--- a/deck/Optum-LS-Conversational-AI-sourced.pptx
+++ b/deck/Optum-LS-Conversational-AI-sourced.pptx
@@ -5,6 +5,7 @@
     <p:sldMasterId id="2147483648" r:id="rId1"/>
   </p:sldMasterIdLst>
   <p:sldIdLst>
+    <p:sldId id="268" r:id="rId19"/>
     <p:sldId id="256" r:id="rId2"/>
     <p:sldId id="257" r:id="rId3"/>
     <p:sldId id="258" r:id="rId4"/>
@@ -2976,8 +2977,615 @@
 </file>
 
 <file path=ppt/slides/slide1.xml><?xml version="1.0" encoding="utf-8"?>
+<p:sld xmlns:a="http://schemas.openxmlformats.org/drawingml/2006/main" xmlns:p="http://schemas.openxmlformats.org/presentationml/2006/main" xmlns:r="http://schemas.openxmlformats.org/officeDocument/2006/relationships">
+  <p:cSld>
+    <p:bg>
+      <p:bgPr>
+        <a:solidFill>
+          <a:srgbClr val="FAF8F2"/>
+        </a:solidFill>
+        <a:effectLst/>
+      </p:bgPr>
+    </p:bg>
+    <p:spTree>
+      <p:nvGrpSpPr>
+        <p:cNvPr id="1" name=""/>
+        <p:cNvGrpSpPr/>
+        <p:nvPr/>
+      </p:nvGrpSpPr>
+      <p:grpSpPr/>
+      <p:sp>
+        <p:nvSpPr>
+          <p:cNvPr id="2" name="cover kicker"/>
+          <p:cNvSpPr txBox="1"/>
+          <p:nvPr/>
+        </p:nvSpPr>
+        <p:spPr>
+          <a:xfrm>
+            <a:off x="822960" y="1051560"/>
+            <a:ext cx="10058400" cy="274320"/>
+          </a:xfrm>
+          <a:prstGeom prst="rect">
+            <a:avLst/>
+          </a:prstGeom>
+          <a:noFill/>
+        </p:spPr>
+        <p:txBody>
+          <a:bodyPr wrap="square" lIns="0" rIns="0" tIns="0" bIns="0" anchor="t">
+            <a:spAutoFit/>
+          </a:bodyPr>
+          <a:lstStyle/>
+          <a:p>
+            <a:pPr algn="l"/>
+            <a:r>
+              <a:rPr sz="1200" b="1" spc="150">
+                <a:solidFill>
+                  <a:srgbClr val="FF612B"/>
+                </a:solidFill>
+                <a:latin typeface="Arial"/>
+              </a:rPr>
+              <a:t>INDEPENDENT COMPETITIVE INTELLIGENCE WORK SAMPLE</a:t>
+            </a:r>
+          </a:p>
+        </p:txBody>
+      </p:sp>
+      <p:sp>
+        <p:nvSpPr>
+          <p:cNvPr id="3" name="cover title"/>
+          <p:cNvSpPr txBox="1"/>
+          <p:nvPr/>
+        </p:nvSpPr>
+        <p:spPr>
+          <a:xfrm>
+            <a:off x="822960" y="1463040"/>
+            <a:ext cx="10515600" cy="731520"/>
+          </a:xfrm>
+          <a:prstGeom prst="rect">
+            <a:avLst/>
+          </a:prstGeom>
+          <a:noFill/>
+        </p:spPr>
+        <p:txBody>
+          <a:bodyPr wrap="square" lIns="0" rIns="0" tIns="0" bIns="0" anchor="t">
+            <a:spAutoFit/>
+          </a:bodyPr>
+          <a:lstStyle/>
+          <a:p>
+            <a:pPr algn="l"/>
+            <a:r>
+              <a:rPr sz="4000" b="1">
+                <a:solidFill>
+                  <a:srgbClr val="002677"/>
+                </a:solidFill>
+                <a:latin typeface="Arial"/>
+              </a:rPr>
+              <a:t>Conversational AI in Life Sciences</a:t>
+            </a:r>
+          </a:p>
+        </p:txBody>
+      </p:sp>
+      <p:sp>
+        <p:nvSpPr>
+          <p:cNvPr id="4" name="cover subtitle"/>
+          <p:cNvSpPr txBox="1"/>
+          <p:nvPr/>
+        </p:nvSpPr>
+        <p:spPr>
+          <a:xfrm>
+            <a:off x="822960" y="2240280"/>
+            <a:ext cx="10515600" cy="457200"/>
+          </a:xfrm>
+          <a:prstGeom prst="rect">
+            <a:avLst/>
+          </a:prstGeom>
+          <a:noFill/>
+        </p:spPr>
+        <p:txBody>
+          <a:bodyPr wrap="square" lIns="0" rIns="0" tIns="0" bIns="0" anchor="t">
+            <a:spAutoFit/>
+          </a:bodyPr>
+          <a:lstStyle/>
+          <a:p>
+            <a:pPr algn="l"/>
+            <a:r>
+              <a:rPr sz="2200" b="0">
+                <a:solidFill>
+                  <a:srgbClr val="002677"/>
+                </a:solidFill>
+                <a:latin typeface="Arial"/>
+              </a:rPr>
+              <a:t>Competitive landscape and implications for Optum Life Sciences</a:t>
+            </a:r>
+          </a:p>
+        </p:txBody>
+      </p:sp>
+      <p:sp>
+        <p:nvSpPr>
+          <p:cNvPr id="5" name="domain chip RWE"/>
+          <p:cNvSpPr/>
+          <p:nvPr/>
+        </p:nvSpPr>
+        <p:spPr>
+          <a:xfrm>
+            <a:off x="822960" y="3063240"/>
+            <a:ext cx="507491" cy="310896"/>
+          </a:xfrm>
+          <a:prstGeom prst="roundRect">
+            <a:avLst>
+              <a:gd name="adj" fmla="val 50000"/>
+            </a:avLst>
+          </a:prstGeom>
+          <a:solidFill>
+            <a:srgbClr val="E6ECF5"/>
+          </a:solidFill>
+          <a:ln w="9525">
+            <a:solidFill>
+              <a:srgbClr val="002677"/>
+            </a:solidFill>
+          </a:ln>
+          <a:effectLst/>
+        </p:spPr>
+        <p:style>
+          <a:lnRef idx="1">
+            <a:schemeClr val="accent1"/>
+          </a:lnRef>
+          <a:fillRef idx="3">
+            <a:schemeClr val="accent1"/>
+          </a:fillRef>
+          <a:effectRef idx="2">
+            <a:schemeClr val="accent1"/>
+          </a:effectRef>
+          <a:fontRef idx="minor">
+            <a:schemeClr val="lt1"/>
+          </a:fontRef>
+        </p:style>
+        <p:txBody>
+          <a:bodyPr rtlCol="0" anchor="ctr" lIns="0" rIns="0" tIns="0" bIns="0"/>
+          <a:lstStyle/>
+          <a:p>
+            <a:pPr algn="ctr"/>
+            <a:r>
+              <a:rPr sz="1050">
+                <a:solidFill>
+                  <a:srgbClr val="002677"/>
+                </a:solidFill>
+                <a:latin typeface="Arial"/>
+              </a:rPr>
+              <a:t>RWE</a:t>
+            </a:r>
+          </a:p>
+        </p:txBody>
+      </p:sp>
+      <p:sp>
+        <p:nvSpPr>
+          <p:cNvPr id="6" name="domain chip Commercial Intelligence"/>
+          <p:cNvSpPr/>
+          <p:nvPr/>
+        </p:nvSpPr>
+        <p:spPr>
+          <a:xfrm>
+            <a:off x="1458468" y="3063240"/>
+            <a:ext cx="2061972" cy="310896"/>
+          </a:xfrm>
+          <a:prstGeom prst="roundRect">
+            <a:avLst>
+              <a:gd name="adj" fmla="val 50000"/>
+            </a:avLst>
+          </a:prstGeom>
+          <a:solidFill>
+            <a:srgbClr val="E6ECF5"/>
+          </a:solidFill>
+          <a:ln w="9525">
+            <a:solidFill>
+              <a:srgbClr val="002677"/>
+            </a:solidFill>
+          </a:ln>
+          <a:effectLst/>
+        </p:spPr>
+        <p:style>
+          <a:lnRef idx="1">
+            <a:schemeClr val="accent1"/>
+          </a:lnRef>
+          <a:fillRef idx="3">
+            <a:schemeClr val="accent1"/>
+          </a:fillRef>
+          <a:effectRef idx="2">
+            <a:schemeClr val="accent1"/>
+          </a:effectRef>
+          <a:fontRef idx="minor">
+            <a:schemeClr val="lt1"/>
+          </a:fontRef>
+        </p:style>
+        <p:txBody>
+          <a:bodyPr rtlCol="0" anchor="ctr" lIns="0" rIns="0" tIns="0" bIns="0"/>
+          <a:lstStyle/>
+          <a:p>
+            <a:pPr algn="ctr"/>
+            <a:r>
+              <a:rPr sz="1050">
+                <a:solidFill>
+                  <a:srgbClr val="002677"/>
+                </a:solidFill>
+                <a:latin typeface="Arial"/>
+              </a:rPr>
+              <a:t>Commercial Intelligence</a:t>
+            </a:r>
+          </a:p>
+        </p:txBody>
+      </p:sp>
+      <p:sp>
+        <p:nvSpPr>
+          <p:cNvPr id="7" name="domain chip Medical / Regulatory Research"/>
+          <p:cNvSpPr/>
+          <p:nvPr/>
+        </p:nvSpPr>
+        <p:spPr>
+          <a:xfrm>
+            <a:off x="3648456" y="3063240"/>
+            <a:ext cx="2528316" cy="310896"/>
+          </a:xfrm>
+          <a:prstGeom prst="roundRect">
+            <a:avLst>
+              <a:gd name="adj" fmla="val 50000"/>
+            </a:avLst>
+          </a:prstGeom>
+          <a:solidFill>
+            <a:srgbClr val="E6ECF5"/>
+          </a:solidFill>
+          <a:ln w="9525">
+            <a:solidFill>
+              <a:srgbClr val="002677"/>
+            </a:solidFill>
+          </a:ln>
+          <a:effectLst/>
+        </p:spPr>
+        <p:style>
+          <a:lnRef idx="1">
+            <a:schemeClr val="accent1"/>
+          </a:lnRef>
+          <a:fillRef idx="3">
+            <a:schemeClr val="accent1"/>
+          </a:fillRef>
+          <a:effectRef idx="2">
+            <a:schemeClr val="accent1"/>
+          </a:effectRef>
+          <a:fontRef idx="minor">
+            <a:schemeClr val="lt1"/>
+          </a:fontRef>
+        </p:style>
+        <p:txBody>
+          <a:bodyPr rtlCol="0" anchor="ctr" lIns="0" rIns="0" tIns="0" bIns="0"/>
+          <a:lstStyle/>
+          <a:p>
+            <a:pPr algn="ctr"/>
+            <a:r>
+              <a:rPr sz="1050">
+                <a:solidFill>
+                  <a:srgbClr val="002677"/>
+                </a:solidFill>
+                <a:latin typeface="Arial"/>
+              </a:rPr>
+              <a:t>Medical / Regulatory Research</a:t>
+            </a:r>
+          </a:p>
+        </p:txBody>
+      </p:sp>
+      <p:sp>
+        <p:nvSpPr>
+          <p:cNvPr id="8" name="domain chip Clinical Trials"/>
+          <p:cNvSpPr/>
+          <p:nvPr/>
+        </p:nvSpPr>
+        <p:spPr>
+          <a:xfrm>
+            <a:off x="6304788" y="3063240"/>
+            <a:ext cx="1440180" cy="310896"/>
+          </a:xfrm>
+          <a:prstGeom prst="roundRect">
+            <a:avLst>
+              <a:gd name="adj" fmla="val 50000"/>
+            </a:avLst>
+          </a:prstGeom>
+          <a:solidFill>
+            <a:srgbClr val="E6ECF5"/>
+          </a:solidFill>
+          <a:ln w="9525">
+            <a:solidFill>
+              <a:srgbClr val="002677"/>
+            </a:solidFill>
+          </a:ln>
+          <a:effectLst/>
+        </p:spPr>
+        <p:style>
+          <a:lnRef idx="1">
+            <a:schemeClr val="accent1"/>
+          </a:lnRef>
+          <a:fillRef idx="3">
+            <a:schemeClr val="accent1"/>
+          </a:fillRef>
+          <a:effectRef idx="2">
+            <a:schemeClr val="accent1"/>
+          </a:effectRef>
+          <a:fontRef idx="minor">
+            <a:schemeClr val="lt1"/>
+          </a:fontRef>
+        </p:style>
+        <p:txBody>
+          <a:bodyPr rtlCol="0" anchor="ctr" lIns="0" rIns="0" tIns="0" bIns="0"/>
+          <a:lstStyle/>
+          <a:p>
+            <a:pPr algn="ctr"/>
+            <a:r>
+              <a:rPr sz="1050">
+                <a:solidFill>
+                  <a:srgbClr val="002677"/>
+                </a:solidFill>
+                <a:latin typeface="Arial"/>
+              </a:rPr>
+              <a:t>Clinical Trials</a:t>
+            </a:r>
+          </a:p>
+        </p:txBody>
+      </p:sp>
+      <p:sp>
+        <p:nvSpPr>
+          <p:cNvPr id="9" name="domain chip Market Access"/>
+          <p:cNvSpPr/>
+          <p:nvPr/>
+        </p:nvSpPr>
+        <p:spPr>
+          <a:xfrm>
+            <a:off x="7872984" y="3063240"/>
+            <a:ext cx="1284732" cy="310896"/>
+          </a:xfrm>
+          <a:prstGeom prst="roundRect">
+            <a:avLst>
+              <a:gd name="adj" fmla="val 50000"/>
+            </a:avLst>
+          </a:prstGeom>
+          <a:solidFill>
+            <a:srgbClr val="E6ECF5"/>
+          </a:solidFill>
+          <a:ln w="9525">
+            <a:solidFill>
+              <a:srgbClr val="002677"/>
+            </a:solidFill>
+          </a:ln>
+          <a:effectLst/>
+        </p:spPr>
+        <p:style>
+          <a:lnRef idx="1">
+            <a:schemeClr val="accent1"/>
+          </a:lnRef>
+          <a:fillRef idx="3">
+            <a:schemeClr val="accent1"/>
+          </a:fillRef>
+          <a:effectRef idx="2">
+            <a:schemeClr val="accent1"/>
+          </a:effectRef>
+          <a:fontRef idx="minor">
+            <a:schemeClr val="lt1"/>
+          </a:fontRef>
+        </p:style>
+        <p:txBody>
+          <a:bodyPr rtlCol="0" anchor="ctr" lIns="0" rIns="0" tIns="0" bIns="0"/>
+          <a:lstStyle/>
+          <a:p>
+            <a:pPr algn="ctr"/>
+            <a:r>
+              <a:rPr sz="1050">
+                <a:solidFill>
+                  <a:srgbClr val="002677"/>
+                </a:solidFill>
+                <a:latin typeface="Arial"/>
+              </a:rPr>
+              <a:t>Market Access</a:t>
+            </a:r>
+          </a:p>
+        </p:txBody>
+      </p:sp>
+      <p:sp>
+        <p:nvSpPr>
+          <p:cNvPr id="10" name="cover scope"/>
+          <p:cNvSpPr txBox="1"/>
+          <p:nvPr/>
+        </p:nvSpPr>
+        <p:spPr>
+          <a:xfrm>
+            <a:off x="822960" y="3584448"/>
+            <a:ext cx="10515600" cy="274320"/>
+          </a:xfrm>
+          <a:prstGeom prst="rect">
+            <a:avLst/>
+          </a:prstGeom>
+          <a:noFill/>
+        </p:spPr>
+        <p:txBody>
+          <a:bodyPr wrap="square" lIns="0" rIns="0" tIns="0" bIns="0" anchor="t">
+            <a:spAutoFit/>
+          </a:bodyPr>
+          <a:lstStyle/>
+          <a:p>
+            <a:pPr algn="l"/>
+            <a:r>
+              <a:rPr sz="1300" b="0">
+                <a:solidFill>
+                  <a:srgbClr val="4B4D4F"/>
+                </a:solidFill>
+                <a:latin typeface="Arial"/>
+              </a:rPr>
+              <a:t>Outside-in assessment of publicly marketed conversational AI across five Optum LS-relevant business domains</a:t>
+            </a:r>
+          </a:p>
+        </p:txBody>
+      </p:sp>
+      <p:cxnSp>
+        <p:nvCxnSpPr>
+          <p:cNvPr id="11" name="Connector 10"/>
+          <p:cNvCxnSpPr/>
+          <p:nvPr/>
+        </p:nvCxnSpPr>
+        <p:spPr>
+          <a:xfrm>
+            <a:off x="822960" y="4343400"/>
+            <a:ext cx="10543032" cy="0"/>
+          </a:xfrm>
+          <a:prstGeom prst="line">
+            <a:avLst/>
+          </a:prstGeom>
+          <a:ln w="9525">
+            <a:solidFill>
+              <a:srgbClr val="D9D4C7"/>
+            </a:solidFill>
+          </a:ln>
+        </p:spPr>
+        <p:style>
+          <a:lnRef idx="2">
+            <a:schemeClr val="accent1"/>
+          </a:lnRef>
+          <a:fillRef idx="0">
+            <a:schemeClr val="accent1"/>
+          </a:fillRef>
+          <a:effectRef idx="1">
+            <a:schemeClr val="accent1"/>
+          </a:effectRef>
+          <a:fontRef idx="minor">
+            <a:schemeClr val="tx1"/>
+          </a:fontRef>
+        </p:style>
+      </p:cxnSp>
+      <p:sp>
+        <p:nvSpPr>
+          <p:cNvPr id="12" name="cover author"/>
+          <p:cNvSpPr txBox="1"/>
+          <p:nvPr/>
+        </p:nvSpPr>
+        <p:spPr>
+          <a:xfrm>
+            <a:off x="822960" y="4526280"/>
+            <a:ext cx="7315200" cy="274320"/>
+          </a:xfrm>
+          <a:prstGeom prst="rect">
+            <a:avLst/>
+          </a:prstGeom>
+          <a:noFill/>
+        </p:spPr>
+        <p:txBody>
+          <a:bodyPr wrap="square" lIns="0" rIns="0" tIns="0" bIns="0" anchor="t">
+            <a:spAutoFit/>
+          </a:bodyPr>
+          <a:lstStyle/>
+          <a:p>
+            <a:pPr algn="l"/>
+            <a:r>
+              <a:rPr sz="1500" b="1">
+                <a:solidFill>
+                  <a:srgbClr val="002677"/>
+                </a:solidFill>
+                <a:latin typeface="Arial"/>
+              </a:rPr>
+              <a:t>Prepared by Joseph Marino</a:t>
+            </a:r>
+          </a:p>
+        </p:txBody>
+      </p:sp>
+      <p:sp>
+        <p:nvSpPr>
+          <p:cNvPr id="13" name="cover date"/>
+          <p:cNvSpPr txBox="1"/>
+          <p:nvPr/>
+        </p:nvSpPr>
+        <p:spPr>
+          <a:xfrm>
+            <a:off x="822960" y="4846320"/>
+            <a:ext cx="7315200" cy="274320"/>
+          </a:xfrm>
+          <a:prstGeom prst="rect">
+            <a:avLst/>
+          </a:prstGeom>
+          <a:noFill/>
+        </p:spPr>
+        <p:txBody>
+          <a:bodyPr wrap="square" lIns="0" rIns="0" tIns="0" bIns="0" anchor="t">
+            <a:spAutoFit/>
+          </a:bodyPr>
+          <a:lstStyle/>
+          <a:p>
+            <a:pPr algn="l"/>
+            <a:r>
+              <a:rPr sz="1200" b="0">
+                <a:solidFill>
+                  <a:srgbClr val="4B4D4F"/>
+                </a:solidFill>
+                <a:latin typeface="Arial"/>
+              </a:rPr>
+              <a:t>October 2026  ·  Public sources reviewed as of October 13, 2026</a:t>
+            </a:r>
+          </a:p>
+        </p:txBody>
+      </p:sp>
+      <p:sp>
+        <p:nvSpPr>
+          <p:cNvPr id="14" name="cover disclaimer"/>
+          <p:cNvSpPr txBox="1"/>
+          <p:nvPr/>
+        </p:nvSpPr>
+        <p:spPr>
+          <a:xfrm>
+            <a:off x="822960" y="5715000"/>
+            <a:ext cx="10543032" cy="502920"/>
+          </a:xfrm>
+          <a:prstGeom prst="rect">
+            <a:avLst/>
+          </a:prstGeom>
+          <a:noFill/>
+        </p:spPr>
+        <p:txBody>
+          <a:bodyPr wrap="square" lIns="0" rIns="0" tIns="0" bIns="0" anchor="t">
+            <a:spAutoFit/>
+          </a:bodyPr>
+          <a:lstStyle/>
+          <a:p>
+            <a:pPr algn="l"/>
+            <a:r>
+              <a:rPr sz="900" b="0">
+                <a:solidFill>
+                  <a:srgbClr val="7A7C7E"/>
+                </a:solidFill>
+                <a:latin typeface="Arial"/>
+              </a:rPr>
+              <a:t>Independent work sample based solely on publicly available information. Not affiliated with, commissioned by or endorsed by Optum or UnitedHealth Group.</a:t>
+            </a:r>
+          </a:p>
+          <a:p>
+            <a:pPr algn="l">
+              <a:spcBef>
+                <a:spcPts val="400"/>
+              </a:spcBef>
+            </a:pPr>
+            <a:r>
+              <a:rPr sz="900" b="0">
+                <a:solidFill>
+                  <a:srgbClr val="7A7C7E"/>
+                </a:solidFill>
+                <a:latin typeface="Arial"/>
+              </a:rPr>
+              <a:t>Research and drafting were assisted by AI tools; the analysis and conclusions are the author’s own.</a:t>
+            </a:r>
+          </a:p>
+        </p:txBody>
+      </p:sp>
+    </p:spTree>
+  </p:cSld>
+  <p:clrMapOvr>
+    <a:masterClrMapping/>
+  </p:clrMapOvr>
+</p:sld>
+</file>
+
+<file path=ppt/slides/slide10.xml><?xml version="1.0" encoding="utf-8"?>
 <p:sld xmlns:a="http://schemas.openxmlformats.org/drawingml/2006/main" xmlns:r="http://schemas.openxmlformats.org/officeDocument/2006/relationships" xmlns:p="http://schemas.openxmlformats.org/presentationml/2006/main">
-  <p:cSld name="Slide 1">
+  <p:cSld name="Slide 9">
     <p:spTree>
       <p:nvGrpSpPr>
         <p:cNvPr id="1" name=""/>
@@ -3024,7 +3632,7 @@
                   <a:schemeClr val="accent2"/>
                 </a:solidFill>
               </a:rPr>
-              <a:t>EXECUTIVE SUMMARY</a:t>
+              <a:t>CONVERSATIONAL AI IN CLINICAL TRIALS AND MARKET ACCESS</a:t>
             </a:r>
             <a:endParaRPr lang="en-US" sz="1000" dirty="0"/>
           </a:p>
@@ -3032,7 +3640,297 @@
       </p:sp>
       <p:sp>
         <p:nvSpPr>
-          <p:cNvPr id="3" name="Text 2"/>
+          <p:cNvPr id="3" name="tracker RWE"/>
+          <p:cNvSpPr/>
+          <p:nvPr/>
+        </p:nvSpPr>
+        <p:spPr>
+          <a:xfrm>
+            <a:off x="5657393" y="365760"/>
+            <a:ext cx="386791" cy="237744"/>
+          </a:xfrm>
+          <a:prstGeom prst="roundRect">
+            <a:avLst>
+              <a:gd name="adj" fmla="val 50000"/>
+            </a:avLst>
+          </a:prstGeom>
+          <a:solidFill>
+            <a:schemeClr val="accent5"/>
+          </a:solidFill>
+          <a:ln/>
+        </p:spPr>
+      </p:sp>
+      <p:sp>
+        <p:nvSpPr>
+          <p:cNvPr id="4" name="Text 2"/>
+          <p:cNvSpPr txBox="1"/>
+          <p:nvPr/>
+        </p:nvSpPr>
+        <p:spPr>
+          <a:xfrm>
+            <a:off x="5657393" y="365760"/>
+            <a:ext cx="386791" cy="237744"/>
+          </a:xfrm>
+          <a:prstGeom prst="rect">
+            <a:avLst/>
+          </a:prstGeom>
+          <a:noFill/>
+          <a:ln/>
+        </p:spPr>
+        <p:txBody>
+          <a:bodyPr wrap="square" lIns="0" tIns="0" rIns="0" bIns="0" rtlCol="0" anchor="ctr"/>
+          <a:lstStyle/>
+          <a:p>
+            <a:pPr algn="ctr" indent="0" marL="0">
+              <a:buNone/>
+            </a:pPr>
+            <a:r>
+              <a:rPr lang="en-US" sz="750" b="1" dirty="0">
+                <a:solidFill>
+                  <a:schemeClr val="accent4"/>
+                </a:solidFill>
+              </a:rPr>
+              <a:t>RWE</a:t>
+            </a:r>
+            <a:endParaRPr lang="en-US" sz="750" dirty="0"/>
+          </a:p>
+        </p:txBody>
+      </p:sp>
+      <p:sp>
+        <p:nvSpPr>
+          <p:cNvPr id="5" name="tracker Commercial Intelligence"/>
+          <p:cNvSpPr/>
+          <p:nvPr/>
+        </p:nvSpPr>
+        <p:spPr>
+          <a:xfrm>
+            <a:off x="6108192" y="365760"/>
+            <a:ext cx="1502359" cy="237744"/>
+          </a:xfrm>
+          <a:prstGeom prst="roundRect">
+            <a:avLst>
+              <a:gd name="adj" fmla="val 50000"/>
+            </a:avLst>
+          </a:prstGeom>
+          <a:solidFill>
+            <a:schemeClr val="accent5"/>
+          </a:solidFill>
+          <a:ln/>
+        </p:spPr>
+      </p:sp>
+      <p:sp>
+        <p:nvSpPr>
+          <p:cNvPr id="6" name="Text 4"/>
+          <p:cNvSpPr txBox="1"/>
+          <p:nvPr/>
+        </p:nvSpPr>
+        <p:spPr>
+          <a:xfrm>
+            <a:off x="6108192" y="365760"/>
+            <a:ext cx="1502359" cy="237744"/>
+          </a:xfrm>
+          <a:prstGeom prst="rect">
+            <a:avLst/>
+          </a:prstGeom>
+          <a:noFill/>
+          <a:ln/>
+        </p:spPr>
+        <p:txBody>
+          <a:bodyPr wrap="square" lIns="0" tIns="0" rIns="0" bIns="0" rtlCol="0" anchor="ctr"/>
+          <a:lstStyle/>
+          <a:p>
+            <a:pPr algn="ctr" indent="0" marL="0">
+              <a:buNone/>
+            </a:pPr>
+            <a:r>
+              <a:rPr lang="en-US" sz="750" b="1" dirty="0">
+                <a:solidFill>
+                  <a:schemeClr val="accent4"/>
+                </a:solidFill>
+              </a:rPr>
+              <a:t>Commercial Intelligence</a:t>
+            </a:r>
+            <a:endParaRPr lang="en-US" sz="750" dirty="0"/>
+          </a:p>
+        </p:txBody>
+      </p:sp>
+      <p:sp>
+        <p:nvSpPr>
+          <p:cNvPr id="7" name="tracker Medical / Regulatory Research"/>
+          <p:cNvSpPr/>
+          <p:nvPr/>
+        </p:nvSpPr>
+        <p:spPr>
+          <a:xfrm>
+            <a:off x="7674559" y="365760"/>
+            <a:ext cx="1837030" cy="237744"/>
+          </a:xfrm>
+          <a:prstGeom prst="roundRect">
+            <a:avLst>
+              <a:gd name="adj" fmla="val 50000"/>
+            </a:avLst>
+          </a:prstGeom>
+          <a:solidFill>
+            <a:schemeClr val="accent5"/>
+          </a:solidFill>
+          <a:ln/>
+        </p:spPr>
+      </p:sp>
+      <p:sp>
+        <p:nvSpPr>
+          <p:cNvPr id="8" name="Text 6"/>
+          <p:cNvSpPr txBox="1"/>
+          <p:nvPr/>
+        </p:nvSpPr>
+        <p:spPr>
+          <a:xfrm>
+            <a:off x="7674559" y="365760"/>
+            <a:ext cx="1837030" cy="237744"/>
+          </a:xfrm>
+          <a:prstGeom prst="rect">
+            <a:avLst/>
+          </a:prstGeom>
+          <a:noFill/>
+          <a:ln/>
+        </p:spPr>
+        <p:txBody>
+          <a:bodyPr wrap="square" lIns="0" tIns="0" rIns="0" bIns="0" rtlCol="0" anchor="ctr"/>
+          <a:lstStyle/>
+          <a:p>
+            <a:pPr algn="ctr" indent="0" marL="0">
+              <a:buNone/>
+            </a:pPr>
+            <a:r>
+              <a:rPr lang="en-US" sz="750" b="1" dirty="0">
+                <a:solidFill>
+                  <a:schemeClr val="accent4"/>
+                </a:solidFill>
+              </a:rPr>
+              <a:t>Medical / Regulatory Research</a:t>
+            </a:r>
+            <a:endParaRPr lang="en-US" sz="750" dirty="0"/>
+          </a:p>
+        </p:txBody>
+      </p:sp>
+      <p:sp>
+        <p:nvSpPr>
+          <p:cNvPr id="9" name="tracker Clinical Trials"/>
+          <p:cNvSpPr/>
+          <p:nvPr/>
+        </p:nvSpPr>
+        <p:spPr>
+          <a:xfrm>
+            <a:off x="9575597" y="365760"/>
+            <a:ext cx="1056132" cy="237744"/>
+          </a:xfrm>
+          <a:prstGeom prst="roundRect">
+            <a:avLst>
+              <a:gd name="adj" fmla="val 50000"/>
+            </a:avLst>
+          </a:prstGeom>
+          <a:solidFill>
+            <a:schemeClr val="accent1"/>
+          </a:solidFill>
+          <a:ln/>
+        </p:spPr>
+      </p:sp>
+      <p:sp>
+        <p:nvSpPr>
+          <p:cNvPr id="10" name="Text 8"/>
+          <p:cNvSpPr txBox="1"/>
+          <p:nvPr/>
+        </p:nvSpPr>
+        <p:spPr>
+          <a:xfrm>
+            <a:off x="9575597" y="365760"/>
+            <a:ext cx="1056132" cy="237744"/>
+          </a:xfrm>
+          <a:prstGeom prst="rect">
+            <a:avLst/>
+          </a:prstGeom>
+          <a:noFill/>
+          <a:ln/>
+        </p:spPr>
+        <p:txBody>
+          <a:bodyPr wrap="square" lIns="0" tIns="0" rIns="0" bIns="0" rtlCol="0" anchor="ctr"/>
+          <a:lstStyle/>
+          <a:p>
+            <a:pPr algn="ctr" indent="0" marL="0">
+              <a:buNone/>
+            </a:pPr>
+            <a:r>
+              <a:rPr lang="en-US" sz="750" b="1" dirty="0">
+                <a:solidFill>
+                  <a:schemeClr val="bg1"/>
+                </a:solidFill>
+              </a:rPr>
+              <a:t>Clinical Trials</a:t>
+            </a:r>
+            <a:endParaRPr lang="en-US" sz="750" dirty="0"/>
+          </a:p>
+        </p:txBody>
+      </p:sp>
+      <p:sp>
+        <p:nvSpPr>
+          <p:cNvPr id="11" name="tracker Market Access"/>
+          <p:cNvSpPr/>
+          <p:nvPr/>
+        </p:nvSpPr>
+        <p:spPr>
+          <a:xfrm>
+            <a:off x="10695737" y="365760"/>
+            <a:ext cx="944575" cy="237744"/>
+          </a:xfrm>
+          <a:prstGeom prst="roundRect">
+            <a:avLst>
+              <a:gd name="adj" fmla="val 50000"/>
+            </a:avLst>
+          </a:prstGeom>
+          <a:solidFill>
+            <a:schemeClr val="accent1"/>
+          </a:solidFill>
+          <a:ln/>
+        </p:spPr>
+      </p:sp>
+      <p:sp>
+        <p:nvSpPr>
+          <p:cNvPr id="12" name="Text 10"/>
+          <p:cNvSpPr txBox="1"/>
+          <p:nvPr/>
+        </p:nvSpPr>
+        <p:spPr>
+          <a:xfrm>
+            <a:off x="10695737" y="365760"/>
+            <a:ext cx="944575" cy="237744"/>
+          </a:xfrm>
+          <a:prstGeom prst="rect">
+            <a:avLst/>
+          </a:prstGeom>
+          <a:noFill/>
+          <a:ln/>
+        </p:spPr>
+        <p:txBody>
+          <a:bodyPr wrap="square" lIns="0" tIns="0" rIns="0" bIns="0" rtlCol="0" anchor="ctr"/>
+          <a:lstStyle/>
+          <a:p>
+            <a:pPr algn="ctr" indent="0" marL="0">
+              <a:buNone/>
+            </a:pPr>
+            <a:r>
+              <a:rPr lang="en-US" sz="750" b="1" dirty="0">
+                <a:solidFill>
+                  <a:schemeClr val="bg1"/>
+                </a:solidFill>
+              </a:rPr>
+              <a:t>Market Access</a:t>
+            </a:r>
+            <a:endParaRPr lang="en-US" sz="750" dirty="0"/>
+          </a:p>
+        </p:txBody>
+      </p:sp>
+      <p:sp>
+        <p:nvSpPr>
+          <p:cNvPr id="13" name="Text 2"/>
           <p:cNvSpPr/>
           <p:nvPr>
             <p:ph idx="103" type="title" hasCustomPrompt="1"/>
@@ -3062,19 +3960,7 @@
                   <a:schemeClr val="accent1"/>
                 </a:solidFill>
               </a:rPr>
-              <a:t>Conversational AI is being marketed across life sciences workflows, creating</a:t>
-            </a:r>
-            <a:br/>
-            <a:pPr algn="l" indent="0" marL="0">
-              <a:buNone/>
-            </a:pPr>
-            <a:r>
-              <a:rPr lang="en-US" sz="2200" b="1" dirty="0">
-                <a:solidFill>
-                  <a:schemeClr val="accent1"/>
-                </a:solidFill>
-              </a:rPr>
-              <a:t>new ways to access information, analytics and decision support</a:t>
+              <a:t>Conversational offerings address specific trial operations and pricing questions, not the entire clinical or market-access workflow</a:t>
             </a:r>
             <a:endParaRPr lang="en-US" sz="2200" dirty="0"/>
           </a:p>
@@ -3082,14 +3968,873 @@
       </p:sp>
       <p:sp>
         <p:nvSpPr>
-          <p:cNvPr id="4" name="lens card"/>
+          <p:cNvPr id="14" name="label"/>
+          <p:cNvSpPr txBox="1"/>
+          <p:nvPr/>
+        </p:nvSpPr>
+        <p:spPr>
+          <a:xfrm>
+            <a:off x="548640" y="1481328"/>
+            <a:ext cx="11091672" cy="201168"/>
+          </a:xfrm>
+          <a:prstGeom prst="rect">
+            <a:avLst/>
+          </a:prstGeom>
+          <a:noFill/>
+          <a:ln/>
+        </p:spPr>
+        <p:txBody>
+          <a:bodyPr wrap="square" lIns="0" tIns="0" rIns="0" bIns="0" rtlCol="0" anchor="t"/>
+          <a:lstStyle/>
+          <a:p>
+            <a:pPr indent="0" marL="0">
+              <a:buNone/>
+            </a:pPr>
+            <a:r>
+              <a:rPr lang="en-US" sz="1000" b="1" spc="100" kern="0" dirty="0">
+                <a:solidFill>
+                  <a:schemeClr val="accent2"/>
+                </a:solidFill>
+              </a:rPr>
+              <a:t>CLINICAL TRIALS — COMPETITIVE EXAMPLES</a:t>
+            </a:r>
+            <a:endParaRPr lang="en-US" sz="1000" dirty="0"/>
+          </a:p>
+        </p:txBody>
+      </p:sp>
+      <p:graphicFrame>
+        <p:nvGraphicFramePr>
+          <p:cNvPr id="10" name="task table"/>
+          <p:cNvGraphicFramePr>
+            <a:graphicFrameLocks noGrp="1"/>
+          </p:cNvGraphicFramePr>
+          <p:nvPr>
+            <p:extLst>
+              <p:ext uri="{D42A27DB-BD31-4B8C-83A1-F6EECF244321}">
+                <p14:modId xmlns:p14="http://schemas.microsoft.com/office/powerpoint/2010/main" val="1579011935"/>
+              </p:ext>
+            </p:extLst>
+          </p:nvPr>
+        </p:nvGraphicFramePr>
+        <p:xfrm>
+          <a:off x="548640" y="1755648"/>
+          <a:ext cx="11091672" cy="914400"/>
+        </p:xfrm>
+        <a:graphic>
+          <a:graphicData uri="http://schemas.openxmlformats.org/drawingml/2006/table">
+            <a:tbl>
+              <a:tblPr/>
+              <a:tblGrid>
+                <a:gridCol w="2286000"/>
+                <a:gridCol w="5760720"/>
+                <a:gridCol w="3044952"/>
+              </a:tblGrid>
+              <a:tr h="329184">
+                <a:tc>
+                  <a:txBody>
+                    <a:bodyPr/>
+                    <a:lstStyle/>
+                    <a:p>
+                      <a:pPr algn="ctr" indent="0" marL="0">
+                        <a:buNone/>
+                      </a:pPr>
+                      <a:r>
+                        <a:rPr lang="en-US" sz="900" b="1" spc="100" kern="0" dirty="0">
+                          <a:solidFill>
+                            <a:schemeClr val="bg1"/>
+                          </a:solidFill>
+                        </a:rPr>
+                        <a:t>CUSTOMER TASK</a:t>
+                      </a:r>
+                      <a:endParaRPr lang="en-US" sz="900" dirty="0"/>
+                    </a:p>
+                  </a:txBody>
+                  <a:tcPr marL="109728" marR="109728" marT="64008" marB="64008" anchor="ctr">
+                    <a:lnL w="0" cap="flat" cmpd="sng" algn="ctr">
+                      <a:noFill/>
+                    </a:lnL>
+                    <a:lnR w="0" cap="flat" cmpd="sng" algn="ctr">
+                      <a:noFill/>
+                    </a:lnR>
+                    <a:lnT w="0" cap="flat" cmpd="sng" algn="ctr">
+                      <a:noFill/>
+                    </a:lnT>
+                    <a:lnB w="0" cap="flat" cmpd="sng" algn="ctr">
+                      <a:noFill/>
+                    </a:lnB>
+                    <a:solidFill>
+                      <a:schemeClr val="accent1"/>
+                    </a:solidFill>
+                  </a:tcPr>
+                </a:tc>
+                <a:tc>
+                  <a:txBody>
+                    <a:bodyPr/>
+                    <a:lstStyle/>
+                    <a:p>
+                      <a:pPr algn="ctr" indent="0" marL="0">
+                        <a:buNone/>
+                      </a:pPr>
+                      <a:r>
+                        <a:rPr lang="en-US" sz="900" b="1" spc="100" kern="0" dirty="0">
+                          <a:solidFill>
+                            <a:schemeClr val="bg1"/>
+                          </a:solidFill>
+                        </a:rPr>
+                        <a:t>CONVERSATIONAL AI OFFERINGS</a:t>
+                      </a:r>
+                      <a:endParaRPr lang="en-US" sz="900" dirty="0"/>
+                    </a:p>
+                  </a:txBody>
+                  <a:tcPr marL="109728" marR="109728" marT="64008" marB="64008" anchor="ctr">
+                    <a:lnL w="0" cap="flat" cmpd="sng" algn="ctr">
+                      <a:noFill/>
+                    </a:lnL>
+                    <a:lnR w="0" cap="flat" cmpd="sng" algn="ctr">
+                      <a:noFill/>
+                    </a:lnR>
+                    <a:lnT w="0" cap="flat" cmpd="sng" algn="ctr">
+                      <a:noFill/>
+                    </a:lnT>
+                    <a:lnB w="0" cap="flat" cmpd="sng" algn="ctr">
+                      <a:noFill/>
+                    </a:lnB>
+                    <a:solidFill>
+                      <a:schemeClr val="accent1"/>
+                    </a:solidFill>
+                  </a:tcPr>
+                </a:tc>
+                <a:tc>
+                  <a:txBody>
+                    <a:bodyPr/>
+                    <a:lstStyle/>
+                    <a:p>
+                      <a:pPr algn="ctr" indent="0" marL="0">
+                        <a:buNone/>
+                      </a:pPr>
+                      <a:r>
+                        <a:rPr lang="en-US" sz="900" b="1" spc="100" kern="0" dirty="0">
+                          <a:solidFill>
+                            <a:schemeClr val="bg1"/>
+                          </a:solidFill>
+                        </a:rPr>
+                        <a:t>RELEVANT OPTUM LS OFFERINGS</a:t>
+                      </a:r>
+                      <a:endParaRPr lang="en-US" sz="900" dirty="0"/>
+                    </a:p>
+                  </a:txBody>
+                  <a:tcPr marL="109728" marR="109728" marT="64008" marB="64008" anchor="ctr">
+                    <a:lnL w="0" cap="flat" cmpd="sng" algn="ctr">
+                      <a:noFill/>
+                    </a:lnL>
+                    <a:lnR w="0" cap="flat" cmpd="sng" algn="ctr">
+                      <a:noFill/>
+                    </a:lnR>
+                    <a:lnT w="0" cap="flat" cmpd="sng" algn="ctr">
+                      <a:noFill/>
+                    </a:lnT>
+                    <a:lnB w="0" cap="flat" cmpd="sng" algn="ctr">
+                      <a:noFill/>
+                    </a:lnB>
+                    <a:solidFill>
+                      <a:schemeClr val="accent1"/>
+                    </a:solidFill>
+                  </a:tcPr>
+                </a:tc>
+              </a:tr>
+              <a:tr h="564811">
+                <a:tc>
+                  <a:txBody>
+                    <a:bodyPr/>
+                    <a:lstStyle/>
+                    <a:p>
+                      <a:pPr algn="ctr" indent="0" marL="0">
+                        <a:buNone/>
+                      </a:pPr>
+                      <a:r>
+                        <a:rPr lang="en-US" sz="1050" b="1" dirty="0">
+                          <a:solidFill>
+                            <a:schemeClr val="accent1"/>
+                          </a:solidFill>
+                        </a:rPr>
+                        <a:t>Trial feasibility, site and investigator identification</a:t>
+                      </a:r>
+                      <a:endParaRPr lang="en-US" sz="1050" dirty="0"/>
+                    </a:p>
+                  </a:txBody>
+                  <a:tcPr marL="109728" marR="109728" marT="64008" marB="64008" anchor="ctr">
+                    <a:lnL w="0" cap="flat" cmpd="sng" algn="ctr">
+                      <a:noFill/>
+                    </a:lnL>
+                    <a:lnR w="25400" cap="flat" cmpd="sng" algn="ctr">
+                      <a:solidFill>
+                        <a:srgbClr val="FFFFFF"/>
+                      </a:solidFill>
+                      <a:prstDash val="solid"/>
+                      <a:round/>
+                      <a:headEnd type="none" w="med" len="med"/>
+                      <a:tailEnd type="none" w="med" len="med"/>
+                    </a:lnR>
+                    <a:lnT w="25400" cap="flat" cmpd="sng" algn="ctr">
+                      <a:solidFill>
+                        <a:srgbClr val="FFFFFF"/>
+                      </a:solidFill>
+                      <a:prstDash val="solid"/>
+                      <a:round/>
+                      <a:headEnd type="none" w="med" len="med"/>
+                      <a:tailEnd type="none" w="med" len="med"/>
+                    </a:lnT>
+                    <a:lnB w="25400" cap="flat" cmpd="sng" algn="ctr">
+                      <a:solidFill>
+                        <a:srgbClr val="FFFFFF"/>
+                      </a:solidFill>
+                      <a:prstDash val="solid"/>
+                      <a:round/>
+                      <a:headEnd type="none" w="med" len="med"/>
+                      <a:tailEnd type="none" w="med" len="med"/>
+                    </a:lnB>
+                    <a:solidFill>
+                      <a:schemeClr val="accent5"/>
+                    </a:solidFill>
+                  </a:tcPr>
+                </a:tc>
+                <a:tc>
+                  <a:txBody>
+                    <a:bodyPr/>
+                    <a:lstStyle/>
+                    <a:p>
+                      <a:pPr indent="0" marL="0">
+                        <a:buNone/>
+                      </a:pPr>
+                      <a:r>
+                        <a:rPr lang="en-US" sz="950" dirty="0">
+                          <a:solidFill>
+                            <a:schemeClr val="tx1"/>
+                          </a:solidFill>
+                        </a:rPr>
+                        <a:t>TriNetX's </a:t>
+                      </a:r>
+                      <a:pPr indent="0" marL="0">
+                        <a:buNone/>
+                      </a:pPr>
+                      <a:r>
+                        <a:rPr lang="en-US" sz="950" b="1" dirty="0">
+                          <a:solidFill>
+                            <a:schemeClr val="tx1"/>
+                          </a:solidFill>
+                        </a:rPr>
+                        <a:t>Terrain AI Assistant</a:t>
+                      </a:r>
+                      <a:pPr indent="0" marL="0">
+                        <a:buNone/>
+                      </a:pPr>
+                      <a:r>
+                        <a:rPr lang="en-US" sz="950" dirty="0">
+                          <a:solidFill>
+                            <a:schemeClr val="tx1"/>
+                          </a:solidFill>
+                        </a:rPr>
+                        <a:t>: natural-language questions about trial sites, investigator experience and patient populations</a:t>
+                      </a:r>
+                      <a:endParaRPr lang="en-US" sz="950" dirty="0"/>
+                    </a:p>
+                  </a:txBody>
+                  <a:tcPr marL="109728" marR="109728" marT="64008" marB="64008" anchor="ctr">
+                    <a:lnL w="0" cap="flat" cmpd="sng" algn="ctr">
+                      <a:noFill/>
+                    </a:lnL>
+                    <a:lnR w="0" cap="flat" cmpd="sng" algn="ctr">
+                      <a:noFill/>
+                    </a:lnR>
+                    <a:lnT w="0" cap="flat" cmpd="sng" algn="ctr">
+                      <a:noFill/>
+                    </a:lnT>
+                    <a:lnB w="9525" cap="flat" cmpd="sng" algn="ctr">
+                      <a:solidFill>
+                        <a:srgbClr val="D9D4C7"/>
+                      </a:solidFill>
+                      <a:prstDash val="solid"/>
+                      <a:round/>
+                      <a:headEnd type="none" w="med" len="med"/>
+                      <a:tailEnd type="none" w="med" len="med"/>
+                    </a:lnB>
+                  </a:tcPr>
+                </a:tc>
+                <a:tc>
+                  <a:txBody>
+                    <a:bodyPr/>
+                    <a:lstStyle/>
+                    <a:p>
+                      <a:pPr indent="0" marL="0">
+                        <a:buNone/>
+                      </a:pPr>
+                      <a:r>
+                        <a:rPr lang="en-US" sz="950" dirty="0">
+                          <a:solidFill>
+                            <a:schemeClr val="tx1"/>
+                          </a:solidFill>
+                        </a:rPr>
+                        <a:t>Prospector Data Mining Studio; Optum Digital Research Network</a:t>
+                      </a:r>
+                      <a:endParaRPr lang="en-US" sz="950" dirty="0"/>
+                    </a:p>
+                  </a:txBody>
+                  <a:tcPr marL="109728" marR="109728" marT="64008" marB="64008" anchor="ctr">
+                    <a:lnL w="0" cap="flat" cmpd="sng" algn="ctr">
+                      <a:noFill/>
+                    </a:lnL>
+                    <a:lnR w="0" cap="flat" cmpd="sng" algn="ctr">
+                      <a:noFill/>
+                    </a:lnR>
+                    <a:lnT w="0" cap="flat" cmpd="sng" algn="ctr">
+                      <a:noFill/>
+                    </a:lnT>
+                    <a:lnB w="9525" cap="flat" cmpd="sng" algn="ctr">
+                      <a:solidFill>
+                        <a:srgbClr val="D9D4C7"/>
+                      </a:solidFill>
+                      <a:prstDash val="solid"/>
+                      <a:round/>
+                      <a:headEnd type="none" w="med" len="med"/>
+                      <a:tailEnd type="none" w="med" len="med"/>
+                    </a:lnB>
+                  </a:tcPr>
+                </a:tc>
+              </a:tr>
+              <a:tr h="650028">
+                <a:tc>
+                  <a:txBody>
+                    <a:bodyPr/>
+                    <a:lstStyle/>
+                    <a:p>
+                      <a:pPr algn="ctr" indent="0" marL="0">
+                        <a:buNone/>
+                      </a:pPr>
+                      <a:r>
+                        <a:rPr lang="en-US" sz="1050" b="1" dirty="0">
+                          <a:solidFill>
+                            <a:schemeClr val="accent1"/>
+                          </a:solidFill>
+                        </a:rPr>
+                        <a:t>Clinical-trial document operations</a:t>
+                      </a:r>
+                      <a:endParaRPr lang="en-US" sz="1050" dirty="0"/>
+                    </a:p>
+                  </a:txBody>
+                  <a:tcPr marL="109728" marR="109728" marT="64008" marB="64008" anchor="ctr">
+                    <a:lnL w="0" cap="flat" cmpd="sng" algn="ctr">
+                      <a:noFill/>
+                    </a:lnL>
+                    <a:lnR w="25400" cap="flat" cmpd="sng" algn="ctr">
+                      <a:solidFill>
+                        <a:srgbClr val="FFFFFF"/>
+                      </a:solidFill>
+                      <a:prstDash val="solid"/>
+                      <a:round/>
+                      <a:headEnd type="none" w="med" len="med"/>
+                      <a:tailEnd type="none" w="med" len="med"/>
+                    </a:lnR>
+                    <a:lnT w="25400" cap="flat" cmpd="sng" algn="ctr">
+                      <a:solidFill>
+                        <a:srgbClr val="FFFFFF"/>
+                      </a:solidFill>
+                      <a:prstDash val="solid"/>
+                      <a:round/>
+                      <a:headEnd type="none" w="med" len="med"/>
+                      <a:tailEnd type="none" w="med" len="med"/>
+                    </a:lnT>
+                    <a:lnB w="25400" cap="flat" cmpd="sng" algn="ctr">
+                      <a:solidFill>
+                        <a:srgbClr val="FFFFFF"/>
+                      </a:solidFill>
+                      <a:prstDash val="solid"/>
+                      <a:round/>
+                      <a:headEnd type="none" w="med" len="med"/>
+                      <a:tailEnd type="none" w="med" len="med"/>
+                    </a:lnB>
+                    <a:solidFill>
+                      <a:schemeClr val="accent5"/>
+                    </a:solidFill>
+                  </a:tcPr>
+                </a:tc>
+                <a:tc>
+                  <a:txBody>
+                    <a:bodyPr/>
+                    <a:lstStyle/>
+                    <a:p>
+                      <a:pPr indent="0" marL="0">
+                        <a:buNone/>
+                      </a:pPr>
+                      <a:r>
+                        <a:rPr lang="en-US" sz="950" dirty="0">
+                          <a:solidFill>
+                            <a:schemeClr val="tx1"/>
+                          </a:solidFill>
+                        </a:rPr>
+                        <a:t>Taimei's </a:t>
+                      </a:r>
+                      <a:pPr indent="0" marL="0">
+                        <a:buNone/>
+                      </a:pPr>
+                      <a:r>
+                        <a:rPr lang="en-US" sz="950" b="1" dirty="0">
+                          <a:solidFill>
+                            <a:schemeClr val="tx1"/>
+                          </a:solidFill>
+                        </a:rPr>
+                        <a:t>Wiz-iCTA</a:t>
+                      </a:r>
+                      <a:pPr indent="0" marL="0">
+                        <a:buNone/>
+                      </a:pPr>
+                      <a:r>
+                        <a:rPr lang="en-US" sz="950" dirty="0">
+                          <a:solidFill>
+                            <a:schemeClr val="tx1"/>
+                          </a:solidFill>
+                        </a:rPr>
+                        <a:t> </a:t>
+                      </a:r>
+                      <a:pPr indent="0" marL="0">
+                        <a:buNone/>
+                      </a:pPr>
+                      <a:r>
+                        <a:rPr lang="en-US" sz="950" dirty="0">
+                          <a:solidFill>
+                            <a:schemeClr val="tx1"/>
+                          </a:solidFill>
+                        </a:rPr>
+                        <a:t>(China)</a:t>
+                      </a:r>
+                      <a:pPr indent="0" marL="0">
+                        <a:buNone/>
+                      </a:pPr>
+                      <a:r>
+                        <a:rPr lang="en-US" sz="950" dirty="0">
+                          <a:solidFill>
+                            <a:schemeClr val="tx1"/>
+                          </a:solidFill>
+                        </a:rPr>
+                        <a:t>: conversational assistant supporting trial project teams and document-management work</a:t>
+                      </a:r>
+                      <a:endParaRPr lang="en-US" sz="950" dirty="0"/>
+                    </a:p>
+                  </a:txBody>
+                  <a:tcPr marL="109728" marR="109728" marT="64008" marB="64008" anchor="ctr">
+                    <a:lnL w="0" cap="flat" cmpd="sng" algn="ctr">
+                      <a:noFill/>
+                    </a:lnL>
+                    <a:lnR w="0" cap="flat" cmpd="sng" algn="ctr">
+                      <a:noFill/>
+                    </a:lnR>
+                    <a:lnT w="0" cap="flat" cmpd="sng" algn="ctr">
+                      <a:noFill/>
+                    </a:lnT>
+                    <a:lnB w="9525" cap="flat" cmpd="sng" algn="ctr">
+                      <a:solidFill>
+                        <a:srgbClr val="D9D4C7"/>
+                      </a:solidFill>
+                      <a:prstDash val="solid"/>
+                      <a:round/>
+                      <a:headEnd type="none" w="med" len="med"/>
+                      <a:tailEnd type="none" w="med" len="med"/>
+                    </a:lnB>
+                  </a:tcPr>
+                </a:tc>
+                <a:tc>
+                  <a:txBody>
+                    <a:bodyPr/>
+                    <a:lstStyle/>
+                    <a:p>
+                      <a:pPr indent="0" marL="0">
+                        <a:buNone/>
+                      </a:pPr>
+                      <a:r>
+                        <a:rPr lang="en-US" sz="950" dirty="0">
+                          <a:solidFill>
+                            <a:schemeClr val="tx1"/>
+                          </a:solidFill>
+                        </a:rPr>
+                        <a:t>Optum True Source supports clinical-trial source-data capture; a directly equivalent document assistant was not established</a:t>
+                      </a:r>
+                      <a:endParaRPr lang="en-US" sz="950" dirty="0"/>
+                    </a:p>
+                  </a:txBody>
+                  <a:tcPr marL="109728" marR="109728" marT="64008" marB="64008" anchor="ctr">
+                    <a:lnL w="0" cap="flat" cmpd="sng" algn="ctr">
+                      <a:noFill/>
+                    </a:lnL>
+                    <a:lnR w="0" cap="flat" cmpd="sng" algn="ctr">
+                      <a:noFill/>
+                    </a:lnR>
+                    <a:lnT w="0" cap="flat" cmpd="sng" algn="ctr">
+                      <a:noFill/>
+                    </a:lnT>
+                    <a:lnB w="9525" cap="flat" cmpd="sng" algn="ctr">
+                      <a:solidFill>
+                        <a:srgbClr val="D9D4C7"/>
+                      </a:solidFill>
+                      <a:prstDash val="solid"/>
+                      <a:round/>
+                      <a:headEnd type="none" w="med" len="med"/>
+                      <a:tailEnd type="none" w="med" len="med"/>
+                    </a:lnB>
+                  </a:tcPr>
+                </a:tc>
+              </a:tr>
+            </a:tbl>
+          </a:graphicData>
+        </a:graphic>
+      </p:graphicFrame>
+      <p:sp>
+        <p:nvSpPr>
+          <p:cNvPr id="16" name="label"/>
+          <p:cNvSpPr txBox="1"/>
+          <p:nvPr/>
+        </p:nvSpPr>
+        <p:spPr>
+          <a:xfrm>
+            <a:off x="548640" y="3445976"/>
+            <a:ext cx="11091672" cy="201168"/>
+          </a:xfrm>
+          <a:prstGeom prst="rect">
+            <a:avLst/>
+          </a:prstGeom>
+          <a:noFill/>
+          <a:ln/>
+        </p:spPr>
+        <p:txBody>
+          <a:bodyPr wrap="square" lIns="0" tIns="0" rIns="0" bIns="0" rtlCol="0" anchor="t"/>
+          <a:lstStyle/>
+          <a:p>
+            <a:pPr indent="0" marL="0">
+              <a:buNone/>
+            </a:pPr>
+            <a:r>
+              <a:rPr lang="en-US" sz="1000" b="1" spc="100" kern="0" dirty="0">
+                <a:solidFill>
+                  <a:schemeClr val="accent2"/>
+                </a:solidFill>
+              </a:rPr>
+              <a:t>MARKET ACCESS — COMPETITIVE EXAMPLES</a:t>
+            </a:r>
+            <a:endParaRPr lang="en-US" sz="1000" dirty="0"/>
+          </a:p>
+        </p:txBody>
+      </p:sp>
+      <p:graphicFrame>
+        <p:nvGraphicFramePr>
+          <p:cNvPr id="19" name="task table"/>
+          <p:cNvGraphicFramePr>
+            <a:graphicFrameLocks noGrp="1"/>
+          </p:cNvGraphicFramePr>
+          <p:nvPr>
+            <p:extLst>
+              <p:ext uri="{D42A27DB-BD31-4B8C-83A1-F6EECF244321}">
+                <p14:modId xmlns:p14="http://schemas.microsoft.com/office/powerpoint/2010/main" val="1579011935"/>
+              </p:ext>
+            </p:extLst>
+          </p:nvPr>
+        </p:nvGraphicFramePr>
+        <p:xfrm>
+          <a:off x="548640" y="3720296"/>
+          <a:ext cx="11091672" cy="914400"/>
+        </p:xfrm>
+        <a:graphic>
+          <a:graphicData uri="http://schemas.openxmlformats.org/drawingml/2006/table">
+            <a:tbl>
+              <a:tblPr/>
+              <a:tblGrid>
+                <a:gridCol w="2286000"/>
+                <a:gridCol w="5760720"/>
+                <a:gridCol w="3044952"/>
+              </a:tblGrid>
+              <a:tr h="329184">
+                <a:tc>
+                  <a:txBody>
+                    <a:bodyPr/>
+                    <a:lstStyle/>
+                    <a:p>
+                      <a:pPr algn="ctr" indent="0" marL="0">
+                        <a:buNone/>
+                      </a:pPr>
+                      <a:r>
+                        <a:rPr lang="en-US" sz="900" b="1" spc="100" kern="0" dirty="0">
+                          <a:solidFill>
+                            <a:schemeClr val="bg1"/>
+                          </a:solidFill>
+                        </a:rPr>
+                        <a:t>CUSTOMER TASK</a:t>
+                      </a:r>
+                      <a:endParaRPr lang="en-US" sz="900" dirty="0"/>
+                    </a:p>
+                  </a:txBody>
+                  <a:tcPr marL="109728" marR="109728" marT="64008" marB="64008" anchor="ctr">
+                    <a:lnL w="0" cap="flat" cmpd="sng" algn="ctr">
+                      <a:noFill/>
+                    </a:lnL>
+                    <a:lnR w="0" cap="flat" cmpd="sng" algn="ctr">
+                      <a:noFill/>
+                    </a:lnR>
+                    <a:lnT w="0" cap="flat" cmpd="sng" algn="ctr">
+                      <a:noFill/>
+                    </a:lnT>
+                    <a:lnB w="0" cap="flat" cmpd="sng" algn="ctr">
+                      <a:noFill/>
+                    </a:lnB>
+                    <a:solidFill>
+                      <a:schemeClr val="accent1"/>
+                    </a:solidFill>
+                  </a:tcPr>
+                </a:tc>
+                <a:tc>
+                  <a:txBody>
+                    <a:bodyPr/>
+                    <a:lstStyle/>
+                    <a:p>
+                      <a:pPr algn="ctr" indent="0" marL="0">
+                        <a:buNone/>
+                      </a:pPr>
+                      <a:r>
+                        <a:rPr lang="en-US" sz="900" b="1" spc="100" kern="0" dirty="0">
+                          <a:solidFill>
+                            <a:schemeClr val="bg1"/>
+                          </a:solidFill>
+                        </a:rPr>
+                        <a:t>CONVERSATIONAL AI OFFERINGS</a:t>
+                      </a:r>
+                      <a:endParaRPr lang="en-US" sz="900" dirty="0"/>
+                    </a:p>
+                  </a:txBody>
+                  <a:tcPr marL="109728" marR="109728" marT="64008" marB="64008" anchor="ctr">
+                    <a:lnL w="0" cap="flat" cmpd="sng" algn="ctr">
+                      <a:noFill/>
+                    </a:lnL>
+                    <a:lnR w="0" cap="flat" cmpd="sng" algn="ctr">
+                      <a:noFill/>
+                    </a:lnR>
+                    <a:lnT w="0" cap="flat" cmpd="sng" algn="ctr">
+                      <a:noFill/>
+                    </a:lnT>
+                    <a:lnB w="0" cap="flat" cmpd="sng" algn="ctr">
+                      <a:noFill/>
+                    </a:lnB>
+                    <a:solidFill>
+                      <a:schemeClr val="accent1"/>
+                    </a:solidFill>
+                  </a:tcPr>
+                </a:tc>
+                <a:tc>
+                  <a:txBody>
+                    <a:bodyPr/>
+                    <a:lstStyle/>
+                    <a:p>
+                      <a:pPr algn="ctr" indent="0" marL="0">
+                        <a:buNone/>
+                      </a:pPr>
+                      <a:r>
+                        <a:rPr lang="en-US" sz="900" b="1" spc="100" kern="0" dirty="0">
+                          <a:solidFill>
+                            <a:schemeClr val="bg1"/>
+                          </a:solidFill>
+                        </a:rPr>
+                        <a:t>RELEVANT OPTUM LS OFFERINGS</a:t>
+                      </a:r>
+                      <a:endParaRPr lang="en-US" sz="900" dirty="0"/>
+                    </a:p>
+                  </a:txBody>
+                  <a:tcPr marL="109728" marR="109728" marT="64008" marB="64008" anchor="ctr">
+                    <a:lnL w="0" cap="flat" cmpd="sng" algn="ctr">
+                      <a:noFill/>
+                    </a:lnL>
+                    <a:lnR w="0" cap="flat" cmpd="sng" algn="ctr">
+                      <a:noFill/>
+                    </a:lnR>
+                    <a:lnT w="0" cap="flat" cmpd="sng" algn="ctr">
+                      <a:noFill/>
+                    </a:lnT>
+                    <a:lnB w="0" cap="flat" cmpd="sng" algn="ctr">
+                      <a:noFill/>
+                    </a:lnB>
+                    <a:solidFill>
+                      <a:schemeClr val="accent1"/>
+                    </a:solidFill>
+                  </a:tcPr>
+                </a:tc>
+              </a:tr>
+              <a:tr h="564811">
+                <a:tc>
+                  <a:txBody>
+                    <a:bodyPr/>
+                    <a:lstStyle/>
+                    <a:p>
+                      <a:pPr algn="ctr" indent="0" marL="0">
+                        <a:buNone/>
+                      </a:pPr>
+                      <a:r>
+                        <a:rPr lang="en-US" sz="1050" b="1" dirty="0">
+                          <a:solidFill>
+                            <a:schemeClr val="accent1"/>
+                          </a:solidFill>
+                        </a:rPr>
+                        <a:t>Pharmaceutical pricing and market-access intelligence</a:t>
+                      </a:r>
+                      <a:endParaRPr lang="en-US" sz="1050" dirty="0"/>
+                    </a:p>
+                  </a:txBody>
+                  <a:tcPr marL="109728" marR="109728" marT="64008" marB="64008" anchor="ctr">
+                    <a:lnL w="0" cap="flat" cmpd="sng" algn="ctr">
+                      <a:noFill/>
+                    </a:lnL>
+                    <a:lnR w="25400" cap="flat" cmpd="sng" algn="ctr">
+                      <a:solidFill>
+                        <a:srgbClr val="FFFFFF"/>
+                      </a:solidFill>
+                      <a:prstDash val="solid"/>
+                      <a:round/>
+                      <a:headEnd type="none" w="med" len="med"/>
+                      <a:tailEnd type="none" w="med" len="med"/>
+                    </a:lnR>
+                    <a:lnT w="25400" cap="flat" cmpd="sng" algn="ctr">
+                      <a:solidFill>
+                        <a:srgbClr val="FFFFFF"/>
+                      </a:solidFill>
+                      <a:prstDash val="solid"/>
+                      <a:round/>
+                      <a:headEnd type="none" w="med" len="med"/>
+                      <a:tailEnd type="none" w="med" len="med"/>
+                    </a:lnT>
+                    <a:lnB w="25400" cap="flat" cmpd="sng" algn="ctr">
+                      <a:solidFill>
+                        <a:srgbClr val="FFFFFF"/>
+                      </a:solidFill>
+                      <a:prstDash val="solid"/>
+                      <a:round/>
+                      <a:headEnd type="none" w="med" len="med"/>
+                      <a:tailEnd type="none" w="med" len="med"/>
+                    </a:lnB>
+                    <a:solidFill>
+                      <a:schemeClr val="accent5"/>
+                    </a:solidFill>
+                  </a:tcPr>
+                </a:tc>
+                <a:tc>
+                  <a:txBody>
+                    <a:bodyPr/>
+                    <a:lstStyle/>
+                    <a:p>
+                      <a:pPr indent="0" marL="0">
+                        <a:buNone/>
+                      </a:pPr>
+                      <a:r>
+                        <a:rPr lang="en-US" sz="950" dirty="0">
+                          <a:solidFill>
+                            <a:schemeClr val="tx1"/>
+                          </a:solidFill>
+                        </a:rPr>
+                        <a:t>EVERSANA's </a:t>
+                      </a:r>
+                      <a:pPr indent="0" marL="0">
+                        <a:buNone/>
+                      </a:pPr>
+                      <a:r>
+                        <a:rPr lang="en-US" sz="950" b="1" dirty="0">
+                          <a:solidFill>
+                            <a:schemeClr val="tx1"/>
+                          </a:solidFill>
+                        </a:rPr>
+                        <a:t>Ask NAVLIN</a:t>
+                      </a:r>
+                      <a:pPr indent="0" marL="0">
+                        <a:buNone/>
+                      </a:pPr>
+                      <a:r>
+                        <a:rPr lang="en-US" sz="950" dirty="0">
+                          <a:solidFill>
+                            <a:schemeClr val="tx1"/>
+                          </a:solidFill>
+                        </a:rPr>
+                        <a:t>: conversational access to pricing, reimbursement and market-access information</a:t>
+                      </a:r>
+                      <a:endParaRPr lang="en-US" sz="950" dirty="0"/>
+                    </a:p>
+                  </a:txBody>
+                  <a:tcPr marL="109728" marR="109728" marT="64008" marB="64008" anchor="ctr">
+                    <a:lnL w="0" cap="flat" cmpd="sng" algn="ctr">
+                      <a:noFill/>
+                    </a:lnL>
+                    <a:lnR w="0" cap="flat" cmpd="sng" algn="ctr">
+                      <a:noFill/>
+                    </a:lnR>
+                    <a:lnT w="0" cap="flat" cmpd="sng" algn="ctr">
+                      <a:noFill/>
+                    </a:lnT>
+                    <a:lnB w="9525" cap="flat" cmpd="sng" algn="ctr">
+                      <a:solidFill>
+                        <a:srgbClr val="D9D4C7"/>
+                      </a:solidFill>
+                      <a:prstDash val="solid"/>
+                      <a:round/>
+                      <a:headEnd type="none" w="med" len="med"/>
+                      <a:tailEnd type="none" w="med" len="med"/>
+                    </a:lnB>
+                  </a:tcPr>
+                </a:tc>
+                <a:tc>
+                  <a:txBody>
+                    <a:bodyPr/>
+                    <a:lstStyle/>
+                    <a:p>
+                      <a:pPr indent="0" marL="0">
+                        <a:buNone/>
+                      </a:pPr>
+                      <a:r>
+                        <a:rPr lang="en-US" sz="950" dirty="0">
+                          <a:solidFill>
+                            <a:schemeClr val="tx1"/>
+                          </a:solidFill>
+                        </a:rPr>
+                        <a:t>Optum HEOR and value evidence; Evidence Engine; health economic and budget impact modeling</a:t>
+                      </a:r>
+                      <a:endParaRPr lang="en-US" sz="950" dirty="0"/>
+                    </a:p>
+                  </a:txBody>
+                  <a:tcPr marL="109728" marR="109728" marT="64008" marB="64008" anchor="ctr">
+                    <a:lnL w="0" cap="flat" cmpd="sng" algn="ctr">
+                      <a:noFill/>
+                    </a:lnL>
+                    <a:lnR w="0" cap="flat" cmpd="sng" algn="ctr">
+                      <a:noFill/>
+                    </a:lnR>
+                    <a:lnT w="0" cap="flat" cmpd="sng" algn="ctr">
+                      <a:noFill/>
+                    </a:lnT>
+                    <a:lnB w="9525" cap="flat" cmpd="sng" algn="ctr">
+                      <a:solidFill>
+                        <a:srgbClr val="D9D4C7"/>
+                      </a:solidFill>
+                      <a:prstDash val="solid"/>
+                      <a:round/>
+                      <a:headEnd type="none" w="med" len="med"/>
+                      <a:tailEnd type="none" w="med" len="med"/>
+                    </a:lnB>
+                  </a:tcPr>
+                </a:tc>
+              </a:tr>
+            </a:tbl>
+          </a:graphicData>
+        </a:graphic>
+      </p:graphicFrame>
+      <p:sp>
+        <p:nvSpPr>
+          <p:cNvPr id="18" name="beyond the public evidence card"/>
           <p:cNvSpPr/>
           <p:nvPr/>
         </p:nvSpPr>
         <p:spPr>
           <a:xfrm>
-            <a:off x="548640" y="1536192"/>
-            <a:ext cx="11091672" cy="1536192"/>
+            <a:off x="548640" y="4797171"/>
+            <a:ext cx="11091672" cy="1256157"/>
           </a:xfrm>
           <a:prstGeom prst="rect">
             <a:avLst/>
@@ -3109,67 +4854,23 @@
       </p:sp>
       <p:sp>
         <p:nvSpPr>
-          <p:cNvPr id="5" name="icon circle"/>
-          <p:cNvSpPr/>
-          <p:nvPr/>
-        </p:nvSpPr>
-        <p:spPr>
-          <a:xfrm>
-            <a:off x="777240" y="1737360"/>
-            <a:ext cx="475488" cy="475488"/>
-          </a:xfrm>
-          <a:prstGeom prst="ellipse">
-            <a:avLst/>
-          </a:prstGeom>
-          <a:solidFill>
-            <a:schemeClr val="accent5"/>
-          </a:solidFill>
-          <a:ln/>
-        </p:spPr>
-      </p:sp>
-      <p:pic>
-        <p:nvPicPr>
-          <p:cNvPr id="6" name="icon MdTravelExplore" descr="preencoded.png">    </p:cNvPr>
-          <p:cNvPicPr>
-            <a:picLocks noChangeAspect="1"/>
-          </p:cNvPicPr>
-          <p:nvPr/>
-        </p:nvPicPr>
-        <p:blipFill>
-          <a:blip r:embed="rId1"/>
-          <a:stretch>
-            <a:fillRect/>
-          </a:stretch>
-        </p:blipFill>
-        <p:spPr>
-          <a:xfrm>
-            <a:off x="881847" y="1841967"/>
-            <a:ext cx="266273" cy="266273"/>
-          </a:xfrm>
-          <a:prstGeom prst="rect">
-            <a:avLst/>
-          </a:prstGeom>
-        </p:spPr>
-      </p:pic>
-      <p:sp>
-        <p:nvSpPr>
-          <p:cNvPr id="7" name="card label"/>
+          <p:cNvPr id="19" name="label"/>
           <p:cNvSpPr txBox="1"/>
           <p:nvPr/>
         </p:nvSpPr>
         <p:spPr>
           <a:xfrm>
-            <a:off x="1417320" y="1719072"/>
-            <a:ext cx="5486400" cy="237744"/>
-          </a:xfrm>
-          <a:prstGeom prst="rect">
-            <a:avLst/>
-          </a:prstGeom>
-          <a:noFill/>
-          <a:ln/>
-        </p:spPr>
-        <p:txBody>
-          <a:bodyPr wrap="square" lIns="0" tIns="0" rIns="0" bIns="0" rtlCol="0" anchor="ctr"/>
+            <a:off x="749808" y="4980051"/>
+            <a:ext cx="10689336" cy="256032"/>
+          </a:xfrm>
+          <a:prstGeom prst="rect">
+            <a:avLst/>
+          </a:prstGeom>
+          <a:noFill/>
+          <a:ln/>
+        </p:spPr>
+        <p:txBody>
+          <a:bodyPr wrap="square" lIns="0" tIns="0" rIns="0" bIns="0" rtlCol="0" anchor="t"/>
           <a:lstStyle/>
           <a:p>
             <a:pPr indent="0" marL="0">
@@ -3181,7 +4882,7 @@
                   <a:schemeClr val="accent2"/>
                 </a:solidFill>
               </a:rPr>
-              <a:t>OUTSIDE-IN RESEARCH LENS</a:t>
+              <a:t>BEYOND THE PUBLIC EVIDENCE</a:t>
             </a:r>
             <a:endParaRPr lang="en-US" sz="1300" dirty="0"/>
           </a:p>
@@ -3189,14 +4890,14 @@
       </p:sp>
       <p:sp>
         <p:nvSpPr>
-          <p:cNvPr id="8" name="Text 5"/>
+          <p:cNvPr id="20" name="Text 16"/>
           <p:cNvSpPr txBox="1"/>
           <p:nvPr/>
         </p:nvSpPr>
         <p:spPr>
           <a:xfrm>
-            <a:off x="1417320" y="2048256"/>
-            <a:ext cx="9966960" cy="201168"/>
+            <a:off x="749808" y="5309235"/>
+            <a:ext cx="10689336" cy="616077"/>
           </a:xfrm>
           <a:prstGeom prst="rect">
             <a:avLst/>
@@ -3212,1122 +4913,31 @@
               <a:buNone/>
             </a:pPr>
             <a:r>
-              <a:rPr lang="en-US" sz="1100" b="1" dirty="0">
+              <a:rPr lang="en-US" sz="1050" b="1" dirty="0">
                 <a:solidFill>
                   <a:schemeClr val="tx1"/>
                 </a:solidFill>
               </a:rPr>
-              <a:t>This study is an assessment of </a:t>
-            </a:r>
+              <a:t>For Clinical Trials, does the interface help identify viable sites, evaluate patients or manage trial documents—and how far does it go?</a:t>
+            </a:r>
+            <a:endParaRPr lang="en-US" sz="1050" dirty="0"/>
+          </a:p>
+          <a:p>
             <a:pPr indent="0" marL="0">
-              <a:buNone/>
-            </a:pPr>
-            <a:r>
-              <a:rPr lang="en-US" sz="1100" b="1" i="1" dirty="0">
+              <a:spcBef>
+                <a:spcPts val="600"/>
+              </a:spcBef>
+              <a:buNone/>
+            </a:pPr>
+            <a:r>
+              <a:rPr lang="en-US" sz="1050" b="1" dirty="0">
                 <a:solidFill>
                   <a:schemeClr val="tx1"/>
                 </a:solidFill>
               </a:rPr>
-              <a:t>publicly-marketed</a:t>
-            </a:r>
-            <a:pPr indent="0" marL="0">
-              <a:buNone/>
-            </a:pPr>
-            <a:r>
-              <a:rPr lang="en-US" sz="1100" b="1" dirty="0">
-                <a:solidFill>
-                  <a:schemeClr val="tx1"/>
-                </a:solidFill>
-              </a:rPr>
-              <a:t> conversational AI products across five Optum Life Sciences-relevant business domains:</a:t>
-            </a:r>
-            <a:endParaRPr lang="en-US" sz="1100" dirty="0"/>
-          </a:p>
-        </p:txBody>
-      </p:sp>
-      <p:sp>
-        <p:nvSpPr>
-          <p:cNvPr id="9" name="workflow chip RWE"/>
-          <p:cNvSpPr/>
-          <p:nvPr/>
-        </p:nvSpPr>
-        <p:spPr>
-          <a:xfrm>
-            <a:off x="1417320" y="2322576"/>
-            <a:ext cx="422727" cy="246888"/>
-          </a:xfrm>
-          <a:prstGeom prst="roundRect">
-            <a:avLst>
-              <a:gd name="adj" fmla="val 50000"/>
-            </a:avLst>
-          </a:prstGeom>
-          <a:solidFill>
-            <a:schemeClr val="accent5"/>
-          </a:solidFill>
-          <a:ln w="9525">
-            <a:solidFill>
-              <a:schemeClr val="accent1"/>
-            </a:solidFill>
-            <a:prstDash val="solid"/>
-          </a:ln>
-        </p:spPr>
-      </p:sp>
-      <p:sp>
-        <p:nvSpPr>
-          <p:cNvPr id="10" name="Text 7"/>
-          <p:cNvSpPr txBox="1"/>
-          <p:nvPr/>
-        </p:nvSpPr>
-        <p:spPr>
-          <a:xfrm>
-            <a:off x="1417320" y="2322576"/>
-            <a:ext cx="422727" cy="246888"/>
-          </a:xfrm>
-          <a:prstGeom prst="rect">
-            <a:avLst/>
-          </a:prstGeom>
-          <a:noFill/>
-          <a:ln/>
-        </p:spPr>
-        <p:txBody>
-          <a:bodyPr wrap="square" lIns="0" tIns="0" rIns="0" bIns="0" rtlCol="0" anchor="ctr"/>
-          <a:lstStyle/>
-          <a:p>
-            <a:pPr algn="ctr" indent="0" marL="0">
-              <a:buNone/>
-            </a:pPr>
-            <a:r>
-              <a:rPr lang="en-US" sz="950" dirty="0">
-                <a:solidFill>
-                  <a:schemeClr val="accent1"/>
-                </a:solidFill>
-              </a:rPr>
-              <a:t>RWE</a:t>
-            </a:r>
-            <a:endParaRPr lang="en-US" sz="950" dirty="0"/>
-          </a:p>
-        </p:txBody>
-      </p:sp>
-      <p:sp>
-        <p:nvSpPr>
-          <p:cNvPr id="11" name="workflow chip Commercial Intelligence"/>
-          <p:cNvSpPr/>
-          <p:nvPr/>
-        </p:nvSpPr>
-        <p:spPr>
-          <a:xfrm>
-            <a:off x="1931487" y="2322576"/>
-            <a:ext cx="1777868" cy="246888"/>
-          </a:xfrm>
-          <a:prstGeom prst="roundRect">
-            <a:avLst>
-              <a:gd name="adj" fmla="val 50000"/>
-            </a:avLst>
-          </a:prstGeom>
-          <a:solidFill>
-            <a:schemeClr val="accent5"/>
-          </a:solidFill>
-          <a:ln w="9525">
-            <a:solidFill>
-              <a:schemeClr val="accent1"/>
-            </a:solidFill>
-            <a:prstDash val="solid"/>
-          </a:ln>
-        </p:spPr>
-      </p:sp>
-      <p:sp>
-        <p:nvSpPr>
-          <p:cNvPr id="12" name="Text 9"/>
-          <p:cNvSpPr txBox="1"/>
-          <p:nvPr/>
-        </p:nvSpPr>
-        <p:spPr>
-          <a:xfrm>
-            <a:off x="1931487" y="2322576"/>
-            <a:ext cx="1777868" cy="246888"/>
-          </a:xfrm>
-          <a:prstGeom prst="rect">
-            <a:avLst/>
-          </a:prstGeom>
-          <a:noFill/>
-          <a:ln/>
-        </p:spPr>
-        <p:txBody>
-          <a:bodyPr wrap="square" lIns="0" tIns="0" rIns="0" bIns="0" rtlCol="0" anchor="ctr"/>
-          <a:lstStyle/>
-          <a:p>
-            <a:pPr algn="ctr" indent="0" marL="0">
-              <a:buNone/>
-            </a:pPr>
-            <a:r>
-              <a:rPr lang="en-US" sz="950" dirty="0">
-                <a:solidFill>
-                  <a:schemeClr val="accent1"/>
-                </a:solidFill>
-              </a:rPr>
-              <a:t>Commercial Intelligence</a:t>
-            </a:r>
-            <a:endParaRPr lang="en-US" sz="950" dirty="0"/>
-          </a:p>
-        </p:txBody>
-      </p:sp>
-      <p:sp>
-        <p:nvSpPr>
-          <p:cNvPr id="13" name="workflow chip Medical / Regulatory Research"/>
-          <p:cNvSpPr/>
-          <p:nvPr/>
-        </p:nvSpPr>
-        <p:spPr>
-          <a:xfrm>
-            <a:off x="3800795" y="2322576"/>
-            <a:ext cx="2184410" cy="246888"/>
-          </a:xfrm>
-          <a:prstGeom prst="roundRect">
-            <a:avLst>
-              <a:gd name="adj" fmla="val 50000"/>
-            </a:avLst>
-          </a:prstGeom>
-          <a:solidFill>
-            <a:schemeClr val="accent5"/>
-          </a:solidFill>
-          <a:ln w="9525">
-            <a:solidFill>
-              <a:schemeClr val="accent1"/>
-            </a:solidFill>
-            <a:prstDash val="solid"/>
-          </a:ln>
-        </p:spPr>
-      </p:sp>
-      <p:sp>
-        <p:nvSpPr>
-          <p:cNvPr id="14" name="Text 11"/>
-          <p:cNvSpPr txBox="1"/>
-          <p:nvPr/>
-        </p:nvSpPr>
-        <p:spPr>
-          <a:xfrm>
-            <a:off x="3800795" y="2322576"/>
-            <a:ext cx="2184410" cy="246888"/>
-          </a:xfrm>
-          <a:prstGeom prst="rect">
-            <a:avLst/>
-          </a:prstGeom>
-          <a:noFill/>
-          <a:ln/>
-        </p:spPr>
-        <p:txBody>
-          <a:bodyPr wrap="square" lIns="0" tIns="0" rIns="0" bIns="0" rtlCol="0" anchor="ctr"/>
-          <a:lstStyle/>
-          <a:p>
-            <a:pPr algn="ctr" indent="0" marL="0">
-              <a:buNone/>
-            </a:pPr>
-            <a:r>
-              <a:rPr lang="en-US" sz="950" dirty="0">
-                <a:solidFill>
-                  <a:schemeClr val="accent1"/>
-                </a:solidFill>
-              </a:rPr>
-              <a:t>Medical / Regulatory Research</a:t>
-            </a:r>
-            <a:endParaRPr lang="en-US" sz="950" dirty="0"/>
-          </a:p>
-        </p:txBody>
-      </p:sp>
-      <p:sp>
-        <p:nvSpPr>
-          <p:cNvPr id="15" name="workflow chip Clinical Trials"/>
-          <p:cNvSpPr/>
-          <p:nvPr/>
-        </p:nvSpPr>
-        <p:spPr>
-          <a:xfrm>
-            <a:off x="6076645" y="2322576"/>
-            <a:ext cx="1235812" cy="246888"/>
-          </a:xfrm>
-          <a:prstGeom prst="roundRect">
-            <a:avLst>
-              <a:gd name="adj" fmla="val 50000"/>
-            </a:avLst>
-          </a:prstGeom>
-          <a:solidFill>
-            <a:schemeClr val="accent5"/>
-          </a:solidFill>
-          <a:ln w="9525">
-            <a:solidFill>
-              <a:schemeClr val="accent1"/>
-            </a:solidFill>
-            <a:prstDash val="solid"/>
-          </a:ln>
-        </p:spPr>
-      </p:sp>
-      <p:sp>
-        <p:nvSpPr>
-          <p:cNvPr id="16" name="Text 13"/>
-          <p:cNvSpPr txBox="1"/>
-          <p:nvPr/>
-        </p:nvSpPr>
-        <p:spPr>
-          <a:xfrm>
-            <a:off x="6076645" y="2322576"/>
-            <a:ext cx="1235812" cy="246888"/>
-          </a:xfrm>
-          <a:prstGeom prst="rect">
-            <a:avLst/>
-          </a:prstGeom>
-          <a:noFill/>
-          <a:ln/>
-        </p:spPr>
-        <p:txBody>
-          <a:bodyPr wrap="square" lIns="0" tIns="0" rIns="0" bIns="0" rtlCol="0" anchor="ctr"/>
-          <a:lstStyle/>
-          <a:p>
-            <a:pPr algn="ctr" indent="0" marL="0">
-              <a:buNone/>
-            </a:pPr>
-            <a:r>
-              <a:rPr lang="en-US" sz="950" dirty="0">
-                <a:solidFill>
-                  <a:schemeClr val="accent1"/>
-                </a:solidFill>
-              </a:rPr>
-              <a:t>Clinical Trials</a:t>
-            </a:r>
-            <a:endParaRPr lang="en-US" sz="950" dirty="0"/>
-          </a:p>
-        </p:txBody>
-      </p:sp>
-      <p:sp>
-        <p:nvSpPr>
-          <p:cNvPr id="17" name="Text 14"/>
-          <p:cNvSpPr txBox="1"/>
-          <p:nvPr/>
-        </p:nvSpPr>
-        <p:spPr>
-          <a:xfrm>
-            <a:off x="7403897" y="2322576"/>
-            <a:ext cx="310896" cy="246888"/>
-          </a:xfrm>
-          <a:prstGeom prst="rect">
-            <a:avLst/>
-          </a:prstGeom>
-          <a:noFill/>
-          <a:ln/>
-        </p:spPr>
-        <p:txBody>
-          <a:bodyPr wrap="square" lIns="0" tIns="0" rIns="0" bIns="0" rtlCol="0" anchor="ctr"/>
-          <a:lstStyle/>
-          <a:p>
-            <a:pPr algn="ctr" indent="0" marL="0">
-              <a:buNone/>
-            </a:pPr>
-            <a:r>
-              <a:rPr lang="en-US" sz="1000" dirty="0">
-                <a:solidFill>
-                  <a:schemeClr val="accent4"/>
-                </a:solidFill>
-              </a:rPr>
-              <a:t>and</a:t>
-            </a:r>
-            <a:endParaRPr lang="en-US" sz="1000" dirty="0"/>
-          </a:p>
-        </p:txBody>
-      </p:sp>
-      <p:sp>
-        <p:nvSpPr>
-          <p:cNvPr id="18" name="workflow chip Market Access"/>
-          <p:cNvSpPr/>
-          <p:nvPr/>
-        </p:nvSpPr>
-        <p:spPr>
-          <a:xfrm>
-            <a:off x="7769657" y="2322576"/>
-            <a:ext cx="1100298" cy="246888"/>
-          </a:xfrm>
-          <a:prstGeom prst="roundRect">
-            <a:avLst>
-              <a:gd name="adj" fmla="val 50000"/>
-            </a:avLst>
-          </a:prstGeom>
-          <a:solidFill>
-            <a:schemeClr val="accent5"/>
-          </a:solidFill>
-          <a:ln w="9525">
-            <a:solidFill>
-              <a:schemeClr val="accent1"/>
-            </a:solidFill>
-            <a:prstDash val="solid"/>
-          </a:ln>
-        </p:spPr>
-      </p:sp>
-      <p:sp>
-        <p:nvSpPr>
-          <p:cNvPr id="19" name="Text 16"/>
-          <p:cNvSpPr txBox="1"/>
-          <p:nvPr/>
-        </p:nvSpPr>
-        <p:spPr>
-          <a:xfrm>
-            <a:off x="7769657" y="2322576"/>
-            <a:ext cx="1100298" cy="246888"/>
-          </a:xfrm>
-          <a:prstGeom prst="rect">
-            <a:avLst/>
-          </a:prstGeom>
-          <a:noFill/>
-          <a:ln/>
-        </p:spPr>
-        <p:txBody>
-          <a:bodyPr wrap="square" lIns="0" tIns="0" rIns="0" bIns="0" rtlCol="0" anchor="ctr"/>
-          <a:lstStyle/>
-          <a:p>
-            <a:pPr algn="ctr" indent="0" marL="0">
-              <a:buNone/>
-            </a:pPr>
-            <a:r>
-              <a:rPr lang="en-US" sz="950" dirty="0">
-                <a:solidFill>
-                  <a:schemeClr val="accent1"/>
-                </a:solidFill>
-              </a:rPr>
-              <a:t>Market Access</a:t>
-            </a:r>
-            <a:endParaRPr lang="en-US" sz="950" dirty="0"/>
-          </a:p>
-        </p:txBody>
-      </p:sp>
-      <p:sp>
-        <p:nvSpPr>
-          <p:cNvPr id="20" name="Text 17"/>
-          <p:cNvSpPr txBox="1"/>
-          <p:nvPr/>
-        </p:nvSpPr>
-        <p:spPr>
-          <a:xfrm>
-            <a:off x="1417320" y="2651760"/>
-            <a:ext cx="9966960" cy="201168"/>
-          </a:xfrm>
-          <a:prstGeom prst="rect">
-            <a:avLst/>
-          </a:prstGeom>
-          <a:noFill/>
-          <a:ln/>
-        </p:spPr>
-        <p:txBody>
-          <a:bodyPr wrap="square" lIns="0" tIns="0" rIns="0" bIns="0" rtlCol="0" anchor="t"/>
-          <a:lstStyle/>
-          <a:p>
-            <a:pPr indent="0" marL="0">
-              <a:buNone/>
-            </a:pPr>
-            <a:r>
-              <a:rPr lang="en-US" sz="1100" b="1" dirty="0">
-                <a:solidFill>
-                  <a:schemeClr val="tx1"/>
-                </a:solidFill>
-              </a:rPr>
-              <a:t>The U.S. competitive landscape is the primary focus; selected international offerings provide context; and Optum LS is the strategic reference point.</a:t>
-            </a:r>
-            <a:endParaRPr lang="en-US" sz="1100" dirty="0"/>
-          </a:p>
-        </p:txBody>
-      </p:sp>
-      <p:sp>
-        <p:nvSpPr>
-          <p:cNvPr id="21" name="key findings card"/>
-          <p:cNvSpPr/>
-          <p:nvPr/>
-        </p:nvSpPr>
-        <p:spPr>
-          <a:xfrm>
-            <a:off x="548640" y="3218688"/>
-            <a:ext cx="3575304" cy="2834640"/>
-          </a:xfrm>
-          <a:prstGeom prst="rect">
-            <a:avLst/>
-          </a:prstGeom>
-          <a:solidFill>
-            <a:schemeClr val="bg1"/>
-          </a:solidFill>
-          <a:ln/>
-          <a:effectLst>
-            <a:outerShdw sx="100000" sy="100000" kx="0" ky="0" algn="bl" rotWithShape="0" blurRad="101600" dist="25400" dir="5400000">
-              <a:srgbClr val="000000">
-                <a:alpha val="10000"/>
-              </a:srgbClr>
-            </a:outerShdw>
-          </a:effectLst>
-        </p:spPr>
-      </p:sp>
-      <p:sp>
-        <p:nvSpPr>
-          <p:cNvPr id="22" name="icon circle"/>
-          <p:cNvSpPr/>
-          <p:nvPr/>
-        </p:nvSpPr>
-        <p:spPr>
-          <a:xfrm>
-            <a:off x="777240" y="3419856"/>
-            <a:ext cx="457200" cy="457200"/>
-          </a:xfrm>
-          <a:prstGeom prst="ellipse">
-            <a:avLst/>
-          </a:prstGeom>
-          <a:solidFill>
-            <a:schemeClr val="accent5"/>
-          </a:solidFill>
-          <a:ln/>
-        </p:spPr>
-      </p:sp>
-      <p:pic>
-        <p:nvPicPr>
-          <p:cNvPr id="23" name="icon MdInsights" descr="preencoded.png">    </p:cNvPr>
-          <p:cNvPicPr>
-            <a:picLocks noChangeAspect="1"/>
-          </p:cNvPicPr>
-          <p:nvPr/>
-        </p:nvPicPr>
-        <p:blipFill>
-          <a:blip r:embed="rId2"/>
-          <a:stretch>
-            <a:fillRect/>
-          </a:stretch>
-        </p:blipFill>
-        <p:spPr>
-          <a:xfrm>
-            <a:off x="877824" y="3520440"/>
-            <a:ext cx="256032" cy="256032"/>
-          </a:xfrm>
-          <a:prstGeom prst="rect">
-            <a:avLst/>
-          </a:prstGeom>
-        </p:spPr>
-      </p:pic>
-      <p:sp>
-        <p:nvSpPr>
-          <p:cNvPr id="24" name="card label"/>
-          <p:cNvSpPr txBox="1"/>
-          <p:nvPr/>
-        </p:nvSpPr>
-        <p:spPr>
-          <a:xfrm>
-            <a:off x="1353312" y="3511296"/>
-            <a:ext cx="2660904" cy="237744"/>
-          </a:xfrm>
-          <a:prstGeom prst="rect">
-            <a:avLst/>
-          </a:prstGeom>
-          <a:noFill/>
-          <a:ln/>
-        </p:spPr>
-        <p:txBody>
-          <a:bodyPr wrap="square" lIns="0" tIns="0" rIns="0" bIns="0" rtlCol="0" anchor="ctr"/>
-          <a:lstStyle/>
-          <a:p>
-            <a:pPr indent="0" marL="0">
-              <a:buNone/>
-            </a:pPr>
-            <a:r>
-              <a:rPr lang="en-US" sz="1300" b="1" spc="150" kern="0" dirty="0">
-                <a:solidFill>
-                  <a:schemeClr val="accent2"/>
-                </a:solidFill>
-              </a:rPr>
-              <a:t>KEY FINDINGS</a:t>
-            </a:r>
-            <a:endParaRPr lang="en-US" sz="1300" dirty="0"/>
-          </a:p>
-        </p:txBody>
-      </p:sp>
-      <p:sp>
-        <p:nvSpPr>
-          <p:cNvPr id="25" name="hero 19"/>
-          <p:cNvSpPr txBox="1"/>
-          <p:nvPr/>
-        </p:nvSpPr>
-        <p:spPr>
-          <a:xfrm>
-            <a:off x="777240" y="4069080"/>
-            <a:ext cx="621792" cy="502920"/>
-          </a:xfrm>
-          <a:prstGeom prst="rect">
-            <a:avLst/>
-          </a:prstGeom>
-          <a:noFill/>
-          <a:ln/>
-        </p:spPr>
-        <p:txBody>
-          <a:bodyPr wrap="square" lIns="0" tIns="0" rIns="0" bIns="0" rtlCol="0" anchor="t"/>
-          <a:lstStyle/>
-          <a:p>
-            <a:pPr indent="0" marL="0">
-              <a:buNone/>
-            </a:pPr>
-            <a:r>
-              <a:rPr lang="en-US" sz="3400" b="1" dirty="0">
-                <a:solidFill>
-                  <a:schemeClr val="accent2"/>
-                </a:solidFill>
-              </a:rPr>
-              <a:t>19</a:t>
-            </a:r>
-            <a:endParaRPr lang="en-US" sz="3400" dirty="0"/>
-          </a:p>
-        </p:txBody>
-      </p:sp>
-      <p:sp>
-        <p:nvSpPr>
-          <p:cNvPr id="26" name="Text 22"/>
-          <p:cNvSpPr txBox="1"/>
-          <p:nvPr/>
-        </p:nvSpPr>
-        <p:spPr>
-          <a:xfrm>
-            <a:off x="1444752" y="4133088"/>
-            <a:ext cx="2478024" cy="749808"/>
-          </a:xfrm>
-          <a:prstGeom prst="rect">
-            <a:avLst/>
-          </a:prstGeom>
-          <a:noFill/>
-          <a:ln/>
-        </p:spPr>
-        <p:txBody>
-          <a:bodyPr wrap="square" lIns="0" tIns="0" rIns="0" bIns="0" rtlCol="0" anchor="t"/>
-          <a:lstStyle/>
-          <a:p>
-            <a:pPr indent="0" marL="0">
-              <a:buNone/>
-            </a:pPr>
-            <a:r>
-              <a:rPr lang="en-US" sz="1050" dirty="0">
-                <a:solidFill>
-                  <a:schemeClr val="tx1"/>
-                </a:solidFill>
-              </a:rPr>
-              <a:t>The U.S. screen identified </a:t>
-            </a:r>
-            <a:pPr indent="0" marL="0">
-              <a:buNone/>
-            </a:pPr>
-            <a:r>
-              <a:rPr lang="en-US" sz="1050" b="1" dirty="0">
-                <a:solidFill>
-                  <a:schemeClr val="tx1"/>
-                </a:solidFill>
-              </a:rPr>
-              <a:t>19 conversational AI offerings</a:t>
-            </a:r>
-            <a:pPr indent="0" marL="0">
-              <a:buNone/>
-            </a:pPr>
-            <a:r>
-              <a:rPr lang="en-US" sz="1050" dirty="0">
-                <a:solidFill>
-                  <a:schemeClr val="tx1"/>
-                </a:solidFill>
-              </a:rPr>
-              <a:t> across five business domains, </a:t>
-            </a:r>
-            <a:pPr indent="0" marL="0">
-              <a:buNone/>
-            </a:pPr>
-            <a:r>
-              <a:rPr lang="en-US" sz="1050" b="1" dirty="0">
-                <a:solidFill>
-                  <a:schemeClr val="tx1"/>
-                </a:solidFill>
-              </a:rPr>
-              <a:t>concentrated in RWE and Commercial Intelligence</a:t>
-            </a:r>
-            <a:pPr indent="0" marL="0">
-              <a:buNone/>
-            </a:pPr>
-            <a:r>
-              <a:rPr lang="en-US" sz="1050" dirty="0">
-                <a:solidFill>
-                  <a:schemeClr val="tx1"/>
-                </a:solidFill>
-              </a:rPr>
-              <a:t>.</a:t>
+              <a:t>For Market Access, is the customer asking for pricing intelligence, reimbursement information or new economic evidence? Where do the vendor offerings overlap with Optum LS, and where do they solve a different problem?</a:t>
             </a:r>
             <a:endParaRPr lang="en-US" sz="1050" dirty="0"/>
-          </a:p>
-        </p:txBody>
-      </p:sp>
-      <p:sp>
-        <p:nvSpPr>
-          <p:cNvPr id="27" name="Shape 23"/>
-          <p:cNvSpPr/>
-          <p:nvPr/>
-        </p:nvSpPr>
-        <p:spPr>
-          <a:xfrm>
-            <a:off x="777240" y="5010912"/>
-            <a:ext cx="3118104" cy="0"/>
-          </a:xfrm>
-          <a:prstGeom prst="line">
-            <a:avLst/>
-          </a:prstGeom>
-          <a:noFill/>
-          <a:ln w="9525">
-            <a:solidFill>
-              <a:schemeClr val="accent3"/>
-            </a:solidFill>
-            <a:prstDash val="solid"/>
-          </a:ln>
-        </p:spPr>
-      </p:sp>
-      <p:sp>
-        <p:nvSpPr>
-          <p:cNvPr id="28" name="hero 10"/>
-          <p:cNvSpPr txBox="1"/>
-          <p:nvPr/>
-        </p:nvSpPr>
-        <p:spPr>
-          <a:xfrm>
-            <a:off x="777240" y="5056632"/>
-            <a:ext cx="621792" cy="502920"/>
-          </a:xfrm>
-          <a:prstGeom prst="rect">
-            <a:avLst/>
-          </a:prstGeom>
-          <a:noFill/>
-          <a:ln/>
-        </p:spPr>
-        <p:txBody>
-          <a:bodyPr wrap="square" lIns="0" tIns="0" rIns="0" bIns="0" rtlCol="0" anchor="t"/>
-          <a:lstStyle/>
-          <a:p>
-            <a:pPr indent="0" marL="0">
-              <a:buNone/>
-            </a:pPr>
-            <a:r>
-              <a:rPr lang="en-US" sz="3400" b="1" dirty="0">
-                <a:solidFill>
-                  <a:schemeClr val="accent2"/>
-                </a:solidFill>
-              </a:rPr>
-              <a:t>9</a:t>
-            </a:r>
-            <a:endParaRPr lang="en-US" sz="3400" dirty="0"/>
-          </a:p>
-        </p:txBody>
-      </p:sp>
-      <p:sp>
-        <p:nvSpPr>
-          <p:cNvPr id="29" name="Text 25"/>
-          <p:cNvSpPr txBox="1"/>
-          <p:nvPr/>
-        </p:nvSpPr>
-        <p:spPr>
-          <a:xfrm>
-            <a:off x="1444752" y="5120640"/>
-            <a:ext cx="2478024" cy="749808"/>
-          </a:xfrm>
-          <a:prstGeom prst="rect">
-            <a:avLst/>
-          </a:prstGeom>
-          <a:noFill/>
-          <a:ln/>
-        </p:spPr>
-        <p:txBody>
-          <a:bodyPr wrap="square" lIns="0" tIns="0" rIns="0" bIns="0" rtlCol="0" anchor="t"/>
-          <a:lstStyle/>
-          <a:p>
-            <a:pPr indent="0" marL="0">
-              <a:buNone/>
-            </a:pPr>
-            <a:r>
-              <a:rPr lang="en-US" sz="1050" dirty="0">
-                <a:solidFill>
-                  <a:schemeClr val="tx1"/>
-                </a:solidFill>
-              </a:rPr>
-              <a:t>The selected international comparison identified </a:t>
-            </a:r>
-            <a:pPr indent="0" marL="0">
-              <a:buNone/>
-            </a:pPr>
-            <a:r>
-              <a:rPr lang="en-US" sz="1050" b="1" dirty="0">
-                <a:solidFill>
-                  <a:schemeClr val="tx1"/>
-                </a:solidFill>
-              </a:rPr>
-              <a:t>9 qualifying conversational AI offerings,</a:t>
-            </a:r>
-            <a:pPr indent="0" marL="0">
-              <a:buNone/>
-            </a:pPr>
-            <a:r>
-              <a:rPr lang="en-US" sz="1050" dirty="0">
-                <a:solidFill>
-                  <a:schemeClr val="tx1"/>
-                </a:solidFill>
-              </a:rPr>
-              <a:t> providing additional examples of how vendors position conversational interaction.</a:t>
-            </a:r>
-            <a:endParaRPr lang="en-US" sz="1050" dirty="0"/>
-          </a:p>
-        </p:txBody>
-      </p:sp>
-      <p:sp>
-        <p:nvSpPr>
-          <p:cNvPr id="30" name="optum ls positioning card"/>
-          <p:cNvSpPr/>
-          <p:nvPr/>
-        </p:nvSpPr>
-        <p:spPr>
-          <a:xfrm>
-            <a:off x="4306824" y="3218688"/>
-            <a:ext cx="3575304" cy="2834640"/>
-          </a:xfrm>
-          <a:prstGeom prst="rect">
-            <a:avLst/>
-          </a:prstGeom>
-          <a:solidFill>
-            <a:schemeClr val="bg1"/>
-          </a:solidFill>
-          <a:ln/>
-          <a:effectLst>
-            <a:outerShdw sx="100000" sy="100000" kx="0" ky="0" algn="bl" rotWithShape="0" blurRad="101600" dist="25400" dir="5400000">
-              <a:srgbClr val="000000">
-                <a:alpha val="10000"/>
-              </a:srgbClr>
-            </a:outerShdw>
-          </a:effectLst>
-        </p:spPr>
-      </p:sp>
-      <p:sp>
-        <p:nvSpPr>
-          <p:cNvPr id="31" name="icon circle"/>
-          <p:cNvSpPr/>
-          <p:nvPr/>
-        </p:nvSpPr>
-        <p:spPr>
-          <a:xfrm>
-            <a:off x="4535424" y="3419856"/>
-            <a:ext cx="457200" cy="457200"/>
-          </a:xfrm>
-          <a:prstGeom prst="ellipse">
-            <a:avLst/>
-          </a:prstGeom>
-          <a:solidFill>
-            <a:schemeClr val="accent5"/>
-          </a:solidFill>
-          <a:ln/>
-        </p:spPr>
-      </p:sp>
-      <p:pic>
-        <p:nvPicPr>
-          <p:cNvPr id="32" name="icon MdOutlineLayers" descr="preencoded.png">    </p:cNvPr>
-          <p:cNvPicPr>
-            <a:picLocks noChangeAspect="1"/>
-          </p:cNvPicPr>
-          <p:nvPr/>
-        </p:nvPicPr>
-        <p:blipFill>
-          <a:blip r:embed="rId3"/>
-          <a:stretch>
-            <a:fillRect/>
-          </a:stretch>
-        </p:blipFill>
-        <p:spPr>
-          <a:xfrm>
-            <a:off x="4636008" y="3520440"/>
-            <a:ext cx="256032" cy="256032"/>
-          </a:xfrm>
-          <a:prstGeom prst="rect">
-            <a:avLst/>
-          </a:prstGeom>
-        </p:spPr>
-      </p:pic>
-      <p:sp>
-        <p:nvSpPr>
-          <p:cNvPr id="33" name="card label"/>
-          <p:cNvSpPr txBox="1"/>
-          <p:nvPr/>
-        </p:nvSpPr>
-        <p:spPr>
-          <a:xfrm>
-            <a:off x="5111496" y="3511296"/>
-            <a:ext cx="2660904" cy="237744"/>
-          </a:xfrm>
-          <a:prstGeom prst="rect">
-            <a:avLst/>
-          </a:prstGeom>
-          <a:noFill/>
-          <a:ln/>
-        </p:spPr>
-        <p:txBody>
-          <a:bodyPr wrap="square" lIns="0" tIns="0" rIns="0" bIns="0" rtlCol="0" anchor="ctr"/>
-          <a:lstStyle/>
-          <a:p>
-            <a:pPr indent="0" marL="0">
-              <a:buNone/>
-            </a:pPr>
-            <a:r>
-              <a:rPr lang="en-US" sz="1300" b="1" spc="150" kern="0" dirty="0">
-                <a:solidFill>
-                  <a:schemeClr val="accent2"/>
-                </a:solidFill>
-              </a:rPr>
-              <a:t>OPTUM LS POSITIONING</a:t>
-            </a:r>
-            <a:endParaRPr lang="en-US" sz="1300" dirty="0"/>
-          </a:p>
-        </p:txBody>
-      </p:sp>
-      <p:sp>
-        <p:nvSpPr>
-          <p:cNvPr id="34" name="Text 29"/>
-          <p:cNvSpPr txBox="1"/>
-          <p:nvPr/>
-        </p:nvSpPr>
-        <p:spPr>
-          <a:xfrm>
-            <a:off x="4535424" y="4087368"/>
-            <a:ext cx="3118104" cy="1645920"/>
-          </a:xfrm>
-          <a:prstGeom prst="rect">
-            <a:avLst/>
-          </a:prstGeom>
-          <a:noFill/>
-          <a:ln/>
-        </p:spPr>
-        <p:txBody>
-          <a:bodyPr wrap="square" lIns="0" tIns="0" rIns="0" bIns="0" rtlCol="0" anchor="t"/>
-          <a:lstStyle/>
-          <a:p>
-            <a:pPr indent="0" marL="0">
-              <a:spcAft>
-                <a:spcPts val="900"/>
-              </a:spcAft>
-              <a:buNone/>
-            </a:pPr>
-            <a:r>
-              <a:rPr lang="en-US" sz="1100" dirty="0">
-                <a:solidFill>
-                  <a:schemeClr val="tx1"/>
-                </a:solidFill>
-              </a:rPr>
-              <a:t>Optum LS publicly emphasizes linked healthcare data, AI-enabled research tools and scientific expertise.</a:t>
-            </a:r>
-            <a:endParaRPr lang="en-US" sz="1100" dirty="0"/>
-          </a:p>
-          <a:p>
-            <a:pPr indent="0" marL="0">
-              <a:spcAft>
-                <a:spcPts val="900"/>
-              </a:spcAft>
-              <a:buNone/>
-            </a:pPr>
-            <a:r>
-              <a:rPr lang="en-US" sz="1100" dirty="0">
-                <a:solidFill>
-                  <a:schemeClr val="tx1"/>
-                </a:solidFill>
-              </a:rPr>
-              <a:t>Several competitors prominently market conversational interfaces as the entry point to comparable customer tasks.</a:t>
-            </a:r>
-            <a:endParaRPr lang="en-US" sz="1100" dirty="0"/>
-          </a:p>
-          <a:p>
-            <a:pPr indent="0" marL="0">
-              <a:spcAft>
-                <a:spcPts val="900"/>
-              </a:spcAft>
-              <a:buNone/>
-            </a:pPr>
-            <a:r>
-              <a:rPr lang="en-US" sz="1100" b="1" dirty="0">
-                <a:solidFill>
-                  <a:schemeClr val="accent1"/>
-                </a:solidFill>
-              </a:rPr>
-              <a:t>This reflects differences in public positioning, not necessarily in underlying functionality.</a:t>
-            </a:r>
-            <a:endParaRPr lang="en-US" sz="1100" dirty="0"/>
-          </a:p>
-        </p:txBody>
-      </p:sp>
-      <p:sp>
-        <p:nvSpPr>
-          <p:cNvPr id="35" name="strategic implication card"/>
-          <p:cNvSpPr/>
-          <p:nvPr/>
-        </p:nvSpPr>
-        <p:spPr>
-          <a:xfrm>
-            <a:off x="8065008" y="3218688"/>
-            <a:ext cx="3575304" cy="2834640"/>
-          </a:xfrm>
-          <a:prstGeom prst="rect">
-            <a:avLst/>
-          </a:prstGeom>
-          <a:solidFill>
-            <a:schemeClr val="bg1"/>
-          </a:solidFill>
-          <a:ln/>
-          <a:effectLst>
-            <a:outerShdw sx="100000" sy="100000" kx="0" ky="0" algn="bl" rotWithShape="0" blurRad="101600" dist="25400" dir="5400000">
-              <a:srgbClr val="000000">
-                <a:alpha val="10000"/>
-              </a:srgbClr>
-            </a:outerShdw>
-          </a:effectLst>
-        </p:spPr>
-      </p:sp>
-      <p:sp>
-        <p:nvSpPr>
-          <p:cNvPr id="36" name="icon circle"/>
-          <p:cNvSpPr/>
-          <p:nvPr/>
-        </p:nvSpPr>
-        <p:spPr>
-          <a:xfrm>
-            <a:off x="8293608" y="3419856"/>
-            <a:ext cx="457200" cy="457200"/>
-          </a:xfrm>
-          <a:prstGeom prst="ellipse">
-            <a:avLst/>
-          </a:prstGeom>
-          <a:solidFill>
-            <a:schemeClr val="accent5"/>
-          </a:solidFill>
-          <a:ln/>
-        </p:spPr>
-      </p:sp>
-      <p:pic>
-        <p:nvPicPr>
-          <p:cNvPr id="37" name="icon MdOutlineLightbulb" descr="preencoded.png">    </p:cNvPr>
-          <p:cNvPicPr>
-            <a:picLocks noChangeAspect="1"/>
-          </p:cNvPicPr>
-          <p:nvPr/>
-        </p:nvPicPr>
-        <p:blipFill>
-          <a:blip r:embed="rId4"/>
-          <a:stretch>
-            <a:fillRect/>
-          </a:stretch>
-        </p:blipFill>
-        <p:spPr>
-          <a:xfrm>
-            <a:off x="8394192" y="3520440"/>
-            <a:ext cx="256032" cy="256032"/>
-          </a:xfrm>
-          <a:prstGeom prst="rect">
-            <a:avLst/>
-          </a:prstGeom>
-        </p:spPr>
-      </p:pic>
-      <p:sp>
-        <p:nvSpPr>
-          <p:cNvPr id="38" name="card label"/>
-          <p:cNvSpPr txBox="1"/>
-          <p:nvPr/>
-        </p:nvSpPr>
-        <p:spPr>
-          <a:xfrm>
-            <a:off x="8869680" y="3511296"/>
-            <a:ext cx="2660904" cy="237744"/>
-          </a:xfrm>
-          <a:prstGeom prst="rect">
-            <a:avLst/>
-          </a:prstGeom>
-          <a:noFill/>
-          <a:ln/>
-        </p:spPr>
-        <p:txBody>
-          <a:bodyPr wrap="square" lIns="0" tIns="0" rIns="0" bIns="0" rtlCol="0" anchor="ctr"/>
-          <a:lstStyle/>
-          <a:p>
-            <a:pPr indent="0" marL="0">
-              <a:buNone/>
-            </a:pPr>
-            <a:r>
-              <a:rPr lang="en-US" sz="1300" b="1" spc="150" kern="0" dirty="0">
-                <a:solidFill>
-                  <a:schemeClr val="accent2"/>
-                </a:solidFill>
-              </a:rPr>
-              <a:t>STRATEGIC IMPLICATION</a:t>
-            </a:r>
-            <a:endParaRPr lang="en-US" sz="1300" dirty="0"/>
-          </a:p>
-        </p:txBody>
-      </p:sp>
-      <p:sp>
-        <p:nvSpPr>
-          <p:cNvPr id="39" name="Text 33"/>
-          <p:cNvSpPr txBox="1"/>
-          <p:nvPr/>
-        </p:nvSpPr>
-        <p:spPr>
-          <a:xfrm>
-            <a:off x="8293608" y="4087368"/>
-            <a:ext cx="3118104" cy="685800"/>
-          </a:xfrm>
-          <a:prstGeom prst="rect">
-            <a:avLst/>
-          </a:prstGeom>
-          <a:noFill/>
-          <a:ln/>
-        </p:spPr>
-        <p:txBody>
-          <a:bodyPr wrap="square" lIns="0" tIns="0" rIns="0" bIns="0" rtlCol="0" anchor="t"/>
-          <a:lstStyle/>
-          <a:p>
-            <a:pPr indent="0" marL="0">
-              <a:buNone/>
-            </a:pPr>
-            <a:r>
-              <a:rPr lang="en-US" sz="1100" dirty="0">
-                <a:solidFill>
-                  <a:schemeClr val="tx1"/>
-                </a:solidFill>
-              </a:rPr>
-              <a:t>The competitive significance of conversational AI depends on the customer task, underlying data and reliability of the results.</a:t>
-            </a:r>
-            <a:endParaRPr lang="en-US" sz="1100" dirty="0"/>
-          </a:p>
-        </p:txBody>
-      </p:sp>
-      <p:sp>
-        <p:nvSpPr>
-          <p:cNvPr id="40" name="strategic question"/>
-          <p:cNvSpPr txBox="1"/>
-          <p:nvPr/>
-        </p:nvSpPr>
-        <p:spPr>
-          <a:xfrm>
-            <a:off x="8293608" y="4818888"/>
-            <a:ext cx="3118104" cy="868680"/>
-          </a:xfrm>
-          <a:prstGeom prst="rect">
-            <a:avLst/>
-          </a:prstGeom>
-          <a:noFill/>
-          <a:ln/>
-        </p:spPr>
-        <p:txBody>
-          <a:bodyPr wrap="square" lIns="0" tIns="0" rIns="0" bIns="0" rtlCol="0" anchor="t"/>
-          <a:lstStyle/>
-          <a:p>
-            <a:pPr indent="0" marL="0">
-              <a:buNone/>
-            </a:pPr>
-            <a:r>
-              <a:rPr lang="en-US" sz="1400" b="1" dirty="0">
-                <a:solidFill>
-                  <a:schemeClr val="accent1"/>
-                </a:solidFill>
-              </a:rPr>
-              <a:t>Where could conversational interaction add value to Optum LS's existing offerings?</a:t>
-            </a:r>
-            <a:endParaRPr lang="en-US" sz="1400" dirty="0"/>
           </a:p>
         </p:txBody>
       </p:sp>
@@ -4370,9 +4980,439 @@
             <a:pPr algn="r"/>
             <a:fld id="{F7021451-1387-4CA6-816F-3879F97B5CBC}" type="slidenum">
               <a:rPr b="0" lang="en-US"/>
-              <a:t>1</a:t>
+              <a:t>9</a:t>
             </a:fld>
             <a:endParaRPr lang="en-US"/>
+          </a:p>
+        </p:txBody>
+      </p:sp>
+      <p:sp>
+        <p:nvSpPr>
+          <p:cNvPr id="26" name="Invisible source link 9: https://trinetx.com/solutions/trinetx-live/terrain">
+            <a:hlinkClick r:id="rId3"/>
+          </p:cNvPr>
+          <p:cNvSpPr/>
+          <p:nvPr/>
+        </p:nvSpPr>
+        <p:spPr>
+          <a:xfrm>
+            <a:off x="3465236" y="2253602"/>
+            <a:ext cx="1119405" cy="89280"/>
+          </a:xfrm>
+          <a:prstGeom prst="rect">
+            <a:avLst/>
+          </a:prstGeom>
+          <a:noFill/>
+          <a:ln>
+            <a:noFill/>
+          </a:ln>
+        </p:spPr>
+        <p:style>
+          <a:lnRef idx="1">
+            <a:schemeClr val="accent1"/>
+          </a:lnRef>
+          <a:fillRef idx="3">
+            <a:schemeClr val="accent1"/>
+          </a:fillRef>
+          <a:effectRef idx="2">
+            <a:schemeClr val="accent1"/>
+          </a:effectRef>
+          <a:fontRef idx="minor">
+            <a:schemeClr val="lt1"/>
+          </a:fontRef>
+        </p:style>
+        <p:txBody>
+          <a:bodyPr rtlCol="0" anchor="ctr"/>
+          <a:lstStyle/>
+          <a:p>
+            <a:pPr algn="ctr"/>
+          </a:p>
+        </p:txBody>
+      </p:sp>
+      <p:sp>
+        <p:nvSpPr>
+          <p:cNvPr id="27" name="Invisible source link 9: https://business.optum.com/en/data-analytics/life-">
+            <a:hlinkClick r:id="rId4"/>
+          </p:cNvPr>
+          <p:cNvSpPr/>
+          <p:nvPr/>
+        </p:nvSpPr>
+        <p:spPr>
+          <a:xfrm>
+            <a:off x="8714349" y="2321280"/>
+            <a:ext cx="1620161" cy="113398"/>
+          </a:xfrm>
+          <a:prstGeom prst="rect">
+            <a:avLst/>
+          </a:prstGeom>
+          <a:noFill/>
+          <a:ln>
+            <a:noFill/>
+          </a:ln>
+        </p:spPr>
+        <p:style>
+          <a:lnRef idx="1">
+            <a:schemeClr val="accent1"/>
+          </a:lnRef>
+          <a:fillRef idx="3">
+            <a:schemeClr val="accent1"/>
+          </a:fillRef>
+          <a:effectRef idx="2">
+            <a:schemeClr val="accent1"/>
+          </a:effectRef>
+          <a:fontRef idx="minor">
+            <a:schemeClr val="lt1"/>
+          </a:fontRef>
+        </p:style>
+        <p:txBody>
+          <a:bodyPr rtlCol="0" anchor="ctr"/>
+          <a:lstStyle/>
+          <a:p>
+            <a:pPr algn="ctr"/>
+          </a:p>
+        </p:txBody>
+      </p:sp>
+      <p:sp>
+        <p:nvSpPr>
+          <p:cNvPr id="28" name="Invisible source link 9: https://business.optum.com/en/data-analytics/life-">
+            <a:hlinkClick r:id="rId4"/>
+          </p:cNvPr>
+          <p:cNvSpPr/>
+          <p:nvPr/>
+        </p:nvSpPr>
+        <p:spPr>
+          <a:xfrm>
+            <a:off x="10409922" y="2321280"/>
+            <a:ext cx="1107162" cy="113398"/>
+          </a:xfrm>
+          <a:prstGeom prst="rect">
+            <a:avLst/>
+          </a:prstGeom>
+          <a:noFill/>
+          <a:ln>
+            <a:noFill/>
+          </a:ln>
+        </p:spPr>
+        <p:style>
+          <a:lnRef idx="1">
+            <a:schemeClr val="accent1"/>
+          </a:lnRef>
+          <a:fillRef idx="3">
+            <a:schemeClr val="accent1"/>
+          </a:fillRef>
+          <a:effectRef idx="2">
+            <a:schemeClr val="accent1"/>
+          </a:effectRef>
+          <a:fontRef idx="minor">
+            <a:schemeClr val="lt1"/>
+          </a:fontRef>
+        </p:style>
+        <p:txBody>
+          <a:bodyPr rtlCol="0" anchor="ctr"/>
+          <a:lstStyle/>
+          <a:p>
+            <a:pPr algn="ctr"/>
+          </a:p>
+        </p:txBody>
+      </p:sp>
+      <p:sp>
+        <p:nvSpPr>
+          <p:cNvPr id="29" name="Invisible source link 9: https://business.optum.com/en/data-analytics/life-">
+            <a:hlinkClick r:id="rId4"/>
+          </p:cNvPr>
+          <p:cNvSpPr/>
+          <p:nvPr/>
+        </p:nvSpPr>
+        <p:spPr>
+          <a:xfrm>
+            <a:off x="8712545" y="2431084"/>
+            <a:ext cx="636288" cy="89280"/>
+          </a:xfrm>
+          <a:prstGeom prst="rect">
+            <a:avLst/>
+          </a:prstGeom>
+          <a:noFill/>
+          <a:ln>
+            <a:noFill/>
+          </a:ln>
+        </p:spPr>
+        <p:style>
+          <a:lnRef idx="1">
+            <a:schemeClr val="accent1"/>
+          </a:lnRef>
+          <a:fillRef idx="3">
+            <a:schemeClr val="accent1"/>
+          </a:fillRef>
+          <a:effectRef idx="2">
+            <a:schemeClr val="accent1"/>
+          </a:effectRef>
+          <a:fontRef idx="minor">
+            <a:schemeClr val="lt1"/>
+          </a:fontRef>
+        </p:style>
+        <p:txBody>
+          <a:bodyPr rtlCol="0" anchor="ctr"/>
+          <a:lstStyle/>
+          <a:p>
+            <a:pPr algn="ctr"/>
+          </a:p>
+        </p:txBody>
+      </p:sp>
+      <p:sp>
+        <p:nvSpPr>
+          <p:cNvPr id="30" name="Invisible source link 9: https://cn.taimei.com/index/product/id/41">
+            <a:hlinkClick r:id="rId5"/>
+          </p:cNvPr>
+          <p:cNvSpPr/>
+          <p:nvPr/>
+        </p:nvSpPr>
+        <p:spPr>
+          <a:xfrm>
+            <a:off x="3408354" y="2860560"/>
+            <a:ext cx="517138" cy="89280"/>
+          </a:xfrm>
+          <a:prstGeom prst="rect">
+            <a:avLst/>
+          </a:prstGeom>
+          <a:noFill/>
+          <a:ln>
+            <a:noFill/>
+          </a:ln>
+        </p:spPr>
+        <p:style>
+          <a:lnRef idx="1">
+            <a:schemeClr val="accent1"/>
+          </a:lnRef>
+          <a:fillRef idx="3">
+            <a:schemeClr val="accent1"/>
+          </a:fillRef>
+          <a:effectRef idx="2">
+            <a:schemeClr val="accent1"/>
+          </a:effectRef>
+          <a:fontRef idx="minor">
+            <a:schemeClr val="lt1"/>
+          </a:fontRef>
+        </p:style>
+        <p:txBody>
+          <a:bodyPr rtlCol="0" anchor="ctr"/>
+          <a:lstStyle/>
+          <a:p>
+            <a:pPr algn="ctr"/>
+          </a:p>
+        </p:txBody>
+      </p:sp>
+      <p:sp>
+        <p:nvSpPr>
+          <p:cNvPr id="31" name="Invisible source link 9: https://business.optum.com/en/data-analytics/life-">
+            <a:hlinkClick r:id="rId4"/>
+          </p:cNvPr>
+          <p:cNvSpPr/>
+          <p:nvPr/>
+        </p:nvSpPr>
+        <p:spPr>
+          <a:xfrm>
+            <a:off x="8710031" y="2796120"/>
+            <a:ext cx="1042012" cy="109804"/>
+          </a:xfrm>
+          <a:prstGeom prst="rect">
+            <a:avLst/>
+          </a:prstGeom>
+          <a:noFill/>
+          <a:ln>
+            <a:noFill/>
+          </a:ln>
+        </p:spPr>
+        <p:style>
+          <a:lnRef idx="1">
+            <a:schemeClr val="accent1"/>
+          </a:lnRef>
+          <a:fillRef idx="3">
+            <a:schemeClr val="accent1"/>
+          </a:fillRef>
+          <a:effectRef idx="2">
+            <a:schemeClr val="accent1"/>
+          </a:effectRef>
+          <a:fontRef idx="minor">
+            <a:schemeClr val="lt1"/>
+          </a:fontRef>
+        </p:style>
+        <p:txBody>
+          <a:bodyPr rtlCol="0" anchor="ctr"/>
+          <a:lstStyle/>
+          <a:p>
+            <a:pPr algn="ctr"/>
+          </a:p>
+        </p:txBody>
+      </p:sp>
+      <p:sp>
+        <p:nvSpPr>
+          <p:cNvPr id="32" name="Invisible source link 9: https://www.navlin.com/products/tender">
+            <a:hlinkClick r:id="rId6"/>
+          </p:cNvPr>
+          <p:cNvSpPr/>
+          <p:nvPr/>
+        </p:nvSpPr>
+        <p:spPr>
+          <a:xfrm>
+            <a:off x="3719031" y="4218114"/>
+            <a:ext cx="684167" cy="89280"/>
+          </a:xfrm>
+          <a:prstGeom prst="rect">
+            <a:avLst/>
+          </a:prstGeom>
+          <a:noFill/>
+          <a:ln>
+            <a:noFill/>
+          </a:ln>
+        </p:spPr>
+        <p:style>
+          <a:lnRef idx="1">
+            <a:schemeClr val="accent1"/>
+          </a:lnRef>
+          <a:fillRef idx="3">
+            <a:schemeClr val="accent1"/>
+          </a:fillRef>
+          <a:effectRef idx="2">
+            <a:schemeClr val="accent1"/>
+          </a:effectRef>
+          <a:fontRef idx="minor">
+            <a:schemeClr val="lt1"/>
+          </a:fontRef>
+        </p:style>
+        <p:txBody>
+          <a:bodyPr rtlCol="0" anchor="ctr"/>
+          <a:lstStyle/>
+          <a:p>
+            <a:pPr algn="ctr"/>
+          </a:p>
+        </p:txBody>
+      </p:sp>
+      <p:sp>
+        <p:nvSpPr>
+          <p:cNvPr id="33" name="Invisible source link 9: https://business.optum.com/en/data-analytics/life-">
+            <a:hlinkClick r:id="rId7"/>
+          </p:cNvPr>
+          <p:cNvSpPr/>
+          <p:nvPr/>
+        </p:nvSpPr>
+        <p:spPr>
+          <a:xfrm>
+            <a:off x="9109264" y="4221353"/>
+            <a:ext cx="333892" cy="86042"/>
+          </a:xfrm>
+          <a:prstGeom prst="rect">
+            <a:avLst/>
+          </a:prstGeom>
+          <a:noFill/>
+          <a:ln>
+            <a:noFill/>
+          </a:ln>
+        </p:spPr>
+        <p:style>
+          <a:lnRef idx="1">
+            <a:schemeClr val="accent1"/>
+          </a:lnRef>
+          <a:fillRef idx="3">
+            <a:schemeClr val="accent1"/>
+          </a:fillRef>
+          <a:effectRef idx="2">
+            <a:schemeClr val="accent1"/>
+          </a:effectRef>
+          <a:fontRef idx="minor">
+            <a:schemeClr val="lt1"/>
+          </a:fontRef>
+        </p:style>
+        <p:txBody>
+          <a:bodyPr rtlCol="0" anchor="ctr"/>
+          <a:lstStyle/>
+          <a:p>
+            <a:pPr algn="ctr"/>
+          </a:p>
+        </p:txBody>
+      </p:sp>
+      <p:sp>
+        <p:nvSpPr>
+          <p:cNvPr id="34" name="Invisible source link 9: https://business.optum.com/en/data-analytics/life-">
+            <a:hlinkClick r:id="rId8"/>
+          </p:cNvPr>
+          <p:cNvSpPr/>
+          <p:nvPr/>
+        </p:nvSpPr>
+        <p:spPr>
+          <a:xfrm>
+            <a:off x="10594972" y="4218114"/>
+            <a:ext cx="889727" cy="113042"/>
+          </a:xfrm>
+          <a:prstGeom prst="rect">
+            <a:avLst/>
+          </a:prstGeom>
+          <a:noFill/>
+          <a:ln>
+            <a:noFill/>
+          </a:ln>
+        </p:spPr>
+        <p:style>
+          <a:lnRef idx="1">
+            <a:schemeClr val="accent1"/>
+          </a:lnRef>
+          <a:fillRef idx="3">
+            <a:schemeClr val="accent1"/>
+          </a:fillRef>
+          <a:effectRef idx="2">
+            <a:schemeClr val="accent1"/>
+          </a:effectRef>
+          <a:fontRef idx="minor">
+            <a:schemeClr val="lt1"/>
+          </a:fontRef>
+        </p:style>
+        <p:txBody>
+          <a:bodyPr rtlCol="0" anchor="ctr"/>
+          <a:lstStyle/>
+          <a:p>
+            <a:pPr algn="ctr"/>
+          </a:p>
+        </p:txBody>
+      </p:sp>
+      <p:sp>
+        <p:nvSpPr>
+          <p:cNvPr id="35" name="Invisible source link 9: https://business.optum.com/en/data-analytics/life-">
+            <a:hlinkClick r:id="rId9"/>
+          </p:cNvPr>
+          <p:cNvSpPr/>
+          <p:nvPr/>
+        </p:nvSpPr>
+        <p:spPr>
+          <a:xfrm>
+            <a:off x="8712901" y="4353839"/>
+            <a:ext cx="2408556" cy="113042"/>
+          </a:xfrm>
+          <a:prstGeom prst="rect">
+            <a:avLst/>
+          </a:prstGeom>
+          <a:noFill/>
+          <a:ln>
+            <a:noFill/>
+          </a:ln>
+        </p:spPr>
+        <p:style>
+          <a:lnRef idx="1">
+            <a:schemeClr val="accent1"/>
+          </a:lnRef>
+          <a:fillRef idx="3">
+            <a:schemeClr val="accent1"/>
+          </a:fillRef>
+          <a:effectRef idx="2">
+            <a:schemeClr val="accent1"/>
+          </a:effectRef>
+          <a:fontRef idx="minor">
+            <a:schemeClr val="lt1"/>
+          </a:fontRef>
+        </p:style>
+        <p:txBody>
+          <a:bodyPr rtlCol="0" anchor="ctr"/>
+          <a:lstStyle/>
+          <a:p>
+            <a:pPr algn="ctr"/>
           </a:p>
         </p:txBody>
       </p:sp>
@@ -4384,7 +5424,7 @@
 </p:sld>
 </file>
 
-<file path=ppt/slides/slide10.xml><?xml version="1.0" encoding="utf-8"?>
+<file path=ppt/slides/slide11.xml><?xml version="1.0" encoding="utf-8"?>
 <p:sld xmlns:a="http://schemas.openxmlformats.org/drawingml/2006/main" xmlns:r="http://schemas.openxmlformats.org/officeDocument/2006/relationships" xmlns:p="http://schemas.openxmlformats.org/presentationml/2006/main">
   <p:cSld name="Slide 10">
     <p:spTree>
@@ -5750,7 +6790,7 @@
 </p:sld>
 </file>
 
-<file path=ppt/slides/slide11.xml><?xml version="1.0" encoding="utf-8"?>
+<file path=ppt/slides/slide12.xml><?xml version="1.0" encoding="utf-8"?>
 <p:sld xmlns:a="http://schemas.openxmlformats.org/drawingml/2006/main" xmlns:r="http://schemas.openxmlformats.org/officeDocument/2006/relationships" xmlns:p="http://schemas.openxmlformats.org/presentationml/2006/main">
   <p:cSld name="Slide 11">
     <p:spTree>
@@ -5831,6 +6871,10 @@
             </a:outerShdw>
           </a:effectLst>
         </p:spPr>
+        <p:txBody>
+          <a:bodyPr/>
+          <a:p/>
+        </p:txBody>
       </p:sp>
       <p:sp>
         <p:nvSpPr>
@@ -5862,7 +6906,7 @@
                   <a:schemeClr val="accent2"/>
                 </a:solidFill>
               </a:rPr>
-              <a:t>SLIDE 1 — EVIDENCE BOUNDARY</a:t>
+              <a:t>SLIDE 2 — EVIDENCE BOUNDARY</a:t>
             </a:r>
             <a:endParaRPr lang="en-US" sz="1000" dirty="0"/>
           </a:p>
@@ -5930,6 +6974,10 @@
             </a:outerShdw>
           </a:effectLst>
         </p:spPr>
+        <p:txBody>
+          <a:bodyPr/>
+          <a:p/>
+        </p:txBody>
       </p:sp>
       <p:sp>
         <p:nvSpPr>
@@ -5961,7 +7009,7 @@
                   <a:schemeClr val="accent2"/>
                 </a:solidFill>
               </a:rPr>
-              <a:t>SLIDE 2 — EVIDENCE BOUNDARY</a:t>
+              <a:t>SLIDE 3 — EVIDENCE BOUNDARY</a:t>
             </a:r>
             <a:endParaRPr lang="en-US" sz="1000" dirty="0"/>
           </a:p>
@@ -6029,6 +7077,10 @@
             </a:outerShdw>
           </a:effectLst>
         </p:spPr>
+        <p:txBody>
+          <a:bodyPr/>
+          <a:p/>
+        </p:txBody>
       </p:sp>
       <p:sp>
         <p:nvSpPr>
@@ -6060,7 +7112,7 @@
                   <a:schemeClr val="accent2"/>
                 </a:solidFill>
               </a:rPr>
-              <a:t>SLIDE 3 — METHODOLOGY NOTE</a:t>
+              <a:t>SLIDE 4 — METHODOLOGY NOTE</a:t>
             </a:r>
             <a:endParaRPr lang="en-US" sz="1000" dirty="0"/>
           </a:p>
@@ -6118,29 +7170,21 @@
                   <a:schemeClr val="tx1"/>
                 </a:solidFill>
               </a:rPr>
-              <a:t> serving similar customer tasks; adjacent participants are excluded. Counts represent distinct company groups per workflow, not product totals. A company may appear in multiple workflows. Optum's ○ indicates that a qualifying conversational interface was </a:t>
+              <a:t> serving similar customer tasks; adjacent participants are excluded. Counts represent distinct company groups per domain, not product totals. A company may appear in multiple domains. </a:t>
             </a:r>
             <a:pPr indent="0" marL="0">
               <a:buNone/>
             </a:pPr>
-            <a:r>
-              <a:rPr lang="en-US" sz="1000" i="1" dirty="0">
+            <a:pPr indent="0" marL="0">
+              <a:buNone/>
+            </a:pPr>
+            <a:r>
+              <a:rPr lang="en-US" sz="1000" dirty="0">
                 <a:solidFill>
                   <a:schemeClr val="tx1"/>
                 </a:solidFill>
               </a:rPr>
-              <a:t>not publicly established in this review</a:t>
-            </a:r>
-            <a:pPr indent="0" marL="0">
-              <a:buNone/>
-            </a:pPr>
-            <a:r>
-              <a:rPr lang="en-US" sz="1000" dirty="0">
-                <a:solidFill>
-                  <a:schemeClr val="tx1"/>
-                </a:solidFill>
-              </a:rPr>
-              <a:t>, not that the capability is absent. These are selected screened companies, not market-wide adoption rates.</a:t>
+              <a:t>These are selected screened companies, not market-wide adoption rates.</a:t>
             </a:r>
             <a:endParaRPr lang="en-US" sz="1000" dirty="0"/>
           </a:p>
@@ -6172,6 +7216,10 @@
             </a:outerShdw>
           </a:effectLst>
         </p:spPr>
+        <p:txBody>
+          <a:bodyPr/>
+          <a:p/>
+        </p:txBody>
       </p:sp>
       <p:sp>
         <p:nvSpPr>
@@ -6203,7 +7251,7 @@
                   <a:schemeClr val="accent2"/>
                 </a:solidFill>
               </a:rPr>
-              <a:t>SLIDE 4 — INDIA RECONCILIATION</a:t>
+              <a:t>SLIDE 5 — INDIA RECONCILIATION</a:t>
             </a:r>
             <a:endParaRPr lang="en-US" sz="1000" dirty="0"/>
           </a:p>
@@ -6239,7 +7287,7 @@
                   <a:schemeClr val="tx1"/>
                 </a:solidFill>
               </a:rPr>
-              <a:t>Of 37 screened companies, 36 qualify as direct/specialized comparators in at least one of the five decision workflows; excluding four companies already represented in the qualifying U.S. chat cohort leaves 32. Three additional chat-marketing companies qualify: Axtria, Doceree and Genpact. Company presence in an India screen does not prove the specific product is available or deployed in India.</a:t>
+              <a:t>Of 37 screened companies, 36 qualify as direct/specialized comparators in at least one of the five domains; excluding four companies already represented in the qualifying U.S. chat cohort leaves 32. Three additional chat-marketing companies qualify: Axtria, Doceree and Genpact. Company presence in an India screen does not prove the specific product is available or deployed in India.</a:t>
             </a:r>
             <a:endParaRPr lang="en-US" sz="1000" dirty="0"/>
           </a:p>
@@ -6271,6 +7319,10 @@
             </a:outerShdw>
           </a:effectLst>
         </p:spPr>
+        <p:txBody>
+          <a:bodyPr/>
+          <a:p/>
+        </p:txBody>
       </p:sp>
       <p:sp>
         <p:nvSpPr>
@@ -6302,7 +7354,7 @@
                   <a:schemeClr val="accent2"/>
                 </a:solidFill>
               </a:rPr>
-              <a:t>SLIDE 4 — EVIDENCE BOUNDARY</a:t>
+              <a:t>SLIDE 5 — EVIDENCE BOUNDARY</a:t>
             </a:r>
             <a:endParaRPr lang="en-US" sz="1000" dirty="0"/>
           </a:p>
@@ -6370,6 +7422,10 @@
             </a:outerShdw>
           </a:effectLst>
         </p:spPr>
+        <p:txBody>
+          <a:bodyPr/>
+          <a:p/>
+        </p:txBody>
       </p:sp>
       <p:sp>
         <p:nvSpPr>
@@ -6401,7 +7457,7 @@
                   <a:schemeClr val="accent2"/>
                 </a:solidFill>
               </a:rPr>
-              <a:t>SLIDE 5 — EVIDENCE BOUNDARY</a:t>
+              <a:t>SLIDE 6 — EVIDENCE BOUNDARY</a:t>
             </a:r>
             <a:endParaRPr lang="en-US" sz="1000" dirty="0"/>
           </a:p>
@@ -6526,7 +7582,7 @@
 </p:sld>
 </file>
 
-<file path=ppt/slides/slide12.xml><?xml version="1.0" encoding="utf-8"?>
+<file path=ppt/slides/slide13.xml><?xml version="1.0" encoding="utf-8"?>
 <p:sld xmlns:a="http://schemas.openxmlformats.org/drawingml/2006/main" xmlns:r="http://schemas.openxmlformats.org/officeDocument/2006/relationships" xmlns:p="http://schemas.openxmlformats.org/presentationml/2006/main">
   <p:cSld name="Slide 12">
     <p:spTree>
@@ -6607,6 +7663,10 @@
             </a:outerShdw>
           </a:effectLst>
         </p:spPr>
+        <p:txBody>
+          <a:bodyPr/>
+          <a:p/>
+        </p:txBody>
       </p:sp>
       <p:sp>
         <p:nvSpPr>
@@ -6638,7 +7698,7 @@
                   <a:schemeClr val="accent2"/>
                 </a:solidFill>
               </a:rPr>
-              <a:t>SLIDE 6 — EVIDENCE BOUNDARY</a:t>
+              <a:t>SLIDE 7 — EVIDENCE BOUNDARY</a:t>
             </a:r>
             <a:endParaRPr lang="en-US" sz="1000" dirty="0"/>
           </a:p>
@@ -6706,6 +7766,10 @@
             </a:outerShdw>
           </a:effectLst>
         </p:spPr>
+        <p:txBody>
+          <a:bodyPr/>
+          <a:p/>
+        </p:txBody>
       </p:sp>
       <p:sp>
         <p:nvSpPr>
@@ -6737,7 +7801,7 @@
                   <a:schemeClr val="accent2"/>
                 </a:solidFill>
               </a:rPr>
-              <a:t>SLIDE 7 — EVIDENCE BOUNDARY</a:t>
+              <a:t>SLIDE 8 — EVIDENCE BOUNDARY</a:t>
             </a:r>
             <a:endParaRPr lang="en-US" sz="1000" dirty="0"/>
           </a:p>
@@ -6805,6 +7869,10 @@
             </a:outerShdw>
           </a:effectLst>
         </p:spPr>
+        <p:txBody>
+          <a:bodyPr/>
+          <a:p/>
+        </p:txBody>
       </p:sp>
       <p:sp>
         <p:nvSpPr>
@@ -6836,7 +7904,7 @@
                   <a:schemeClr val="accent2"/>
                 </a:solidFill>
               </a:rPr>
-              <a:t>SLIDE 8 — EVIDENCE BOUNDARY</a:t>
+              <a:t>SLIDE 9 — EVIDENCE BOUNDARY</a:t>
             </a:r>
             <a:endParaRPr lang="en-US" sz="1000" dirty="0"/>
           </a:p>
@@ -6904,6 +7972,10 @@
             </a:outerShdw>
           </a:effectLst>
         </p:spPr>
+        <p:txBody>
+          <a:bodyPr/>
+          <a:p/>
+        </p:txBody>
       </p:sp>
       <p:sp>
         <p:nvSpPr>
@@ -6935,7 +8007,7 @@
                   <a:schemeClr val="accent2"/>
                 </a:solidFill>
               </a:rPr>
-              <a:t>SLIDE 9 — EVIDENCE BOUNDARY</a:t>
+              <a:t>SLIDE 10 — EVIDENCE BOUNDARY</a:t>
             </a:r>
             <a:endParaRPr lang="en-US" sz="1000" dirty="0"/>
           </a:p>
@@ -7003,6 +8075,10 @@
             </a:outerShdw>
           </a:effectLst>
         </p:spPr>
+        <p:txBody>
+          <a:bodyPr/>
+          <a:p/>
+        </p:txBody>
       </p:sp>
       <p:sp>
         <p:nvSpPr>
@@ -7034,7 +8110,7 @@
                   <a:schemeClr val="accent2"/>
                 </a:solidFill>
               </a:rPr>
-              <a:t>SLIDE 10 — EVIDENCE BOUNDARY</a:t>
+              <a:t>SLIDE 11 — EVIDENCE BOUNDARY</a:t>
             </a:r>
             <a:endParaRPr lang="en-US" sz="1000" dirty="0"/>
           </a:p>
@@ -7177,6 +8253,10 @@
             </a:outerShdw>
           </a:effectLst>
         </p:spPr>
+        <p:txBody>
+          <a:bodyPr/>
+          <a:p/>
+        </p:txBody>
       </p:sp>
       <p:sp>
         <p:nvSpPr>
@@ -7259,6 +8339,1415 @@
 </file>
 
 <file path=ppt/slides/slide2.xml><?xml version="1.0" encoding="utf-8"?>
+<p:sld xmlns:a="http://schemas.openxmlformats.org/drawingml/2006/main" xmlns:r="http://schemas.openxmlformats.org/officeDocument/2006/relationships" xmlns:p="http://schemas.openxmlformats.org/presentationml/2006/main">
+  <p:cSld name="Slide 1">
+    <p:spTree>
+      <p:nvGrpSpPr>
+        <p:cNvPr id="1" name=""/>
+        <p:cNvGrpSpPr/>
+        <p:nvPr/>
+      </p:nvGrpSpPr>
+      <p:grpSpPr>
+        <a:xfrm>
+          <a:off x="0" y="0"/>
+          <a:ext cx="0" cy="0"/>
+          <a:chOff x="0" y="0"/>
+          <a:chExt cx="0" cy="0"/>
+        </a:xfrm>
+      </p:grpSpPr>
+      <p:sp>
+        <p:nvSpPr>
+          <p:cNvPr id="2" name="Text 2"/>
+          <p:cNvSpPr/>
+          <p:nvPr>
+            <p:ph idx="102" type="body" hasCustomPrompt="1"/>
+          </p:nvPr>
+        </p:nvSpPr>
+        <p:spPr>
+          <a:xfrm>
+            <a:off x="548640" y="384048"/>
+            <a:ext cx="8229600" cy="219456"/>
+          </a:xfrm>
+          <a:prstGeom prst="rect">
+            <a:avLst/>
+          </a:prstGeom>
+          <a:noFill/>
+          <a:ln/>
+        </p:spPr>
+        <p:txBody>
+          <a:bodyPr wrap="square" lIns="0" tIns="0" rIns="0" bIns="0" rtlCol="0" anchor="t"/>
+          <a:lstStyle/>
+          <a:p>
+            <a:pPr indent="0" marL="0">
+              <a:buNone/>
+            </a:pPr>
+            <a:r>
+              <a:rPr lang="en-US" sz="1000" b="1" spc="100" kern="0" dirty="0">
+                <a:solidFill>
+                  <a:schemeClr val="accent2"/>
+                </a:solidFill>
+              </a:rPr>
+              <a:t>EXECUTIVE SUMMARY</a:t>
+            </a:r>
+            <a:endParaRPr lang="en-US" sz="1000" dirty="0"/>
+          </a:p>
+        </p:txBody>
+      </p:sp>
+      <p:sp>
+        <p:nvSpPr>
+          <p:cNvPr id="3" name="Text 2"/>
+          <p:cNvSpPr/>
+          <p:nvPr>
+            <p:ph idx="103" type="title" hasCustomPrompt="1"/>
+          </p:nvPr>
+        </p:nvSpPr>
+        <p:spPr>
+          <a:xfrm>
+            <a:off x="548640" y="640080"/>
+            <a:ext cx="11091672" cy="749808"/>
+          </a:xfrm>
+          <a:prstGeom prst="rect">
+            <a:avLst/>
+          </a:prstGeom>
+          <a:noFill/>
+          <a:ln/>
+        </p:spPr>
+        <p:txBody>
+          <a:bodyPr wrap="square" lIns="0" tIns="0" rIns="0" bIns="0" rtlCol="0" anchor="t"/>
+          <a:lstStyle/>
+          <a:p>
+            <a:pPr algn="l" indent="0" marL="0">
+              <a:buNone/>
+            </a:pPr>
+            <a:r>
+              <a:rPr lang="en-US" sz="2200" b="1" dirty="0">
+                <a:solidFill>
+                  <a:schemeClr val="accent1"/>
+                </a:solidFill>
+              </a:rPr>
+              <a:t>Conversational AI is being marketed across life sciences workflows, creating</a:t>
+            </a:r>
+            <a:br/>
+            <a:pPr algn="l" indent="0" marL="0">
+              <a:buNone/>
+            </a:pPr>
+            <a:r>
+              <a:rPr lang="en-US" sz="2200" b="1" dirty="0">
+                <a:solidFill>
+                  <a:schemeClr val="accent1"/>
+                </a:solidFill>
+              </a:rPr>
+              <a:t>new ways to access information, analytics and decision support</a:t>
+            </a:r>
+            <a:endParaRPr lang="en-US" sz="2200" dirty="0"/>
+          </a:p>
+        </p:txBody>
+      </p:sp>
+      <p:sp>
+        <p:nvSpPr>
+          <p:cNvPr id="4" name="lens card"/>
+          <p:cNvSpPr/>
+          <p:nvPr/>
+        </p:nvSpPr>
+        <p:spPr>
+          <a:xfrm>
+            <a:off x="548640" y="1536192"/>
+            <a:ext cx="11091672" cy="1536192"/>
+          </a:xfrm>
+          <a:prstGeom prst="rect">
+            <a:avLst/>
+          </a:prstGeom>
+          <a:solidFill>
+            <a:schemeClr val="bg1"/>
+          </a:solidFill>
+          <a:ln/>
+          <a:effectLst>
+            <a:outerShdw sx="100000" sy="100000" kx="0" ky="0" algn="bl" rotWithShape="0" blurRad="101600" dist="25400" dir="5400000">
+              <a:srgbClr val="000000">
+                <a:alpha val="10000"/>
+              </a:srgbClr>
+            </a:outerShdw>
+          </a:effectLst>
+        </p:spPr>
+      </p:sp>
+      <p:sp>
+        <p:nvSpPr>
+          <p:cNvPr id="5" name="icon circle"/>
+          <p:cNvSpPr/>
+          <p:nvPr/>
+        </p:nvSpPr>
+        <p:spPr>
+          <a:xfrm>
+            <a:off x="777240" y="1737360"/>
+            <a:ext cx="475488" cy="475488"/>
+          </a:xfrm>
+          <a:prstGeom prst="ellipse">
+            <a:avLst/>
+          </a:prstGeom>
+          <a:solidFill>
+            <a:schemeClr val="accent5"/>
+          </a:solidFill>
+          <a:ln/>
+        </p:spPr>
+      </p:sp>
+      <p:pic>
+        <p:nvPicPr>
+          <p:cNvPr id="6" name="icon MdTravelExplore" descr="preencoded.png">    </p:cNvPr>
+          <p:cNvPicPr>
+            <a:picLocks noChangeAspect="1"/>
+          </p:cNvPicPr>
+          <p:nvPr/>
+        </p:nvPicPr>
+        <p:blipFill>
+          <a:blip r:embed="rId1"/>
+          <a:stretch>
+            <a:fillRect/>
+          </a:stretch>
+        </p:blipFill>
+        <p:spPr>
+          <a:xfrm>
+            <a:off x="881847" y="1841967"/>
+            <a:ext cx="266273" cy="266273"/>
+          </a:xfrm>
+          <a:prstGeom prst="rect">
+            <a:avLst/>
+          </a:prstGeom>
+        </p:spPr>
+      </p:pic>
+      <p:sp>
+        <p:nvSpPr>
+          <p:cNvPr id="7" name="card label"/>
+          <p:cNvSpPr txBox="1"/>
+          <p:nvPr/>
+        </p:nvSpPr>
+        <p:spPr>
+          <a:xfrm>
+            <a:off x="1417320" y="1719072"/>
+            <a:ext cx="5486400" cy="237744"/>
+          </a:xfrm>
+          <a:prstGeom prst="rect">
+            <a:avLst/>
+          </a:prstGeom>
+          <a:noFill/>
+          <a:ln/>
+        </p:spPr>
+        <p:txBody>
+          <a:bodyPr wrap="square" lIns="0" tIns="0" rIns="0" bIns="0" rtlCol="0" anchor="ctr"/>
+          <a:lstStyle/>
+          <a:p>
+            <a:pPr indent="0" marL="0">
+              <a:buNone/>
+            </a:pPr>
+            <a:r>
+              <a:rPr lang="en-US" sz="1300" b="1" spc="150" kern="0" dirty="0">
+                <a:solidFill>
+                  <a:schemeClr val="accent2"/>
+                </a:solidFill>
+              </a:rPr>
+              <a:t>OUTSIDE-IN RESEARCH LENS</a:t>
+            </a:r>
+            <a:endParaRPr lang="en-US" sz="1300" dirty="0"/>
+          </a:p>
+        </p:txBody>
+      </p:sp>
+      <p:sp>
+        <p:nvSpPr>
+          <p:cNvPr id="8" name="Text 5"/>
+          <p:cNvSpPr txBox="1"/>
+          <p:nvPr/>
+        </p:nvSpPr>
+        <p:spPr>
+          <a:xfrm>
+            <a:off x="1417320" y="2048256"/>
+            <a:ext cx="9966960" cy="201168"/>
+          </a:xfrm>
+          <a:prstGeom prst="rect">
+            <a:avLst/>
+          </a:prstGeom>
+          <a:noFill/>
+          <a:ln/>
+        </p:spPr>
+        <p:txBody>
+          <a:bodyPr wrap="square" lIns="0" tIns="0" rIns="0" bIns="0" rtlCol="0" anchor="t"/>
+          <a:lstStyle/>
+          <a:p>
+            <a:pPr indent="0" marL="0">
+              <a:buNone/>
+            </a:pPr>
+            <a:r>
+              <a:rPr lang="en-US" sz="1100" b="1" dirty="0">
+                <a:solidFill>
+                  <a:schemeClr val="tx1"/>
+                </a:solidFill>
+              </a:rPr>
+              <a:t>This study is an assessment of </a:t>
+            </a:r>
+            <a:pPr indent="0" marL="0">
+              <a:buNone/>
+            </a:pPr>
+            <a:r>
+              <a:rPr lang="en-US" sz="1100" b="1" i="1" dirty="0">
+                <a:solidFill>
+                  <a:schemeClr val="tx1"/>
+                </a:solidFill>
+              </a:rPr>
+              <a:t>publicly-marketed</a:t>
+            </a:r>
+            <a:pPr indent="0" marL="0">
+              <a:buNone/>
+            </a:pPr>
+            <a:r>
+              <a:rPr lang="en-US" sz="1100" b="1" dirty="0">
+                <a:solidFill>
+                  <a:schemeClr val="tx1"/>
+                </a:solidFill>
+              </a:rPr>
+              <a:t> conversational AI products across five Optum Life Sciences-relevant business domains:</a:t>
+            </a:r>
+            <a:endParaRPr lang="en-US" sz="1100" dirty="0"/>
+          </a:p>
+        </p:txBody>
+      </p:sp>
+      <p:sp>
+        <p:nvSpPr>
+          <p:cNvPr id="9" name="workflow chip RWE"/>
+          <p:cNvSpPr/>
+          <p:nvPr/>
+        </p:nvSpPr>
+        <p:spPr>
+          <a:xfrm>
+            <a:off x="1417320" y="2322576"/>
+            <a:ext cx="422727" cy="246888"/>
+          </a:xfrm>
+          <a:prstGeom prst="roundRect">
+            <a:avLst>
+              <a:gd name="adj" fmla="val 50000"/>
+            </a:avLst>
+          </a:prstGeom>
+          <a:solidFill>
+            <a:schemeClr val="accent5"/>
+          </a:solidFill>
+          <a:ln w="9525">
+            <a:solidFill>
+              <a:schemeClr val="accent1"/>
+            </a:solidFill>
+            <a:prstDash val="solid"/>
+          </a:ln>
+        </p:spPr>
+      </p:sp>
+      <p:sp>
+        <p:nvSpPr>
+          <p:cNvPr id="10" name="Text 7"/>
+          <p:cNvSpPr txBox="1"/>
+          <p:nvPr/>
+        </p:nvSpPr>
+        <p:spPr>
+          <a:xfrm>
+            <a:off x="1417320" y="2322576"/>
+            <a:ext cx="422727" cy="246888"/>
+          </a:xfrm>
+          <a:prstGeom prst="rect">
+            <a:avLst/>
+          </a:prstGeom>
+          <a:noFill/>
+          <a:ln/>
+        </p:spPr>
+        <p:txBody>
+          <a:bodyPr wrap="square" lIns="0" tIns="0" rIns="0" bIns="0" rtlCol="0" anchor="ctr"/>
+          <a:lstStyle/>
+          <a:p>
+            <a:pPr algn="ctr" indent="0" marL="0">
+              <a:buNone/>
+            </a:pPr>
+            <a:r>
+              <a:rPr lang="en-US" sz="950" dirty="0">
+                <a:solidFill>
+                  <a:schemeClr val="accent1"/>
+                </a:solidFill>
+              </a:rPr>
+              <a:t>RWE</a:t>
+            </a:r>
+            <a:endParaRPr lang="en-US" sz="950" dirty="0"/>
+          </a:p>
+        </p:txBody>
+      </p:sp>
+      <p:sp>
+        <p:nvSpPr>
+          <p:cNvPr id="11" name="workflow chip Commercial Intelligence"/>
+          <p:cNvSpPr/>
+          <p:nvPr/>
+        </p:nvSpPr>
+        <p:spPr>
+          <a:xfrm>
+            <a:off x="1931487" y="2322576"/>
+            <a:ext cx="1777868" cy="246888"/>
+          </a:xfrm>
+          <a:prstGeom prst="roundRect">
+            <a:avLst>
+              <a:gd name="adj" fmla="val 50000"/>
+            </a:avLst>
+          </a:prstGeom>
+          <a:solidFill>
+            <a:schemeClr val="accent5"/>
+          </a:solidFill>
+          <a:ln w="9525">
+            <a:solidFill>
+              <a:schemeClr val="accent1"/>
+            </a:solidFill>
+            <a:prstDash val="solid"/>
+          </a:ln>
+        </p:spPr>
+      </p:sp>
+      <p:sp>
+        <p:nvSpPr>
+          <p:cNvPr id="12" name="Text 9"/>
+          <p:cNvSpPr txBox="1"/>
+          <p:nvPr/>
+        </p:nvSpPr>
+        <p:spPr>
+          <a:xfrm>
+            <a:off x="1931487" y="2322576"/>
+            <a:ext cx="1777868" cy="246888"/>
+          </a:xfrm>
+          <a:prstGeom prst="rect">
+            <a:avLst/>
+          </a:prstGeom>
+          <a:noFill/>
+          <a:ln/>
+        </p:spPr>
+        <p:txBody>
+          <a:bodyPr wrap="square" lIns="0" tIns="0" rIns="0" bIns="0" rtlCol="0" anchor="ctr"/>
+          <a:lstStyle/>
+          <a:p>
+            <a:pPr algn="ctr" indent="0" marL="0">
+              <a:buNone/>
+            </a:pPr>
+            <a:r>
+              <a:rPr lang="en-US" sz="950" dirty="0">
+                <a:solidFill>
+                  <a:schemeClr val="accent1"/>
+                </a:solidFill>
+              </a:rPr>
+              <a:t>Commercial Intelligence</a:t>
+            </a:r>
+            <a:endParaRPr lang="en-US" sz="950" dirty="0"/>
+          </a:p>
+        </p:txBody>
+      </p:sp>
+      <p:sp>
+        <p:nvSpPr>
+          <p:cNvPr id="13" name="workflow chip Medical / Regulatory Research"/>
+          <p:cNvSpPr/>
+          <p:nvPr/>
+        </p:nvSpPr>
+        <p:spPr>
+          <a:xfrm>
+            <a:off x="3800795" y="2322576"/>
+            <a:ext cx="2184410" cy="246888"/>
+          </a:xfrm>
+          <a:prstGeom prst="roundRect">
+            <a:avLst>
+              <a:gd name="adj" fmla="val 50000"/>
+            </a:avLst>
+          </a:prstGeom>
+          <a:solidFill>
+            <a:schemeClr val="accent5"/>
+          </a:solidFill>
+          <a:ln w="9525">
+            <a:solidFill>
+              <a:schemeClr val="accent1"/>
+            </a:solidFill>
+            <a:prstDash val="solid"/>
+          </a:ln>
+        </p:spPr>
+      </p:sp>
+      <p:sp>
+        <p:nvSpPr>
+          <p:cNvPr id="14" name="Text 11"/>
+          <p:cNvSpPr txBox="1"/>
+          <p:nvPr/>
+        </p:nvSpPr>
+        <p:spPr>
+          <a:xfrm>
+            <a:off x="3800795" y="2322576"/>
+            <a:ext cx="2184410" cy="246888"/>
+          </a:xfrm>
+          <a:prstGeom prst="rect">
+            <a:avLst/>
+          </a:prstGeom>
+          <a:noFill/>
+          <a:ln/>
+        </p:spPr>
+        <p:txBody>
+          <a:bodyPr wrap="square" lIns="0" tIns="0" rIns="0" bIns="0" rtlCol="0" anchor="ctr"/>
+          <a:lstStyle/>
+          <a:p>
+            <a:pPr algn="ctr" indent="0" marL="0">
+              <a:buNone/>
+            </a:pPr>
+            <a:r>
+              <a:rPr lang="en-US" sz="950" dirty="0">
+                <a:solidFill>
+                  <a:schemeClr val="accent1"/>
+                </a:solidFill>
+              </a:rPr>
+              <a:t>Medical / Regulatory Research</a:t>
+            </a:r>
+            <a:endParaRPr lang="en-US" sz="950" dirty="0"/>
+          </a:p>
+        </p:txBody>
+      </p:sp>
+      <p:sp>
+        <p:nvSpPr>
+          <p:cNvPr id="15" name="workflow chip Clinical Trials"/>
+          <p:cNvSpPr/>
+          <p:nvPr/>
+        </p:nvSpPr>
+        <p:spPr>
+          <a:xfrm>
+            <a:off x="6076645" y="2322576"/>
+            <a:ext cx="1235812" cy="246888"/>
+          </a:xfrm>
+          <a:prstGeom prst="roundRect">
+            <a:avLst>
+              <a:gd name="adj" fmla="val 50000"/>
+            </a:avLst>
+          </a:prstGeom>
+          <a:solidFill>
+            <a:schemeClr val="accent5"/>
+          </a:solidFill>
+          <a:ln w="9525">
+            <a:solidFill>
+              <a:schemeClr val="accent1"/>
+            </a:solidFill>
+            <a:prstDash val="solid"/>
+          </a:ln>
+        </p:spPr>
+      </p:sp>
+      <p:sp>
+        <p:nvSpPr>
+          <p:cNvPr id="16" name="Text 13"/>
+          <p:cNvSpPr txBox="1"/>
+          <p:nvPr/>
+        </p:nvSpPr>
+        <p:spPr>
+          <a:xfrm>
+            <a:off x="6076645" y="2322576"/>
+            <a:ext cx="1235812" cy="246888"/>
+          </a:xfrm>
+          <a:prstGeom prst="rect">
+            <a:avLst/>
+          </a:prstGeom>
+          <a:noFill/>
+          <a:ln/>
+        </p:spPr>
+        <p:txBody>
+          <a:bodyPr wrap="square" lIns="0" tIns="0" rIns="0" bIns="0" rtlCol="0" anchor="ctr"/>
+          <a:lstStyle/>
+          <a:p>
+            <a:pPr algn="ctr" indent="0" marL="0">
+              <a:buNone/>
+            </a:pPr>
+            <a:r>
+              <a:rPr lang="en-US" sz="950" dirty="0">
+                <a:solidFill>
+                  <a:schemeClr val="accent1"/>
+                </a:solidFill>
+              </a:rPr>
+              <a:t>Clinical Trials</a:t>
+            </a:r>
+            <a:endParaRPr lang="en-US" sz="950" dirty="0"/>
+          </a:p>
+        </p:txBody>
+      </p:sp>
+      <p:sp>
+        <p:nvSpPr>
+          <p:cNvPr id="17" name="Text 14"/>
+          <p:cNvSpPr txBox="1"/>
+          <p:nvPr/>
+        </p:nvSpPr>
+        <p:spPr>
+          <a:xfrm>
+            <a:off x="7403897" y="2322576"/>
+            <a:ext cx="310896" cy="246888"/>
+          </a:xfrm>
+          <a:prstGeom prst="rect">
+            <a:avLst/>
+          </a:prstGeom>
+          <a:noFill/>
+          <a:ln/>
+        </p:spPr>
+        <p:txBody>
+          <a:bodyPr wrap="square" lIns="0" tIns="0" rIns="0" bIns="0" rtlCol="0" anchor="ctr"/>
+          <a:lstStyle/>
+          <a:p>
+            <a:pPr algn="ctr" indent="0" marL="0">
+              <a:buNone/>
+            </a:pPr>
+            <a:r>
+              <a:rPr lang="en-US" sz="1000" dirty="0">
+                <a:solidFill>
+                  <a:schemeClr val="accent4"/>
+                </a:solidFill>
+              </a:rPr>
+              <a:t>and</a:t>
+            </a:r>
+            <a:endParaRPr lang="en-US" sz="1000" dirty="0"/>
+          </a:p>
+        </p:txBody>
+      </p:sp>
+      <p:sp>
+        <p:nvSpPr>
+          <p:cNvPr id="18" name="workflow chip Market Access"/>
+          <p:cNvSpPr/>
+          <p:nvPr/>
+        </p:nvSpPr>
+        <p:spPr>
+          <a:xfrm>
+            <a:off x="7769657" y="2322576"/>
+            <a:ext cx="1100298" cy="246888"/>
+          </a:xfrm>
+          <a:prstGeom prst="roundRect">
+            <a:avLst>
+              <a:gd name="adj" fmla="val 50000"/>
+            </a:avLst>
+          </a:prstGeom>
+          <a:solidFill>
+            <a:schemeClr val="accent5"/>
+          </a:solidFill>
+          <a:ln w="9525">
+            <a:solidFill>
+              <a:schemeClr val="accent1"/>
+            </a:solidFill>
+            <a:prstDash val="solid"/>
+          </a:ln>
+        </p:spPr>
+      </p:sp>
+      <p:sp>
+        <p:nvSpPr>
+          <p:cNvPr id="19" name="Text 16"/>
+          <p:cNvSpPr txBox="1"/>
+          <p:nvPr/>
+        </p:nvSpPr>
+        <p:spPr>
+          <a:xfrm>
+            <a:off x="7769657" y="2322576"/>
+            <a:ext cx="1100298" cy="246888"/>
+          </a:xfrm>
+          <a:prstGeom prst="rect">
+            <a:avLst/>
+          </a:prstGeom>
+          <a:noFill/>
+          <a:ln/>
+        </p:spPr>
+        <p:txBody>
+          <a:bodyPr wrap="square" lIns="0" tIns="0" rIns="0" bIns="0" rtlCol="0" anchor="ctr"/>
+          <a:lstStyle/>
+          <a:p>
+            <a:pPr algn="ctr" indent="0" marL="0">
+              <a:buNone/>
+            </a:pPr>
+            <a:r>
+              <a:rPr lang="en-US" sz="950" dirty="0">
+                <a:solidFill>
+                  <a:schemeClr val="accent1"/>
+                </a:solidFill>
+              </a:rPr>
+              <a:t>Market Access</a:t>
+            </a:r>
+            <a:endParaRPr lang="en-US" sz="950" dirty="0"/>
+          </a:p>
+        </p:txBody>
+      </p:sp>
+      <p:sp>
+        <p:nvSpPr>
+          <p:cNvPr id="20" name="Text 17"/>
+          <p:cNvSpPr txBox="1"/>
+          <p:nvPr/>
+        </p:nvSpPr>
+        <p:spPr>
+          <a:xfrm>
+            <a:off x="1417320" y="2651760"/>
+            <a:ext cx="9966960" cy="201168"/>
+          </a:xfrm>
+          <a:prstGeom prst="rect">
+            <a:avLst/>
+          </a:prstGeom>
+          <a:noFill/>
+          <a:ln/>
+        </p:spPr>
+        <p:txBody>
+          <a:bodyPr wrap="square" lIns="0" tIns="0" rIns="0" bIns="0" rtlCol="0" anchor="t"/>
+          <a:lstStyle/>
+          <a:p>
+            <a:pPr indent="0" marL="0">
+              <a:buNone/>
+            </a:pPr>
+            <a:r>
+              <a:rPr lang="en-US" sz="1100" b="1" dirty="0">
+                <a:solidFill>
+                  <a:schemeClr val="tx1"/>
+                </a:solidFill>
+              </a:rPr>
+              <a:t>The U.S. competitive landscape is the primary focus; selected international offerings provide context; and Optum LS is the strategic reference point.</a:t>
+            </a:r>
+            <a:endParaRPr lang="en-US" sz="1100" dirty="0"/>
+          </a:p>
+        </p:txBody>
+      </p:sp>
+      <p:sp>
+        <p:nvSpPr>
+          <p:cNvPr id="21" name="key findings card"/>
+          <p:cNvSpPr/>
+          <p:nvPr/>
+        </p:nvSpPr>
+        <p:spPr>
+          <a:xfrm>
+            <a:off x="548640" y="3218688"/>
+            <a:ext cx="3575304" cy="2834640"/>
+          </a:xfrm>
+          <a:prstGeom prst="rect">
+            <a:avLst/>
+          </a:prstGeom>
+          <a:solidFill>
+            <a:schemeClr val="bg1"/>
+          </a:solidFill>
+          <a:ln/>
+          <a:effectLst>
+            <a:outerShdw sx="100000" sy="100000" kx="0" ky="0" algn="bl" rotWithShape="0" blurRad="101600" dist="25400" dir="5400000">
+              <a:srgbClr val="000000">
+                <a:alpha val="10000"/>
+              </a:srgbClr>
+            </a:outerShdw>
+          </a:effectLst>
+        </p:spPr>
+      </p:sp>
+      <p:sp>
+        <p:nvSpPr>
+          <p:cNvPr id="22" name="icon circle"/>
+          <p:cNvSpPr/>
+          <p:nvPr/>
+        </p:nvSpPr>
+        <p:spPr>
+          <a:xfrm>
+            <a:off x="777240" y="3419856"/>
+            <a:ext cx="457200" cy="457200"/>
+          </a:xfrm>
+          <a:prstGeom prst="ellipse">
+            <a:avLst/>
+          </a:prstGeom>
+          <a:solidFill>
+            <a:schemeClr val="accent5"/>
+          </a:solidFill>
+          <a:ln/>
+        </p:spPr>
+      </p:sp>
+      <p:pic>
+        <p:nvPicPr>
+          <p:cNvPr id="23" name="icon MdInsights" descr="preencoded.png">    </p:cNvPr>
+          <p:cNvPicPr>
+            <a:picLocks noChangeAspect="1"/>
+          </p:cNvPicPr>
+          <p:nvPr/>
+        </p:nvPicPr>
+        <p:blipFill>
+          <a:blip r:embed="rId2"/>
+          <a:stretch>
+            <a:fillRect/>
+          </a:stretch>
+        </p:blipFill>
+        <p:spPr>
+          <a:xfrm>
+            <a:off x="877824" y="3520440"/>
+            <a:ext cx="256032" cy="256032"/>
+          </a:xfrm>
+          <a:prstGeom prst="rect">
+            <a:avLst/>
+          </a:prstGeom>
+        </p:spPr>
+      </p:pic>
+      <p:sp>
+        <p:nvSpPr>
+          <p:cNvPr id="24" name="card label"/>
+          <p:cNvSpPr txBox="1"/>
+          <p:nvPr/>
+        </p:nvSpPr>
+        <p:spPr>
+          <a:xfrm>
+            <a:off x="1353312" y="3511296"/>
+            <a:ext cx="2660904" cy="237744"/>
+          </a:xfrm>
+          <a:prstGeom prst="rect">
+            <a:avLst/>
+          </a:prstGeom>
+          <a:noFill/>
+          <a:ln/>
+        </p:spPr>
+        <p:txBody>
+          <a:bodyPr wrap="square" lIns="0" tIns="0" rIns="0" bIns="0" rtlCol="0" anchor="ctr"/>
+          <a:lstStyle/>
+          <a:p>
+            <a:pPr indent="0" marL="0">
+              <a:buNone/>
+            </a:pPr>
+            <a:r>
+              <a:rPr lang="en-US" sz="1300" b="1" spc="150" kern="0" dirty="0">
+                <a:solidFill>
+                  <a:schemeClr val="accent2"/>
+                </a:solidFill>
+              </a:rPr>
+              <a:t>KEY FINDINGS</a:t>
+            </a:r>
+            <a:endParaRPr lang="en-US" sz="1300" dirty="0"/>
+          </a:p>
+        </p:txBody>
+      </p:sp>
+      <p:sp>
+        <p:nvSpPr>
+          <p:cNvPr id="25" name="hero 19"/>
+          <p:cNvSpPr txBox="1"/>
+          <p:nvPr/>
+        </p:nvSpPr>
+        <p:spPr>
+          <a:xfrm>
+            <a:off x="777240" y="4069080"/>
+            <a:ext cx="621792" cy="502920"/>
+          </a:xfrm>
+          <a:prstGeom prst="rect">
+            <a:avLst/>
+          </a:prstGeom>
+          <a:noFill/>
+          <a:ln/>
+        </p:spPr>
+        <p:txBody>
+          <a:bodyPr wrap="square" lIns="0" tIns="0" rIns="0" bIns="0" rtlCol="0" anchor="t"/>
+          <a:lstStyle/>
+          <a:p>
+            <a:pPr indent="0" marL="0">
+              <a:buNone/>
+            </a:pPr>
+            <a:r>
+              <a:rPr lang="en-US" sz="3400" b="1" dirty="0">
+                <a:solidFill>
+                  <a:schemeClr val="accent2"/>
+                </a:solidFill>
+              </a:rPr>
+              <a:t>19</a:t>
+            </a:r>
+            <a:endParaRPr lang="en-US" sz="3400" dirty="0"/>
+          </a:p>
+        </p:txBody>
+      </p:sp>
+      <p:sp>
+        <p:nvSpPr>
+          <p:cNvPr id="26" name="Text 22"/>
+          <p:cNvSpPr txBox="1"/>
+          <p:nvPr/>
+        </p:nvSpPr>
+        <p:spPr>
+          <a:xfrm>
+            <a:off x="1444752" y="4133088"/>
+            <a:ext cx="2478024" cy="749808"/>
+          </a:xfrm>
+          <a:prstGeom prst="rect">
+            <a:avLst/>
+          </a:prstGeom>
+          <a:noFill/>
+          <a:ln/>
+        </p:spPr>
+        <p:txBody>
+          <a:bodyPr wrap="square" lIns="0" tIns="0" rIns="0" bIns="0" rtlCol="0" anchor="t"/>
+          <a:lstStyle/>
+          <a:p>
+            <a:pPr indent="0" marL="0">
+              <a:buNone/>
+            </a:pPr>
+            <a:r>
+              <a:rPr lang="en-US" sz="1050" dirty="0">
+                <a:solidFill>
+                  <a:schemeClr val="tx1"/>
+                </a:solidFill>
+              </a:rPr>
+              <a:t>The U.S. screen identified </a:t>
+            </a:r>
+            <a:pPr indent="0" marL="0">
+              <a:buNone/>
+            </a:pPr>
+            <a:r>
+              <a:rPr lang="en-US" sz="1050" b="1" dirty="0">
+                <a:solidFill>
+                  <a:schemeClr val="tx1"/>
+                </a:solidFill>
+              </a:rPr>
+              <a:t>19 conversational AI offerings</a:t>
+            </a:r>
+            <a:pPr indent="0" marL="0">
+              <a:buNone/>
+            </a:pPr>
+            <a:r>
+              <a:rPr lang="en-US" sz="1050" dirty="0">
+                <a:solidFill>
+                  <a:schemeClr val="tx1"/>
+                </a:solidFill>
+              </a:rPr>
+              <a:t> across five business domains, </a:t>
+            </a:r>
+            <a:pPr indent="0" marL="0">
+              <a:buNone/>
+            </a:pPr>
+            <a:r>
+              <a:rPr lang="en-US" sz="1050" b="1" dirty="0">
+                <a:solidFill>
+                  <a:schemeClr val="tx1"/>
+                </a:solidFill>
+              </a:rPr>
+              <a:t>concentrated in RWE and Commercial Intelligence</a:t>
+            </a:r>
+            <a:pPr indent="0" marL="0">
+              <a:buNone/>
+            </a:pPr>
+            <a:r>
+              <a:rPr lang="en-US" sz="1050" dirty="0">
+                <a:solidFill>
+                  <a:schemeClr val="tx1"/>
+                </a:solidFill>
+              </a:rPr>
+              <a:t>.</a:t>
+            </a:r>
+            <a:endParaRPr lang="en-US" sz="1050" dirty="0"/>
+          </a:p>
+        </p:txBody>
+      </p:sp>
+      <p:sp>
+        <p:nvSpPr>
+          <p:cNvPr id="27" name="Shape 23"/>
+          <p:cNvSpPr/>
+          <p:nvPr/>
+        </p:nvSpPr>
+        <p:spPr>
+          <a:xfrm>
+            <a:off x="777240" y="5010912"/>
+            <a:ext cx="3118104" cy="0"/>
+          </a:xfrm>
+          <a:prstGeom prst="line">
+            <a:avLst/>
+          </a:prstGeom>
+          <a:noFill/>
+          <a:ln w="9525">
+            <a:solidFill>
+              <a:schemeClr val="accent3"/>
+            </a:solidFill>
+            <a:prstDash val="solid"/>
+          </a:ln>
+        </p:spPr>
+      </p:sp>
+      <p:sp>
+        <p:nvSpPr>
+          <p:cNvPr id="28" name="hero 10"/>
+          <p:cNvSpPr txBox="1"/>
+          <p:nvPr/>
+        </p:nvSpPr>
+        <p:spPr>
+          <a:xfrm>
+            <a:off x="777240" y="5056632"/>
+            <a:ext cx="621792" cy="502920"/>
+          </a:xfrm>
+          <a:prstGeom prst="rect">
+            <a:avLst/>
+          </a:prstGeom>
+          <a:noFill/>
+          <a:ln/>
+        </p:spPr>
+        <p:txBody>
+          <a:bodyPr wrap="square" lIns="0" tIns="0" rIns="0" bIns="0" rtlCol="0" anchor="t"/>
+          <a:lstStyle/>
+          <a:p>
+            <a:pPr indent="0" marL="0">
+              <a:buNone/>
+            </a:pPr>
+            <a:r>
+              <a:rPr lang="en-US" sz="3400" b="1" dirty="0">
+                <a:solidFill>
+                  <a:schemeClr val="accent2"/>
+                </a:solidFill>
+              </a:rPr>
+              <a:t>9</a:t>
+            </a:r>
+            <a:endParaRPr lang="en-US" sz="3400" dirty="0"/>
+          </a:p>
+        </p:txBody>
+      </p:sp>
+      <p:sp>
+        <p:nvSpPr>
+          <p:cNvPr id="29" name="Text 25"/>
+          <p:cNvSpPr txBox="1"/>
+          <p:nvPr/>
+        </p:nvSpPr>
+        <p:spPr>
+          <a:xfrm>
+            <a:off x="1444752" y="5120640"/>
+            <a:ext cx="2478024" cy="749808"/>
+          </a:xfrm>
+          <a:prstGeom prst="rect">
+            <a:avLst/>
+          </a:prstGeom>
+          <a:noFill/>
+          <a:ln/>
+        </p:spPr>
+        <p:txBody>
+          <a:bodyPr wrap="square" lIns="0" tIns="0" rIns="0" bIns="0" rtlCol="0" anchor="t"/>
+          <a:lstStyle/>
+          <a:p>
+            <a:pPr indent="0" marL="0">
+              <a:buNone/>
+            </a:pPr>
+            <a:r>
+              <a:rPr lang="en-US" sz="1050" dirty="0">
+                <a:solidFill>
+                  <a:schemeClr val="tx1"/>
+                </a:solidFill>
+              </a:rPr>
+              <a:t>The selected international comparison identified </a:t>
+            </a:r>
+            <a:pPr indent="0" marL="0">
+              <a:buNone/>
+            </a:pPr>
+            <a:r>
+              <a:rPr lang="en-US" sz="1050" b="1" dirty="0">
+                <a:solidFill>
+                  <a:schemeClr val="tx1"/>
+                </a:solidFill>
+              </a:rPr>
+              <a:t>9 qualifying conversational AI offerings,</a:t>
+            </a:r>
+            <a:pPr indent="0" marL="0">
+              <a:buNone/>
+            </a:pPr>
+            <a:r>
+              <a:rPr lang="en-US" sz="1050" dirty="0">
+                <a:solidFill>
+                  <a:schemeClr val="tx1"/>
+                </a:solidFill>
+              </a:rPr>
+              <a:t> providing additional examples of how vendors position conversational interaction.</a:t>
+            </a:r>
+            <a:endParaRPr lang="en-US" sz="1050" dirty="0"/>
+          </a:p>
+        </p:txBody>
+      </p:sp>
+      <p:sp>
+        <p:nvSpPr>
+          <p:cNvPr id="30" name="optum ls positioning card"/>
+          <p:cNvSpPr/>
+          <p:nvPr/>
+        </p:nvSpPr>
+        <p:spPr>
+          <a:xfrm>
+            <a:off x="4306824" y="3218688"/>
+            <a:ext cx="3575304" cy="2834640"/>
+          </a:xfrm>
+          <a:prstGeom prst="rect">
+            <a:avLst/>
+          </a:prstGeom>
+          <a:solidFill>
+            <a:schemeClr val="bg1"/>
+          </a:solidFill>
+          <a:ln/>
+          <a:effectLst>
+            <a:outerShdw sx="100000" sy="100000" kx="0" ky="0" algn="bl" rotWithShape="0" blurRad="101600" dist="25400" dir="5400000">
+              <a:srgbClr val="000000">
+                <a:alpha val="10000"/>
+              </a:srgbClr>
+            </a:outerShdw>
+          </a:effectLst>
+        </p:spPr>
+      </p:sp>
+      <p:sp>
+        <p:nvSpPr>
+          <p:cNvPr id="31" name="icon circle"/>
+          <p:cNvSpPr/>
+          <p:nvPr/>
+        </p:nvSpPr>
+        <p:spPr>
+          <a:xfrm>
+            <a:off x="4535424" y="3419856"/>
+            <a:ext cx="457200" cy="457200"/>
+          </a:xfrm>
+          <a:prstGeom prst="ellipse">
+            <a:avLst/>
+          </a:prstGeom>
+          <a:solidFill>
+            <a:schemeClr val="accent5"/>
+          </a:solidFill>
+          <a:ln/>
+        </p:spPr>
+      </p:sp>
+      <p:pic>
+        <p:nvPicPr>
+          <p:cNvPr id="32" name="icon MdOutlineLayers" descr="preencoded.png">    </p:cNvPr>
+          <p:cNvPicPr>
+            <a:picLocks noChangeAspect="1"/>
+          </p:cNvPicPr>
+          <p:nvPr/>
+        </p:nvPicPr>
+        <p:blipFill>
+          <a:blip r:embed="rId3"/>
+          <a:stretch>
+            <a:fillRect/>
+          </a:stretch>
+        </p:blipFill>
+        <p:spPr>
+          <a:xfrm>
+            <a:off x="4636008" y="3520440"/>
+            <a:ext cx="256032" cy="256032"/>
+          </a:xfrm>
+          <a:prstGeom prst="rect">
+            <a:avLst/>
+          </a:prstGeom>
+        </p:spPr>
+      </p:pic>
+      <p:sp>
+        <p:nvSpPr>
+          <p:cNvPr id="33" name="card label"/>
+          <p:cNvSpPr txBox="1"/>
+          <p:nvPr/>
+        </p:nvSpPr>
+        <p:spPr>
+          <a:xfrm>
+            <a:off x="5111496" y="3511296"/>
+            <a:ext cx="2660904" cy="237744"/>
+          </a:xfrm>
+          <a:prstGeom prst="rect">
+            <a:avLst/>
+          </a:prstGeom>
+          <a:noFill/>
+          <a:ln/>
+        </p:spPr>
+        <p:txBody>
+          <a:bodyPr wrap="square" lIns="0" tIns="0" rIns="0" bIns="0" rtlCol="0" anchor="ctr"/>
+          <a:lstStyle/>
+          <a:p>
+            <a:pPr indent="0" marL="0">
+              <a:buNone/>
+            </a:pPr>
+            <a:r>
+              <a:rPr lang="en-US" sz="1300" b="1" spc="150" kern="0" dirty="0">
+                <a:solidFill>
+                  <a:schemeClr val="accent2"/>
+                </a:solidFill>
+              </a:rPr>
+              <a:t>OPTUM LS POSITIONING</a:t>
+            </a:r>
+            <a:endParaRPr lang="en-US" sz="1300" dirty="0"/>
+          </a:p>
+        </p:txBody>
+      </p:sp>
+      <p:sp>
+        <p:nvSpPr>
+          <p:cNvPr id="34" name="Text 29"/>
+          <p:cNvSpPr txBox="1"/>
+          <p:nvPr/>
+        </p:nvSpPr>
+        <p:spPr>
+          <a:xfrm>
+            <a:off x="4535424" y="4087368"/>
+            <a:ext cx="3118104" cy="1645920"/>
+          </a:xfrm>
+          <a:prstGeom prst="rect">
+            <a:avLst/>
+          </a:prstGeom>
+          <a:noFill/>
+          <a:ln/>
+        </p:spPr>
+        <p:txBody>
+          <a:bodyPr wrap="square" lIns="0" tIns="0" rIns="0" bIns="0" rtlCol="0" anchor="t"/>
+          <a:lstStyle/>
+          <a:p>
+            <a:pPr indent="0" marL="0">
+              <a:spcAft>
+                <a:spcPts val="900"/>
+              </a:spcAft>
+              <a:buNone/>
+            </a:pPr>
+            <a:r>
+              <a:rPr lang="en-US" sz="1100" dirty="0">
+                <a:solidFill>
+                  <a:schemeClr val="tx1"/>
+                </a:solidFill>
+              </a:rPr>
+              <a:t>Optum LS publicly emphasizes linked healthcare data, AI-enabled research tools and scientific expertise.</a:t>
+            </a:r>
+            <a:endParaRPr lang="en-US" sz="1100" dirty="0"/>
+          </a:p>
+          <a:p>
+            <a:pPr indent="0" marL="0">
+              <a:spcAft>
+                <a:spcPts val="900"/>
+              </a:spcAft>
+              <a:buNone/>
+            </a:pPr>
+            <a:r>
+              <a:rPr lang="en-US" sz="1100" dirty="0">
+                <a:solidFill>
+                  <a:schemeClr val="tx1"/>
+                </a:solidFill>
+              </a:rPr>
+              <a:t>Several competitors prominently market conversational interfaces as the entry point to comparable customer tasks.</a:t>
+            </a:r>
+            <a:endParaRPr lang="en-US" sz="1100" dirty="0"/>
+          </a:p>
+          <a:p>
+            <a:pPr indent="0" marL="0">
+              <a:spcAft>
+                <a:spcPts val="900"/>
+              </a:spcAft>
+              <a:buNone/>
+            </a:pPr>
+            <a:r>
+              <a:rPr lang="en-US" sz="1100" b="1" dirty="0">
+                <a:solidFill>
+                  <a:schemeClr val="accent1"/>
+                </a:solidFill>
+              </a:rPr>
+              <a:t>This reflects differences in public positioning, not necessarily in underlying functionality.</a:t>
+            </a:r>
+            <a:endParaRPr lang="en-US" sz="1100" dirty="0"/>
+          </a:p>
+        </p:txBody>
+      </p:sp>
+      <p:sp>
+        <p:nvSpPr>
+          <p:cNvPr id="35" name="strategic implication card"/>
+          <p:cNvSpPr/>
+          <p:nvPr/>
+        </p:nvSpPr>
+        <p:spPr>
+          <a:xfrm>
+            <a:off x="8065008" y="3218688"/>
+            <a:ext cx="3575304" cy="2834640"/>
+          </a:xfrm>
+          <a:prstGeom prst="rect">
+            <a:avLst/>
+          </a:prstGeom>
+          <a:solidFill>
+            <a:schemeClr val="bg1"/>
+          </a:solidFill>
+          <a:ln/>
+          <a:effectLst>
+            <a:outerShdw sx="100000" sy="100000" kx="0" ky="0" algn="bl" rotWithShape="0" blurRad="101600" dist="25400" dir="5400000">
+              <a:srgbClr val="000000">
+                <a:alpha val="10000"/>
+              </a:srgbClr>
+            </a:outerShdw>
+          </a:effectLst>
+        </p:spPr>
+      </p:sp>
+      <p:sp>
+        <p:nvSpPr>
+          <p:cNvPr id="36" name="icon circle"/>
+          <p:cNvSpPr/>
+          <p:nvPr/>
+        </p:nvSpPr>
+        <p:spPr>
+          <a:xfrm>
+            <a:off x="8293608" y="3419856"/>
+            <a:ext cx="457200" cy="457200"/>
+          </a:xfrm>
+          <a:prstGeom prst="ellipse">
+            <a:avLst/>
+          </a:prstGeom>
+          <a:solidFill>
+            <a:schemeClr val="accent5"/>
+          </a:solidFill>
+          <a:ln/>
+        </p:spPr>
+      </p:sp>
+      <p:pic>
+        <p:nvPicPr>
+          <p:cNvPr id="37" name="icon MdOutlineLightbulb" descr="preencoded.png">    </p:cNvPr>
+          <p:cNvPicPr>
+            <a:picLocks noChangeAspect="1"/>
+          </p:cNvPicPr>
+          <p:nvPr/>
+        </p:nvPicPr>
+        <p:blipFill>
+          <a:blip r:embed="rId4"/>
+          <a:stretch>
+            <a:fillRect/>
+          </a:stretch>
+        </p:blipFill>
+        <p:spPr>
+          <a:xfrm>
+            <a:off x="8394192" y="3520440"/>
+            <a:ext cx="256032" cy="256032"/>
+          </a:xfrm>
+          <a:prstGeom prst="rect">
+            <a:avLst/>
+          </a:prstGeom>
+        </p:spPr>
+      </p:pic>
+      <p:sp>
+        <p:nvSpPr>
+          <p:cNvPr id="38" name="card label"/>
+          <p:cNvSpPr txBox="1"/>
+          <p:nvPr/>
+        </p:nvSpPr>
+        <p:spPr>
+          <a:xfrm>
+            <a:off x="8869680" y="3511296"/>
+            <a:ext cx="2660904" cy="237744"/>
+          </a:xfrm>
+          <a:prstGeom prst="rect">
+            <a:avLst/>
+          </a:prstGeom>
+          <a:noFill/>
+          <a:ln/>
+        </p:spPr>
+        <p:txBody>
+          <a:bodyPr wrap="square" lIns="0" tIns="0" rIns="0" bIns="0" rtlCol="0" anchor="ctr"/>
+          <a:lstStyle/>
+          <a:p>
+            <a:pPr indent="0" marL="0">
+              <a:buNone/>
+            </a:pPr>
+            <a:r>
+              <a:rPr lang="en-US" sz="1300" b="1" spc="150" kern="0" dirty="0">
+                <a:solidFill>
+                  <a:schemeClr val="accent2"/>
+                </a:solidFill>
+              </a:rPr>
+              <a:t>STRATEGIC IMPLICATION</a:t>
+            </a:r>
+            <a:endParaRPr lang="en-US" sz="1300" dirty="0"/>
+          </a:p>
+        </p:txBody>
+      </p:sp>
+      <p:sp>
+        <p:nvSpPr>
+          <p:cNvPr id="39" name="Text 33"/>
+          <p:cNvSpPr txBox="1"/>
+          <p:nvPr/>
+        </p:nvSpPr>
+        <p:spPr>
+          <a:xfrm>
+            <a:off x="8293608" y="4087368"/>
+            <a:ext cx="3118104" cy="685800"/>
+          </a:xfrm>
+          <a:prstGeom prst="rect">
+            <a:avLst/>
+          </a:prstGeom>
+          <a:noFill/>
+          <a:ln/>
+        </p:spPr>
+        <p:txBody>
+          <a:bodyPr wrap="square" lIns="0" tIns="0" rIns="0" bIns="0" rtlCol="0" anchor="t"/>
+          <a:lstStyle/>
+          <a:p>
+            <a:pPr indent="0" marL="0">
+              <a:buNone/>
+            </a:pPr>
+            <a:r>
+              <a:rPr lang="en-US" sz="1100" dirty="0">
+                <a:solidFill>
+                  <a:schemeClr val="tx1"/>
+                </a:solidFill>
+              </a:rPr>
+              <a:t>The competitive significance of conversational AI depends on the customer task, underlying data and reliability of the results.</a:t>
+            </a:r>
+            <a:endParaRPr lang="en-US" sz="1100" dirty="0"/>
+          </a:p>
+        </p:txBody>
+      </p:sp>
+      <p:sp>
+        <p:nvSpPr>
+          <p:cNvPr id="40" name="strategic question"/>
+          <p:cNvSpPr txBox="1"/>
+          <p:nvPr/>
+        </p:nvSpPr>
+        <p:spPr>
+          <a:xfrm>
+            <a:off x="8293608" y="4818888"/>
+            <a:ext cx="3118104" cy="868680"/>
+          </a:xfrm>
+          <a:prstGeom prst="rect">
+            <a:avLst/>
+          </a:prstGeom>
+          <a:noFill/>
+          <a:ln/>
+        </p:spPr>
+        <p:txBody>
+          <a:bodyPr wrap="square" lIns="0" tIns="0" rIns="0" bIns="0" rtlCol="0" anchor="t"/>
+          <a:lstStyle/>
+          <a:p>
+            <a:pPr indent="0" marL="0">
+              <a:buNone/>
+            </a:pPr>
+            <a:r>
+              <a:rPr lang="en-US" sz="1400" b="1" dirty="0">
+                <a:solidFill>
+                  <a:schemeClr val="accent1"/>
+                </a:solidFill>
+              </a:rPr>
+              <a:t>Where could conversational interaction add value to Optum LS's existing offerings?</a:t>
+            </a:r>
+            <a:endParaRPr lang="en-US" sz="1400" dirty="0"/>
+          </a:p>
+        </p:txBody>
+      </p:sp>
+      <p:sp>
+        <p:nvSpPr>
+          <p:cNvPr id="25" name="Slide Number Placeholder 0"/>
+          <p:cNvSpPr>
+            <a:spLocks noGrp="1"/>
+          </p:cNvSpPr>
+          <p:nvPr>
+            <p:ph type="sldNum" sz="quarter" idx="4294967295"/>
+          </p:nvPr>
+        </p:nvSpPr>
+        <p:spPr>
+          <a:xfrm>
+            <a:off x="10725912" y="6309360"/>
+            <a:ext cx="914400" cy="201168"/>
+          </a:xfrm>
+          <a:prstGeom prst="rect">
+            <a:avLst/>
+          </a:prstGeom>
+          <a:extLst>
+            <a:ext uri="{C572A759-6A51-4108-AA02-DFA0A04FC94B}">
+              <ma14:wrappingTextBoxFlag xmlns:ma14="http://schemas.microsoft.com/office/mac/drawingml/2011/main" val="0"/>
+            </a:ext>
+          </a:extLst>
+        </p:spPr>
+        <p:txBody>
+          <a:bodyPr lIns="0" tIns="0" rIns="0" bIns="0"/>
+          <a:lstStyle>
+            <a:lvl1pPr>
+              <a:defRPr sz="900">
+                <a:solidFill>
+                  <a:schemeClr val="accent4"/>
+                </a:solidFill>
+              </a:defRPr>
+            </a:lvl1pPr>
+          </a:lstStyle>
+          <a:p>
+            <a:pPr algn="r"/>
+            <a:fld id="{F7021451-1387-4CA6-816F-3879F97B5CBC}" type="slidenum">
+              <a:rPr b="0" lang="en-US"/>
+              <a:t>1</a:t>
+            </a:fld>
+            <a:endParaRPr lang="en-US"/>
+          </a:p>
+        </p:txBody>
+      </p:sp>
+    </p:spTree>
+  </p:cSld>
+  <p:clrMapOvr>
+    <a:masterClrMapping/>
+  </p:clrMapOvr>
+</p:sld>
+</file>
+
+<file path=ppt/slides/slide3.xml><?xml version="1.0" encoding="utf-8"?>
 <p:sld xmlns:a="http://schemas.openxmlformats.org/drawingml/2006/main" xmlns:r="http://schemas.openxmlformats.org/officeDocument/2006/relationships" xmlns:p="http://schemas.openxmlformats.org/presentationml/2006/main">
   <p:cSld name="Slide 2">
     <p:spTree>
@@ -8797,7 +11286,7 @@
 </p:sld>
 </file>
 
-<file path=ppt/slides/slide3.xml><?xml version="1.0" encoding="utf-8"?>
+<file path=ppt/slides/slide4.xml><?xml version="1.0" encoding="utf-8"?>
 <p:sld xmlns:a="http://schemas.openxmlformats.org/drawingml/2006/main" xmlns:r="http://schemas.openxmlformats.org/officeDocument/2006/relationships" xmlns:p="http://schemas.openxmlformats.org/presentationml/2006/main">
   <p:cSld name="Slide 3">
     <p:spTree>
@@ -8910,7 +11399,7 @@
         </p:nvSpPr>
         <p:spPr>
           <a:xfrm>
-            <a:off x="2173986" y="1517904"/>
+            <a:off x="1945386" y="1517904"/>
             <a:ext cx="2939796" cy="548640"/>
           </a:xfrm>
           <a:prstGeom prst="rect">
@@ -8921,6 +11410,10 @@
           </a:solidFill>
           <a:ln/>
         </p:spPr>
+        <p:txBody>
+          <a:bodyPr/>
+          <a:p/>
+        </p:txBody>
       </p:sp>
       <p:sp>
         <p:nvSpPr>
@@ -8930,7 +11423,7 @@
         </p:nvSpPr>
         <p:spPr>
           <a:xfrm>
-            <a:off x="2430018" y="1517904"/>
+            <a:off x="2201418" y="1517904"/>
             <a:ext cx="420624" cy="548640"/>
           </a:xfrm>
           <a:prstGeom prst="rect">
@@ -8966,7 +11459,7 @@
         </p:nvSpPr>
         <p:spPr>
           <a:xfrm>
-            <a:off x="2960370" y="1517904"/>
+            <a:off x="2731770" y="1517904"/>
             <a:ext cx="1988820" cy="548640"/>
           </a:xfrm>
           <a:prstGeom prst="rect">
@@ -9002,7 +11495,7 @@
         </p:nvSpPr>
         <p:spPr>
           <a:xfrm>
-            <a:off x="5314950" y="1673352"/>
+            <a:off x="5086350" y="1673352"/>
             <a:ext cx="420624" cy="237744"/>
           </a:xfrm>
           <a:prstGeom prst="rightArrow">
@@ -9013,6 +11506,10 @@
           </a:solidFill>
           <a:ln/>
         </p:spPr>
+        <p:txBody>
+          <a:bodyPr/>
+          <a:p/>
+        </p:txBody>
       </p:sp>
       <p:sp>
         <p:nvSpPr>
@@ -9022,8 +11519,8 @@
         </p:nvSpPr>
         <p:spPr>
           <a:xfrm>
-            <a:off x="5936742" y="1517904"/>
-            <a:ext cx="4078224" cy="548640"/>
+            <a:off x="5708142" y="1517904"/>
+            <a:ext cx="4535424" cy="548640"/>
           </a:xfrm>
           <a:prstGeom prst="rect">
             <a:avLst/>
@@ -9033,6 +11530,10 @@
           </a:solidFill>
           <a:ln/>
         </p:spPr>
+        <p:txBody>
+          <a:bodyPr/>
+          <a:p/>
+        </p:txBody>
       </p:sp>
       <p:sp>
         <p:nvSpPr>
@@ -9042,7 +11543,7 @@
         </p:nvSpPr>
         <p:spPr>
           <a:xfrm>
-            <a:off x="6192774" y="1517904"/>
+            <a:off x="5964174" y="1517904"/>
             <a:ext cx="420624" cy="548640"/>
           </a:xfrm>
           <a:prstGeom prst="rect">
@@ -9078,8 +11579,8 @@
         </p:nvSpPr>
         <p:spPr>
           <a:xfrm>
-            <a:off x="6723126" y="1517904"/>
-            <a:ext cx="3127248" cy="548640"/>
+            <a:off x="6494526" y="1517904"/>
+            <a:ext cx="3584448" cy="548640"/>
           </a:xfrm>
           <a:prstGeom prst="rect">
             <a:avLst/>
@@ -9125,6 +11626,10 @@
           </a:solidFill>
           <a:ln/>
         </p:spPr>
+        <p:txBody>
+          <a:bodyPr/>
+          <a:p/>
+        </p:txBody>
       </p:sp>
       <p:sp>
         <p:nvSpPr>
@@ -9220,7 +11725,7 @@
         </p:nvSpPr>
         <p:spPr>
           <a:xfrm>
-            <a:off x="5486400" y="2286000"/>
+            <a:off x="5715000" y="2286000"/>
             <a:ext cx="2880360" cy="457200"/>
           </a:xfrm>
           <a:prstGeom prst="rect">
@@ -9256,7 +11761,7 @@
         </p:nvSpPr>
         <p:spPr>
           <a:xfrm>
-            <a:off x="8503920" y="2286000"/>
+            <a:off x="9052560" y="2286000"/>
             <a:ext cx="2103120" cy="457200"/>
           </a:xfrm>
           <a:prstGeom prst="rect">
@@ -9293,56 +11798,6 @@
                 </a:solidFill>
               </a:rPr>
               <a:t>offerings</a:t>
-            </a:r>
-            <a:endParaRPr lang="en-US" sz="900" dirty="0"/>
-          </a:p>
-        </p:txBody>
-      </p:sp>
-      <p:sp>
-        <p:nvSpPr>
-          <p:cNvPr id="16" name="Text 14"/>
-          <p:cNvSpPr txBox="1"/>
-          <p:nvPr/>
-        </p:nvSpPr>
-        <p:spPr>
-          <a:xfrm>
-            <a:off x="10652760" y="2286000"/>
-            <a:ext cx="987552" cy="457200"/>
-          </a:xfrm>
-          <a:prstGeom prst="rect">
-            <a:avLst/>
-          </a:prstGeom>
-          <a:noFill/>
-          <a:ln/>
-        </p:spPr>
-        <p:txBody>
-          <a:bodyPr wrap="square" lIns="0" tIns="0" rIns="0" bIns="0" rtlCol="0" anchor="ctr"/>
-          <a:lstStyle/>
-          <a:p>
-            <a:pPr algn="ctr" indent="0" marL="0">
-              <a:buNone/>
-            </a:pPr>
-            <a:r>
-              <a:rPr lang="en-US" sz="900" b="1" dirty="0">
-                <a:solidFill>
-                  <a:schemeClr val="bg1"/>
-                </a:solidFill>
-              </a:rPr>
-              <a:t>Optum LS</a:t>
-            </a:r>
-            <a:endParaRPr lang="en-US" sz="900" dirty="0"/>
-          </a:p>
-          <a:p>
-            <a:pPr algn="ctr" indent="0" marL="0">
-              <a:buNone/>
-            </a:pPr>
-            <a:r>
-              <a:rPr lang="en-US" sz="900" b="1" dirty="0">
-                <a:solidFill>
-                  <a:schemeClr val="bg1"/>
-                </a:solidFill>
-              </a:rPr>
-              <a:t>chat claim</a:t>
             </a:r>
             <a:endParaRPr lang="en-US" sz="900" dirty="0"/>
           </a:p>
@@ -9437,6 +11892,10 @@
             <a:prstDash val="solid"/>
           </a:ln>
         </p:spPr>
+        <p:txBody>
+          <a:bodyPr/>
+          <a:p/>
+        </p:txBody>
       </p:sp>
       <p:sp>
         <p:nvSpPr>
@@ -9482,7 +11941,7 @@
         </p:nvSpPr>
         <p:spPr>
           <a:xfrm>
-            <a:off x="5577840" y="2743200"/>
+            <a:off x="5806440" y="2743200"/>
             <a:ext cx="2697480" cy="502920"/>
           </a:xfrm>
           <a:prstGeom prst="rect">
@@ -9518,7 +11977,7 @@
         </p:nvSpPr>
         <p:spPr>
           <a:xfrm>
-            <a:off x="8595360" y="2743200"/>
+            <a:off x="9144000" y="2743200"/>
             <a:ext cx="1920240" cy="502920"/>
           </a:xfrm>
           <a:prstGeom prst="rect">
@@ -9545,28 +12004,6 @@
             <a:endParaRPr lang="en-US" sz="900" dirty="0"/>
           </a:p>
         </p:txBody>
-      </p:sp>
-      <p:sp>
-        <p:nvSpPr>
-          <p:cNvPr id="23" name="chat status RWE"/>
-          <p:cNvSpPr/>
-          <p:nvPr/>
-        </p:nvSpPr>
-        <p:spPr>
-          <a:xfrm>
-            <a:off x="11109960" y="2912364"/>
-            <a:ext cx="164592" cy="164592"/>
-          </a:xfrm>
-          <a:prstGeom prst="ellipse">
-            <a:avLst/>
-          </a:prstGeom>
-          <a:ln w="15875">
-            <a:solidFill>
-              <a:schemeClr val="accent4"/>
-            </a:solidFill>
-            <a:prstDash val="solid"/>
-          </a:ln>
-        </p:spPr>
       </p:sp>
       <p:sp>
         <p:nvSpPr>
@@ -9590,6 +12027,10 @@
             <a:prstDash val="solid"/>
           </a:ln>
         </p:spPr>
+        <p:txBody>
+          <a:bodyPr/>
+          <a:p/>
+        </p:txBody>
       </p:sp>
       <p:sp>
         <p:nvSpPr>
@@ -9664,6 +12105,10 @@
             <a:prstDash val="solid"/>
           </a:ln>
         </p:spPr>
+        <p:txBody>
+          <a:bodyPr/>
+          <a:p/>
+        </p:txBody>
       </p:sp>
       <p:sp>
         <p:nvSpPr>
@@ -9709,7 +12154,7 @@
         </p:nvSpPr>
         <p:spPr>
           <a:xfrm>
-            <a:off x="5577840" y="3246120"/>
+            <a:off x="5806440" y="3246120"/>
             <a:ext cx="2697480" cy="502920"/>
           </a:xfrm>
           <a:prstGeom prst="rect">
@@ -9745,7 +12190,7 @@
         </p:nvSpPr>
         <p:spPr>
           <a:xfrm>
-            <a:off x="8595360" y="3246120"/>
+            <a:off x="9144000" y="3246120"/>
             <a:ext cx="1920240" cy="502920"/>
           </a:xfrm>
           <a:prstGeom prst="rect">
@@ -9772,28 +12217,6 @@
             <a:endParaRPr lang="en-US" sz="900" dirty="0"/>
           </a:p>
         </p:txBody>
-      </p:sp>
-      <p:sp>
-        <p:nvSpPr>
-          <p:cNvPr id="30" name="chat status Commercial Intelligence"/>
-          <p:cNvSpPr/>
-          <p:nvPr/>
-        </p:nvSpPr>
-        <p:spPr>
-          <a:xfrm>
-            <a:off x="11109960" y="3415284"/>
-            <a:ext cx="164592" cy="164592"/>
-          </a:xfrm>
-          <a:prstGeom prst="ellipse">
-            <a:avLst/>
-          </a:prstGeom>
-          <a:ln w="15875">
-            <a:solidFill>
-              <a:schemeClr val="accent4"/>
-            </a:solidFill>
-            <a:prstDash val="solid"/>
-          </a:ln>
-        </p:spPr>
       </p:sp>
       <p:sp>
         <p:nvSpPr>
@@ -9817,6 +12240,10 @@
             <a:prstDash val="solid"/>
           </a:ln>
         </p:spPr>
+        <p:txBody>
+          <a:bodyPr/>
+          <a:p/>
+        </p:txBody>
       </p:sp>
       <p:sp>
         <p:nvSpPr>
@@ -9891,6 +12318,10 @@
             <a:prstDash val="solid"/>
           </a:ln>
         </p:spPr>
+        <p:txBody>
+          <a:bodyPr/>
+          <a:p/>
+        </p:txBody>
       </p:sp>
       <p:sp>
         <p:nvSpPr>
@@ -9936,7 +12367,7 @@
         </p:nvSpPr>
         <p:spPr>
           <a:xfrm>
-            <a:off x="5577840" y="3749040"/>
+            <a:off x="5806440" y="3749040"/>
             <a:ext cx="2697480" cy="502920"/>
           </a:xfrm>
           <a:prstGeom prst="rect">
@@ -9972,7 +12403,7 @@
         </p:nvSpPr>
         <p:spPr>
           <a:xfrm>
-            <a:off x="8595360" y="3749040"/>
+            <a:off x="9144000" y="3749040"/>
             <a:ext cx="1920240" cy="502920"/>
           </a:xfrm>
           <a:prstGeom prst="rect">
@@ -9999,28 +12430,6 @@
             <a:endParaRPr lang="en-US" sz="900" dirty="0"/>
           </a:p>
         </p:txBody>
-      </p:sp>
-      <p:sp>
-        <p:nvSpPr>
-          <p:cNvPr id="37" name="chat status Medical / Regulatory Research"/>
-          <p:cNvSpPr/>
-          <p:nvPr/>
-        </p:nvSpPr>
-        <p:spPr>
-          <a:xfrm>
-            <a:off x="11109960" y="3918204"/>
-            <a:ext cx="164592" cy="164592"/>
-          </a:xfrm>
-          <a:prstGeom prst="ellipse">
-            <a:avLst/>
-          </a:prstGeom>
-          <a:ln w="15875">
-            <a:solidFill>
-              <a:schemeClr val="accent4"/>
-            </a:solidFill>
-            <a:prstDash val="solid"/>
-          </a:ln>
-        </p:spPr>
       </p:sp>
       <p:sp>
         <p:nvSpPr>
@@ -10044,6 +12453,10 @@
             <a:prstDash val="solid"/>
           </a:ln>
         </p:spPr>
+        <p:txBody>
+          <a:bodyPr/>
+          <a:p/>
+        </p:txBody>
       </p:sp>
       <p:sp>
         <p:nvSpPr>
@@ -10118,6 +12531,10 @@
             <a:prstDash val="solid"/>
           </a:ln>
         </p:spPr>
+        <p:txBody>
+          <a:bodyPr/>
+          <a:p/>
+        </p:txBody>
       </p:sp>
       <p:sp>
         <p:nvSpPr>
@@ -10163,7 +12580,7 @@
         </p:nvSpPr>
         <p:spPr>
           <a:xfrm>
-            <a:off x="5577840" y="4251960"/>
+            <a:off x="5806440" y="4251960"/>
             <a:ext cx="2697480" cy="502920"/>
           </a:xfrm>
           <a:prstGeom prst="rect">
@@ -10199,7 +12616,7 @@
         </p:nvSpPr>
         <p:spPr>
           <a:xfrm>
-            <a:off x="8595360" y="4251960"/>
+            <a:off x="9144000" y="4251960"/>
             <a:ext cx="1920240" cy="502920"/>
           </a:xfrm>
           <a:prstGeom prst="rect">
@@ -10226,28 +12643,6 @@
             <a:endParaRPr lang="en-US" sz="900" dirty="0"/>
           </a:p>
         </p:txBody>
-      </p:sp>
-      <p:sp>
-        <p:nvSpPr>
-          <p:cNvPr id="44" name="chat status Clinical Trials"/>
-          <p:cNvSpPr/>
-          <p:nvPr/>
-        </p:nvSpPr>
-        <p:spPr>
-          <a:xfrm>
-            <a:off x="11109960" y="4421124"/>
-            <a:ext cx="164592" cy="164592"/>
-          </a:xfrm>
-          <a:prstGeom prst="ellipse">
-            <a:avLst/>
-          </a:prstGeom>
-          <a:ln w="15875">
-            <a:solidFill>
-              <a:schemeClr val="accent4"/>
-            </a:solidFill>
-            <a:prstDash val="solid"/>
-          </a:ln>
-        </p:spPr>
       </p:sp>
       <p:sp>
         <p:nvSpPr>
@@ -10271,6 +12666,10 @@
             <a:prstDash val="solid"/>
           </a:ln>
         </p:spPr>
+        <p:txBody>
+          <a:bodyPr/>
+          <a:p/>
+        </p:txBody>
       </p:sp>
       <p:sp>
         <p:nvSpPr>
@@ -10345,6 +12744,10 @@
             <a:prstDash val="solid"/>
           </a:ln>
         </p:spPr>
+        <p:txBody>
+          <a:bodyPr/>
+          <a:p/>
+        </p:txBody>
       </p:sp>
       <p:sp>
         <p:nvSpPr>
@@ -10390,7 +12793,7 @@
         </p:nvSpPr>
         <p:spPr>
           <a:xfrm>
-            <a:off x="5577840" y="4754880"/>
+            <a:off x="5806440" y="4754880"/>
             <a:ext cx="2697480" cy="502920"/>
           </a:xfrm>
           <a:prstGeom prst="rect">
@@ -10426,7 +12829,7 @@
         </p:nvSpPr>
         <p:spPr>
           <a:xfrm>
-            <a:off x="8595360" y="4754880"/>
+            <a:off x="9144000" y="4754880"/>
             <a:ext cx="1920240" cy="502920"/>
           </a:xfrm>
           <a:prstGeom prst="rect">
@@ -10453,28 +12856,6 @@
             <a:endParaRPr lang="en-US" sz="900" dirty="0"/>
           </a:p>
         </p:txBody>
-      </p:sp>
-      <p:sp>
-        <p:nvSpPr>
-          <p:cNvPr id="51" name="chat status Market Access"/>
-          <p:cNvSpPr/>
-          <p:nvPr/>
-        </p:nvSpPr>
-        <p:spPr>
-          <a:xfrm>
-            <a:off x="11109960" y="4924044"/>
-            <a:ext cx="164592" cy="164592"/>
-          </a:xfrm>
-          <a:prstGeom prst="ellipse">
-            <a:avLst/>
-          </a:prstGeom>
-          <a:ln w="15875">
-            <a:solidFill>
-              <a:schemeClr val="accent4"/>
-            </a:solidFill>
-            <a:prstDash val="solid"/>
-          </a:ln>
-        </p:spPr>
       </p:sp>
       <p:sp>
         <p:nvSpPr>
@@ -10498,6 +12879,10 @@
             <a:prstDash val="solid"/>
           </a:ln>
         </p:spPr>
+        <p:txBody>
+          <a:bodyPr/>
+          <a:p/>
+        </p:txBody>
       </p:sp>
       <p:sp>
         <p:nvSpPr>
@@ -10529,43 +12914,7 @@
                   <a:schemeClr val="accent4"/>
                 </a:solidFill>
               </a:rPr>
-              <a:t>Scope note: Offerings are organized by their primary customer decision workflow; supporting data and analytics capabilities may serve more than one workflow.</a:t>
-            </a:r>
-            <a:endParaRPr lang="en-US" sz="800" dirty="0"/>
-          </a:p>
-        </p:txBody>
-      </p:sp>
-      <p:sp>
-        <p:nvSpPr>
-          <p:cNvPr id="54" name="chat claim legend"/>
-          <p:cNvSpPr txBox="1"/>
-          <p:nvPr/>
-        </p:nvSpPr>
-        <p:spPr>
-          <a:xfrm>
-            <a:off x="9418320" y="5321808"/>
-            <a:ext cx="2221992" cy="182880"/>
-          </a:xfrm>
-          <a:prstGeom prst="rect">
-            <a:avLst/>
-          </a:prstGeom>
-          <a:noFill/>
-          <a:ln/>
-        </p:spPr>
-        <p:txBody>
-          <a:bodyPr wrap="square" lIns="0" tIns="0" rIns="0" bIns="0" rtlCol="0" anchor="t"/>
-          <a:lstStyle/>
-          <a:p>
-            <a:pPr algn="r" indent="0" marL="0">
-              <a:buNone/>
-            </a:pPr>
-            <a:r>
-              <a:rPr lang="en-US" sz="800" i="1" dirty="0">
-                <a:solidFill>
-                  <a:schemeClr val="accent4"/>
-                </a:solidFill>
-              </a:rPr>
-              <a:t>○  Not publicly established in this review</a:t>
+              <a:t>Scope note: Offerings are organized by their primary domain; supporting data and analytics capabilities may serve more than one domain.</a:t>
             </a:r>
             <a:endParaRPr lang="en-US" sz="800" dirty="0"/>
           </a:p>
@@ -10597,6 +12946,10 @@
             </a:outerShdw>
           </a:effectLst>
         </p:spPr>
+        <p:txBody>
+          <a:bodyPr/>
+          <a:p/>
+        </p:txBody>
       </p:sp>
       <p:sp>
         <p:nvSpPr>
@@ -10739,7 +13092,7 @@
         </p:nvSpPr>
         <p:spPr>
           <a:xfrm>
-            <a:off x="5587055" y="2888640"/>
+            <a:off x="5815655" y="2888640"/>
             <a:ext cx="837175" cy="84594"/>
           </a:xfrm>
           <a:prstGeom prst="rect">
@@ -10782,7 +13135,7 @@
         </p:nvSpPr>
         <p:spPr>
           <a:xfrm>
-            <a:off x="6686128" y="2892602"/>
+            <a:off x="6914728" y="2892602"/>
             <a:ext cx="311934" cy="103314"/>
           </a:xfrm>
           <a:prstGeom prst="rect">
@@ -10825,7 +13178,7 @@
         </p:nvSpPr>
         <p:spPr>
           <a:xfrm>
-            <a:off x="7073118" y="2888640"/>
+            <a:off x="7301718" y="2888640"/>
             <a:ext cx="988012" cy="107276"/>
           </a:xfrm>
           <a:prstGeom prst="rect">
@@ -10868,7 +13221,7 @@
         </p:nvSpPr>
         <p:spPr>
           <a:xfrm>
-            <a:off x="5993134" y="3026168"/>
+            <a:off x="6221734" y="3026168"/>
             <a:ext cx="508858" cy="107276"/>
           </a:xfrm>
           <a:prstGeom prst="rect">
@@ -10911,7 +13264,7 @@
         </p:nvSpPr>
         <p:spPr>
           <a:xfrm>
-            <a:off x="6571283" y="3030130"/>
+            <a:off x="6799883" y="3030130"/>
             <a:ext cx="675176" cy="103314"/>
           </a:xfrm>
           <a:prstGeom prst="rect">
@@ -10954,7 +13307,7 @@
         </p:nvSpPr>
         <p:spPr>
           <a:xfrm>
-            <a:off x="8594830" y="2957398"/>
+            <a:off x="9143470" y="2957398"/>
             <a:ext cx="1075488" cy="107276"/>
           </a:xfrm>
           <a:prstGeom prst="rect">
@@ -10997,7 +13350,7 @@
         </p:nvSpPr>
         <p:spPr>
           <a:xfrm>
-            <a:off x="9742861" y="2957398"/>
+            <a:off x="10291501" y="2957398"/>
             <a:ext cx="739246" cy="107276"/>
           </a:xfrm>
           <a:prstGeom prst="rect">
@@ -11040,7 +13393,7 @@
         </p:nvSpPr>
         <p:spPr>
           <a:xfrm>
-            <a:off x="8599504" y="3071888"/>
+            <a:off x="9148144" y="3071888"/>
             <a:ext cx="396172" cy="84594"/>
           </a:xfrm>
           <a:prstGeom prst="rect">
@@ -11083,7 +13436,7 @@
         </p:nvSpPr>
         <p:spPr>
           <a:xfrm>
-            <a:off x="5917532" y="3391560"/>
+            <a:off x="6146132" y="3391560"/>
             <a:ext cx="888292" cy="107276"/>
           </a:xfrm>
           <a:prstGeom prst="rect">
@@ -11126,7 +13479,7 @@
         </p:nvSpPr>
         <p:spPr>
           <a:xfrm>
-            <a:off x="7063403" y="3394443"/>
+            <a:off x="7292003" y="3394443"/>
             <a:ext cx="535489" cy="104394"/>
           </a:xfrm>
           <a:prstGeom prst="rect">
@@ -11169,7 +13522,7 @@
         </p:nvSpPr>
         <p:spPr>
           <a:xfrm>
-            <a:off x="7844953" y="3394430"/>
+            <a:off x="8073553" y="3394430"/>
             <a:ext cx="417419" cy="81724"/>
           </a:xfrm>
           <a:prstGeom prst="rect">
@@ -11212,7 +13565,7 @@
         </p:nvSpPr>
         <p:spPr>
           <a:xfrm>
-            <a:off x="5582382" y="3506050"/>
+            <a:off x="5810982" y="3506050"/>
             <a:ext cx="1267726" cy="84594"/>
           </a:xfrm>
           <a:prstGeom prst="rect">
@@ -11255,7 +13608,7 @@
         </p:nvSpPr>
         <p:spPr>
           <a:xfrm>
-            <a:off x="7265001" y="3506038"/>
+            <a:off x="7493601" y="3506038"/>
             <a:ext cx="969648" cy="107276"/>
           </a:xfrm>
           <a:prstGeom prst="rect">
@@ -11298,7 +13651,7 @@
         </p:nvSpPr>
         <p:spPr>
           <a:xfrm>
-            <a:off x="5582382" y="3620528"/>
+            <a:off x="5810982" y="3620528"/>
             <a:ext cx="404097" cy="84594"/>
           </a:xfrm>
           <a:prstGeom prst="rect">
@@ -11341,7 +13694,7 @@
         </p:nvSpPr>
         <p:spPr>
           <a:xfrm>
-            <a:off x="8604190" y="3391560"/>
+            <a:off x="9152830" y="3391560"/>
             <a:ext cx="697489" cy="107276"/>
           </a:xfrm>
           <a:prstGeom prst="rect">
@@ -11384,7 +13737,7 @@
         </p:nvSpPr>
         <p:spPr>
           <a:xfrm>
-            <a:off x="5917532" y="3894480"/>
+            <a:off x="6146132" y="3894480"/>
             <a:ext cx="393289" cy="84594"/>
           </a:xfrm>
           <a:prstGeom prst="rect">
@@ -11427,7 +13780,7 @@
         </p:nvSpPr>
         <p:spPr>
           <a:xfrm>
-            <a:off x="6561568" y="3894480"/>
+            <a:off x="6790168" y="3894480"/>
             <a:ext cx="1476881" cy="84594"/>
           </a:xfrm>
           <a:prstGeom prst="rect">
@@ -11470,7 +13823,7 @@
         </p:nvSpPr>
         <p:spPr>
           <a:xfrm>
-            <a:off x="5927615" y="4032008"/>
+            <a:off x="6156215" y="4032008"/>
             <a:ext cx="659694" cy="84594"/>
           </a:xfrm>
           <a:prstGeom prst="rect">
@@ -11513,7 +13866,7 @@
         </p:nvSpPr>
         <p:spPr>
           <a:xfrm>
-            <a:off x="8604190" y="3894480"/>
+            <a:off x="9152830" y="3894480"/>
             <a:ext cx="1387245" cy="107277"/>
           </a:xfrm>
           <a:prstGeom prst="rect">
@@ -11556,7 +13909,7 @@
         </p:nvSpPr>
         <p:spPr>
           <a:xfrm>
-            <a:off x="10065412" y="3894480"/>
+            <a:off x="10614052" y="3894480"/>
             <a:ext cx="341093" cy="84594"/>
           </a:xfrm>
           <a:prstGeom prst="rect">
@@ -11599,7 +13952,7 @@
         </p:nvSpPr>
         <p:spPr>
           <a:xfrm>
-            <a:off x="8600584" y="4008958"/>
+            <a:off x="9149224" y="4008958"/>
             <a:ext cx="319490" cy="107276"/>
           </a:xfrm>
           <a:prstGeom prst="rect">
@@ -11642,7 +13995,7 @@
         </p:nvSpPr>
         <p:spPr>
           <a:xfrm>
-            <a:off x="5580210" y="4466170"/>
+            <a:off x="5808810" y="4466170"/>
             <a:ext cx="1385086" cy="84594"/>
           </a:xfrm>
           <a:prstGeom prst="rect">
@@ -11685,7 +14038,7 @@
         </p:nvSpPr>
         <p:spPr>
           <a:xfrm>
-            <a:off x="8604190" y="4401362"/>
+            <a:off x="9152830" y="4401362"/>
             <a:ext cx="543046" cy="103314"/>
           </a:xfrm>
           <a:prstGeom prst="rect">
@@ -11728,7 +14081,7 @@
         </p:nvSpPr>
         <p:spPr>
           <a:xfrm>
-            <a:off x="9220134" y="4397400"/>
+            <a:off x="9768774" y="4397400"/>
             <a:ext cx="1283919" cy="107276"/>
           </a:xfrm>
           <a:prstGeom prst="rect">
@@ -11771,7 +14124,7 @@
         </p:nvSpPr>
         <p:spPr>
           <a:xfrm>
-            <a:off x="8660705" y="4537798"/>
+            <a:off x="9209345" y="4537798"/>
             <a:ext cx="618648" cy="81724"/>
           </a:xfrm>
           <a:prstGeom prst="rect">
@@ -11814,7 +14167,7 @@
         </p:nvSpPr>
         <p:spPr>
           <a:xfrm>
-            <a:off x="6225694" y="4969090"/>
+            <a:off x="6454294" y="4969090"/>
             <a:ext cx="619016" cy="84594"/>
           </a:xfrm>
           <a:prstGeom prst="rect">
@@ -11857,7 +14210,7 @@
         </p:nvSpPr>
         <p:spPr>
           <a:xfrm>
-            <a:off x="8604190" y="4971960"/>
+            <a:off x="9152830" y="4971960"/>
             <a:ext cx="316620" cy="81724"/>
           </a:xfrm>
           <a:prstGeom prst="rect">
@@ -11900,7 +14253,7 @@
         </p:nvSpPr>
         <p:spPr>
           <a:xfrm>
-            <a:off x="9792174" y="4969078"/>
+            <a:off x="10340814" y="4969078"/>
             <a:ext cx="715853" cy="107277"/>
           </a:xfrm>
           <a:prstGeom prst="rect">
@@ -11943,7 +14296,7 @@
         </p:nvSpPr>
         <p:spPr>
           <a:xfrm>
-            <a:off x="8602387" y="5104803"/>
+            <a:off x="9151027" y="5104803"/>
             <a:ext cx="115378" cy="63360"/>
           </a:xfrm>
           <a:prstGeom prst="rect">
@@ -11984,7 +14337,7 @@
 </p:sld>
 </file>
 
-<file path=ppt/slides/slide4.xml><?xml version="1.0" encoding="utf-8"?>
+<file path=ppt/slides/slide5.xml><?xml version="1.0" encoding="utf-8"?>
 <p:sld xmlns:a="http://schemas.openxmlformats.org/drawingml/2006/main" xmlns:r="http://schemas.openxmlformats.org/officeDocument/2006/relationships" xmlns:p="http://schemas.openxmlformats.org/presentationml/2006/main">
   <p:cSld name="Slide 4">
     <p:spTree>
@@ -14379,7 +16732,7 @@
 </p:sld>
 </file>
 
-<file path=ppt/slides/slide5.xml><?xml version="1.0" encoding="utf-8"?>
+<file path=ppt/slides/slide6.xml><?xml version="1.0" encoding="utf-8"?>
 <p:sld xmlns:a="http://schemas.openxmlformats.org/drawingml/2006/main" xmlns:r="http://schemas.openxmlformats.org/officeDocument/2006/relationships" xmlns:p="http://schemas.openxmlformats.org/presentationml/2006/main">
   <p:cSld name="Slide 5">
     <p:spTree>
@@ -16579,7 +18932,7 @@
 </p:sld>
 </file>
 
-<file path=ppt/slides/slide6.xml><?xml version="1.0" encoding="utf-8"?>
+<file path=ppt/slides/slide7.xml><?xml version="1.0" encoding="utf-8"?>
 <p:sld xmlns:a="http://schemas.openxmlformats.org/drawingml/2006/main" xmlns:r="http://schemas.openxmlformats.org/officeDocument/2006/relationships" xmlns:p="http://schemas.openxmlformats.org/presentationml/2006/main">
   <p:cSld name="Slide 6">
     <p:spTree>
@@ -18584,7 +20937,7 @@
 </p:sld>
 </file>
 
-<file path=ppt/slides/slide7.xml><?xml version="1.0" encoding="utf-8"?>
+<file path=ppt/slides/slide8.xml><?xml version="1.0" encoding="utf-8"?>
 <p:sld xmlns:a="http://schemas.openxmlformats.org/drawingml/2006/main" xmlns:r="http://schemas.openxmlformats.org/officeDocument/2006/relationships" xmlns:p="http://schemas.openxmlformats.org/presentationml/2006/main">
   <p:cSld name="Slide 7">
     <p:spTree>
@@ -18660,6 +21013,10 @@
           </a:solidFill>
           <a:ln/>
         </p:spPr>
+        <p:txBody>
+          <a:bodyPr/>
+          <a:p/>
+        </p:txBody>
       </p:sp>
       <p:sp>
         <p:nvSpPr>
@@ -18718,6 +21075,10 @@
           </a:solidFill>
           <a:ln/>
         </p:spPr>
+        <p:txBody>
+          <a:bodyPr/>
+          <a:p/>
+        </p:txBody>
       </p:sp>
       <p:sp>
         <p:nvSpPr>
@@ -18776,6 +21137,10 @@
           </a:solidFill>
           <a:ln/>
         </p:spPr>
+        <p:txBody>
+          <a:bodyPr/>
+          <a:p/>
+        </p:txBody>
       </p:sp>
       <p:sp>
         <p:nvSpPr>
@@ -18834,6 +21199,10 @@
           </a:solidFill>
           <a:ln/>
         </p:spPr>
+        <p:txBody>
+          <a:bodyPr/>
+          <a:p/>
+        </p:txBody>
       </p:sp>
       <p:sp>
         <p:nvSpPr>
@@ -18892,6 +21261,10 @@
           </a:solidFill>
           <a:ln/>
         </p:spPr>
+        <p:txBody>
+          <a:bodyPr/>
+          <a:p/>
+        </p:txBody>
       </p:sp>
       <p:sp>
         <p:nvSpPr>
@@ -19569,7 +21942,7 @@
                             <a:schemeClr val="tx1"/>
                           </a:solidFill>
                         </a:rPr>
-                        <a:t>(Argentina)</a:t>
+                        <a:t>(Spain)</a:t>
                       </a:r>
                       <a:pPr indent="0" marL="0">
                         <a:buNone/>
@@ -19897,6 +22270,10 @@
             </a:outerShdw>
           </a:effectLst>
         </p:spPr>
+        <p:txBody>
+          <a:bodyPr/>
+          <a:p/>
+        </p:txBody>
       </p:sp>
       <p:sp>
         <p:nvSpPr>
@@ -19996,6 +22373,10 @@
             </a:outerShdw>
           </a:effectLst>
         </p:spPr>
+        <p:txBody>
+          <a:bodyPr/>
+          <a:p/>
+        </p:txBody>
       </p:sp>
       <p:sp>
         <p:nvSpPr>
@@ -20027,7 +22408,7 @@
                   <a:schemeClr val="accent2"/>
                 </a:solidFill>
               </a:rPr>
-              <a:t>TRANSITION TO OTHER WORKFLOWS</a:t>
+              <a:t>TRANSITION TO OTHER DOMAINS</a:t>
             </a:r>
             <a:endParaRPr lang="en-US" sz="1300" dirty="0"/>
           </a:p>
@@ -20638,7 +23019,7 @@
 </p:sld>
 </file>
 
-<file path=ppt/slides/slide8.xml><?xml version="1.0" encoding="utf-8"?>
+<file path=ppt/slides/slide9.xml><?xml version="1.0" encoding="utf-8"?>
 <p:sld xmlns:a="http://schemas.openxmlformats.org/drawingml/2006/main" xmlns:r="http://schemas.openxmlformats.org/officeDocument/2006/relationships" xmlns:p="http://schemas.openxmlformats.org/presentationml/2006/main">
   <p:cSld name="Slide 8">
     <p:spTree>
@@ -22204,1847 +24585,6 @@
 </p:sld>
 </file>
 
-<file path=ppt/slides/slide9.xml><?xml version="1.0" encoding="utf-8"?>
-<p:sld xmlns:a="http://schemas.openxmlformats.org/drawingml/2006/main" xmlns:r="http://schemas.openxmlformats.org/officeDocument/2006/relationships" xmlns:p="http://schemas.openxmlformats.org/presentationml/2006/main">
-  <p:cSld name="Slide 9">
-    <p:spTree>
-      <p:nvGrpSpPr>
-        <p:cNvPr id="1" name=""/>
-        <p:cNvGrpSpPr/>
-        <p:nvPr/>
-      </p:nvGrpSpPr>
-      <p:grpSpPr>
-        <a:xfrm>
-          <a:off x="0" y="0"/>
-          <a:ext cx="0" cy="0"/>
-          <a:chOff x="0" y="0"/>
-          <a:chExt cx="0" cy="0"/>
-        </a:xfrm>
-      </p:grpSpPr>
-      <p:sp>
-        <p:nvSpPr>
-          <p:cNvPr id="2" name="Text 2"/>
-          <p:cNvSpPr/>
-          <p:nvPr>
-            <p:ph idx="102" type="body" hasCustomPrompt="1"/>
-          </p:nvPr>
-        </p:nvSpPr>
-        <p:spPr>
-          <a:xfrm>
-            <a:off x="548640" y="384048"/>
-            <a:ext cx="8229600" cy="219456"/>
-          </a:xfrm>
-          <a:prstGeom prst="rect">
-            <a:avLst/>
-          </a:prstGeom>
-          <a:noFill/>
-          <a:ln/>
-        </p:spPr>
-        <p:txBody>
-          <a:bodyPr wrap="square" lIns="0" tIns="0" rIns="0" bIns="0" rtlCol="0" anchor="t"/>
-          <a:lstStyle/>
-          <a:p>
-            <a:pPr indent="0" marL="0">
-              <a:buNone/>
-            </a:pPr>
-            <a:r>
-              <a:rPr lang="en-US" sz="1000" b="1" spc="100" kern="0" dirty="0">
-                <a:solidFill>
-                  <a:schemeClr val="accent2"/>
-                </a:solidFill>
-              </a:rPr>
-              <a:t>CONVERSATIONAL AI IN CLINICAL TRIALS AND MARKET ACCESS</a:t>
-            </a:r>
-            <a:endParaRPr lang="en-US" sz="1000" dirty="0"/>
-          </a:p>
-        </p:txBody>
-      </p:sp>
-      <p:sp>
-        <p:nvSpPr>
-          <p:cNvPr id="3" name="tracker RWE"/>
-          <p:cNvSpPr/>
-          <p:nvPr/>
-        </p:nvSpPr>
-        <p:spPr>
-          <a:xfrm>
-            <a:off x="5657393" y="365760"/>
-            <a:ext cx="386791" cy="237744"/>
-          </a:xfrm>
-          <a:prstGeom prst="roundRect">
-            <a:avLst>
-              <a:gd name="adj" fmla="val 50000"/>
-            </a:avLst>
-          </a:prstGeom>
-          <a:solidFill>
-            <a:schemeClr val="accent5"/>
-          </a:solidFill>
-          <a:ln/>
-        </p:spPr>
-      </p:sp>
-      <p:sp>
-        <p:nvSpPr>
-          <p:cNvPr id="4" name="Text 2"/>
-          <p:cNvSpPr txBox="1"/>
-          <p:nvPr/>
-        </p:nvSpPr>
-        <p:spPr>
-          <a:xfrm>
-            <a:off x="5657393" y="365760"/>
-            <a:ext cx="386791" cy="237744"/>
-          </a:xfrm>
-          <a:prstGeom prst="rect">
-            <a:avLst/>
-          </a:prstGeom>
-          <a:noFill/>
-          <a:ln/>
-        </p:spPr>
-        <p:txBody>
-          <a:bodyPr wrap="square" lIns="0" tIns="0" rIns="0" bIns="0" rtlCol="0" anchor="ctr"/>
-          <a:lstStyle/>
-          <a:p>
-            <a:pPr algn="ctr" indent="0" marL="0">
-              <a:buNone/>
-            </a:pPr>
-            <a:r>
-              <a:rPr lang="en-US" sz="750" b="1" dirty="0">
-                <a:solidFill>
-                  <a:schemeClr val="accent4"/>
-                </a:solidFill>
-              </a:rPr>
-              <a:t>RWE</a:t>
-            </a:r>
-            <a:endParaRPr lang="en-US" sz="750" dirty="0"/>
-          </a:p>
-        </p:txBody>
-      </p:sp>
-      <p:sp>
-        <p:nvSpPr>
-          <p:cNvPr id="5" name="tracker Commercial Intelligence"/>
-          <p:cNvSpPr/>
-          <p:nvPr/>
-        </p:nvSpPr>
-        <p:spPr>
-          <a:xfrm>
-            <a:off x="6108192" y="365760"/>
-            <a:ext cx="1502359" cy="237744"/>
-          </a:xfrm>
-          <a:prstGeom prst="roundRect">
-            <a:avLst>
-              <a:gd name="adj" fmla="val 50000"/>
-            </a:avLst>
-          </a:prstGeom>
-          <a:solidFill>
-            <a:schemeClr val="accent5"/>
-          </a:solidFill>
-          <a:ln/>
-        </p:spPr>
-      </p:sp>
-      <p:sp>
-        <p:nvSpPr>
-          <p:cNvPr id="6" name="Text 4"/>
-          <p:cNvSpPr txBox="1"/>
-          <p:nvPr/>
-        </p:nvSpPr>
-        <p:spPr>
-          <a:xfrm>
-            <a:off x="6108192" y="365760"/>
-            <a:ext cx="1502359" cy="237744"/>
-          </a:xfrm>
-          <a:prstGeom prst="rect">
-            <a:avLst/>
-          </a:prstGeom>
-          <a:noFill/>
-          <a:ln/>
-        </p:spPr>
-        <p:txBody>
-          <a:bodyPr wrap="square" lIns="0" tIns="0" rIns="0" bIns="0" rtlCol="0" anchor="ctr"/>
-          <a:lstStyle/>
-          <a:p>
-            <a:pPr algn="ctr" indent="0" marL="0">
-              <a:buNone/>
-            </a:pPr>
-            <a:r>
-              <a:rPr lang="en-US" sz="750" b="1" dirty="0">
-                <a:solidFill>
-                  <a:schemeClr val="accent4"/>
-                </a:solidFill>
-              </a:rPr>
-              <a:t>Commercial Intelligence</a:t>
-            </a:r>
-            <a:endParaRPr lang="en-US" sz="750" dirty="0"/>
-          </a:p>
-        </p:txBody>
-      </p:sp>
-      <p:sp>
-        <p:nvSpPr>
-          <p:cNvPr id="7" name="tracker Medical / Regulatory Research"/>
-          <p:cNvSpPr/>
-          <p:nvPr/>
-        </p:nvSpPr>
-        <p:spPr>
-          <a:xfrm>
-            <a:off x="7674559" y="365760"/>
-            <a:ext cx="1837030" cy="237744"/>
-          </a:xfrm>
-          <a:prstGeom prst="roundRect">
-            <a:avLst>
-              <a:gd name="adj" fmla="val 50000"/>
-            </a:avLst>
-          </a:prstGeom>
-          <a:solidFill>
-            <a:schemeClr val="accent5"/>
-          </a:solidFill>
-          <a:ln/>
-        </p:spPr>
-      </p:sp>
-      <p:sp>
-        <p:nvSpPr>
-          <p:cNvPr id="8" name="Text 6"/>
-          <p:cNvSpPr txBox="1"/>
-          <p:nvPr/>
-        </p:nvSpPr>
-        <p:spPr>
-          <a:xfrm>
-            <a:off x="7674559" y="365760"/>
-            <a:ext cx="1837030" cy="237744"/>
-          </a:xfrm>
-          <a:prstGeom prst="rect">
-            <a:avLst/>
-          </a:prstGeom>
-          <a:noFill/>
-          <a:ln/>
-        </p:spPr>
-        <p:txBody>
-          <a:bodyPr wrap="square" lIns="0" tIns="0" rIns="0" bIns="0" rtlCol="0" anchor="ctr"/>
-          <a:lstStyle/>
-          <a:p>
-            <a:pPr algn="ctr" indent="0" marL="0">
-              <a:buNone/>
-            </a:pPr>
-            <a:r>
-              <a:rPr lang="en-US" sz="750" b="1" dirty="0">
-                <a:solidFill>
-                  <a:schemeClr val="accent4"/>
-                </a:solidFill>
-              </a:rPr>
-              <a:t>Medical / Regulatory Research</a:t>
-            </a:r>
-            <a:endParaRPr lang="en-US" sz="750" dirty="0"/>
-          </a:p>
-        </p:txBody>
-      </p:sp>
-      <p:sp>
-        <p:nvSpPr>
-          <p:cNvPr id="9" name="tracker Clinical Trials"/>
-          <p:cNvSpPr/>
-          <p:nvPr/>
-        </p:nvSpPr>
-        <p:spPr>
-          <a:xfrm>
-            <a:off x="9575597" y="365760"/>
-            <a:ext cx="1056132" cy="237744"/>
-          </a:xfrm>
-          <a:prstGeom prst="roundRect">
-            <a:avLst>
-              <a:gd name="adj" fmla="val 50000"/>
-            </a:avLst>
-          </a:prstGeom>
-          <a:solidFill>
-            <a:schemeClr val="accent1"/>
-          </a:solidFill>
-          <a:ln/>
-        </p:spPr>
-      </p:sp>
-      <p:sp>
-        <p:nvSpPr>
-          <p:cNvPr id="10" name="Text 8"/>
-          <p:cNvSpPr txBox="1"/>
-          <p:nvPr/>
-        </p:nvSpPr>
-        <p:spPr>
-          <a:xfrm>
-            <a:off x="9575597" y="365760"/>
-            <a:ext cx="1056132" cy="237744"/>
-          </a:xfrm>
-          <a:prstGeom prst="rect">
-            <a:avLst/>
-          </a:prstGeom>
-          <a:noFill/>
-          <a:ln/>
-        </p:spPr>
-        <p:txBody>
-          <a:bodyPr wrap="square" lIns="0" tIns="0" rIns="0" bIns="0" rtlCol="0" anchor="ctr"/>
-          <a:lstStyle/>
-          <a:p>
-            <a:pPr algn="ctr" indent="0" marL="0">
-              <a:buNone/>
-            </a:pPr>
-            <a:r>
-              <a:rPr lang="en-US" sz="750" b="1" dirty="0">
-                <a:solidFill>
-                  <a:schemeClr val="bg1"/>
-                </a:solidFill>
-              </a:rPr>
-              <a:t>Clinical Trials</a:t>
-            </a:r>
-            <a:endParaRPr lang="en-US" sz="750" dirty="0"/>
-          </a:p>
-        </p:txBody>
-      </p:sp>
-      <p:sp>
-        <p:nvSpPr>
-          <p:cNvPr id="11" name="tracker Market Access"/>
-          <p:cNvSpPr/>
-          <p:nvPr/>
-        </p:nvSpPr>
-        <p:spPr>
-          <a:xfrm>
-            <a:off x="10695737" y="365760"/>
-            <a:ext cx="944575" cy="237744"/>
-          </a:xfrm>
-          <a:prstGeom prst="roundRect">
-            <a:avLst>
-              <a:gd name="adj" fmla="val 50000"/>
-            </a:avLst>
-          </a:prstGeom>
-          <a:solidFill>
-            <a:schemeClr val="accent1"/>
-          </a:solidFill>
-          <a:ln/>
-        </p:spPr>
-      </p:sp>
-      <p:sp>
-        <p:nvSpPr>
-          <p:cNvPr id="12" name="Text 10"/>
-          <p:cNvSpPr txBox="1"/>
-          <p:nvPr/>
-        </p:nvSpPr>
-        <p:spPr>
-          <a:xfrm>
-            <a:off x="10695737" y="365760"/>
-            <a:ext cx="944575" cy="237744"/>
-          </a:xfrm>
-          <a:prstGeom prst="rect">
-            <a:avLst/>
-          </a:prstGeom>
-          <a:noFill/>
-          <a:ln/>
-        </p:spPr>
-        <p:txBody>
-          <a:bodyPr wrap="square" lIns="0" tIns="0" rIns="0" bIns="0" rtlCol="0" anchor="ctr"/>
-          <a:lstStyle/>
-          <a:p>
-            <a:pPr algn="ctr" indent="0" marL="0">
-              <a:buNone/>
-            </a:pPr>
-            <a:r>
-              <a:rPr lang="en-US" sz="750" b="1" dirty="0">
-                <a:solidFill>
-                  <a:schemeClr val="bg1"/>
-                </a:solidFill>
-              </a:rPr>
-              <a:t>Market Access</a:t>
-            </a:r>
-            <a:endParaRPr lang="en-US" sz="750" dirty="0"/>
-          </a:p>
-        </p:txBody>
-      </p:sp>
-      <p:sp>
-        <p:nvSpPr>
-          <p:cNvPr id="13" name="Text 2"/>
-          <p:cNvSpPr/>
-          <p:nvPr>
-            <p:ph idx="103" type="title" hasCustomPrompt="1"/>
-          </p:nvPr>
-        </p:nvSpPr>
-        <p:spPr>
-          <a:xfrm>
-            <a:off x="548640" y="640080"/>
-            <a:ext cx="11091672" cy="749808"/>
-          </a:xfrm>
-          <a:prstGeom prst="rect">
-            <a:avLst/>
-          </a:prstGeom>
-          <a:noFill/>
-          <a:ln/>
-        </p:spPr>
-        <p:txBody>
-          <a:bodyPr wrap="square" lIns="0" tIns="0" rIns="0" bIns="0" rtlCol="0" anchor="t"/>
-          <a:lstStyle/>
-          <a:p>
-            <a:pPr algn="l" indent="0" marL="0">
-              <a:buNone/>
-            </a:pPr>
-            <a:r>
-              <a:rPr lang="en-US" sz="2200" b="1" dirty="0">
-                <a:solidFill>
-                  <a:schemeClr val="accent1"/>
-                </a:solidFill>
-              </a:rPr>
-              <a:t>Conversational offerings address specific trial operations and pricing questions, not the entire clinical or market-access workflow</a:t>
-            </a:r>
-            <a:endParaRPr lang="en-US" sz="2200" dirty="0"/>
-          </a:p>
-        </p:txBody>
-      </p:sp>
-      <p:sp>
-        <p:nvSpPr>
-          <p:cNvPr id="14" name="label"/>
-          <p:cNvSpPr txBox="1"/>
-          <p:nvPr/>
-        </p:nvSpPr>
-        <p:spPr>
-          <a:xfrm>
-            <a:off x="548640" y="1481328"/>
-            <a:ext cx="11091672" cy="201168"/>
-          </a:xfrm>
-          <a:prstGeom prst="rect">
-            <a:avLst/>
-          </a:prstGeom>
-          <a:noFill/>
-          <a:ln/>
-        </p:spPr>
-        <p:txBody>
-          <a:bodyPr wrap="square" lIns="0" tIns="0" rIns="0" bIns="0" rtlCol="0" anchor="t"/>
-          <a:lstStyle/>
-          <a:p>
-            <a:pPr indent="0" marL="0">
-              <a:buNone/>
-            </a:pPr>
-            <a:r>
-              <a:rPr lang="en-US" sz="1000" b="1" spc="100" kern="0" dirty="0">
-                <a:solidFill>
-                  <a:schemeClr val="accent2"/>
-                </a:solidFill>
-              </a:rPr>
-              <a:t>CLINICAL TRIALS — COMPETITIVE EXAMPLES</a:t>
-            </a:r>
-            <a:endParaRPr lang="en-US" sz="1000" dirty="0"/>
-          </a:p>
-        </p:txBody>
-      </p:sp>
-      <p:graphicFrame>
-        <p:nvGraphicFramePr>
-          <p:cNvPr id="10" name="task table"/>
-          <p:cNvGraphicFramePr>
-            <a:graphicFrameLocks noGrp="1"/>
-          </p:cNvGraphicFramePr>
-          <p:nvPr>
-            <p:extLst>
-              <p:ext uri="{D42A27DB-BD31-4B8C-83A1-F6EECF244321}">
-                <p14:modId xmlns:p14="http://schemas.microsoft.com/office/powerpoint/2010/main" val="1579011935"/>
-              </p:ext>
-            </p:extLst>
-          </p:nvPr>
-        </p:nvGraphicFramePr>
-        <p:xfrm>
-          <a:off x="548640" y="1755648"/>
-          <a:ext cx="11091672" cy="914400"/>
-        </p:xfrm>
-        <a:graphic>
-          <a:graphicData uri="http://schemas.openxmlformats.org/drawingml/2006/table">
-            <a:tbl>
-              <a:tblPr/>
-              <a:tblGrid>
-                <a:gridCol w="2286000"/>
-                <a:gridCol w="5760720"/>
-                <a:gridCol w="3044952"/>
-              </a:tblGrid>
-              <a:tr h="329184">
-                <a:tc>
-                  <a:txBody>
-                    <a:bodyPr/>
-                    <a:lstStyle/>
-                    <a:p>
-                      <a:pPr algn="ctr" indent="0" marL="0">
-                        <a:buNone/>
-                      </a:pPr>
-                      <a:r>
-                        <a:rPr lang="en-US" sz="900" b="1" spc="100" kern="0" dirty="0">
-                          <a:solidFill>
-                            <a:schemeClr val="bg1"/>
-                          </a:solidFill>
-                        </a:rPr>
-                        <a:t>CUSTOMER TASK</a:t>
-                      </a:r>
-                      <a:endParaRPr lang="en-US" sz="900" dirty="0"/>
-                    </a:p>
-                  </a:txBody>
-                  <a:tcPr marL="109728" marR="109728" marT="64008" marB="64008" anchor="ctr">
-                    <a:lnL w="0" cap="flat" cmpd="sng" algn="ctr">
-                      <a:noFill/>
-                    </a:lnL>
-                    <a:lnR w="0" cap="flat" cmpd="sng" algn="ctr">
-                      <a:noFill/>
-                    </a:lnR>
-                    <a:lnT w="0" cap="flat" cmpd="sng" algn="ctr">
-                      <a:noFill/>
-                    </a:lnT>
-                    <a:lnB w="0" cap="flat" cmpd="sng" algn="ctr">
-                      <a:noFill/>
-                    </a:lnB>
-                    <a:solidFill>
-                      <a:schemeClr val="accent1"/>
-                    </a:solidFill>
-                  </a:tcPr>
-                </a:tc>
-                <a:tc>
-                  <a:txBody>
-                    <a:bodyPr/>
-                    <a:lstStyle/>
-                    <a:p>
-                      <a:pPr algn="ctr" indent="0" marL="0">
-                        <a:buNone/>
-                      </a:pPr>
-                      <a:r>
-                        <a:rPr lang="en-US" sz="900" b="1" spc="100" kern="0" dirty="0">
-                          <a:solidFill>
-                            <a:schemeClr val="bg1"/>
-                          </a:solidFill>
-                        </a:rPr>
-                        <a:t>CONVERSATIONAL AI OFFERINGS</a:t>
-                      </a:r>
-                      <a:endParaRPr lang="en-US" sz="900" dirty="0"/>
-                    </a:p>
-                  </a:txBody>
-                  <a:tcPr marL="109728" marR="109728" marT="64008" marB="64008" anchor="ctr">
-                    <a:lnL w="0" cap="flat" cmpd="sng" algn="ctr">
-                      <a:noFill/>
-                    </a:lnL>
-                    <a:lnR w="0" cap="flat" cmpd="sng" algn="ctr">
-                      <a:noFill/>
-                    </a:lnR>
-                    <a:lnT w="0" cap="flat" cmpd="sng" algn="ctr">
-                      <a:noFill/>
-                    </a:lnT>
-                    <a:lnB w="0" cap="flat" cmpd="sng" algn="ctr">
-                      <a:noFill/>
-                    </a:lnB>
-                    <a:solidFill>
-                      <a:schemeClr val="accent1"/>
-                    </a:solidFill>
-                  </a:tcPr>
-                </a:tc>
-                <a:tc>
-                  <a:txBody>
-                    <a:bodyPr/>
-                    <a:lstStyle/>
-                    <a:p>
-                      <a:pPr algn="ctr" indent="0" marL="0">
-                        <a:buNone/>
-                      </a:pPr>
-                      <a:r>
-                        <a:rPr lang="en-US" sz="900" b="1" spc="100" kern="0" dirty="0">
-                          <a:solidFill>
-                            <a:schemeClr val="bg1"/>
-                          </a:solidFill>
-                        </a:rPr>
-                        <a:t>RELEVANT OPTUM LS OFFERINGS</a:t>
-                      </a:r>
-                      <a:endParaRPr lang="en-US" sz="900" dirty="0"/>
-                    </a:p>
-                  </a:txBody>
-                  <a:tcPr marL="109728" marR="109728" marT="64008" marB="64008" anchor="ctr">
-                    <a:lnL w="0" cap="flat" cmpd="sng" algn="ctr">
-                      <a:noFill/>
-                    </a:lnL>
-                    <a:lnR w="0" cap="flat" cmpd="sng" algn="ctr">
-                      <a:noFill/>
-                    </a:lnR>
-                    <a:lnT w="0" cap="flat" cmpd="sng" algn="ctr">
-                      <a:noFill/>
-                    </a:lnT>
-                    <a:lnB w="0" cap="flat" cmpd="sng" algn="ctr">
-                      <a:noFill/>
-                    </a:lnB>
-                    <a:solidFill>
-                      <a:schemeClr val="accent1"/>
-                    </a:solidFill>
-                  </a:tcPr>
-                </a:tc>
-              </a:tr>
-              <a:tr h="564811">
-                <a:tc>
-                  <a:txBody>
-                    <a:bodyPr/>
-                    <a:lstStyle/>
-                    <a:p>
-                      <a:pPr algn="ctr" indent="0" marL="0">
-                        <a:buNone/>
-                      </a:pPr>
-                      <a:r>
-                        <a:rPr lang="en-US" sz="1050" b="1" dirty="0">
-                          <a:solidFill>
-                            <a:schemeClr val="accent1"/>
-                          </a:solidFill>
-                        </a:rPr>
-                        <a:t>Trial feasibility, site and investigator identification</a:t>
-                      </a:r>
-                      <a:endParaRPr lang="en-US" sz="1050" dirty="0"/>
-                    </a:p>
-                  </a:txBody>
-                  <a:tcPr marL="109728" marR="109728" marT="64008" marB="64008" anchor="ctr">
-                    <a:lnL w="0" cap="flat" cmpd="sng" algn="ctr">
-                      <a:noFill/>
-                    </a:lnL>
-                    <a:lnR w="25400" cap="flat" cmpd="sng" algn="ctr">
-                      <a:solidFill>
-                        <a:srgbClr val="FFFFFF"/>
-                      </a:solidFill>
-                      <a:prstDash val="solid"/>
-                      <a:round/>
-                      <a:headEnd type="none" w="med" len="med"/>
-                      <a:tailEnd type="none" w="med" len="med"/>
-                    </a:lnR>
-                    <a:lnT w="25400" cap="flat" cmpd="sng" algn="ctr">
-                      <a:solidFill>
-                        <a:srgbClr val="FFFFFF"/>
-                      </a:solidFill>
-                      <a:prstDash val="solid"/>
-                      <a:round/>
-                      <a:headEnd type="none" w="med" len="med"/>
-                      <a:tailEnd type="none" w="med" len="med"/>
-                    </a:lnT>
-                    <a:lnB w="25400" cap="flat" cmpd="sng" algn="ctr">
-                      <a:solidFill>
-                        <a:srgbClr val="FFFFFF"/>
-                      </a:solidFill>
-                      <a:prstDash val="solid"/>
-                      <a:round/>
-                      <a:headEnd type="none" w="med" len="med"/>
-                      <a:tailEnd type="none" w="med" len="med"/>
-                    </a:lnB>
-                    <a:solidFill>
-                      <a:schemeClr val="accent5"/>
-                    </a:solidFill>
-                  </a:tcPr>
-                </a:tc>
-                <a:tc>
-                  <a:txBody>
-                    <a:bodyPr/>
-                    <a:lstStyle/>
-                    <a:p>
-                      <a:pPr indent="0" marL="0">
-                        <a:buNone/>
-                      </a:pPr>
-                      <a:r>
-                        <a:rPr lang="en-US" sz="950" dirty="0">
-                          <a:solidFill>
-                            <a:schemeClr val="tx1"/>
-                          </a:solidFill>
-                        </a:rPr>
-                        <a:t>TriNetX's </a:t>
-                      </a:r>
-                      <a:pPr indent="0" marL="0">
-                        <a:buNone/>
-                      </a:pPr>
-                      <a:r>
-                        <a:rPr lang="en-US" sz="950" b="1" dirty="0">
-                          <a:solidFill>
-                            <a:schemeClr val="tx1"/>
-                          </a:solidFill>
-                        </a:rPr>
-                        <a:t>Terrain AI Assistant</a:t>
-                      </a:r>
-                      <a:pPr indent="0" marL="0">
-                        <a:buNone/>
-                      </a:pPr>
-                      <a:r>
-                        <a:rPr lang="en-US" sz="950" dirty="0">
-                          <a:solidFill>
-                            <a:schemeClr val="tx1"/>
-                          </a:solidFill>
-                        </a:rPr>
-                        <a:t>: natural-language questions about trial sites, investigator experience and patient populations</a:t>
-                      </a:r>
-                      <a:endParaRPr lang="en-US" sz="950" dirty="0"/>
-                    </a:p>
-                  </a:txBody>
-                  <a:tcPr marL="109728" marR="109728" marT="64008" marB="64008" anchor="ctr">
-                    <a:lnL w="0" cap="flat" cmpd="sng" algn="ctr">
-                      <a:noFill/>
-                    </a:lnL>
-                    <a:lnR w="0" cap="flat" cmpd="sng" algn="ctr">
-                      <a:noFill/>
-                    </a:lnR>
-                    <a:lnT w="0" cap="flat" cmpd="sng" algn="ctr">
-                      <a:noFill/>
-                    </a:lnT>
-                    <a:lnB w="9525" cap="flat" cmpd="sng" algn="ctr">
-                      <a:solidFill>
-                        <a:srgbClr val="D9D4C7"/>
-                      </a:solidFill>
-                      <a:prstDash val="solid"/>
-                      <a:round/>
-                      <a:headEnd type="none" w="med" len="med"/>
-                      <a:tailEnd type="none" w="med" len="med"/>
-                    </a:lnB>
-                  </a:tcPr>
-                </a:tc>
-                <a:tc>
-                  <a:txBody>
-                    <a:bodyPr/>
-                    <a:lstStyle/>
-                    <a:p>
-                      <a:pPr indent="0" marL="0">
-                        <a:buNone/>
-                      </a:pPr>
-                      <a:r>
-                        <a:rPr lang="en-US" sz="950" dirty="0">
-                          <a:solidFill>
-                            <a:schemeClr val="tx1"/>
-                          </a:solidFill>
-                        </a:rPr>
-                        <a:t>Prospector Data Mining Studio; Optum Digital Research Network</a:t>
-                      </a:r>
-                      <a:endParaRPr lang="en-US" sz="950" dirty="0"/>
-                    </a:p>
-                  </a:txBody>
-                  <a:tcPr marL="109728" marR="109728" marT="64008" marB="64008" anchor="ctr">
-                    <a:lnL w="0" cap="flat" cmpd="sng" algn="ctr">
-                      <a:noFill/>
-                    </a:lnL>
-                    <a:lnR w="0" cap="flat" cmpd="sng" algn="ctr">
-                      <a:noFill/>
-                    </a:lnR>
-                    <a:lnT w="0" cap="flat" cmpd="sng" algn="ctr">
-                      <a:noFill/>
-                    </a:lnT>
-                    <a:lnB w="9525" cap="flat" cmpd="sng" algn="ctr">
-                      <a:solidFill>
-                        <a:srgbClr val="D9D4C7"/>
-                      </a:solidFill>
-                      <a:prstDash val="solid"/>
-                      <a:round/>
-                      <a:headEnd type="none" w="med" len="med"/>
-                      <a:tailEnd type="none" w="med" len="med"/>
-                    </a:lnB>
-                  </a:tcPr>
-                </a:tc>
-              </a:tr>
-              <a:tr h="650028">
-                <a:tc>
-                  <a:txBody>
-                    <a:bodyPr/>
-                    <a:lstStyle/>
-                    <a:p>
-                      <a:pPr algn="ctr" indent="0" marL="0">
-                        <a:buNone/>
-                      </a:pPr>
-                      <a:r>
-                        <a:rPr lang="en-US" sz="1050" b="1" dirty="0">
-                          <a:solidFill>
-                            <a:schemeClr val="accent1"/>
-                          </a:solidFill>
-                        </a:rPr>
-                        <a:t>Clinical-trial document operations</a:t>
-                      </a:r>
-                      <a:endParaRPr lang="en-US" sz="1050" dirty="0"/>
-                    </a:p>
-                  </a:txBody>
-                  <a:tcPr marL="109728" marR="109728" marT="64008" marB="64008" anchor="ctr">
-                    <a:lnL w="0" cap="flat" cmpd="sng" algn="ctr">
-                      <a:noFill/>
-                    </a:lnL>
-                    <a:lnR w="25400" cap="flat" cmpd="sng" algn="ctr">
-                      <a:solidFill>
-                        <a:srgbClr val="FFFFFF"/>
-                      </a:solidFill>
-                      <a:prstDash val="solid"/>
-                      <a:round/>
-                      <a:headEnd type="none" w="med" len="med"/>
-                      <a:tailEnd type="none" w="med" len="med"/>
-                    </a:lnR>
-                    <a:lnT w="25400" cap="flat" cmpd="sng" algn="ctr">
-                      <a:solidFill>
-                        <a:srgbClr val="FFFFFF"/>
-                      </a:solidFill>
-                      <a:prstDash val="solid"/>
-                      <a:round/>
-                      <a:headEnd type="none" w="med" len="med"/>
-                      <a:tailEnd type="none" w="med" len="med"/>
-                    </a:lnT>
-                    <a:lnB w="25400" cap="flat" cmpd="sng" algn="ctr">
-                      <a:solidFill>
-                        <a:srgbClr val="FFFFFF"/>
-                      </a:solidFill>
-                      <a:prstDash val="solid"/>
-                      <a:round/>
-                      <a:headEnd type="none" w="med" len="med"/>
-                      <a:tailEnd type="none" w="med" len="med"/>
-                    </a:lnB>
-                    <a:solidFill>
-                      <a:schemeClr val="accent5"/>
-                    </a:solidFill>
-                  </a:tcPr>
-                </a:tc>
-                <a:tc>
-                  <a:txBody>
-                    <a:bodyPr/>
-                    <a:lstStyle/>
-                    <a:p>
-                      <a:pPr indent="0" marL="0">
-                        <a:buNone/>
-                      </a:pPr>
-                      <a:r>
-                        <a:rPr lang="en-US" sz="950" dirty="0">
-                          <a:solidFill>
-                            <a:schemeClr val="tx1"/>
-                          </a:solidFill>
-                        </a:rPr>
-                        <a:t>Taimei's </a:t>
-                      </a:r>
-                      <a:pPr indent="0" marL="0">
-                        <a:buNone/>
-                      </a:pPr>
-                      <a:r>
-                        <a:rPr lang="en-US" sz="950" b="1" dirty="0">
-                          <a:solidFill>
-                            <a:schemeClr val="tx1"/>
-                          </a:solidFill>
-                        </a:rPr>
-                        <a:t>Wiz-iCTA</a:t>
-                      </a:r>
-                      <a:pPr indent="0" marL="0">
-                        <a:buNone/>
-                      </a:pPr>
-                      <a:r>
-                        <a:rPr lang="en-US" sz="950" dirty="0">
-                          <a:solidFill>
-                            <a:schemeClr val="tx1"/>
-                          </a:solidFill>
-                        </a:rPr>
-                        <a:t> </a:t>
-                      </a:r>
-                      <a:pPr indent="0" marL="0">
-                        <a:buNone/>
-                      </a:pPr>
-                      <a:r>
-                        <a:rPr lang="en-US" sz="950" dirty="0">
-                          <a:solidFill>
-                            <a:schemeClr val="tx1"/>
-                          </a:solidFill>
-                        </a:rPr>
-                        <a:t>(China)</a:t>
-                      </a:r>
-                      <a:pPr indent="0" marL="0">
-                        <a:buNone/>
-                      </a:pPr>
-                      <a:r>
-                        <a:rPr lang="en-US" sz="950" dirty="0">
-                          <a:solidFill>
-                            <a:schemeClr val="tx1"/>
-                          </a:solidFill>
-                        </a:rPr>
-                        <a:t>: conversational assistant supporting trial project teams and document-management work</a:t>
-                      </a:r>
-                      <a:endParaRPr lang="en-US" sz="950" dirty="0"/>
-                    </a:p>
-                  </a:txBody>
-                  <a:tcPr marL="109728" marR="109728" marT="64008" marB="64008" anchor="ctr">
-                    <a:lnL w="0" cap="flat" cmpd="sng" algn="ctr">
-                      <a:noFill/>
-                    </a:lnL>
-                    <a:lnR w="0" cap="flat" cmpd="sng" algn="ctr">
-                      <a:noFill/>
-                    </a:lnR>
-                    <a:lnT w="0" cap="flat" cmpd="sng" algn="ctr">
-                      <a:noFill/>
-                    </a:lnT>
-                    <a:lnB w="9525" cap="flat" cmpd="sng" algn="ctr">
-                      <a:solidFill>
-                        <a:srgbClr val="D9D4C7"/>
-                      </a:solidFill>
-                      <a:prstDash val="solid"/>
-                      <a:round/>
-                      <a:headEnd type="none" w="med" len="med"/>
-                      <a:tailEnd type="none" w="med" len="med"/>
-                    </a:lnB>
-                  </a:tcPr>
-                </a:tc>
-                <a:tc>
-                  <a:txBody>
-                    <a:bodyPr/>
-                    <a:lstStyle/>
-                    <a:p>
-                      <a:pPr indent="0" marL="0">
-                        <a:buNone/>
-                      </a:pPr>
-                      <a:r>
-                        <a:rPr lang="en-US" sz="950" dirty="0">
-                          <a:solidFill>
-                            <a:schemeClr val="tx1"/>
-                          </a:solidFill>
-                        </a:rPr>
-                        <a:t>Optum True Source supports clinical-trial source-data capture; a directly equivalent document assistant was not established</a:t>
-                      </a:r>
-                      <a:endParaRPr lang="en-US" sz="950" dirty="0"/>
-                    </a:p>
-                  </a:txBody>
-                  <a:tcPr marL="109728" marR="109728" marT="64008" marB="64008" anchor="ctr">
-                    <a:lnL w="0" cap="flat" cmpd="sng" algn="ctr">
-                      <a:noFill/>
-                    </a:lnL>
-                    <a:lnR w="0" cap="flat" cmpd="sng" algn="ctr">
-                      <a:noFill/>
-                    </a:lnR>
-                    <a:lnT w="0" cap="flat" cmpd="sng" algn="ctr">
-                      <a:noFill/>
-                    </a:lnT>
-                    <a:lnB w="9525" cap="flat" cmpd="sng" algn="ctr">
-                      <a:solidFill>
-                        <a:srgbClr val="D9D4C7"/>
-                      </a:solidFill>
-                      <a:prstDash val="solid"/>
-                      <a:round/>
-                      <a:headEnd type="none" w="med" len="med"/>
-                      <a:tailEnd type="none" w="med" len="med"/>
-                    </a:lnB>
-                  </a:tcPr>
-                </a:tc>
-              </a:tr>
-            </a:tbl>
-          </a:graphicData>
-        </a:graphic>
-      </p:graphicFrame>
-      <p:sp>
-        <p:nvSpPr>
-          <p:cNvPr id="16" name="label"/>
-          <p:cNvSpPr txBox="1"/>
-          <p:nvPr/>
-        </p:nvSpPr>
-        <p:spPr>
-          <a:xfrm>
-            <a:off x="548640" y="3445976"/>
-            <a:ext cx="11091672" cy="201168"/>
-          </a:xfrm>
-          <a:prstGeom prst="rect">
-            <a:avLst/>
-          </a:prstGeom>
-          <a:noFill/>
-          <a:ln/>
-        </p:spPr>
-        <p:txBody>
-          <a:bodyPr wrap="square" lIns="0" tIns="0" rIns="0" bIns="0" rtlCol="0" anchor="t"/>
-          <a:lstStyle/>
-          <a:p>
-            <a:pPr indent="0" marL="0">
-              <a:buNone/>
-            </a:pPr>
-            <a:r>
-              <a:rPr lang="en-US" sz="1000" b="1" spc="100" kern="0" dirty="0">
-                <a:solidFill>
-                  <a:schemeClr val="accent2"/>
-                </a:solidFill>
-              </a:rPr>
-              <a:t>MARKET ACCESS — COMPETITIVE EXAMPLES</a:t>
-            </a:r>
-            <a:endParaRPr lang="en-US" sz="1000" dirty="0"/>
-          </a:p>
-        </p:txBody>
-      </p:sp>
-      <p:graphicFrame>
-        <p:nvGraphicFramePr>
-          <p:cNvPr id="19" name="task table"/>
-          <p:cNvGraphicFramePr>
-            <a:graphicFrameLocks noGrp="1"/>
-          </p:cNvGraphicFramePr>
-          <p:nvPr>
-            <p:extLst>
-              <p:ext uri="{D42A27DB-BD31-4B8C-83A1-F6EECF244321}">
-                <p14:modId xmlns:p14="http://schemas.microsoft.com/office/powerpoint/2010/main" val="1579011935"/>
-              </p:ext>
-            </p:extLst>
-          </p:nvPr>
-        </p:nvGraphicFramePr>
-        <p:xfrm>
-          <a:off x="548640" y="3720296"/>
-          <a:ext cx="11091672" cy="914400"/>
-        </p:xfrm>
-        <a:graphic>
-          <a:graphicData uri="http://schemas.openxmlformats.org/drawingml/2006/table">
-            <a:tbl>
-              <a:tblPr/>
-              <a:tblGrid>
-                <a:gridCol w="2286000"/>
-                <a:gridCol w="5760720"/>
-                <a:gridCol w="3044952"/>
-              </a:tblGrid>
-              <a:tr h="329184">
-                <a:tc>
-                  <a:txBody>
-                    <a:bodyPr/>
-                    <a:lstStyle/>
-                    <a:p>
-                      <a:pPr algn="ctr" indent="0" marL="0">
-                        <a:buNone/>
-                      </a:pPr>
-                      <a:r>
-                        <a:rPr lang="en-US" sz="900" b="1" spc="100" kern="0" dirty="0">
-                          <a:solidFill>
-                            <a:schemeClr val="bg1"/>
-                          </a:solidFill>
-                        </a:rPr>
-                        <a:t>CUSTOMER TASK</a:t>
-                      </a:r>
-                      <a:endParaRPr lang="en-US" sz="900" dirty="0"/>
-                    </a:p>
-                  </a:txBody>
-                  <a:tcPr marL="109728" marR="109728" marT="64008" marB="64008" anchor="ctr">
-                    <a:lnL w="0" cap="flat" cmpd="sng" algn="ctr">
-                      <a:noFill/>
-                    </a:lnL>
-                    <a:lnR w="0" cap="flat" cmpd="sng" algn="ctr">
-                      <a:noFill/>
-                    </a:lnR>
-                    <a:lnT w="0" cap="flat" cmpd="sng" algn="ctr">
-                      <a:noFill/>
-                    </a:lnT>
-                    <a:lnB w="0" cap="flat" cmpd="sng" algn="ctr">
-                      <a:noFill/>
-                    </a:lnB>
-                    <a:solidFill>
-                      <a:schemeClr val="accent1"/>
-                    </a:solidFill>
-                  </a:tcPr>
-                </a:tc>
-                <a:tc>
-                  <a:txBody>
-                    <a:bodyPr/>
-                    <a:lstStyle/>
-                    <a:p>
-                      <a:pPr algn="ctr" indent="0" marL="0">
-                        <a:buNone/>
-                      </a:pPr>
-                      <a:r>
-                        <a:rPr lang="en-US" sz="900" b="1" spc="100" kern="0" dirty="0">
-                          <a:solidFill>
-                            <a:schemeClr val="bg1"/>
-                          </a:solidFill>
-                        </a:rPr>
-                        <a:t>CONVERSATIONAL AI OFFERINGS</a:t>
-                      </a:r>
-                      <a:endParaRPr lang="en-US" sz="900" dirty="0"/>
-                    </a:p>
-                  </a:txBody>
-                  <a:tcPr marL="109728" marR="109728" marT="64008" marB="64008" anchor="ctr">
-                    <a:lnL w="0" cap="flat" cmpd="sng" algn="ctr">
-                      <a:noFill/>
-                    </a:lnL>
-                    <a:lnR w="0" cap="flat" cmpd="sng" algn="ctr">
-                      <a:noFill/>
-                    </a:lnR>
-                    <a:lnT w="0" cap="flat" cmpd="sng" algn="ctr">
-                      <a:noFill/>
-                    </a:lnT>
-                    <a:lnB w="0" cap="flat" cmpd="sng" algn="ctr">
-                      <a:noFill/>
-                    </a:lnB>
-                    <a:solidFill>
-                      <a:schemeClr val="accent1"/>
-                    </a:solidFill>
-                  </a:tcPr>
-                </a:tc>
-                <a:tc>
-                  <a:txBody>
-                    <a:bodyPr/>
-                    <a:lstStyle/>
-                    <a:p>
-                      <a:pPr algn="ctr" indent="0" marL="0">
-                        <a:buNone/>
-                      </a:pPr>
-                      <a:r>
-                        <a:rPr lang="en-US" sz="900" b="1" spc="100" kern="0" dirty="0">
-                          <a:solidFill>
-                            <a:schemeClr val="bg1"/>
-                          </a:solidFill>
-                        </a:rPr>
-                        <a:t>RELEVANT OPTUM LS OFFERINGS</a:t>
-                      </a:r>
-                      <a:endParaRPr lang="en-US" sz="900" dirty="0"/>
-                    </a:p>
-                  </a:txBody>
-                  <a:tcPr marL="109728" marR="109728" marT="64008" marB="64008" anchor="ctr">
-                    <a:lnL w="0" cap="flat" cmpd="sng" algn="ctr">
-                      <a:noFill/>
-                    </a:lnL>
-                    <a:lnR w="0" cap="flat" cmpd="sng" algn="ctr">
-                      <a:noFill/>
-                    </a:lnR>
-                    <a:lnT w="0" cap="flat" cmpd="sng" algn="ctr">
-                      <a:noFill/>
-                    </a:lnT>
-                    <a:lnB w="0" cap="flat" cmpd="sng" algn="ctr">
-                      <a:noFill/>
-                    </a:lnB>
-                    <a:solidFill>
-                      <a:schemeClr val="accent1"/>
-                    </a:solidFill>
-                  </a:tcPr>
-                </a:tc>
-              </a:tr>
-              <a:tr h="564811">
-                <a:tc>
-                  <a:txBody>
-                    <a:bodyPr/>
-                    <a:lstStyle/>
-                    <a:p>
-                      <a:pPr algn="ctr" indent="0" marL="0">
-                        <a:buNone/>
-                      </a:pPr>
-                      <a:r>
-                        <a:rPr lang="en-US" sz="1050" b="1" dirty="0">
-                          <a:solidFill>
-                            <a:schemeClr val="accent1"/>
-                          </a:solidFill>
-                        </a:rPr>
-                        <a:t>Pharmaceutical pricing and market-access intelligence</a:t>
-                      </a:r>
-                      <a:endParaRPr lang="en-US" sz="1050" dirty="0"/>
-                    </a:p>
-                  </a:txBody>
-                  <a:tcPr marL="109728" marR="109728" marT="64008" marB="64008" anchor="ctr">
-                    <a:lnL w="0" cap="flat" cmpd="sng" algn="ctr">
-                      <a:noFill/>
-                    </a:lnL>
-                    <a:lnR w="25400" cap="flat" cmpd="sng" algn="ctr">
-                      <a:solidFill>
-                        <a:srgbClr val="FFFFFF"/>
-                      </a:solidFill>
-                      <a:prstDash val="solid"/>
-                      <a:round/>
-                      <a:headEnd type="none" w="med" len="med"/>
-                      <a:tailEnd type="none" w="med" len="med"/>
-                    </a:lnR>
-                    <a:lnT w="25400" cap="flat" cmpd="sng" algn="ctr">
-                      <a:solidFill>
-                        <a:srgbClr val="FFFFFF"/>
-                      </a:solidFill>
-                      <a:prstDash val="solid"/>
-                      <a:round/>
-                      <a:headEnd type="none" w="med" len="med"/>
-                      <a:tailEnd type="none" w="med" len="med"/>
-                    </a:lnT>
-                    <a:lnB w="25400" cap="flat" cmpd="sng" algn="ctr">
-                      <a:solidFill>
-                        <a:srgbClr val="FFFFFF"/>
-                      </a:solidFill>
-                      <a:prstDash val="solid"/>
-                      <a:round/>
-                      <a:headEnd type="none" w="med" len="med"/>
-                      <a:tailEnd type="none" w="med" len="med"/>
-                    </a:lnB>
-                    <a:solidFill>
-                      <a:schemeClr val="accent5"/>
-                    </a:solidFill>
-                  </a:tcPr>
-                </a:tc>
-                <a:tc>
-                  <a:txBody>
-                    <a:bodyPr/>
-                    <a:lstStyle/>
-                    <a:p>
-                      <a:pPr indent="0" marL="0">
-                        <a:buNone/>
-                      </a:pPr>
-                      <a:r>
-                        <a:rPr lang="en-US" sz="950" dirty="0">
-                          <a:solidFill>
-                            <a:schemeClr val="tx1"/>
-                          </a:solidFill>
-                        </a:rPr>
-                        <a:t>EVERSANA's </a:t>
-                      </a:r>
-                      <a:pPr indent="0" marL="0">
-                        <a:buNone/>
-                      </a:pPr>
-                      <a:r>
-                        <a:rPr lang="en-US" sz="950" b="1" dirty="0">
-                          <a:solidFill>
-                            <a:schemeClr val="tx1"/>
-                          </a:solidFill>
-                        </a:rPr>
-                        <a:t>Ask NAVLIN</a:t>
-                      </a:r>
-                      <a:pPr indent="0" marL="0">
-                        <a:buNone/>
-                      </a:pPr>
-                      <a:r>
-                        <a:rPr lang="en-US" sz="950" dirty="0">
-                          <a:solidFill>
-                            <a:schemeClr val="tx1"/>
-                          </a:solidFill>
-                        </a:rPr>
-                        <a:t>: conversational access to pricing, reimbursement and market-access information</a:t>
-                      </a:r>
-                      <a:endParaRPr lang="en-US" sz="950" dirty="0"/>
-                    </a:p>
-                  </a:txBody>
-                  <a:tcPr marL="109728" marR="109728" marT="64008" marB="64008" anchor="ctr">
-                    <a:lnL w="0" cap="flat" cmpd="sng" algn="ctr">
-                      <a:noFill/>
-                    </a:lnL>
-                    <a:lnR w="0" cap="flat" cmpd="sng" algn="ctr">
-                      <a:noFill/>
-                    </a:lnR>
-                    <a:lnT w="0" cap="flat" cmpd="sng" algn="ctr">
-                      <a:noFill/>
-                    </a:lnT>
-                    <a:lnB w="9525" cap="flat" cmpd="sng" algn="ctr">
-                      <a:solidFill>
-                        <a:srgbClr val="D9D4C7"/>
-                      </a:solidFill>
-                      <a:prstDash val="solid"/>
-                      <a:round/>
-                      <a:headEnd type="none" w="med" len="med"/>
-                      <a:tailEnd type="none" w="med" len="med"/>
-                    </a:lnB>
-                  </a:tcPr>
-                </a:tc>
-                <a:tc>
-                  <a:txBody>
-                    <a:bodyPr/>
-                    <a:lstStyle/>
-                    <a:p>
-                      <a:pPr indent="0" marL="0">
-                        <a:buNone/>
-                      </a:pPr>
-                      <a:r>
-                        <a:rPr lang="en-US" sz="950" dirty="0">
-                          <a:solidFill>
-                            <a:schemeClr val="tx1"/>
-                          </a:solidFill>
-                        </a:rPr>
-                        <a:t>Optum HEOR and value evidence; Evidence Engine; health economic and budget impact modeling</a:t>
-                      </a:r>
-                      <a:endParaRPr lang="en-US" sz="950" dirty="0"/>
-                    </a:p>
-                  </a:txBody>
-                  <a:tcPr marL="109728" marR="109728" marT="64008" marB="64008" anchor="ctr">
-                    <a:lnL w="0" cap="flat" cmpd="sng" algn="ctr">
-                      <a:noFill/>
-                    </a:lnL>
-                    <a:lnR w="0" cap="flat" cmpd="sng" algn="ctr">
-                      <a:noFill/>
-                    </a:lnR>
-                    <a:lnT w="0" cap="flat" cmpd="sng" algn="ctr">
-                      <a:noFill/>
-                    </a:lnT>
-                    <a:lnB w="9525" cap="flat" cmpd="sng" algn="ctr">
-                      <a:solidFill>
-                        <a:srgbClr val="D9D4C7"/>
-                      </a:solidFill>
-                      <a:prstDash val="solid"/>
-                      <a:round/>
-                      <a:headEnd type="none" w="med" len="med"/>
-                      <a:tailEnd type="none" w="med" len="med"/>
-                    </a:lnB>
-                  </a:tcPr>
-                </a:tc>
-              </a:tr>
-            </a:tbl>
-          </a:graphicData>
-        </a:graphic>
-      </p:graphicFrame>
-      <p:sp>
-        <p:nvSpPr>
-          <p:cNvPr id="18" name="beyond the public evidence card"/>
-          <p:cNvSpPr/>
-          <p:nvPr/>
-        </p:nvSpPr>
-        <p:spPr>
-          <a:xfrm>
-            <a:off x="548640" y="4797171"/>
-            <a:ext cx="11091672" cy="1256157"/>
-          </a:xfrm>
-          <a:prstGeom prst="rect">
-            <a:avLst/>
-          </a:prstGeom>
-          <a:solidFill>
-            <a:schemeClr val="bg1"/>
-          </a:solidFill>
-          <a:ln/>
-          <a:effectLst>
-            <a:outerShdw sx="100000" sy="100000" kx="0" ky="0" algn="bl" rotWithShape="0" blurRad="101600" dist="25400" dir="5400000">
-              <a:srgbClr val="000000">
-                <a:alpha val="10000"/>
-              </a:srgbClr>
-            </a:outerShdw>
-          </a:effectLst>
-        </p:spPr>
-      </p:sp>
-      <p:sp>
-        <p:nvSpPr>
-          <p:cNvPr id="19" name="label"/>
-          <p:cNvSpPr txBox="1"/>
-          <p:nvPr/>
-        </p:nvSpPr>
-        <p:spPr>
-          <a:xfrm>
-            <a:off x="749808" y="4980051"/>
-            <a:ext cx="10689336" cy="256032"/>
-          </a:xfrm>
-          <a:prstGeom prst="rect">
-            <a:avLst/>
-          </a:prstGeom>
-          <a:noFill/>
-          <a:ln/>
-        </p:spPr>
-        <p:txBody>
-          <a:bodyPr wrap="square" lIns="0" tIns="0" rIns="0" bIns="0" rtlCol="0" anchor="t"/>
-          <a:lstStyle/>
-          <a:p>
-            <a:pPr indent="0" marL="0">
-              <a:buNone/>
-            </a:pPr>
-            <a:r>
-              <a:rPr lang="en-US" sz="1300" b="1" spc="150" kern="0" dirty="0">
-                <a:solidFill>
-                  <a:schemeClr val="accent2"/>
-                </a:solidFill>
-              </a:rPr>
-              <a:t>BEYOND THE PUBLIC EVIDENCE</a:t>
-            </a:r>
-            <a:endParaRPr lang="en-US" sz="1300" dirty="0"/>
-          </a:p>
-        </p:txBody>
-      </p:sp>
-      <p:sp>
-        <p:nvSpPr>
-          <p:cNvPr id="20" name="Text 16"/>
-          <p:cNvSpPr txBox="1"/>
-          <p:nvPr/>
-        </p:nvSpPr>
-        <p:spPr>
-          <a:xfrm>
-            <a:off x="749808" y="5309235"/>
-            <a:ext cx="10689336" cy="616077"/>
-          </a:xfrm>
-          <a:prstGeom prst="rect">
-            <a:avLst/>
-          </a:prstGeom>
-          <a:noFill/>
-          <a:ln/>
-        </p:spPr>
-        <p:txBody>
-          <a:bodyPr wrap="square" lIns="0" tIns="0" rIns="0" bIns="0" rtlCol="0" anchor="t"/>
-          <a:lstStyle/>
-          <a:p>
-            <a:pPr indent="0" marL="0">
-              <a:buNone/>
-            </a:pPr>
-            <a:r>
-              <a:rPr lang="en-US" sz="1050" b="1" dirty="0">
-                <a:solidFill>
-                  <a:schemeClr val="tx1"/>
-                </a:solidFill>
-              </a:rPr>
-              <a:t>For Clinical Trials, does the interface help identify viable sites, evaluate patients or manage trial documents—and how far does it go?</a:t>
-            </a:r>
-            <a:endParaRPr lang="en-US" sz="1050" dirty="0"/>
-          </a:p>
-          <a:p>
-            <a:pPr indent="0" marL="0">
-              <a:spcBef>
-                <a:spcPts val="600"/>
-              </a:spcBef>
-              <a:buNone/>
-            </a:pPr>
-            <a:r>
-              <a:rPr lang="en-US" sz="1050" b="1" dirty="0">
-                <a:solidFill>
-                  <a:schemeClr val="tx1"/>
-                </a:solidFill>
-              </a:rPr>
-              <a:t>For Market Access, is the customer asking for pricing intelligence, reimbursement information or new economic evidence? Where do the vendor offerings overlap with Optum LS, and where do they solve a different problem?</a:t>
-            </a:r>
-            <a:endParaRPr lang="en-US" sz="1050" dirty="0"/>
-          </a:p>
-        </p:txBody>
-      </p:sp>
-      <p:sp>
-        <p:nvSpPr>
-          <p:cNvPr id="25" name="Slide Number Placeholder 0"/>
-          <p:cNvSpPr>
-            <a:spLocks noGrp="1"/>
-          </p:cNvSpPr>
-          <p:nvPr>
-            <p:ph type="sldNum" sz="quarter" idx="4294967295"/>
-          </p:nvPr>
-        </p:nvSpPr>
-        <p:spPr>
-          <a:xfrm>
-            <a:off x="10725912" y="6309360"/>
-            <a:ext cx="914400" cy="201168"/>
-          </a:xfrm>
-          <a:prstGeom prst="rect">
-            <a:avLst/>
-          </a:prstGeom>
-          <a:extLst>
-            <a:ext uri="{C572A759-6A51-4108-AA02-DFA0A04FC94B}">
-              <ma14:wrappingTextBoxFlag xmlns:ma14="http://schemas.microsoft.com/office/mac/drawingml/2011/main" val="0"/>
-            </a:ext>
-          </a:extLst>
-        </p:spPr>
-        <p:txBody>
-          <a:bodyPr lIns="0" tIns="0" rIns="0" bIns="0"/>
-          <a:lstStyle>
-            <a:lvl1pPr>
-              <a:defRPr sz="900">
-                <a:solidFill>
-                  <a:schemeClr val="accent4"/>
-                </a:solidFill>
-              </a:defRPr>
-            </a:lvl1pPr>
-          </a:lstStyle>
-          <a:p>
-            <a:pPr algn="r"/>
-            <a:fld id="{F7021451-1387-4CA6-816F-3879F97B5CBC}" type="slidenum">
-              <a:rPr b="0" lang="en-US"/>
-              <a:t>9</a:t>
-            </a:fld>
-            <a:endParaRPr lang="en-US"/>
-          </a:p>
-        </p:txBody>
-      </p:sp>
-      <p:sp>
-        <p:nvSpPr>
-          <p:cNvPr id="26" name="Invisible source link 9: https://trinetx.com/solutions/trinetx-live/terrain">
-            <a:hlinkClick r:id="rId3"/>
-          </p:cNvPr>
-          <p:cNvSpPr/>
-          <p:nvPr/>
-        </p:nvSpPr>
-        <p:spPr>
-          <a:xfrm>
-            <a:off x="3465236" y="2253602"/>
-            <a:ext cx="1119405" cy="89280"/>
-          </a:xfrm>
-          <a:prstGeom prst="rect">
-            <a:avLst/>
-          </a:prstGeom>
-          <a:noFill/>
-          <a:ln>
-            <a:noFill/>
-          </a:ln>
-        </p:spPr>
-        <p:style>
-          <a:lnRef idx="1">
-            <a:schemeClr val="accent1"/>
-          </a:lnRef>
-          <a:fillRef idx="3">
-            <a:schemeClr val="accent1"/>
-          </a:fillRef>
-          <a:effectRef idx="2">
-            <a:schemeClr val="accent1"/>
-          </a:effectRef>
-          <a:fontRef idx="minor">
-            <a:schemeClr val="lt1"/>
-          </a:fontRef>
-        </p:style>
-        <p:txBody>
-          <a:bodyPr rtlCol="0" anchor="ctr"/>
-          <a:lstStyle/>
-          <a:p>
-            <a:pPr algn="ctr"/>
-          </a:p>
-        </p:txBody>
-      </p:sp>
-      <p:sp>
-        <p:nvSpPr>
-          <p:cNvPr id="27" name="Invisible source link 9: https://business.optum.com/en/data-analytics/life-">
-            <a:hlinkClick r:id="rId4"/>
-          </p:cNvPr>
-          <p:cNvSpPr/>
-          <p:nvPr/>
-        </p:nvSpPr>
-        <p:spPr>
-          <a:xfrm>
-            <a:off x="8714349" y="2321280"/>
-            <a:ext cx="1620161" cy="113398"/>
-          </a:xfrm>
-          <a:prstGeom prst="rect">
-            <a:avLst/>
-          </a:prstGeom>
-          <a:noFill/>
-          <a:ln>
-            <a:noFill/>
-          </a:ln>
-        </p:spPr>
-        <p:style>
-          <a:lnRef idx="1">
-            <a:schemeClr val="accent1"/>
-          </a:lnRef>
-          <a:fillRef idx="3">
-            <a:schemeClr val="accent1"/>
-          </a:fillRef>
-          <a:effectRef idx="2">
-            <a:schemeClr val="accent1"/>
-          </a:effectRef>
-          <a:fontRef idx="minor">
-            <a:schemeClr val="lt1"/>
-          </a:fontRef>
-        </p:style>
-        <p:txBody>
-          <a:bodyPr rtlCol="0" anchor="ctr"/>
-          <a:lstStyle/>
-          <a:p>
-            <a:pPr algn="ctr"/>
-          </a:p>
-        </p:txBody>
-      </p:sp>
-      <p:sp>
-        <p:nvSpPr>
-          <p:cNvPr id="28" name="Invisible source link 9: https://business.optum.com/en/data-analytics/life-">
-            <a:hlinkClick r:id="rId4"/>
-          </p:cNvPr>
-          <p:cNvSpPr/>
-          <p:nvPr/>
-        </p:nvSpPr>
-        <p:spPr>
-          <a:xfrm>
-            <a:off x="10409922" y="2321280"/>
-            <a:ext cx="1107162" cy="113398"/>
-          </a:xfrm>
-          <a:prstGeom prst="rect">
-            <a:avLst/>
-          </a:prstGeom>
-          <a:noFill/>
-          <a:ln>
-            <a:noFill/>
-          </a:ln>
-        </p:spPr>
-        <p:style>
-          <a:lnRef idx="1">
-            <a:schemeClr val="accent1"/>
-          </a:lnRef>
-          <a:fillRef idx="3">
-            <a:schemeClr val="accent1"/>
-          </a:fillRef>
-          <a:effectRef idx="2">
-            <a:schemeClr val="accent1"/>
-          </a:effectRef>
-          <a:fontRef idx="minor">
-            <a:schemeClr val="lt1"/>
-          </a:fontRef>
-        </p:style>
-        <p:txBody>
-          <a:bodyPr rtlCol="0" anchor="ctr"/>
-          <a:lstStyle/>
-          <a:p>
-            <a:pPr algn="ctr"/>
-          </a:p>
-        </p:txBody>
-      </p:sp>
-      <p:sp>
-        <p:nvSpPr>
-          <p:cNvPr id="29" name="Invisible source link 9: https://business.optum.com/en/data-analytics/life-">
-            <a:hlinkClick r:id="rId4"/>
-          </p:cNvPr>
-          <p:cNvSpPr/>
-          <p:nvPr/>
-        </p:nvSpPr>
-        <p:spPr>
-          <a:xfrm>
-            <a:off x="8712545" y="2431084"/>
-            <a:ext cx="636288" cy="89280"/>
-          </a:xfrm>
-          <a:prstGeom prst="rect">
-            <a:avLst/>
-          </a:prstGeom>
-          <a:noFill/>
-          <a:ln>
-            <a:noFill/>
-          </a:ln>
-        </p:spPr>
-        <p:style>
-          <a:lnRef idx="1">
-            <a:schemeClr val="accent1"/>
-          </a:lnRef>
-          <a:fillRef idx="3">
-            <a:schemeClr val="accent1"/>
-          </a:fillRef>
-          <a:effectRef idx="2">
-            <a:schemeClr val="accent1"/>
-          </a:effectRef>
-          <a:fontRef idx="minor">
-            <a:schemeClr val="lt1"/>
-          </a:fontRef>
-        </p:style>
-        <p:txBody>
-          <a:bodyPr rtlCol="0" anchor="ctr"/>
-          <a:lstStyle/>
-          <a:p>
-            <a:pPr algn="ctr"/>
-          </a:p>
-        </p:txBody>
-      </p:sp>
-      <p:sp>
-        <p:nvSpPr>
-          <p:cNvPr id="30" name="Invisible source link 9: https://cn.taimei.com/index/product/id/41">
-            <a:hlinkClick r:id="rId5"/>
-          </p:cNvPr>
-          <p:cNvSpPr/>
-          <p:nvPr/>
-        </p:nvSpPr>
-        <p:spPr>
-          <a:xfrm>
-            <a:off x="3408354" y="2860560"/>
-            <a:ext cx="517138" cy="89280"/>
-          </a:xfrm>
-          <a:prstGeom prst="rect">
-            <a:avLst/>
-          </a:prstGeom>
-          <a:noFill/>
-          <a:ln>
-            <a:noFill/>
-          </a:ln>
-        </p:spPr>
-        <p:style>
-          <a:lnRef idx="1">
-            <a:schemeClr val="accent1"/>
-          </a:lnRef>
-          <a:fillRef idx="3">
-            <a:schemeClr val="accent1"/>
-          </a:fillRef>
-          <a:effectRef idx="2">
-            <a:schemeClr val="accent1"/>
-          </a:effectRef>
-          <a:fontRef idx="minor">
-            <a:schemeClr val="lt1"/>
-          </a:fontRef>
-        </p:style>
-        <p:txBody>
-          <a:bodyPr rtlCol="0" anchor="ctr"/>
-          <a:lstStyle/>
-          <a:p>
-            <a:pPr algn="ctr"/>
-          </a:p>
-        </p:txBody>
-      </p:sp>
-      <p:sp>
-        <p:nvSpPr>
-          <p:cNvPr id="31" name="Invisible source link 9: https://business.optum.com/en/data-analytics/life-">
-            <a:hlinkClick r:id="rId4"/>
-          </p:cNvPr>
-          <p:cNvSpPr/>
-          <p:nvPr/>
-        </p:nvSpPr>
-        <p:spPr>
-          <a:xfrm>
-            <a:off x="8710031" y="2796120"/>
-            <a:ext cx="1042012" cy="109804"/>
-          </a:xfrm>
-          <a:prstGeom prst="rect">
-            <a:avLst/>
-          </a:prstGeom>
-          <a:noFill/>
-          <a:ln>
-            <a:noFill/>
-          </a:ln>
-        </p:spPr>
-        <p:style>
-          <a:lnRef idx="1">
-            <a:schemeClr val="accent1"/>
-          </a:lnRef>
-          <a:fillRef idx="3">
-            <a:schemeClr val="accent1"/>
-          </a:fillRef>
-          <a:effectRef idx="2">
-            <a:schemeClr val="accent1"/>
-          </a:effectRef>
-          <a:fontRef idx="minor">
-            <a:schemeClr val="lt1"/>
-          </a:fontRef>
-        </p:style>
-        <p:txBody>
-          <a:bodyPr rtlCol="0" anchor="ctr"/>
-          <a:lstStyle/>
-          <a:p>
-            <a:pPr algn="ctr"/>
-          </a:p>
-        </p:txBody>
-      </p:sp>
-      <p:sp>
-        <p:nvSpPr>
-          <p:cNvPr id="32" name="Invisible source link 9: https://www.navlin.com/products/tender">
-            <a:hlinkClick r:id="rId6"/>
-          </p:cNvPr>
-          <p:cNvSpPr/>
-          <p:nvPr/>
-        </p:nvSpPr>
-        <p:spPr>
-          <a:xfrm>
-            <a:off x="3719031" y="4218114"/>
-            <a:ext cx="684167" cy="89280"/>
-          </a:xfrm>
-          <a:prstGeom prst="rect">
-            <a:avLst/>
-          </a:prstGeom>
-          <a:noFill/>
-          <a:ln>
-            <a:noFill/>
-          </a:ln>
-        </p:spPr>
-        <p:style>
-          <a:lnRef idx="1">
-            <a:schemeClr val="accent1"/>
-          </a:lnRef>
-          <a:fillRef idx="3">
-            <a:schemeClr val="accent1"/>
-          </a:fillRef>
-          <a:effectRef idx="2">
-            <a:schemeClr val="accent1"/>
-          </a:effectRef>
-          <a:fontRef idx="minor">
-            <a:schemeClr val="lt1"/>
-          </a:fontRef>
-        </p:style>
-        <p:txBody>
-          <a:bodyPr rtlCol="0" anchor="ctr"/>
-          <a:lstStyle/>
-          <a:p>
-            <a:pPr algn="ctr"/>
-          </a:p>
-        </p:txBody>
-      </p:sp>
-      <p:sp>
-        <p:nvSpPr>
-          <p:cNvPr id="33" name="Invisible source link 9: https://business.optum.com/en/data-analytics/life-">
-            <a:hlinkClick r:id="rId7"/>
-          </p:cNvPr>
-          <p:cNvSpPr/>
-          <p:nvPr/>
-        </p:nvSpPr>
-        <p:spPr>
-          <a:xfrm>
-            <a:off x="9109264" y="4221353"/>
-            <a:ext cx="333892" cy="86042"/>
-          </a:xfrm>
-          <a:prstGeom prst="rect">
-            <a:avLst/>
-          </a:prstGeom>
-          <a:noFill/>
-          <a:ln>
-            <a:noFill/>
-          </a:ln>
-        </p:spPr>
-        <p:style>
-          <a:lnRef idx="1">
-            <a:schemeClr val="accent1"/>
-          </a:lnRef>
-          <a:fillRef idx="3">
-            <a:schemeClr val="accent1"/>
-          </a:fillRef>
-          <a:effectRef idx="2">
-            <a:schemeClr val="accent1"/>
-          </a:effectRef>
-          <a:fontRef idx="minor">
-            <a:schemeClr val="lt1"/>
-          </a:fontRef>
-        </p:style>
-        <p:txBody>
-          <a:bodyPr rtlCol="0" anchor="ctr"/>
-          <a:lstStyle/>
-          <a:p>
-            <a:pPr algn="ctr"/>
-          </a:p>
-        </p:txBody>
-      </p:sp>
-      <p:sp>
-        <p:nvSpPr>
-          <p:cNvPr id="34" name="Invisible source link 9: https://business.optum.com/en/data-analytics/life-">
-            <a:hlinkClick r:id="rId8"/>
-          </p:cNvPr>
-          <p:cNvSpPr/>
-          <p:nvPr/>
-        </p:nvSpPr>
-        <p:spPr>
-          <a:xfrm>
-            <a:off x="10594972" y="4218114"/>
-            <a:ext cx="889727" cy="113042"/>
-          </a:xfrm>
-          <a:prstGeom prst="rect">
-            <a:avLst/>
-          </a:prstGeom>
-          <a:noFill/>
-          <a:ln>
-            <a:noFill/>
-          </a:ln>
-        </p:spPr>
-        <p:style>
-          <a:lnRef idx="1">
-            <a:schemeClr val="accent1"/>
-          </a:lnRef>
-          <a:fillRef idx="3">
-            <a:schemeClr val="accent1"/>
-          </a:fillRef>
-          <a:effectRef idx="2">
-            <a:schemeClr val="accent1"/>
-          </a:effectRef>
-          <a:fontRef idx="minor">
-            <a:schemeClr val="lt1"/>
-          </a:fontRef>
-        </p:style>
-        <p:txBody>
-          <a:bodyPr rtlCol="0" anchor="ctr"/>
-          <a:lstStyle/>
-          <a:p>
-            <a:pPr algn="ctr"/>
-          </a:p>
-        </p:txBody>
-      </p:sp>
-      <p:sp>
-        <p:nvSpPr>
-          <p:cNvPr id="35" name="Invisible source link 9: https://business.optum.com/en/data-analytics/life-">
-            <a:hlinkClick r:id="rId9"/>
-          </p:cNvPr>
-          <p:cNvSpPr/>
-          <p:nvPr/>
-        </p:nvSpPr>
-        <p:spPr>
-          <a:xfrm>
-            <a:off x="8712901" y="4353839"/>
-            <a:ext cx="2408556" cy="113042"/>
-          </a:xfrm>
-          <a:prstGeom prst="rect">
-            <a:avLst/>
-          </a:prstGeom>
-          <a:noFill/>
-          <a:ln>
-            <a:noFill/>
-          </a:ln>
-        </p:spPr>
-        <p:style>
-          <a:lnRef idx="1">
-            <a:schemeClr val="accent1"/>
-          </a:lnRef>
-          <a:fillRef idx="3">
-            <a:schemeClr val="accent1"/>
-          </a:fillRef>
-          <a:effectRef idx="2">
-            <a:schemeClr val="accent1"/>
-          </a:effectRef>
-          <a:fontRef idx="minor">
-            <a:schemeClr val="lt1"/>
-          </a:fontRef>
-        </p:style>
-        <p:txBody>
-          <a:bodyPr rtlCol="0" anchor="ctr"/>
-          <a:lstStyle/>
-          <a:p>
-            <a:pPr algn="ctr"/>
-          </a:p>
-        </p:txBody>
-      </p:sp>
-    </p:spTree>
-  </p:cSld>
-  <p:clrMapOvr>
-    <a:masterClrMapping/>
-  </p:clrMapOvr>
-</p:sld>
-</file>
-
 <file path=ppt/theme/theme1.xml><?xml version="1.0" encoding="utf-8"?>
 <a:theme xmlns:a="http://schemas.openxmlformats.org/drawingml/2006/main" name="Optum LS Strategy">
   <a:themeElements>

--- a/deck/Optum-LS-Conversational-AI-sourced.pptx
+++ b/deck/Optum-LS-Conversational-AI-sourced.pptx
@@ -8469,6 +8469,10 @@
             </a:outerShdw>
           </a:effectLst>
         </p:spPr>
+        <p:txBody>
+          <a:bodyPr/>
+          <a:p/>
+        </p:txBody>
       </p:sp>
       <p:sp>
         <p:nvSpPr>
@@ -8489,6 +8493,10 @@
           </a:solidFill>
           <a:ln/>
         </p:spPr>
+        <p:txBody>
+          <a:bodyPr/>
+          <a:p/>
+        </p:txBody>
       </p:sp>
       <p:pic>
         <p:nvPicPr>
@@ -8634,6 +8642,10 @@
             <a:prstDash val="solid"/>
           </a:ln>
         </p:spPr>
+        <p:txBody>
+          <a:bodyPr/>
+          <a:p/>
+        </p:txBody>
       </p:sp>
       <p:sp>
         <p:nvSpPr>
@@ -8697,6 +8709,10 @@
             <a:prstDash val="solid"/>
           </a:ln>
         </p:spPr>
+        <p:txBody>
+          <a:bodyPr/>
+          <a:p/>
+        </p:txBody>
       </p:sp>
       <p:sp>
         <p:nvSpPr>
@@ -8760,6 +8776,10 @@
             <a:prstDash val="solid"/>
           </a:ln>
         </p:spPr>
+        <p:txBody>
+          <a:bodyPr/>
+          <a:p/>
+        </p:txBody>
       </p:sp>
       <p:sp>
         <p:nvSpPr>
@@ -8823,6 +8843,10 @@
             <a:prstDash val="solid"/>
           </a:ln>
         </p:spPr>
+        <p:txBody>
+          <a:bodyPr/>
+          <a:p/>
+        </p:txBody>
       </p:sp>
       <p:sp>
         <p:nvSpPr>
@@ -8922,6 +8946,10 @@
             <a:prstDash val="solid"/>
           </a:ln>
         </p:spPr>
+        <p:txBody>
+          <a:bodyPr/>
+          <a:p/>
+        </p:txBody>
       </p:sp>
       <p:sp>
         <p:nvSpPr>
@@ -8989,7 +9017,7 @@
                   <a:schemeClr val="tx1"/>
                 </a:solidFill>
               </a:rPr>
-              <a:t>The U.S. competitive landscape is the primary focus; selected international offerings provide context; and Optum LS is the strategic reference point.</a:t>
+              <a:t>The U.S. is the primary competitive focus; selected international offerings provide context; Optum LS anchors the comparisons.</a:t>
             </a:r>
             <a:endParaRPr lang="en-US" sz="1100" dirty="0"/>
           </a:p>
@@ -9910,6 +9938,10 @@
             <a:prstDash val="solid"/>
           </a:ln>
         </p:spPr>
+        <p:txBody>
+          <a:bodyPr/>
+          <a:p/>
+        </p:txBody>
       </p:sp>
       <p:sp>
         <p:nvSpPr>
@@ -10007,6 +10039,10 @@
             <a:prstDash val="solid"/>
           </a:ln>
         </p:spPr>
+        <p:txBody>
+          <a:bodyPr/>
+          <a:p/>
+        </p:txBody>
       </p:sp>
       <p:sp>
         <p:nvSpPr>
@@ -10201,6 +10237,10 @@
             <a:prstDash val="solid"/>
           </a:ln>
         </p:spPr>
+        <p:txBody>
+          <a:bodyPr/>
+          <a:p/>
+        </p:txBody>
       </p:sp>
       <p:sp>
         <p:nvSpPr>
@@ -10356,6 +10396,10 @@
             <a:prstDash val="solid"/>
           </a:ln>
         </p:spPr>
+        <p:txBody>
+          <a:bodyPr/>
+          <a:p/>
+        </p:txBody>
       </p:sp>
       <p:sp>
         <p:nvSpPr>
@@ -10550,6 +10594,10 @@
             <a:prstDash val="solid"/>
           </a:ln>
         </p:spPr>
+        <p:txBody>
+          <a:bodyPr/>
+          <a:p/>
+        </p:txBody>
       </p:sp>
       <p:sp>
         <p:nvSpPr>
@@ -10674,6 +10722,10 @@
             </a:outerShdw>
           </a:effectLst>
         </p:spPr>
+        <p:txBody>
+          <a:bodyPr/>
+          <a:p/>
+        </p:txBody>
       </p:sp>
       <p:sp>
         <p:nvSpPr>
@@ -10773,6 +10825,10 @@
             </a:outerShdw>
           </a:effectLst>
         </p:spPr>
+        <p:txBody>
+          <a:bodyPr/>
+          <a:p/>
+        </p:txBody>
       </p:sp>
       <p:sp>
         <p:nvSpPr>
@@ -10840,7 +10896,7 @@
                   <a:schemeClr val="tx1"/>
                 </a:solidFill>
               </a:rPr>
-              <a:t>We look beyond RWE to assess publicly-marketed conversational AI across five Optum LS-aligned domains, prioritizing the U.S. competitive landscape and using selected international offerings for context.</a:t>
+              <a:t>We examine publicly marketed conversational AI across five Optum LS-relevant business domains. Vendors' product claims and descriptions of customer use provide observable evidence for comparing competitive positioning without access to internal product data.</a:t>
             </a:r>
             <a:endParaRPr lang="en-US" sz="1200" dirty="0"/>
           </a:p>

--- a/deck/Optum-LS-Conversational-AI-sourced.pptx
+++ b/deck/Optum-LS-Conversational-AI-sourced.pptx
@@ -9049,6 +9049,10 @@
             </a:outerShdw>
           </a:effectLst>
         </p:spPr>
+        <p:txBody>
+          <a:bodyPr/>
+          <a:p/>
+        </p:txBody>
       </p:sp>
       <p:sp>
         <p:nvSpPr>
@@ -9069,6 +9073,10 @@
           </a:solidFill>
           <a:ln/>
         </p:spPr>
+        <p:txBody>
+          <a:bodyPr/>
+          <a:p/>
+        </p:txBody>
       </p:sp>
       <p:pic>
         <p:nvPicPr>
@@ -9151,7 +9159,7 @@
           <a:bodyPr wrap="square" lIns="0" tIns="0" rIns="0" bIns="0" rtlCol="0" anchor="t"/>
           <a:lstStyle/>
           <a:p>
-            <a:pPr indent="0" marL="0">
+            <a:pPr indent="0" marL="0" algn="ctr">
               <a:buNone/>
             </a:pPr>
             <a:r>
@@ -9268,6 +9276,10 @@
             <a:prstDash val="solid"/>
           </a:ln>
         </p:spPr>
+        <p:txBody>
+          <a:bodyPr/>
+          <a:p/>
+        </p:txBody>
       </p:sp>
       <p:sp>
         <p:nvSpPr>
@@ -9290,7 +9302,7 @@
           <a:bodyPr wrap="square" lIns="0" tIns="0" rIns="0" bIns="0" rtlCol="0" anchor="t"/>
           <a:lstStyle/>
           <a:p>
-            <a:pPr indent="0" marL="0">
+            <a:pPr indent="0" marL="0" algn="ctr">
               <a:buNone/>
             </a:pPr>
             <a:r>
@@ -9389,6 +9401,10 @@
             </a:outerShdw>
           </a:effectLst>
         </p:spPr>
+        <p:txBody>
+          <a:bodyPr/>
+          <a:p/>
+        </p:txBody>
       </p:sp>
       <p:sp>
         <p:nvSpPr>
@@ -9409,6 +9425,10 @@
           </a:solidFill>
           <a:ln/>
         </p:spPr>
+        <p:txBody>
+          <a:bodyPr/>
+          <a:p/>
+        </p:txBody>
       </p:sp>
       <p:pic>
         <p:nvPicPr>
@@ -9569,6 +9589,10 @@
             </a:outerShdw>
           </a:effectLst>
         </p:spPr>
+        <p:txBody>
+          <a:bodyPr/>
+          <a:p/>
+        </p:txBody>
       </p:sp>
       <p:sp>
         <p:nvSpPr>
@@ -9589,6 +9613,10 @@
           </a:solidFill>
           <a:ln/>
         </p:spPr>
+        <p:txBody>
+          <a:bodyPr/>
+          <a:p/>
+        </p:txBody>
       </p:sp>
       <p:pic>
         <p:nvPicPr>
@@ -12984,8 +13012,8 @@
         </p:nvSpPr>
         <p:spPr>
           <a:xfrm>
-            <a:off x="548640" y="5596128"/>
-            <a:ext cx="11091672" cy="548640"/>
+            <a:off x="1110996" y="5596128"/>
+            <a:ext cx="9966960" cy="548640"/>
           </a:xfrm>
           <a:prstGeom prst="rect">
             <a:avLst/>
@@ -13015,8 +13043,8 @@
         </p:nvSpPr>
         <p:spPr>
           <a:xfrm>
-            <a:off x="548640" y="5596128"/>
-            <a:ext cx="2377440" cy="548640"/>
+            <a:off x="1293876" y="5596128"/>
+            <a:ext cx="2011680" cy="548640"/>
           </a:xfrm>
           <a:prstGeom prst="rect">
             <a:avLst/>
@@ -13051,8 +13079,8 @@
         </p:nvSpPr>
         <p:spPr>
           <a:xfrm>
-            <a:off x="2926080" y="5596128"/>
-            <a:ext cx="8531352" cy="548640"/>
+            <a:off x="3305556" y="5596128"/>
+            <a:ext cx="7589520" cy="548640"/>
           </a:xfrm>
           <a:prstGeom prst="rect">
             <a:avLst/>
@@ -13064,7 +13092,7 @@
           <a:bodyPr wrap="square" lIns="0" tIns="0" rIns="0" bIns="0" rtlCol="0" anchor="ctr"/>
           <a:lstStyle/>
           <a:p>
-            <a:pPr indent="0" marL="0">
+            <a:pPr indent="0" marL="0" algn="ctr">
               <a:buNone/>
             </a:pPr>
             <a:r>
@@ -13073,12 +13101,12 @@
                   <a:schemeClr val="tx1"/>
                 </a:solidFill>
               </a:rPr>
-              <a:t>A publicly-marketed customer-facing conversational interface was not established in the reviewed materials for Optum LS</a:t>
+              <a:t>A publicly-marketed customer-facing conversational interface was not established in the reviewed materials</a:t>
             </a:r>
             <a:endParaRPr lang="en-US" sz="1050" dirty="0"/>
           </a:p>
           <a:p>
-            <a:pPr indent="0" marL="0">
+            <a:pPr indent="0" marL="0" algn="ctr">
               <a:buNone/>
             </a:pPr>
             <a:r>
@@ -13087,7 +13115,7 @@
                   <a:schemeClr val="tx1"/>
                 </a:solidFill>
               </a:rPr>
-              <a:t>across the five relevant business domains.</a:t>
+              <a:t>for Optum LS across the five relevant business domains.</a:t>
             </a:r>
             <a:endParaRPr lang="en-US" sz="1050" dirty="0"/>
           </a:p>
@@ -14541,6 +14569,10 @@
           </a:solidFill>
           <a:ln/>
         </p:spPr>
+        <p:txBody>
+          <a:bodyPr/>
+          <a:p/>
+        </p:txBody>
       </p:sp>
       <p:sp>
         <p:nvSpPr>
@@ -16519,6 +16551,10 @@
             </a:outerShdw>
           </a:effectLst>
         </p:spPr>
+        <p:txBody>
+          <a:bodyPr/>
+          <a:p/>
+        </p:txBody>
       </p:sp>
       <p:sp>
         <p:nvSpPr>
@@ -16618,6 +16654,10 @@
             </a:outerShdw>
           </a:effectLst>
         </p:spPr>
+        <p:txBody>
+          <a:bodyPr/>
+          <a:p/>
+        </p:txBody>
       </p:sp>
       <p:sp>
         <p:nvSpPr>
@@ -16638,6 +16678,10 @@
           </a:solidFill>
           <a:ln/>
         </p:spPr>
+        <p:txBody>
+          <a:bodyPr/>
+          <a:p/>
+        </p:txBody>
       </p:sp>
       <p:pic>
         <p:nvPicPr>
@@ -16693,7 +16737,7 @@
                   <a:schemeClr val="accent2"/>
                 </a:solidFill>
               </a:rPr>
-              <a:t>NEXT: FROM COMPANY SCREENS TO ACTUAL PRODUCTS</a:t>
+              <a:t>FROM COMPANY SCREENS TO ACTUAL PRODUCTS</a:t>
             </a:r>
             <a:endParaRPr lang="en-US" sz="1300" dirty="0"/>
           </a:p>

--- a/deck/Optum-LS-Conversational-AI-sourced.pptx
+++ b/deck/Optum-LS-Conversational-AI-sourced.pptx
@@ -3571,6 +3571,61 @@
                 <a:latin typeface="Arial"/>
               </a:rPr>
               <a:t>Research and drafting were assisted by AI tools; the analysis and conclusions are the author’s own.</a:t>
+            </a:r>
+          </a:p>
+        </p:txBody>
+      </p:sp>
+      <p:sp>
+        <p:nvSpPr>
+          <p:cNvPr id="15" name="cover contact"/>
+          <p:cNvSpPr txBox="1"/>
+          <p:nvPr/>
+        </p:nvSpPr>
+        <p:spPr>
+          <a:xfrm>
+            <a:off x="822960" y="5138928"/>
+            <a:ext cx="8229600" cy="274320"/>
+          </a:xfrm>
+          <a:prstGeom prst="rect">
+            <a:avLst/>
+          </a:prstGeom>
+          <a:noFill/>
+        </p:spPr>
+        <p:txBody>
+          <a:bodyPr wrap="square" lIns="0" rIns="0" tIns="0" bIns="0">
+            <a:spAutoFit/>
+          </a:bodyPr>
+          <a:lstStyle/>
+          <a:p>
+            <a:pPr algn="l"/>
+            <a:r>
+              <a:rPr sz="1200" u="none">
+                <a:solidFill>
+                  <a:srgbClr val="002677"/>
+                </a:solidFill>
+                <a:latin typeface="Arial"/>
+                <a:hlinkClick r:id="rId2"/>
+              </a:rPr>
+              <a:t>linkedin.com/in/joseph-marino-995651183</a:t>
+            </a:r>
+            <a:r>
+              <a:rPr sz="1200">
+                <a:solidFill>
+                  <a:srgbClr val="7A7C7E"/>
+                </a:solidFill>
+                <a:latin typeface="Arial"/>
+              </a:rPr>
+              <a:t>  ·  </a:t>
+            </a:r>
+            <a:r>
+              <a:rPr sz="1200" u="none">
+                <a:solidFill>
+                  <a:srgbClr val="002677"/>
+                </a:solidFill>
+                <a:latin typeface="Arial"/>
+                <a:hlinkClick r:id="rId3"/>
+              </a:rPr>
+              <a:t>marinojoe@gmail.com</a:t>
             </a:r>
           </a:p>
         </p:txBody>

--- a/deck/Optum-LS-Conversational-AI-sourced.pptx
+++ b/deck/Optum-LS-Conversational-AI-sourced.pptx
@@ -7100,7 +7100,7 @@
                   <a:schemeClr val="tx1"/>
                 </a:solidFill>
               </a:rPr>
-              <a:t>Dates reflect selected public announcements or releases, not necessarily first feature availability. The timeline illustrates a research catalyst, not measured market-wide growth. AI-enabled or agentic launches are not automatically qualifying conversational products; the Norstella example is excluded from the final conversational count.</a:t>
+              <a:t>Dates reflect selected public announcements or releases, not necessarily first feature availability. The timeline illustrates a research catalyst, not measured market-wide growth. AI-enabled or agentic launches are not automatically qualifying conversational products; Norstella’s Atlas Patient Analytics is excluded from the final conversational count.</a:t>
             </a:r>
             <a:endParaRPr lang="en-US" sz="1000" dirty="0"/>
           </a:p>
@@ -8201,7 +8201,7 @@
                   <a:schemeClr val="tx1"/>
                 </a:solidFill>
               </a:rPr>
-              <a:t>These are selected publicly documented developments, not an exhaustive assessment of AI suppliers. The three approaches are neither mutually exclusive nor predictions of future competition. They do not establish that AI suppliers caused the recent RWE launch cluster, are displacing established vendors, or expose an Optum capability gap. Not all supplier offerings qualify as conversational products; they are not additions to the deck's product counts. North for Pharma was described as planned; Explore Assistant's general commercial availability was not established in our review.</a:t>
+              <a:t>These are selected publicly documented developments, not an exhaustive assessment of LLM providers. The three approaches are neither mutually exclusive nor predictions of future competition. They do not establish that LLM providers caused the recent RWE launch cluster, are displacing established vendors, or expose an Optum capability gap. Not all LLM provider offerings qualify as conversational products; they are not additions to the deck's product counts. North for Pharma was described as planned; Explore Assistant's general commercial availability was not established in our review.</a:t>
             </a:r>
             <a:endParaRPr lang="en-US" sz="1000" dirty="0"/>
           </a:p>
@@ -9396,35 +9396,43 @@
             <a:pPr indent="0" marL="0">
               <a:buNone/>
             </a:pPr>
+            <a:pPr indent="0" marL="0">
+              <a:buNone/>
+            </a:pPr>
+            <a:pPr indent="0" marL="0">
+              <a:buNone/>
+            </a:pPr>
+            <a:r>
+              <a:rPr lang="en-US" sz="1050" b="1" dirty="0">
+                <a:solidFill>
+                  <a:schemeClr val="tx1"/>
+                </a:solidFill>
+              </a:rPr>
+              <a:t>Nine selected international offerings</a:t>
+            </a:r>
             <a:r>
               <a:rPr lang="en-US" sz="1050" dirty="0">
                 <a:solidFill>
                   <a:schemeClr val="tx1"/>
                 </a:solidFill>
               </a:rPr>
-              <a:t>The selected international comparison identified </a:t>
-            </a:r>
-            <a:pPr indent="0" marL="0">
-              <a:buNone/>
-            </a:pPr>
+              <a:t> show how vendors outside the U.S. position conversational interaction, concentrated in </a:t>
+            </a:r>
             <a:r>
               <a:rPr lang="en-US" sz="1050" b="1" dirty="0">
                 <a:solidFill>
                   <a:schemeClr val="tx1"/>
                 </a:solidFill>
               </a:rPr>
-              <a:t>9 qualifying conversational AI offerings,</a:t>
-            </a:r>
-            <a:pPr indent="0" marL="0">
-              <a:buNone/>
-            </a:pPr>
+              <a:t>RWE and Commercial Intelligence</a:t>
+            </a:r>
             <a:r>
               <a:rPr lang="en-US" sz="1050" dirty="0">
                 <a:solidFill>
                   <a:schemeClr val="tx1"/>
                 </a:solidFill>
               </a:rPr>
-              <a:t> providing additional examples of how vendors position conversational interaction.</a:t>
+              <a:t>.</a:t>
             </a:r>
             <a:endParaRPr lang="en-US" sz="1050" dirty="0"/>
           </a:p>
@@ -14525,7 +14533,7 @@
                   <a:schemeClr val="accent2"/>
                 </a:solidFill>
               </a:rPr>
-              <a:t>U.S. BASELINE AND INTERNATIONAL COMPETITOR SCREENS</a:t>
+              <a:t>U.S. BASELINE AND INTERNATIONAL COMPANY SCREENS</a:t>
             </a:r>
             <a:endParaRPr lang="en-US" sz="1000" dirty="0"/>
           </a:p>
@@ -16677,7 +16685,7 @@
                   <a:schemeClr val="tx1"/>
                 </a:solidFill>
               </a:rPr>
-              <a:t>Each bar shows the share of comparable companies we screened that market conversational AI. International counts exclude competitors already represented in the U.S. inventory.</a:t>
+              <a:t>Each bar shows the share of comparable companies we screened that market conversational AI. International counts exclude companies already represented in the U.S. inventory.</a:t>
             </a:r>
             <a:endParaRPr lang="en-US" sz="1000" dirty="0"/>
           </a:p>

--- a/deck/Optum-LS-Conversational-AI-sourced.pptx
+++ b/deck/Optum-LS-Conversational-AI-sourced.pptx
@@ -10987,7 +10987,7 @@
                   <a:schemeClr val="tx1"/>
                 </a:solidFill>
               </a:rPr>
-              <a:t>We examine publicly marketed conversational AI across five Optum LS-relevant business domains. Vendors' product claims and descriptions of customer use provide observable evidence for comparing competitive positioning without access to internal product data.</a:t>
+              <a:t>We examine publicly marketed conversational AI across five Optum LS-relevant business domains. Vendors' product claims provide observable evidence for competitive positioning without access to internal product data.</a:t>
             </a:r>
             <a:endParaRPr lang="en-US" sz="1200" dirty="0"/>
           </a:p>

--- a/deck/Optum-LS-Conversational-AI-sourced.pptx
+++ b/deck/Optum-LS-Conversational-AI-sourced.pptx
@@ -6961,7 +6961,7 @@
                   <a:schemeClr val="accent2"/>
                 </a:solidFill>
               </a:rPr>
-              <a:t>SLIDE 2 — EVIDENCE BOUNDARY</a:t>
+              <a:t>SLIDE 2 — EXECUTIVE SUMMARY</a:t>
             </a:r>
             <a:endParaRPr lang="en-US" sz="1000" dirty="0"/>
           </a:p>
@@ -7064,7 +7064,7 @@
                   <a:schemeClr val="accent2"/>
                 </a:solidFill>
               </a:rPr>
-              <a:t>SLIDE 3 — EVIDENCE BOUNDARY</a:t>
+              <a:t>SLIDE 3 — RESEARCH CATALYST</a:t>
             </a:r>
             <a:endParaRPr lang="en-US" sz="1000" dirty="0"/>
           </a:p>
@@ -7167,7 +7167,7 @@
                   <a:schemeClr val="accent2"/>
                 </a:solidFill>
               </a:rPr>
-              <a:t>SLIDE 4 — METHODOLOGY NOTE</a:t>
+              <a:t>SLIDE 4 — U.S. LANDSCAPE</a:t>
             </a:r>
             <a:endParaRPr lang="en-US" sz="1000" dirty="0"/>
           </a:p>
@@ -7247,7 +7247,7 @@
       </p:sp>
       <p:sp>
         <p:nvSpPr>
-          <p:cNvPr id="12" name="slide 4 — india reconciliation"/>
+          <p:cNvPr id="15" name="slide 4 — evidence boundary"/>
           <p:cNvSpPr/>
           <p:nvPr/>
         </p:nvSpPr>
@@ -7278,7 +7278,7 @@
       </p:sp>
       <p:sp>
         <p:nvSpPr>
-          <p:cNvPr id="13" name="label"/>
+          <p:cNvPr id="16" name="label"/>
           <p:cNvSpPr txBox="1"/>
           <p:nvPr/>
         </p:nvSpPr>
@@ -7306,7 +7306,7 @@
                   <a:schemeClr val="accent2"/>
                 </a:solidFill>
               </a:rPr>
-              <a:t>SLIDE 5 — INDIA RECONCILIATION</a:t>
+              <a:t>SLIDE 5 — INTERNATIONAL SCREENS</a:t>
             </a:r>
             <a:endParaRPr lang="en-US" sz="1000" dirty="0"/>
           </a:p>
@@ -7314,7 +7314,7 @@
       </p:sp>
       <p:sp>
         <p:nvSpPr>
-          <p:cNvPr id="14" name="Text 12"/>
+          <p:cNvPr id="17" name="Text 15"/>
           <p:cNvSpPr txBox="1"/>
           <p:nvPr/>
         </p:nvSpPr>
@@ -7342,7 +7342,7 @@
                   <a:schemeClr val="tx1"/>
                 </a:solidFill>
               </a:rPr>
-              <a:t>Of 37 screened companies, 36 qualify as direct/specialized comparators in at least one of the five domains; excluding four companies already represented in the qualifying U.S. chat cohort leaves 32. Three additional chat-marketing companies qualify: Axtria, Doceree and Genpact. Company presence in an India screen does not prove the specific product is available or deployed in India.</a:t>
+              <a:t>Selected country/region screens differ in research depth and company composition and are not representative national market samples. The Nordics screen groups Denmark, Finland, Norway and Sweden. A multinational may appear in multiple country screens; the counts are not additive across countries. A globally marketed product does not establish locally verified use. Percentages show shares within screened comparable companies, not regional adoption, customer penetration or product deployment rates.</a:t>
             </a:r>
             <a:endParaRPr lang="en-US" sz="1000" dirty="0"/>
           </a:p>
@@ -7350,7 +7350,7 @@
       </p:sp>
       <p:sp>
         <p:nvSpPr>
-          <p:cNvPr id="15" name="slide 4 — evidence boundary"/>
+          <p:cNvPr id="18" name="slide 5 — evidence boundary"/>
           <p:cNvSpPr/>
           <p:nvPr/>
         </p:nvSpPr>
@@ -7381,7 +7381,7 @@
       </p:sp>
       <p:sp>
         <p:nvSpPr>
-          <p:cNvPr id="16" name="label"/>
+          <p:cNvPr id="19" name="label"/>
           <p:cNvSpPr txBox="1"/>
           <p:nvPr/>
         </p:nvSpPr>
@@ -7409,110 +7409,7 @@
                   <a:schemeClr val="accent2"/>
                 </a:solidFill>
               </a:rPr>
-              <a:t>SLIDE 5 — EVIDENCE BOUNDARY</a:t>
-            </a:r>
-            <a:endParaRPr lang="en-US" sz="1000" dirty="0"/>
-          </a:p>
-        </p:txBody>
-      </p:sp>
-      <p:sp>
-        <p:nvSpPr>
-          <p:cNvPr id="17" name="Text 15"/>
-          <p:cNvSpPr txBox="1"/>
-          <p:nvPr/>
-        </p:nvSpPr>
-        <p:spPr>
-          <a:xfrm>
-            <a:off x="4483608" y="3579876"/>
-            <a:ext cx="3221736" cy="1677924"/>
-          </a:xfrm>
-          <a:prstGeom prst="rect">
-            <a:avLst/>
-          </a:prstGeom>
-          <a:noFill/>
-          <a:ln/>
-        </p:spPr>
-        <p:txBody>
-          <a:bodyPr wrap="square" lIns="0" tIns="0" rIns="0" bIns="0" rtlCol="0" anchor="t"/>
-          <a:lstStyle/>
-          <a:p>
-            <a:pPr indent="0" marL="0">
-              <a:buNone/>
-            </a:pPr>
-            <a:r>
-              <a:rPr lang="en-US" sz="1000" dirty="0">
-                <a:solidFill>
-                  <a:schemeClr val="tx1"/>
-                </a:solidFill>
-              </a:rPr>
-              <a:t>Selected country/region screens differ in research depth and company composition and are not representative national market samples. The Nordics screen groups Denmark, Finland, Norway and Sweden. A multinational may appear in multiple country screens; the counts are not additive across countries. A globally marketed product does not establish locally verified use. Percentages show shares within screened comparable companies, not regional adoption, customer penetration or product deployment rates.</a:t>
-            </a:r>
-            <a:endParaRPr lang="en-US" sz="1000" dirty="0"/>
-          </a:p>
-        </p:txBody>
-      </p:sp>
-      <p:sp>
-        <p:nvSpPr>
-          <p:cNvPr id="18" name="slide 5 — evidence boundary"/>
-          <p:cNvSpPr/>
-          <p:nvPr/>
-        </p:nvSpPr>
-        <p:spPr>
-          <a:xfrm>
-            <a:off x="8052816" y="3159252"/>
-            <a:ext cx="3587496" cy="2171700"/>
-          </a:xfrm>
-          <a:prstGeom prst="rect">
-            <a:avLst/>
-          </a:prstGeom>
-          <a:solidFill>
-            <a:schemeClr val="bg1"/>
-          </a:solidFill>
-          <a:ln/>
-          <a:effectLst>
-            <a:outerShdw sx="100000" sy="100000" kx="0" ky="0" algn="bl" rotWithShape="0" blurRad="101600" dist="25400" dir="5400000">
-              <a:srgbClr val="000000">
-                <a:alpha val="10000"/>
-              </a:srgbClr>
-            </a:outerShdw>
-          </a:effectLst>
-        </p:spPr>
-        <p:txBody>
-          <a:bodyPr/>
-          <a:p/>
-        </p:txBody>
-      </p:sp>
-      <p:sp>
-        <p:nvSpPr>
-          <p:cNvPr id="19" name="label"/>
-          <p:cNvSpPr txBox="1"/>
-          <p:nvPr/>
-        </p:nvSpPr>
-        <p:spPr>
-          <a:xfrm>
-            <a:off x="8235696" y="3305556"/>
-            <a:ext cx="3221736" cy="219456"/>
-          </a:xfrm>
-          <a:prstGeom prst="rect">
-            <a:avLst/>
-          </a:prstGeom>
-          <a:noFill/>
-          <a:ln/>
-        </p:spPr>
-        <p:txBody>
-          <a:bodyPr wrap="square" lIns="0" tIns="0" rIns="0" bIns="0" rtlCol="0" anchor="t"/>
-          <a:lstStyle/>
-          <a:p>
-            <a:pPr indent="0" marL="0">
-              <a:buNone/>
-            </a:pPr>
-            <a:r>
-              <a:rPr lang="en-US" sz="1000" b="1" spc="100" kern="0" dirty="0">
-                <a:solidFill>
-                  <a:schemeClr val="accent2"/>
-                </a:solidFill>
-              </a:rPr>
-              <a:t>SLIDE 6 — EVIDENCE BOUNDARY</a:t>
+              <a:t>SLIDE 6 — RWE</a:t>
             </a:r>
             <a:endParaRPr lang="en-US" sz="1000" dirty="0"/>
           </a:p>
@@ -7526,7 +7423,7 @@
         </p:nvSpPr>
         <p:spPr>
           <a:xfrm>
-            <a:off x="8235696" y="3579876"/>
+            <a:off x="4483608" y="3579876"/>
             <a:ext cx="3221736" cy="1677924"/>
           </a:xfrm>
           <a:prstGeom prst="rect">
@@ -7753,7 +7650,7 @@
                   <a:schemeClr val="accent2"/>
                 </a:solidFill>
               </a:rPr>
-              <a:t>SLIDE 7 — EVIDENCE BOUNDARY</a:t>
+              <a:t>SLIDE 7 — SPECIALIZED RWE</a:t>
             </a:r>
             <a:endParaRPr lang="en-US" sz="1000" dirty="0"/>
           </a:p>
@@ -7856,7 +7753,7 @@
                   <a:schemeClr val="accent2"/>
                 </a:solidFill>
               </a:rPr>
-              <a:t>SLIDE 8 — EVIDENCE BOUNDARY</a:t>
+              <a:t>SLIDE 8 — COMMERCIAL INTELLIGENCE</a:t>
             </a:r>
             <a:endParaRPr lang="en-US" sz="1000" dirty="0"/>
           </a:p>
@@ -7959,7 +7856,7 @@
                   <a:schemeClr val="accent2"/>
                 </a:solidFill>
               </a:rPr>
-              <a:t>SLIDE 9 — EVIDENCE BOUNDARY</a:t>
+              <a:t>SLIDE 9 — MEDICAL / REGULATORY</a:t>
             </a:r>
             <a:endParaRPr lang="en-US" sz="1000" dirty="0"/>
           </a:p>
@@ -8062,7 +7959,7 @@
                   <a:schemeClr val="accent2"/>
                 </a:solidFill>
               </a:rPr>
-              <a:t>SLIDE 10 — EVIDENCE BOUNDARY</a:t>
+              <a:t>SLIDE 10 — TRIALS &amp; MARKET ACCESS</a:t>
             </a:r>
             <a:endParaRPr lang="en-US" sz="1000" dirty="0"/>
           </a:p>
@@ -8165,7 +8062,7 @@
                   <a:schemeClr val="accent2"/>
                 </a:solidFill>
               </a:rPr>
-              <a:t>SLIDE 11 — EVIDENCE BOUNDARY</a:t>
+              <a:t>SLIDE 11 — LLM PROVIDERS</a:t>
             </a:r>
             <a:endParaRPr lang="en-US" sz="1000" dirty="0"/>
           </a:p>

--- a/deck/Optum-LS-Conversational-AI-sourced.pptx
+++ b/deck/Optum-LS-Conversational-AI-sourced.pptx
@@ -7526,6 +7526,109 @@
           </a:p>
         </p:txBody>
       </p:sp>
+      <p:sp>
+        <p:nvSpPr>
+          <p:cNvPr id="3" name="slide 6 — evidence boundary"/>
+          <p:cNvSpPr/>
+          <p:nvPr/>
+        </p:nvSpPr>
+        <p:spPr>
+          <a:xfrm>
+            <a:off x="8055864" y="3163824"/>
+            <a:ext cx="3587496" cy="2176272"/>
+          </a:xfrm>
+          <a:prstGeom prst="rect">
+            <a:avLst/>
+          </a:prstGeom>
+          <a:solidFill>
+            <a:schemeClr val="bg1"/>
+          </a:solidFill>
+          <a:ln/>
+          <a:effectLst>
+            <a:outerShdw sx="100000" sy="100000" kx="0" ky="0" algn="bl" rotWithShape="0" blurRad="101600" dist="25400" dir="5400000">
+              <a:srgbClr val="000000">
+                <a:alpha val="10000"/>
+              </a:srgbClr>
+            </a:outerShdw>
+          </a:effectLst>
+        </p:spPr>
+        <p:txBody>
+          <a:bodyPr/>
+          <a:p/>
+        </p:txBody>
+      </p:sp>
+      <p:sp>
+        <p:nvSpPr>
+          <p:cNvPr id="4" name="label"/>
+          <p:cNvSpPr txBox="1"/>
+          <p:nvPr/>
+        </p:nvSpPr>
+        <p:spPr>
+          <a:xfrm>
+            <a:off x="8238744" y="3310128"/>
+            <a:ext cx="3221736" cy="219456"/>
+          </a:xfrm>
+          <a:prstGeom prst="rect">
+            <a:avLst/>
+          </a:prstGeom>
+          <a:noFill/>
+          <a:ln/>
+        </p:spPr>
+        <p:txBody>
+          <a:bodyPr wrap="square" lIns="0" tIns="0" rIns="0" bIns="0" rtlCol="0" anchor="t"/>
+          <a:lstStyle/>
+          <a:p>
+            <a:pPr indent="0" marL="0">
+              <a:buNone/>
+            </a:pPr>
+            <a:r>
+              <a:rPr lang="en-US" sz="1000" b="1" spc="100" kern="0" dirty="0">
+                <a:solidFill>
+                  <a:schemeClr val="accent2"/>
+                </a:solidFill>
+              </a:rPr>
+              <a:t>SLIDE 7 — SPECIALIZED RWE</a:t>
+            </a:r>
+            <a:endParaRPr lang="en-US" sz="1000" dirty="0"/>
+          </a:p>
+        </p:txBody>
+      </p:sp>
+      <p:sp>
+        <p:nvSpPr>
+          <p:cNvPr id="5" name="Text 3"/>
+          <p:cNvSpPr txBox="1"/>
+          <p:nvPr/>
+        </p:nvSpPr>
+        <p:spPr>
+          <a:xfrm>
+            <a:off x="8238744" y="3584448"/>
+            <a:ext cx="3221736" cy="1682495"/>
+          </a:xfrm>
+          <a:prstGeom prst="rect">
+            <a:avLst/>
+          </a:prstGeom>
+          <a:noFill/>
+          <a:ln/>
+        </p:spPr>
+        <p:txBody>
+          <a:bodyPr wrap="square" lIns="0" tIns="0" rIns="0" bIns="0" rtlCol="0" anchor="t"/>
+          <a:lstStyle/>
+          <a:p>
+            <a:pPr indent="0" marL="0">
+              <a:buNone/>
+            </a:pPr>
+            <a:r>
+              <a:rPr lang="en-US" sz="1000" dirty="0">
+                <a:solidFill>
+                  <a:schemeClr val="tx1"/>
+                </a:solidFill>
+              </a:rPr>
+              <a:t>Scope: Four qualifying U.S. conversational offerings plus one selected international example. Product descriptions are based on public marketing; study-grade reliability, data entitlements and actual deployment are not independently established.</a:t>
+            </a:r>
+            <a:endParaRPr lang="en-US" sz="1000" dirty="0"/>
+          </a:p>
+        </p:txBody>
+      </p:sp>
     </p:spTree>
   </p:cSld>
   <p:clrMapOvr>
@@ -7591,14 +7694,14 @@
       </p:sp>
       <p:sp>
         <p:nvSpPr>
-          <p:cNvPr id="3" name="slide 6 — evidence boundary"/>
+          <p:cNvPr id="6" name="slide 7 — evidence boundary"/>
           <p:cNvSpPr/>
           <p:nvPr/>
         </p:nvSpPr>
         <p:spPr>
           <a:xfrm>
             <a:off x="548640" y="822960"/>
-            <a:ext cx="3587496" cy="1706880"/>
+            <a:ext cx="3587496" cy="2322576"/>
           </a:xfrm>
           <a:prstGeom prst="rect">
             <a:avLst/>
@@ -7622,7 +7725,7 @@
       </p:sp>
       <p:sp>
         <p:nvSpPr>
-          <p:cNvPr id="4" name="label"/>
+          <p:cNvPr id="7" name="label"/>
           <p:cNvSpPr txBox="1"/>
           <p:nvPr/>
         </p:nvSpPr>
@@ -7650,7 +7753,7 @@
                   <a:schemeClr val="accent2"/>
                 </a:solidFill>
               </a:rPr>
-              <a:t>SLIDE 7 — SPECIALIZED RWE</a:t>
+              <a:t>SLIDE 8 — COMMERCIAL INTELLIGENCE</a:t>
             </a:r>
             <a:endParaRPr lang="en-US" sz="1000" dirty="0"/>
           </a:p>
@@ -7658,14 +7761,14 @@
       </p:sp>
       <p:sp>
         <p:nvSpPr>
-          <p:cNvPr id="5" name="Text 3"/>
+          <p:cNvPr id="8" name="Text 6"/>
           <p:cNvSpPr txBox="1"/>
           <p:nvPr/>
         </p:nvSpPr>
         <p:spPr>
           <a:xfrm>
             <a:off x="731520" y="1243584"/>
-            <a:ext cx="3221736" cy="1213104"/>
+            <a:ext cx="3221736" cy="1828800"/>
           </a:xfrm>
           <a:prstGeom prst="rect">
             <a:avLst/>
@@ -7686,7 +7789,7 @@
                   <a:schemeClr val="tx1"/>
                 </a:solidFill>
               </a:rPr>
-              <a:t>Scope: Four qualifying U.S. conversational offerings plus one selected international example. Product descriptions are based on public marketing; study-grade reliability, data entitlements and actual deployment are not independently established.</a:t>
+              <a:t>Scope: All four qualifying U.S. commercial conversational offerings plus four selected international examples. Customer tasks are not interchangeable; Optum comparisons are based on public offerings, not feature-for-feature validation. International examples are illustrative, not a geographic prevalence comparison.</a:t>
             </a:r>
             <a:endParaRPr lang="en-US" sz="1000" dirty="0"/>
           </a:p>
@@ -7694,14 +7797,14 @@
       </p:sp>
       <p:sp>
         <p:nvSpPr>
-          <p:cNvPr id="6" name="slide 7 — evidence boundary"/>
+          <p:cNvPr id="9" name="slide 8 — evidence boundary"/>
           <p:cNvSpPr/>
           <p:nvPr/>
         </p:nvSpPr>
         <p:spPr>
           <a:xfrm>
-            <a:off x="4300728" y="822960"/>
-            <a:ext cx="3587496" cy="1706880"/>
+            <a:off x="4297680" y="822960"/>
+            <a:ext cx="3587496" cy="2322576"/>
           </a:xfrm>
           <a:prstGeom prst="rect">
             <a:avLst/>
@@ -7725,13 +7828,13 @@
       </p:sp>
       <p:sp>
         <p:nvSpPr>
-          <p:cNvPr id="7" name="label"/>
+          <p:cNvPr id="10" name="label"/>
           <p:cNvSpPr txBox="1"/>
           <p:nvPr/>
         </p:nvSpPr>
         <p:spPr>
           <a:xfrm>
-            <a:off x="4483608" y="969264"/>
+            <a:off x="4480560" y="969264"/>
             <a:ext cx="3221736" cy="219456"/>
           </a:xfrm>
           <a:prstGeom prst="rect">
@@ -7753,7 +7856,7 @@
                   <a:schemeClr val="accent2"/>
                 </a:solidFill>
               </a:rPr>
-              <a:t>SLIDE 8 — COMMERCIAL INTELLIGENCE</a:t>
+              <a:t>SLIDE 9 — MEDICAL / REGULATORY</a:t>
             </a:r>
             <a:endParaRPr lang="en-US" sz="1000" dirty="0"/>
           </a:p>
@@ -7761,14 +7864,14 @@
       </p:sp>
       <p:sp>
         <p:nvSpPr>
-          <p:cNvPr id="8" name="Text 6"/>
+          <p:cNvPr id="11" name="Text 9"/>
           <p:cNvSpPr txBox="1"/>
           <p:nvPr/>
         </p:nvSpPr>
         <p:spPr>
           <a:xfrm>
-            <a:off x="4483608" y="1243584"/>
-            <a:ext cx="3221736" cy="1213104"/>
+            <a:off x="4480560" y="1243584"/>
+            <a:ext cx="3221736" cy="1828800"/>
           </a:xfrm>
           <a:prstGeom prst="rect">
             <a:avLst/>
@@ -7789,7 +7892,7 @@
                   <a:schemeClr val="tx1"/>
                 </a:solidFill>
               </a:rPr>
-              <a:t>Scope: All four qualifying U.S. commercial conversational offerings plus four selected international examples. Customer tasks are not interchangeable; Optum comparisons are based on public offerings, not feature-for-feature validation. International examples are illustrative, not a geographic prevalence comparison.</a:t>
+              <a:t>Three qualifying U.S. offerings plus one selected Spanish example. The examples span distinct tasks; scientific research, medical education, document assistance and pharmacovigilance are not interchangeable. Optum comparisons reflect publicly marketed capabilities, not verified conversational equivalence.</a:t>
             </a:r>
             <a:endParaRPr lang="en-US" sz="1000" dirty="0"/>
           </a:p>
@@ -7797,14 +7900,14 @@
       </p:sp>
       <p:sp>
         <p:nvSpPr>
-          <p:cNvPr id="9" name="slide 8 — evidence boundary"/>
+          <p:cNvPr id="12" name="slide 9 — evidence boundary"/>
           <p:cNvSpPr/>
           <p:nvPr/>
         </p:nvSpPr>
         <p:spPr>
           <a:xfrm>
-            <a:off x="8052816" y="822960"/>
-            <a:ext cx="3587496" cy="1706880"/>
+            <a:off x="8055864" y="822960"/>
+            <a:ext cx="3587496" cy="2322576"/>
           </a:xfrm>
           <a:prstGeom prst="rect">
             <a:avLst/>
@@ -7828,13 +7931,13 @@
       </p:sp>
       <p:sp>
         <p:nvSpPr>
-          <p:cNvPr id="10" name="label"/>
+          <p:cNvPr id="13" name="label"/>
           <p:cNvSpPr txBox="1"/>
           <p:nvPr/>
         </p:nvSpPr>
         <p:spPr>
           <a:xfrm>
-            <a:off x="8235696" y="969264"/>
+            <a:off x="8238744" y="969264"/>
             <a:ext cx="3221736" cy="219456"/>
           </a:xfrm>
           <a:prstGeom prst="rect">
@@ -7856,7 +7959,7 @@
                   <a:schemeClr val="accent2"/>
                 </a:solidFill>
               </a:rPr>
-              <a:t>SLIDE 9 — MEDICAL / REGULATORY</a:t>
+              <a:t>SLIDE 10 — TRIALS &amp; MARKET ACCESS</a:t>
             </a:r>
             <a:endParaRPr lang="en-US" sz="1000" dirty="0"/>
           </a:p>
@@ -7864,14 +7967,14 @@
       </p:sp>
       <p:sp>
         <p:nvSpPr>
-          <p:cNvPr id="11" name="Text 9"/>
+          <p:cNvPr id="14" name="Text 12"/>
           <p:cNvSpPr txBox="1"/>
           <p:nvPr/>
         </p:nvSpPr>
         <p:spPr>
           <a:xfrm>
-            <a:off x="8235696" y="1243584"/>
-            <a:ext cx="3221736" cy="1213104"/>
+            <a:off x="8238744" y="1243584"/>
+            <a:ext cx="3221736" cy="1828800"/>
           </a:xfrm>
           <a:prstGeom prst="rect">
             <a:avLst/>
@@ -7892,7 +7995,7 @@
                   <a:schemeClr val="tx1"/>
                 </a:solidFill>
               </a:rPr>
-              <a:t>Three qualifying U.S. offerings plus one selected Spanish example. The examples span distinct tasks; scientific research, medical education, document assistance and pharmacovigilance are not interchangeable. Optum comparisons reflect publicly marketed capabilities, not verified conversational equivalence.</a:t>
+              <a:t>Clinical trials — one qualifying U.S. offering and one selected Chinese example. Market access — one qualifying U.S. offering. No additional qualifying international market-access offering was identified in the selected inventory. The Optum comparisons are based on customer-task overlap, not identical product functionality.</a:t>
             </a:r>
             <a:endParaRPr lang="en-US" sz="1000" dirty="0"/>
           </a:p>
@@ -7900,14 +8003,14 @@
       </p:sp>
       <p:sp>
         <p:nvSpPr>
-          <p:cNvPr id="12" name="slide 9 — evidence boundary"/>
+          <p:cNvPr id="15" name="slide 10 — evidence boundary"/>
           <p:cNvSpPr/>
           <p:nvPr/>
         </p:nvSpPr>
         <p:spPr>
           <a:xfrm>
-            <a:off x="548640" y="2694432"/>
-            <a:ext cx="3587496" cy="2326640"/>
+            <a:off x="548640" y="3310128"/>
+            <a:ext cx="3587496" cy="2322576"/>
           </a:xfrm>
           <a:prstGeom prst="rect">
             <a:avLst/>
@@ -7931,13 +8034,13 @@
       </p:sp>
       <p:sp>
         <p:nvSpPr>
-          <p:cNvPr id="13" name="label"/>
+          <p:cNvPr id="16" name="label"/>
           <p:cNvSpPr txBox="1"/>
           <p:nvPr/>
         </p:nvSpPr>
         <p:spPr>
           <a:xfrm>
-            <a:off x="731520" y="2840736"/>
+            <a:off x="731520" y="3456432"/>
             <a:ext cx="3221736" cy="219456"/>
           </a:xfrm>
           <a:prstGeom prst="rect">
@@ -7959,7 +8062,7 @@
                   <a:schemeClr val="accent2"/>
                 </a:solidFill>
               </a:rPr>
-              <a:t>SLIDE 10 — TRIALS &amp; MARKET ACCESS</a:t>
+              <a:t>SLIDE 11 — LLM PROVIDERS</a:t>
             </a:r>
             <a:endParaRPr lang="en-US" sz="1000" dirty="0"/>
           </a:p>
@@ -7967,14 +8070,14 @@
       </p:sp>
       <p:sp>
         <p:nvSpPr>
-          <p:cNvPr id="14" name="Text 12"/>
+          <p:cNvPr id="17" name="Text 15"/>
           <p:cNvSpPr txBox="1"/>
           <p:nvPr/>
         </p:nvSpPr>
         <p:spPr>
           <a:xfrm>
-            <a:off x="731520" y="3115056"/>
-            <a:ext cx="3221736" cy="1832864"/>
+            <a:off x="731520" y="3730752"/>
+            <a:ext cx="3221736" cy="1828800"/>
           </a:xfrm>
           <a:prstGeom prst="rect">
             <a:avLst/>
@@ -7995,7 +8098,7 @@
                   <a:schemeClr val="tx1"/>
                 </a:solidFill>
               </a:rPr>
-              <a:t>Clinical trials — one qualifying U.S. offering and one selected Chinese example. Market access — one qualifying U.S. offering. No additional qualifying international market-access offering was identified in the selected inventory. The Optum comparisons are based on customer-task overlap, not identical product functionality.</a:t>
+              <a:t>These are selected publicly documented developments, not an exhaustive assessment of LLM providers. The three approaches are neither mutually exclusive nor predictions of future competition. They do not establish that LLM providers caused the recent RWE launch cluster, are displacing established vendors, or expose an Optum capability gap. Not all LLM provider offerings qualify as conversational products; they are not additions to the deck's product counts. North for Pharma was described as planned; Explore Assistant's general commercial availability was not established in our review.</a:t>
             </a:r>
             <a:endParaRPr lang="en-US" sz="1000" dirty="0"/>
           </a:p>
@@ -8003,14 +8106,89 @@
       </p:sp>
       <p:sp>
         <p:nvSpPr>
-          <p:cNvPr id="15" name="slide 10 — evidence boundary"/>
+          <p:cNvPr id="18" name="Text 2"/>
           <p:cNvSpPr/>
-          <p:nvPr/>
-        </p:nvSpPr>
-        <p:spPr>
-          <a:xfrm>
-            <a:off x="4300728" y="2694432"/>
-            <a:ext cx="3587496" cy="2326640"/>
+          <p:nvPr>
+            <p:ph idx="103" type="title" hasCustomPrompt="1"/>
+          </p:nvPr>
+        </p:nvSpPr>
+        <p:spPr>
+          <a:xfrm>
+            <a:off x="548640" y="640080"/>
+            <a:ext cx="11091672" cy="749808"/>
+          </a:xfrm>
+          <a:prstGeom prst="rect">
+            <a:avLst/>
+          </a:prstGeom>
+          <a:noFill/>
+          <a:ln/>
+        </p:spPr>
+        <p:txBody>
+          <a:bodyPr wrap="square" lIns="0" tIns="0" rIns="0" bIns="0" rtlCol="0" anchor="t"/>
+          <a:lstStyle/>
+          <a:p>
+            <a:pPr algn="l" indent="0" marL="0">
+              <a:buNone/>
+            </a:pPr>
+            <a:endParaRPr lang="en-US" sz="2200" dirty="0"/>
+          </a:p>
+        </p:txBody>
+      </p:sp>
+      <p:sp>
+        <p:nvSpPr>
+          <p:cNvPr id="25" name="Slide Number Placeholder 0"/>
+          <p:cNvSpPr>
+            <a:spLocks noGrp="1"/>
+          </p:cNvSpPr>
+          <p:nvPr>
+            <p:ph type="sldNum" sz="quarter" idx="4294967295"/>
+          </p:nvPr>
+        </p:nvSpPr>
+        <p:spPr>
+          <a:xfrm>
+            <a:off x="10725912" y="6309360"/>
+            <a:ext cx="914400" cy="201168"/>
+          </a:xfrm>
+          <a:prstGeom prst="rect">
+            <a:avLst/>
+          </a:prstGeom>
+          <a:extLst>
+            <a:ext uri="{C572A759-6A51-4108-AA02-DFA0A04FC94B}">
+              <ma14:wrappingTextBoxFlag xmlns:ma14="http://schemas.microsoft.com/office/mac/drawingml/2011/main" val="0"/>
+            </a:ext>
+          </a:extLst>
+        </p:spPr>
+        <p:txBody>
+          <a:bodyPr lIns="0" tIns="0" rIns="0" bIns="0"/>
+          <a:lstStyle>
+            <a:lvl1pPr>
+              <a:defRPr sz="900">
+                <a:solidFill>
+                  <a:schemeClr val="accent4"/>
+                </a:solidFill>
+              </a:defRPr>
+            </a:lvl1pPr>
+          </a:lstStyle>
+          <a:p>
+            <a:pPr algn="r"/>
+            <a:fld id="{F7021451-1387-4CA6-816F-3879F97B5CBC}" type="slidenum">
+              <a:rPr b="0" lang="en-US"/>
+              <a:t>12</a:t>
+            </a:fld>
+            <a:endParaRPr lang="en-US"/>
+          </a:p>
+        </p:txBody>
+      </p:sp>
+      <p:sp>
+        <p:nvSpPr>
+          <p:cNvPr id="26" name="Source convention 13"/>
+          <p:cNvSpPr/>
+          <p:nvPr/>
+        </p:nvSpPr>
+        <p:spPr>
+          <a:xfrm>
+            <a:off x="4297680" y="3310128"/>
+            <a:ext cx="3587496" cy="2322576"/>
           </a:xfrm>
           <a:prstGeom prst="rect">
             <a:avLst/>
@@ -8034,191 +8212,13 @@
       </p:sp>
       <p:sp>
         <p:nvSpPr>
-          <p:cNvPr id="16" name="label"/>
-          <p:cNvSpPr txBox="1"/>
-          <p:nvPr/>
-        </p:nvSpPr>
-        <p:spPr>
-          <a:xfrm>
-            <a:off x="4483608" y="2840736"/>
-            <a:ext cx="3221736" cy="219456"/>
-          </a:xfrm>
-          <a:prstGeom prst="rect">
-            <a:avLst/>
-          </a:prstGeom>
-          <a:noFill/>
-          <a:ln/>
-        </p:spPr>
-        <p:txBody>
-          <a:bodyPr wrap="square" lIns="0" tIns="0" rIns="0" bIns="0" rtlCol="0" anchor="t"/>
-          <a:lstStyle/>
-          <a:p>
-            <a:pPr indent="0" marL="0">
-              <a:buNone/>
-            </a:pPr>
-            <a:r>
-              <a:rPr lang="en-US" sz="1000" b="1" spc="100" kern="0" dirty="0">
-                <a:solidFill>
-                  <a:schemeClr val="accent2"/>
-                </a:solidFill>
-              </a:rPr>
-              <a:t>SLIDE 11 — LLM PROVIDERS</a:t>
-            </a:r>
-            <a:endParaRPr lang="en-US" sz="1000" dirty="0"/>
-          </a:p>
-        </p:txBody>
-      </p:sp>
-      <p:sp>
-        <p:nvSpPr>
-          <p:cNvPr id="17" name="Text 15"/>
-          <p:cNvSpPr txBox="1"/>
-          <p:nvPr/>
-        </p:nvSpPr>
-        <p:spPr>
-          <a:xfrm>
-            <a:off x="4483608" y="3115056"/>
-            <a:ext cx="3221736" cy="1832864"/>
-          </a:xfrm>
-          <a:prstGeom prst="rect">
-            <a:avLst/>
-          </a:prstGeom>
-          <a:noFill/>
-          <a:ln/>
-        </p:spPr>
-        <p:txBody>
-          <a:bodyPr wrap="square" lIns="0" tIns="0" rIns="0" bIns="0" rtlCol="0" anchor="t"/>
-          <a:lstStyle/>
-          <a:p>
-            <a:pPr indent="0" marL="0">
-              <a:buNone/>
-            </a:pPr>
-            <a:r>
-              <a:rPr lang="en-US" sz="1000" dirty="0">
-                <a:solidFill>
-                  <a:schemeClr val="tx1"/>
-                </a:solidFill>
-              </a:rPr>
-              <a:t>These are selected publicly documented developments, not an exhaustive assessment of LLM providers. The three approaches are neither mutually exclusive nor predictions of future competition. They do not establish that LLM providers caused the recent RWE launch cluster, are displacing established vendors, or expose an Optum capability gap. Not all LLM provider offerings qualify as conversational products; they are not additions to the deck's product counts. North for Pharma was described as planned; Explore Assistant's general commercial availability was not established in our review.</a:t>
-            </a:r>
-            <a:endParaRPr lang="en-US" sz="1000" dirty="0"/>
-          </a:p>
-        </p:txBody>
-      </p:sp>
-      <p:sp>
-        <p:nvSpPr>
-          <p:cNvPr id="18" name="Text 2"/>
-          <p:cNvSpPr/>
-          <p:nvPr>
-            <p:ph idx="103" type="title" hasCustomPrompt="1"/>
-          </p:nvPr>
-        </p:nvSpPr>
-        <p:spPr>
-          <a:xfrm>
-            <a:off x="548640" y="640080"/>
-            <a:ext cx="11091672" cy="749808"/>
-          </a:xfrm>
-          <a:prstGeom prst="rect">
-            <a:avLst/>
-          </a:prstGeom>
-          <a:noFill/>
-          <a:ln/>
-        </p:spPr>
-        <p:txBody>
-          <a:bodyPr wrap="square" lIns="0" tIns="0" rIns="0" bIns="0" rtlCol="0" anchor="t"/>
-          <a:lstStyle/>
-          <a:p>
-            <a:pPr algn="l" indent="0" marL="0">
-              <a:buNone/>
-            </a:pPr>
-            <a:endParaRPr lang="en-US" sz="2200" dirty="0"/>
-          </a:p>
-        </p:txBody>
-      </p:sp>
-      <p:sp>
-        <p:nvSpPr>
-          <p:cNvPr id="25" name="Slide Number Placeholder 0"/>
-          <p:cNvSpPr>
-            <a:spLocks noGrp="1"/>
-          </p:cNvSpPr>
-          <p:nvPr>
-            <p:ph type="sldNum" sz="quarter" idx="4294967295"/>
-          </p:nvPr>
-        </p:nvSpPr>
-        <p:spPr>
-          <a:xfrm>
-            <a:off x="10725912" y="6309360"/>
-            <a:ext cx="914400" cy="201168"/>
-          </a:xfrm>
-          <a:prstGeom prst="rect">
-            <a:avLst/>
-          </a:prstGeom>
-          <a:extLst>
-            <a:ext uri="{C572A759-6A51-4108-AA02-DFA0A04FC94B}">
-              <ma14:wrappingTextBoxFlag xmlns:ma14="http://schemas.microsoft.com/office/mac/drawingml/2011/main" val="0"/>
-            </a:ext>
-          </a:extLst>
-        </p:spPr>
-        <p:txBody>
-          <a:bodyPr lIns="0" tIns="0" rIns="0" bIns="0"/>
-          <a:lstStyle>
-            <a:lvl1pPr>
-              <a:defRPr sz="900">
-                <a:solidFill>
-                  <a:schemeClr val="accent4"/>
-                </a:solidFill>
-              </a:defRPr>
-            </a:lvl1pPr>
-          </a:lstStyle>
-          <a:p>
-            <a:pPr algn="r"/>
-            <a:fld id="{F7021451-1387-4CA6-816F-3879F97B5CBC}" type="slidenum">
-              <a:rPr b="0" lang="en-US"/>
-              <a:t>12</a:t>
-            </a:fld>
-            <a:endParaRPr lang="en-US"/>
-          </a:p>
-        </p:txBody>
-      </p:sp>
-      <p:sp>
-        <p:nvSpPr>
-          <p:cNvPr id="26" name="Source convention 13"/>
-          <p:cNvSpPr/>
-          <p:nvPr/>
-        </p:nvSpPr>
-        <p:spPr>
-          <a:xfrm>
-            <a:off x="8058912" y="2694432"/>
-            <a:ext cx="3587496" cy="2326640"/>
-          </a:xfrm>
-          <a:prstGeom prst="rect">
-            <a:avLst/>
-          </a:prstGeom>
-          <a:solidFill>
-            <a:schemeClr val="bg1"/>
-          </a:solidFill>
-          <a:ln/>
-          <a:effectLst>
-            <a:outerShdw sx="100000" sy="100000" kx="0" ky="0" algn="bl" rotWithShape="0" blurRad="101600" dist="25400" dir="5400000">
-              <a:srgbClr val="000000">
-                <a:alpha val="10000"/>
-              </a:srgbClr>
-            </a:outerShdw>
-          </a:effectLst>
-        </p:spPr>
-        <p:txBody>
-          <a:bodyPr/>
-          <a:p/>
-        </p:txBody>
-      </p:sp>
-      <p:sp>
-        <p:nvSpPr>
           <p:cNvPr id="27" name="Source convention 14"/>
           <p:cNvSpPr txBox="1"/>
           <p:nvPr/>
         </p:nvSpPr>
         <p:spPr>
           <a:xfrm>
-            <a:off x="8241792" y="2840736"/>
+            <a:off x="4480560" y="3456432"/>
             <a:ext cx="3221736" cy="219456"/>
           </a:xfrm>
           <a:prstGeom prst="rect">
@@ -8254,8 +8254,8 @@
         </p:nvSpPr>
         <p:spPr>
           <a:xfrm>
-            <a:off x="8241792" y="3115056"/>
-            <a:ext cx="3221736" cy="1832864"/>
+            <a:off x="4480560" y="3730752"/>
+            <a:ext cx="3221736" cy="1828800"/>
           </a:xfrm>
           <a:prstGeom prst="rect">
             <a:avLst/>

--- a/deck/Optum-LS-Conversational-AI-sourced.pptx
+++ b/deck/Optum-LS-Conversational-AI-sourced.pptx
@@ -3714,6 +3714,10 @@
           </a:solidFill>
           <a:ln/>
         </p:spPr>
+        <p:txBody>
+          <a:bodyPr/>
+          <a:p/>
+        </p:txBody>
       </p:sp>
       <p:sp>
         <p:nvSpPr>
@@ -3772,6 +3776,10 @@
           </a:solidFill>
           <a:ln/>
         </p:spPr>
+        <p:txBody>
+          <a:bodyPr/>
+          <a:p/>
+        </p:txBody>
       </p:sp>
       <p:sp>
         <p:nvSpPr>
@@ -3830,6 +3838,10 @@
           </a:solidFill>
           <a:ln/>
         </p:spPr>
+        <p:txBody>
+          <a:bodyPr/>
+          <a:p/>
+        </p:txBody>
       </p:sp>
       <p:sp>
         <p:nvSpPr>
@@ -3888,6 +3900,10 @@
           </a:solidFill>
           <a:ln/>
         </p:spPr>
+        <p:txBody>
+          <a:bodyPr/>
+          <a:p/>
+        </p:txBody>
       </p:sp>
       <p:sp>
         <p:nvSpPr>
@@ -3946,6 +3962,10 @@
           </a:solidFill>
           <a:ln/>
         </p:spPr>
+        <p:txBody>
+          <a:bodyPr/>
+          <a:p/>
+        </p:txBody>
       </p:sp>
       <p:sp>
         <p:nvSpPr>
@@ -4073,7 +4093,7 @@
         </p:nvGraphicFramePr>
         <p:xfrm>
           <a:off x="548640" y="1755648"/>
-          <a:ext cx="11091672" cy="914400"/>
+          <a:ext cx="11091672" cy="1587288"/>
         </p:xfrm>
         <a:graphic>
           <a:graphicData uri="http://schemas.openxmlformats.org/drawingml/2006/table">
@@ -4197,7 +4217,7 @@
                   </a:tcPr>
                 </a:tc>
               </a:tr>
-              <a:tr h="564811">
+              <a:tr h="608076">
                 <a:tc>
                   <a:txBody>
                     <a:bodyPr/>
@@ -4324,12 +4344,44 @@
                         <a:buNone/>
                       </a:pPr>
                       <a:r>
-                        <a:rPr lang="en-US" sz="950" dirty="0">
+                        <a:rPr lang="en-US" sz="950" dirty="0" b="1">
                           <a:solidFill>
                             <a:schemeClr val="tx1"/>
                           </a:solidFill>
                         </a:rPr>
-                        <a:t>Prospector Data Mining Studio; Optum Digital Research Network</a:t>
+                        <a:t>Prospector</a:t>
+                      </a:r>
+                      <a:r>
+                        <a:rPr lang="en-US" sz="950" dirty="0" b="0">
+                          <a:solidFill>
+                            <a:schemeClr val="tx1"/>
+                          </a:solidFill>
+                        </a:rPr>
+                        <a:t> (no-code cohort building, attrition funnels)</a:t>
+                      </a:r>
+                      <a:r>
+                        <a:rPr lang="en-US" sz="950" dirty="0" b="0">
+                          <a:solidFill>
+                            <a:schemeClr val="tx1"/>
+                          </a:solidFill>
+                        </a:rPr>
+                        <a:t>; </a:t>
+                      </a:r>
+                      <a:r>
+                        <a:rPr lang="en-US" sz="950" dirty="0" b="1">
+                          <a:solidFill>
+                            <a:schemeClr val="tx1"/>
+                          </a:solidFill>
+                        </a:rPr>
+                        <a:t>Digital Research Network</a:t>
+                      </a:r>
+                      <a:r>
+                        <a:rPr lang="en-US" sz="950" dirty="0" b="0">
+                          <a:solidFill>
+                            <a:schemeClr val="tx1"/>
+                          </a:solidFill>
+                        </a:rPr>
+                        <a:t> (patient identification, recruitment infrastructure)</a:t>
                       </a:r>
                       <a:endParaRPr lang="en-US" sz="950" dirty="0"/>
                     </a:p>
@@ -4505,12 +4557,36 @@
                         <a:buNone/>
                       </a:pPr>
                       <a:r>
-                        <a:rPr lang="en-US" sz="950" dirty="0">
+                        <a:rPr lang="en-US" sz="950" dirty="0" b="1">
                           <a:solidFill>
                             <a:schemeClr val="tx1"/>
                           </a:solidFill>
                         </a:rPr>
-                        <a:t>Optum True Source supports clinical-trial source-data capture; a directly equivalent document assistant was not established</a:t>
+                        <a:t>True Source</a:t>
+                      </a:r>
+                      <a:r>
+                        <a:rPr lang="en-US" sz="950" dirty="0" b="0">
+                          <a:solidFill>
+                            <a:schemeClr val="tx1"/>
+                          </a:solidFill>
+                        </a:rPr>
+                        <a:t> (electronic source-data capture)</a:t>
+                      </a:r>
+                      <a:r>
+                        <a:rPr lang="en-US" sz="950" dirty="0" b="0">
+                          <a:solidFill>
+                            <a:schemeClr val="tx1"/>
+                          </a:solidFill>
+                        </a:rPr>
+                        <a:t>; </a:t>
+                      </a:r>
+                      <a:r>
+                        <a:rPr lang="en-US" sz="950" dirty="0" b="0">
+                          <a:solidFill>
+                            <a:schemeClr val="tx1"/>
+                          </a:solidFill>
+                        </a:rPr>
+                        <a:t>no comparable conversational document assistant established</a:t>
                       </a:r>
                       <a:endParaRPr lang="en-US" sz="950" dirty="0"/>
                     </a:p>
@@ -4549,7 +4625,7 @@
         </p:nvSpPr>
         <p:spPr>
           <a:xfrm>
-            <a:off x="548640" y="3445976"/>
+            <a:off x="548640" y="3489241"/>
             <a:ext cx="11091672" cy="201168"/>
           </a:xfrm>
           <a:prstGeom prst="rect">
@@ -4592,8 +4668,8 @@
           </p:nvPr>
         </p:nvGraphicFramePr>
         <p:xfrm>
-          <a:off x="548640" y="3720296"/>
-          <a:ext cx="11091672" cy="914400"/>
+          <a:off x="548640" y="3763561"/>
+          <a:ext cx="11091672" cy="1226820"/>
         </p:xfrm>
         <a:graphic>
           <a:graphicData uri="http://schemas.openxmlformats.org/drawingml/2006/table">
@@ -4717,7 +4793,7 @@
                   </a:tcPr>
                 </a:tc>
               </a:tr>
-              <a:tr h="564811">
+              <a:tr h="897636">
                 <a:tc>
                   <a:txBody>
                     <a:bodyPr/>
@@ -4844,12 +4920,68 @@
                         <a:buNone/>
                       </a:pPr>
                       <a:r>
-                        <a:rPr lang="en-US" sz="950" dirty="0">
+                        <a:rPr lang="en-US" sz="950" dirty="0" b="1">
                           <a:solidFill>
                             <a:schemeClr val="tx1"/>
                           </a:solidFill>
                         </a:rPr>
-                        <a:t>Optum HEOR and value evidence; Evidence Engine; health economic and budget impact modeling</a:t>
+                        <a:t>HEOR/value evidence</a:t>
+                      </a:r>
+                      <a:r>
+                        <a:rPr lang="en-US" sz="950" dirty="0" b="0">
+                          <a:solidFill>
+                            <a:schemeClr val="tx1"/>
+                          </a:solidFill>
+                        </a:rPr>
+                        <a:t> (outcomes research, economic analysis)</a:t>
+                      </a:r>
+                      <a:r>
+                        <a:rPr lang="en-US" sz="950" dirty="0" b="0">
+                          <a:solidFill>
+                            <a:schemeClr val="tx1"/>
+                          </a:solidFill>
+                        </a:rPr>
+                        <a:t>; </a:t>
+                      </a:r>
+                      <a:r>
+                        <a:rPr lang="en-US" sz="950" dirty="0" b="1">
+                          <a:solidFill>
+                            <a:schemeClr val="tx1"/>
+                          </a:solidFill>
+                        </a:rPr>
+                        <a:t>Evidence Engine</a:t>
+                      </a:r>
+                      <a:r>
+                        <a:rPr lang="en-US" sz="950" dirty="0" b="0">
+                          <a:solidFill>
+                            <a:schemeClr val="tx1"/>
+                          </a:solidFill>
+                        </a:rPr>
+                        <a:t> (evidence-generation support)</a:t>
+                      </a:r>
+                      <a:r>
+                        <a:rPr lang="en-US" sz="950" dirty="0" b="0">
+                          <a:solidFill>
+                            <a:schemeClr val="tx1"/>
+                          </a:solidFill>
+                        </a:rPr>
+                        <a:t>; </a:t>
+                      </a:r>
+                      <a:r>
+                        <a:rPr lang="en-US" sz="950" dirty="0" b="1">
+                          <a:solidFill>
+                            <a:schemeClr val="tx1"/>
+                          </a:solidFill>
+                        </a:rPr>
+                        <a:t>health economic and budget impact modeling</a:t>
+                      </a:r>
+                      <a:r>
+                        <a:rPr lang="en-US" sz="950" dirty="0" b="0">
+                          <a:solidFill>
+                            <a:schemeClr val="tx1"/>
+                          </a:solidFill>
+                        </a:rPr>
+                        <a:t> (cost and budget scenarios)</a:t>
                       </a:r>
                       <a:endParaRPr lang="en-US" sz="950" dirty="0"/>
                     </a:p>
@@ -4888,8 +5020,8 @@
         </p:nvSpPr>
         <p:spPr>
           <a:xfrm>
-            <a:off x="548640" y="4797171"/>
-            <a:ext cx="11091672" cy="1256157"/>
+            <a:off x="548640" y="5136685"/>
+            <a:ext cx="11091672" cy="971507"/>
           </a:xfrm>
           <a:prstGeom prst="rect">
             <a:avLst/>
@@ -4906,6 +5038,10 @@
             </a:outerShdw>
           </a:effectLst>
         </p:spPr>
+        <p:txBody>
+          <a:bodyPr/>
+          <a:p/>
+        </p:txBody>
       </p:sp>
       <p:sp>
         <p:nvSpPr>
@@ -4915,7 +5051,7 @@
         </p:nvSpPr>
         <p:spPr>
           <a:xfrm>
-            <a:off x="749808" y="4980051"/>
+            <a:off x="749808" y="5183526"/>
             <a:ext cx="10689336" cy="256032"/>
           </a:xfrm>
           <a:prstGeom prst="rect">
@@ -4951,8 +5087,8 @@
         </p:nvSpPr>
         <p:spPr>
           <a:xfrm>
-            <a:off x="749808" y="5309235"/>
-            <a:ext cx="10689336" cy="616077"/>
+            <a:off x="749808" y="5494422"/>
+            <a:ext cx="10689336" cy="566928"/>
           </a:xfrm>
           <a:prstGeom prst="rect">
             <a:avLst/>
@@ -4968,7 +5104,7 @@
               <a:buNone/>
             </a:pPr>
             <a:r>
-              <a:rPr lang="en-US" sz="1050" b="1" dirty="0">
+              <a:rPr lang="en-US" sz="1000" b="1" dirty="0">
                 <a:solidFill>
                   <a:schemeClr val="tx1"/>
                 </a:solidFill>
@@ -4985,7 +5121,7 @@
               <a:buNone/>
             </a:pPr>
             <a:r>
-              <a:rPr lang="en-US" sz="1050" b="1" dirty="0">
+              <a:rPr lang="en-US" sz="1000" b="1" dirty="0">
                 <a:solidFill>
                   <a:schemeClr val="tx1"/>
                 </a:solidFill>
@@ -5008,7 +5144,7 @@
         </p:nvSpPr>
         <p:spPr>
           <a:xfrm>
-            <a:off x="10725912" y="6309360"/>
+            <a:off x="10725912" y="6685450"/>
             <a:ext cx="914400" cy="201168"/>
           </a:xfrm>
           <a:prstGeom prst="rect">
@@ -5051,7 +5187,7 @@
         </p:nvSpPr>
         <p:spPr>
           <a:xfrm>
-            <a:off x="3465236" y="2253602"/>
+            <a:off x="3465236" y="2275234"/>
             <a:ext cx="1119405" cy="89280"/>
           </a:xfrm>
           <a:prstGeom prst="rect">
@@ -5086,16 +5222,16 @@
       </p:sp>
       <p:sp>
         <p:nvSpPr>
-          <p:cNvPr id="27" name="Invisible source link 9: https://business.optum.com/en/data-analytics/life-">
-            <a:hlinkClick r:id="rId4"/>
+          <p:cNvPr id="30" name="Invisible source link 9: https://cn.taimei.com/index/product/id/41">
+            <a:hlinkClick r:id="rId5"/>
           </p:cNvPr>
           <p:cNvSpPr/>
           <p:nvPr/>
         </p:nvSpPr>
         <p:spPr>
           <a:xfrm>
-            <a:off x="8714349" y="2321280"/>
-            <a:ext cx="1620161" cy="113398"/>
+            <a:off x="3408354" y="2903825"/>
+            <a:ext cx="517138" cy="89280"/>
           </a:xfrm>
           <a:prstGeom prst="rect">
             <a:avLst/>
@@ -5129,16 +5265,16 @@
       </p:sp>
       <p:sp>
         <p:nvSpPr>
-          <p:cNvPr id="28" name="Invisible source link 9: https://business.optum.com/en/data-analytics/life-">
-            <a:hlinkClick r:id="rId4"/>
+          <p:cNvPr id="32" name="Invisible source link 9: https://www.navlin.com/products/tender">
+            <a:hlinkClick r:id="rId6"/>
           </p:cNvPr>
           <p:cNvSpPr/>
           <p:nvPr/>
         </p:nvSpPr>
         <p:spPr>
           <a:xfrm>
-            <a:off x="10409922" y="2321280"/>
-            <a:ext cx="1107162" cy="113398"/>
+            <a:off x="3719031" y="4427791"/>
+            <a:ext cx="684167" cy="89280"/>
           </a:xfrm>
           <a:prstGeom prst="rect">
             <a:avLst/>
@@ -5172,7 +5308,7 @@
       </p:sp>
       <p:sp>
         <p:nvSpPr>
-          <p:cNvPr id="29" name="Invisible source link 9: https://business.optum.com/en/data-analytics/life-">
+          <p:cNvPr id="9520" name="Invisible source link 10: https://business.optum.com/en/data-analytics/life-sciences/clinical-trial-design.html">
             <a:hlinkClick r:id="rId4"/>
           </p:cNvPr>
           <p:cNvSpPr/>
@@ -5180,8 +5316,8 @@
         </p:nvSpPr>
         <p:spPr>
           <a:xfrm>
-            <a:off x="8712545" y="2431084"/>
-            <a:ext cx="636288" cy="89280"/>
+            <a:off x="8704795" y="2185862"/>
+            <a:ext cx="634592" cy="134588"/>
           </a:xfrm>
           <a:prstGeom prst="rect">
             <a:avLst/>
@@ -5215,16 +5351,16 @@
       </p:sp>
       <p:sp>
         <p:nvSpPr>
-          <p:cNvPr id="30" name="Invisible source link 9: https://cn.taimei.com/index/product/id/41">
-            <a:hlinkClick r:id="rId5"/>
+          <p:cNvPr id="9521" name="Invisible source link 10: https://business.optum.com/en/data-analytics/life-sciences/clinical-trial-design.html">
+            <a:hlinkClick r:id="rId4"/>
           </p:cNvPr>
           <p:cNvSpPr/>
           <p:nvPr/>
         </p:nvSpPr>
         <p:spPr>
           <a:xfrm>
-            <a:off x="3408354" y="2860560"/>
-            <a:ext cx="517138" cy="89280"/>
+            <a:off x="9198724" y="2321574"/>
+            <a:ext cx="1449602" cy="134588"/>
           </a:xfrm>
           <a:prstGeom prst="rect">
             <a:avLst/>
@@ -5258,7 +5394,7 @@
       </p:sp>
       <p:sp>
         <p:nvSpPr>
-          <p:cNvPr id="31" name="Invisible source link 9: https://business.optum.com/en/data-analytics/life-">
+          <p:cNvPr id="9522" name="Invisible source link 10: https://business.optum.com/en/data-analytics/life-sciences/clinical-trial-design.html">
             <a:hlinkClick r:id="rId4"/>
           </p:cNvPr>
           <p:cNvSpPr/>
@@ -5266,8 +5402,8 @@
         </p:nvSpPr>
         <p:spPr>
           <a:xfrm>
-            <a:off x="8710031" y="2796120"/>
-            <a:ext cx="1042012" cy="109804"/>
+            <a:off x="8704795" y="2814778"/>
+            <a:ext cx="694168" cy="134588"/>
           </a:xfrm>
           <a:prstGeom prst="rect">
             <a:avLst/>
@@ -5301,16 +5437,16 @@
       </p:sp>
       <p:sp>
         <p:nvSpPr>
-          <p:cNvPr id="32" name="Invisible source link 9: https://www.navlin.com/products/tender">
-            <a:hlinkClick r:id="rId6"/>
+          <p:cNvPr id="9523" name="Invisible source link 10: https://business.optum.com/en/data-analytics/life-sciences/heor.html">
+            <a:hlinkClick r:id="rId7"/>
           </p:cNvPr>
           <p:cNvSpPr/>
           <p:nvPr/>
         </p:nvSpPr>
         <p:spPr>
           <a:xfrm>
-            <a:off x="3719031" y="4218114"/>
-            <a:ext cx="684167" cy="89280"/>
+            <a:off x="8704795" y="4270262"/>
+            <a:ext cx="1236262" cy="134588"/>
           </a:xfrm>
           <a:prstGeom prst="rect">
             <a:avLst/>
@@ -5344,16 +5480,16 @@
       </p:sp>
       <p:sp>
         <p:nvSpPr>
-          <p:cNvPr id="33" name="Invisible source link 9: https://business.optum.com/en/data-analytics/life-">
-            <a:hlinkClick r:id="rId7"/>
+          <p:cNvPr id="9524" name="Invisible source link 10: https://business.optum.com/en/data-analytics/life-sciences/evidence-engine.html">
+            <a:hlinkClick r:id="rId8"/>
           </p:cNvPr>
           <p:cNvSpPr/>
           <p:nvPr/>
         </p:nvSpPr>
         <p:spPr>
           <a:xfrm>
-            <a:off x="9109264" y="4221353"/>
-            <a:ext cx="333892" cy="86042"/>
+            <a:off x="9794519" y="4405974"/>
+            <a:ext cx="962019" cy="134588"/>
           </a:xfrm>
           <a:prstGeom prst="rect">
             <a:avLst/>
@@ -5387,16 +5523,16 @@
       </p:sp>
       <p:sp>
         <p:nvSpPr>
-          <p:cNvPr id="34" name="Invisible source link 9: https://business.optum.com/en/data-analytics/life-">
-            <a:hlinkClick r:id="rId8"/>
+          <p:cNvPr id="9525" name="Invisible source link 10: https://business.optum.com/en/data-analytics/life-sciences/value-based-contracts.html">
+            <a:hlinkClick r:id="rId9"/>
           </p:cNvPr>
           <p:cNvSpPr/>
           <p:nvPr/>
         </p:nvSpPr>
         <p:spPr>
           <a:xfrm>
-            <a:off x="10594972" y="4218114"/>
-            <a:ext cx="889727" cy="113042"/>
+            <a:off x="9815753" y="4541699"/>
+            <a:ext cx="1630018" cy="134588"/>
           </a:xfrm>
           <a:prstGeom prst="rect">
             <a:avLst/>
@@ -5430,7 +5566,7 @@
       </p:sp>
       <p:sp>
         <p:nvSpPr>
-          <p:cNvPr id="35" name="Invisible source link 9: https://business.optum.com/en/data-analytics/life-">
+          <p:cNvPr id="9526" name="Invisible source link 10: https://business.optum.com/en/data-analytics/life-sciences/value-based-contracts.html">
             <a:hlinkClick r:id="rId9"/>
           </p:cNvPr>
           <p:cNvSpPr/>
@@ -5438,8 +5574,8 @@
         </p:nvSpPr>
         <p:spPr>
           <a:xfrm>
-            <a:off x="8712901" y="4353839"/>
-            <a:ext cx="2408556" cy="113042"/>
+            <a:off x="8704795" y="4677411"/>
+            <a:ext cx="955145" cy="134588"/>
           </a:xfrm>
           <a:prstGeom prst="rect">
             <a:avLst/>
@@ -17505,12 +17641,44 @@
                         <a:buNone/>
                       </a:pPr>
                       <a:r>
-                        <a:rPr lang="en-US" sz="950" dirty="0">
+                        <a:rPr lang="en-US" sz="950" dirty="0" b="1">
                           <a:solidFill>
                             <a:schemeClr val="tx1"/>
                           </a:solidFill>
                         </a:rPr>
-                        <a:t>Market Clarity Data; linked claims/EHR data; Enriched Clinical Data</a:t>
+                        <a:t>Market Clarity Data</a:t>
+                      </a:r>
+                      <a:r>
+                        <a:rPr lang="en-US" sz="950" dirty="0" b="0">
+                          <a:solidFill>
+                            <a:schemeClr val="tx1"/>
+                          </a:solidFill>
+                        </a:rPr>
+                        <a:t> (linked claims/EHR)</a:t>
+                      </a:r>
+                      <a:r>
+                        <a:rPr lang="en-US" sz="950" dirty="0" b="0">
+                          <a:solidFill>
+                            <a:schemeClr val="tx1"/>
+                          </a:solidFill>
+                        </a:rPr>
+                        <a:t>; </a:t>
+                      </a:r>
+                      <a:r>
+                        <a:rPr lang="en-US" sz="950" dirty="0" b="1">
+                          <a:solidFill>
+                            <a:schemeClr val="tx1"/>
+                          </a:solidFill>
+                        </a:rPr>
+                        <a:t>Enriched Clinical Data</a:t>
+                      </a:r>
+                      <a:r>
+                        <a:rPr lang="en-US" sz="950" dirty="0" b="0">
+                          <a:solidFill>
+                            <a:schemeClr val="tx1"/>
+                          </a:solidFill>
+                        </a:rPr>
+                        <a:t> (NLP-extracted clinical variables)</a:t>
                       </a:r>
                       <a:endParaRPr lang="en-US" sz="950" dirty="0"/>
                     </a:p>
@@ -17798,12 +17966,68 @@
                         <a:buNone/>
                       </a:pPr>
                       <a:r>
-                        <a:rPr lang="en-US" sz="950" dirty="0">
+                        <a:rPr lang="en-US" sz="950" dirty="0" b="1">
                           <a:solidFill>
                             <a:schemeClr val="tx1"/>
                           </a:solidFill>
                         </a:rPr>
-                        <a:t>Analytics on Demand; Clinical Notes Lab; Prospector</a:t>
+                        <a:t>Analytics on Demand</a:t>
+                      </a:r>
+                      <a:r>
+                        <a:rPr lang="en-US" sz="950" dirty="0" b="0">
+                          <a:solidFill>
+                            <a:schemeClr val="tx1"/>
+                          </a:solidFill>
+                        </a:rPr>
+                        <a:t> (advanced statistical models)</a:t>
+                      </a:r>
+                      <a:r>
+                        <a:rPr lang="en-US" sz="950" dirty="0" b="0">
+                          <a:solidFill>
+                            <a:schemeClr val="tx1"/>
+                          </a:solidFill>
+                        </a:rPr>
+                        <a:t>; </a:t>
+                      </a:r>
+                      <a:r>
+                        <a:rPr lang="en-US" sz="950" dirty="0" b="1">
+                          <a:solidFill>
+                            <a:schemeClr val="tx1"/>
+                          </a:solidFill>
+                        </a:rPr>
+                        <a:t>Clinical Notes Lab</a:t>
+                      </a:r>
+                      <a:r>
+                        <a:rPr lang="en-US" sz="950" dirty="0" b="0">
+                          <a:solidFill>
+                            <a:schemeClr val="tx1"/>
+                          </a:solidFill>
+                        </a:rPr>
+                        <a:t> (NLP/LLMs, custom AI models)</a:t>
+                      </a:r>
+                      <a:r>
+                        <a:rPr lang="en-US" sz="950" dirty="0" b="0">
+                          <a:solidFill>
+                            <a:schemeClr val="tx1"/>
+                          </a:solidFill>
+                        </a:rPr>
+                        <a:t>; </a:t>
+                      </a:r>
+                      <a:r>
+                        <a:rPr lang="en-US" sz="950" dirty="0" b="1">
+                          <a:solidFill>
+                            <a:schemeClr val="tx1"/>
+                          </a:solidFill>
+                        </a:rPr>
+                        <a:t>Prospector</a:t>
+                      </a:r>
+                      <a:r>
+                        <a:rPr lang="en-US" sz="950" dirty="0" b="0">
+                          <a:solidFill>
+                            <a:schemeClr val="tx1"/>
+                          </a:solidFill>
+                        </a:rPr>
+                        <a:t> (no-code cohort building, attrition analysis)</a:t>
                       </a:r>
                       <a:endParaRPr lang="en-US" sz="950" dirty="0"/>
                     </a:p>
@@ -18030,12 +18254,44 @@
                         <a:buNone/>
                       </a:pPr>
                       <a:r>
-                        <a:rPr lang="en-US" sz="950" dirty="0">
+                        <a:rPr lang="en-US" sz="950" dirty="0" b="1">
                           <a:solidFill>
                             <a:schemeClr val="tx1"/>
                           </a:solidFill>
                         </a:rPr>
-                        <a:t>Analytics on Demand; epidemiology research services</a:t>
+                        <a:t>Analytics on Demand</a:t>
+                      </a:r>
+                      <a:r>
+                        <a:rPr lang="en-US" sz="950" dirty="0" b="0">
+                          <a:solidFill>
+                            <a:schemeClr val="tx1"/>
+                          </a:solidFill>
+                        </a:rPr>
+                        <a:t> (statistical modeling, decision trees)</a:t>
+                      </a:r>
+                      <a:r>
+                        <a:rPr lang="en-US" sz="950" dirty="0" b="0">
+                          <a:solidFill>
+                            <a:schemeClr val="tx1"/>
+                          </a:solidFill>
+                        </a:rPr>
+                        <a:t>; </a:t>
+                      </a:r>
+                      <a:r>
+                        <a:rPr lang="en-US" sz="950" dirty="0" b="1">
+                          <a:solidFill>
+                            <a:schemeClr val="tx1"/>
+                          </a:solidFill>
+                        </a:rPr>
+                        <a:t>epidemiology research services</a:t>
+                      </a:r>
+                      <a:r>
+                        <a:rPr lang="en-US" sz="950" dirty="0" b="0">
+                          <a:solidFill>
+                            <a:schemeClr val="tx1"/>
+                          </a:solidFill>
+                        </a:rPr>
+                        <a:t> (advanced study methods, scientific review)</a:t>
                       </a:r>
                       <a:endParaRPr lang="en-US" sz="950" dirty="0"/>
                     </a:p>
@@ -18341,16 +18597,16 @@
       </p:sp>
       <p:sp>
         <p:nvSpPr>
-          <p:cNvPr id="29" name="Invisible source link 5: https://business.optum.com/en/data-analytics/life-">
-            <a:hlinkClick r:id="rId5"/>
+          <p:cNvPr id="33" name="Invisible source link 5: https://www.komodohealth.com/product/marmot/">
+            <a:hlinkClick r:id="rId8"/>
           </p:cNvPr>
           <p:cNvSpPr/>
           <p:nvPr/>
         </p:nvSpPr>
         <p:spPr>
           <a:xfrm>
-            <a:off x="8714349" y="2215438"/>
-            <a:ext cx="1022923" cy="113398"/>
+            <a:off x="3900118" y="3032277"/>
+            <a:ext cx="426779" cy="84963"/>
           </a:xfrm>
           <a:prstGeom prst="rect">
             <a:avLst/>
@@ -18384,16 +18640,16 @@
       </p:sp>
       <p:sp>
         <p:nvSpPr>
-          <p:cNvPr id="30" name="Invisible source link 5: https://business.optum.com/en/data-analytics/life-">
-            <a:hlinkClick r:id="rId6"/>
+          <p:cNvPr id="34" name="Invisible source link 5: https://www.komodohealth.com/press/komodo-health-u">
+            <a:hlinkClick r:id="rId9"/>
           </p:cNvPr>
           <p:cNvSpPr/>
           <p:nvPr/>
         </p:nvSpPr>
         <p:spPr>
           <a:xfrm>
-            <a:off x="9809815" y="2215438"/>
-            <a:ext cx="1238568" cy="89280"/>
+            <a:off x="4602828" y="3032277"/>
+            <a:ext cx="346490" cy="108724"/>
           </a:xfrm>
           <a:prstGeom prst="rect">
             <a:avLst/>
@@ -18427,16 +18683,16 @@
       </p:sp>
       <p:sp>
         <p:nvSpPr>
-          <p:cNvPr id="31" name="Invisible source link 5: https://business.optum.com/en/data-analytics/life-">
-            <a:hlinkClick r:id="rId7"/>
+          <p:cNvPr id="35" name="Invisible source link 5: https://www.truveta.com/blog/announcement/truveta-">
+            <a:hlinkClick r:id="rId10"/>
           </p:cNvPr>
           <p:cNvSpPr/>
           <p:nvPr/>
         </p:nvSpPr>
         <p:spPr>
           <a:xfrm>
-            <a:off x="11123083" y="2215438"/>
-            <a:ext cx="394369" cy="89280"/>
+            <a:off x="3467040" y="3214446"/>
+            <a:ext cx="1121208" cy="113398"/>
           </a:xfrm>
           <a:prstGeom prst="rect">
             <a:avLst/>
@@ -18470,16 +18726,16 @@
       </p:sp>
       <p:sp>
         <p:nvSpPr>
-          <p:cNvPr id="32" name="Invisible source link 5: https://business.optum.com/en/data-analytics/life-">
-            <a:hlinkClick r:id="rId7"/>
+          <p:cNvPr id="36" name="Invisible source link 5: https://briya.com/aire-population-agent/">
+            <a:hlinkClick r:id="rId11"/>
           </p:cNvPr>
           <p:cNvSpPr/>
           <p:nvPr/>
         </p:nvSpPr>
         <p:spPr>
           <a:xfrm>
-            <a:off x="8709663" y="2325242"/>
-            <a:ext cx="772368" cy="89280"/>
+            <a:off x="3339241" y="3400920"/>
+            <a:ext cx="1312367" cy="113398"/>
           </a:xfrm>
           <a:prstGeom prst="rect">
             <a:avLst/>
@@ -18513,16 +18769,16 @@
       </p:sp>
       <p:sp>
         <p:nvSpPr>
-          <p:cNvPr id="33" name="Invisible source link 5: https://www.komodohealth.com/product/marmot/">
-            <a:hlinkClick r:id="rId8"/>
+          <p:cNvPr id="40" name="Invisible source link 5: https://panalgo.com/ella/">
+            <a:hlinkClick r:id="rId15"/>
           </p:cNvPr>
           <p:cNvSpPr/>
           <p:nvPr/>
         </p:nvSpPr>
         <p:spPr>
           <a:xfrm>
-            <a:off x="3900118" y="3032277"/>
-            <a:ext cx="426779" cy="84963"/>
+            <a:off x="3545157" y="4122001"/>
+            <a:ext cx="348649" cy="89280"/>
           </a:xfrm>
           <a:prstGeom prst="rect">
             <a:avLst/>
@@ -18556,16 +18812,16 @@
       </p:sp>
       <p:sp>
         <p:nvSpPr>
-          <p:cNvPr id="34" name="Invisible source link 5: https://www.komodohealth.com/press/komodo-health-u">
-            <a:hlinkClick r:id="rId9"/>
+          <p:cNvPr id="41" name="Invisible source link 5: https://www.bcplatforms.com/bc-catalyst">
+            <a:hlinkClick r:id="rId16"/>
           </p:cNvPr>
           <p:cNvSpPr/>
           <p:nvPr/>
         </p:nvSpPr>
         <p:spPr>
           <a:xfrm>
-            <a:off x="4602828" y="3032277"/>
-            <a:ext cx="346490" cy="108724"/>
+            <a:off x="3716872" y="4308487"/>
+            <a:ext cx="667975" cy="113398"/>
           </a:xfrm>
           <a:prstGeom prst="rect">
             <a:avLst/>
@@ -18599,16 +18855,16 @@
       </p:sp>
       <p:sp>
         <p:nvSpPr>
-          <p:cNvPr id="35" name="Invisible source link 5: https://www.truveta.com/blog/announcement/truveta-">
-            <a:hlinkClick r:id="rId10"/>
+          <p:cNvPr id="9500" name="Invisible source link 6: https://business.optum.com/en/data-analytics/life-sciences/real-world-data/market-clarity-data.html">
+            <a:hlinkClick r:id="rId5"/>
           </p:cNvPr>
           <p:cNvSpPr/>
           <p:nvPr/>
         </p:nvSpPr>
         <p:spPr>
           <a:xfrm>
-            <a:off x="3467040" y="3214446"/>
-            <a:ext cx="1121208" cy="113398"/>
+            <a:off x="8704795" y="2126095"/>
+            <a:ext cx="1088769" cy="134588"/>
           </a:xfrm>
           <a:prstGeom prst="rect">
             <a:avLst/>
@@ -18642,16 +18898,16 @@
       </p:sp>
       <p:sp>
         <p:nvSpPr>
-          <p:cNvPr id="36" name="Invisible source link 5: https://briya.com/aire-population-agent/">
-            <a:hlinkClick r:id="rId11"/>
+          <p:cNvPr id="9501" name="Invisible source link 6: https://business.optum.com/en/data-analytics/life-sciences/real-world-data/enriched-clinical-data.html">
+            <a:hlinkClick r:id="rId7"/>
           </p:cNvPr>
           <p:cNvSpPr/>
           <p:nvPr/>
         </p:nvSpPr>
         <p:spPr>
           <a:xfrm>
-            <a:off x="3339241" y="3400920"/>
-            <a:ext cx="1312367" cy="113398"/>
+            <a:off x="10951197" y="2126095"/>
+            <a:ext cx="513511" cy="134588"/>
           </a:xfrm>
           <a:prstGeom prst="rect">
             <a:avLst/>
@@ -18685,16 +18941,16 @@
       </p:sp>
       <p:sp>
         <p:nvSpPr>
-          <p:cNvPr id="37" name="Invisible source link 5: https://business.optum.com/en/data-analytics/life-">
-            <a:hlinkClick r:id="rId12"/>
+          <p:cNvPr id="9502" name="Invisible source link 6: https://business.optum.com/en/data-analytics/life-sciences/real-world-data/enriched-clinical-data.html">
+            <a:hlinkClick r:id="rId7"/>
           </p:cNvPr>
           <p:cNvSpPr/>
           <p:nvPr/>
         </p:nvSpPr>
         <p:spPr>
           <a:xfrm>
-            <a:off x="8704620" y="3214433"/>
-            <a:ext cx="1131648" cy="113042"/>
+            <a:off x="8704795" y="2261820"/>
+            <a:ext cx="721665" cy="134588"/>
           </a:xfrm>
           <a:prstGeom prst="rect">
             <a:avLst/>
@@ -18728,16 +18984,16 @@
       </p:sp>
       <p:sp>
         <p:nvSpPr>
-          <p:cNvPr id="38" name="Invisible source link 5: https://business.optum.com/en/data-analytics/life-">
-            <a:hlinkClick r:id="rId13"/>
+          <p:cNvPr id="9503" name="Invisible source link 6: https://business.optum.com/en/data-analytics/life-sciences/heor/exploratory-analysis.html">
+            <a:hlinkClick r:id="rId12"/>
           </p:cNvPr>
           <p:cNvSpPr/>
           <p:nvPr/>
         </p:nvSpPr>
         <p:spPr>
           <a:xfrm>
-            <a:off x="9915287" y="3214433"/>
-            <a:ext cx="960643" cy="89280"/>
+            <a:off x="8704795" y="2989022"/>
+            <a:ext cx="1222996" cy="134588"/>
           </a:xfrm>
           <a:prstGeom prst="rect">
             <a:avLst/>
@@ -18771,16 +19027,16 @@
       </p:sp>
       <p:sp>
         <p:nvSpPr>
-          <p:cNvPr id="39" name="Invisible source link 5: https://business.optum.com/en/data-analytics/life-">
-            <a:hlinkClick r:id="rId14"/>
+          <p:cNvPr id="9504" name="Invisible source link 6: https://business.optum.com/en/data-analytics/life-sciences/real-world-data/clinical-notes.html">
+            <a:hlinkClick r:id="rId13"/>
           </p:cNvPr>
           <p:cNvSpPr/>
           <p:nvPr/>
         </p:nvSpPr>
         <p:spPr>
           <a:xfrm>
-            <a:off x="10956042" y="3218751"/>
-            <a:ext cx="571849" cy="108724"/>
+            <a:off x="9198724" y="3124734"/>
+            <a:ext cx="1041856" cy="134588"/>
           </a:xfrm>
           <a:prstGeom prst="rect">
             <a:avLst/>
@@ -18814,16 +19070,16 @@
       </p:sp>
       <p:sp>
         <p:nvSpPr>
-          <p:cNvPr id="40" name="Invisible source link 5: https://panalgo.com/ella/">
-            <a:hlinkClick r:id="rId15"/>
+          <p:cNvPr id="9505" name="Invisible source link 6: https://business.optum.com/en/data-analytics/life-sciences/clinical-trial-design.html">
+            <a:hlinkClick r:id="rId14"/>
           </p:cNvPr>
           <p:cNvSpPr/>
           <p:nvPr/>
         </p:nvSpPr>
         <p:spPr>
           <a:xfrm>
-            <a:off x="3545157" y="4122001"/>
-            <a:ext cx="348649" cy="89280"/>
+            <a:off x="9198724" y="3260459"/>
+            <a:ext cx="634592" cy="134588"/>
           </a:xfrm>
           <a:prstGeom prst="rect">
             <a:avLst/>
@@ -18857,16 +19113,16 @@
       </p:sp>
       <p:sp>
         <p:nvSpPr>
-          <p:cNvPr id="41" name="Invisible source link 5: https://www.bcplatforms.com/bc-catalyst">
-            <a:hlinkClick r:id="rId16"/>
+          <p:cNvPr id="9506" name="Invisible source link 6: https://business.optum.com/en/data-analytics/life-sciences/heor/exploratory-analysis.html">
+            <a:hlinkClick r:id="rId12"/>
           </p:cNvPr>
           <p:cNvSpPr/>
           <p:nvPr/>
         </p:nvSpPr>
         <p:spPr>
           <a:xfrm>
-            <a:off x="3716872" y="4308487"/>
-            <a:ext cx="667975" cy="113398"/>
+            <a:off x="8704795" y="4125901"/>
+            <a:ext cx="1222996" cy="134588"/>
           </a:xfrm>
           <a:prstGeom prst="rect">
             <a:avLst/>
@@ -18900,50 +19156,7 @@
       </p:sp>
       <p:sp>
         <p:nvSpPr>
-          <p:cNvPr id="42" name="Invisible source link 5: https://business.optum.com/en/data-analytics/life-">
-            <a:hlinkClick r:id="rId12"/>
-          </p:cNvPr>
-          <p:cNvSpPr/>
-          <p:nvPr/>
-        </p:nvSpPr>
-        <p:spPr>
-          <a:xfrm>
-            <a:off x="8704620" y="4215244"/>
-            <a:ext cx="1131648" cy="113398"/>
-          </a:xfrm>
-          <a:prstGeom prst="rect">
-            <a:avLst/>
-          </a:prstGeom>
-          <a:noFill/>
-          <a:ln>
-            <a:noFill/>
-          </a:ln>
-        </p:spPr>
-        <p:style>
-          <a:lnRef idx="1">
-            <a:schemeClr val="accent1"/>
-          </a:lnRef>
-          <a:fillRef idx="3">
-            <a:schemeClr val="accent1"/>
-          </a:fillRef>
-          <a:effectRef idx="2">
-            <a:schemeClr val="accent1"/>
-          </a:effectRef>
-          <a:fontRef idx="minor">
-            <a:schemeClr val="lt1"/>
-          </a:fontRef>
-        </p:style>
-        <p:txBody>
-          <a:bodyPr rtlCol="0" anchor="ctr"/>
-          <a:lstStyle/>
-          <a:p>
-            <a:pPr algn="ctr"/>
-          </a:p>
-        </p:txBody>
-      </p:sp>
-      <p:sp>
-        <p:nvSpPr>
-          <p:cNvPr id="43" name="Invisible source link 5: https://business.optum.com/en/data-analytics/life-">
+          <p:cNvPr id="9507" name="Invisible source link 6: https://business.optum.com/en/data-analytics/life-sciences/epidemiology-consulting.html">
             <a:hlinkClick r:id="rId17"/>
           </p:cNvPr>
           <p:cNvSpPr/>
@@ -18951,8 +19164,8 @@
         </p:nvSpPr>
         <p:spPr>
           <a:xfrm>
-            <a:off x="9914207" y="4215244"/>
-            <a:ext cx="1200404" cy="113398"/>
+            <a:off x="9078125" y="4261613"/>
+            <a:ext cx="1823942" cy="134588"/>
           </a:xfrm>
           <a:prstGeom prst="rect">
             <a:avLst/>
@@ -19705,12 +19918,44 @@
                         <a:buNone/>
                       </a:pPr>
                       <a:r>
-                        <a:rPr lang="en-US" sz="950" dirty="0">
+                        <a:rPr lang="en-US" sz="950" dirty="0" b="1">
                           <a:solidFill>
                             <a:schemeClr val="tx1"/>
                           </a:solidFill>
                         </a:rPr>
-                        <a:t>Enriched Clinical Data; clinicogenomics datasets</a:t>
+                        <a:t>Enriched Clinical Data</a:t>
+                      </a:r>
+                      <a:r>
+                        <a:rPr lang="en-US" sz="950" dirty="0" b="0">
+                          <a:solidFill>
+                            <a:schemeClr val="tx1"/>
+                          </a:solidFill>
+                        </a:rPr>
+                        <a:t> (NLP-derived disease attributes)</a:t>
+                      </a:r>
+                      <a:r>
+                        <a:rPr lang="en-US" sz="950" dirty="0" b="0">
+                          <a:solidFill>
+                            <a:schemeClr val="tx1"/>
+                          </a:solidFill>
+                        </a:rPr>
+                        <a:t>; </a:t>
+                      </a:r>
+                      <a:r>
+                        <a:rPr lang="en-US" sz="950" dirty="0" b="1">
+                          <a:solidFill>
+                            <a:schemeClr val="tx1"/>
+                          </a:solidFill>
+                        </a:rPr>
+                        <a:t>clinicogenomics datasets</a:t>
+                      </a:r>
+                      <a:r>
+                        <a:rPr lang="en-US" sz="950" dirty="0" b="0">
+                          <a:solidFill>
+                            <a:schemeClr val="tx1"/>
+                          </a:solidFill>
+                        </a:rPr>
+                        <a:t> (linked clinical/genomic data)</a:t>
                       </a:r>
                       <a:endParaRPr lang="en-US" sz="950" dirty="0"/>
                     </a:p>
@@ -19915,12 +20160,44 @@
                         <a:buNone/>
                       </a:pPr>
                       <a:r>
-                        <a:rPr lang="en-US" sz="950" dirty="0">
+                        <a:rPr lang="en-US" sz="950" dirty="0" b="1">
                           <a:solidFill>
                             <a:schemeClr val="tx1"/>
                           </a:solidFill>
                         </a:rPr>
-                        <a:t>Clinical Notes Lab; epidemiology and observational research</a:t>
+                        <a:t>Clinical Notes Lab</a:t>
+                      </a:r>
+                      <a:r>
+                        <a:rPr lang="en-US" sz="950" dirty="0" b="0">
+                          <a:solidFill>
+                            <a:schemeClr val="tx1"/>
+                          </a:solidFill>
+                        </a:rPr>
+                        <a:t> (NLP/LLMs, custom AI models)</a:t>
+                      </a:r>
+                      <a:r>
+                        <a:rPr lang="en-US" sz="950" dirty="0" b="0">
+                          <a:solidFill>
+                            <a:schemeClr val="tx1"/>
+                          </a:solidFill>
+                        </a:rPr>
+                        <a:t>; </a:t>
+                      </a:r>
+                      <a:r>
+                        <a:rPr lang="en-US" sz="950" dirty="0" b="1">
+                          <a:solidFill>
+                            <a:schemeClr val="tx1"/>
+                          </a:solidFill>
+                        </a:rPr>
+                        <a:t>epidemiology and observational research</a:t>
+                      </a:r>
+                      <a:r>
+                        <a:rPr lang="en-US" sz="950" dirty="0" b="0">
+                          <a:solidFill>
+                            <a:schemeClr val="tx1"/>
+                          </a:solidFill>
+                        </a:rPr>
+                        <a:t> (study design, comparative effectiveness)</a:t>
                       </a:r>
                       <a:endParaRPr lang="en-US" sz="950" dirty="0"/>
                     </a:p>
@@ -20108,12 +20385,44 @@
                         <a:buNone/>
                       </a:pPr>
                       <a:r>
-                        <a:rPr lang="en-US" sz="950" dirty="0">
+                        <a:rPr lang="en-US" sz="950" dirty="0" b="1">
                           <a:solidFill>
                             <a:schemeClr val="tx1"/>
                           </a:solidFill>
                         </a:rPr>
-                        <a:t>Analytics on Demand; research data and study environments</a:t>
+                        <a:t>Analytics on Demand</a:t>
+                      </a:r>
+                      <a:r>
+                        <a:rPr lang="en-US" sz="950" dirty="0" b="0">
+                          <a:solidFill>
+                            <a:schemeClr val="tx1"/>
+                          </a:solidFill>
+                        </a:rPr>
+                        <a:t> (advanced statistical modeling, survival analysis)</a:t>
+                      </a:r>
+                      <a:r>
+                        <a:rPr lang="en-US" sz="950" dirty="0" b="0">
+                          <a:solidFill>
+                            <a:schemeClr val="tx1"/>
+                          </a:solidFill>
+                        </a:rPr>
+                        <a:t>; </a:t>
+                      </a:r>
+                      <a:r>
+                        <a:rPr lang="en-US" sz="950" dirty="0" b="1">
+                          <a:solidFill>
+                            <a:schemeClr val="tx1"/>
+                          </a:solidFill>
+                        </a:rPr>
+                        <a:t>research data and study environments</a:t>
+                      </a:r>
+                      <a:r>
+                        <a:rPr lang="en-US" sz="950" dirty="0" b="0">
+                          <a:solidFill>
+                            <a:schemeClr val="tx1"/>
+                          </a:solidFill>
+                        </a:rPr>
+                        <a:t> (curated data, analytical workspaces)</a:t>
                       </a:r>
                       <a:endParaRPr lang="en-US" sz="950" dirty="0"/>
                     </a:p>
@@ -20475,16 +20784,16 @@
       </p:sp>
       <p:sp>
         <p:nvSpPr>
-          <p:cNvPr id="28" name="Invisible source link 6: https://business.optum.com/en/data-analytics/life-">
-            <a:hlinkClick r:id="rId5"/>
+          <p:cNvPr id="30" name="Invisible source link 6: https://www.concertai.com/precision-explorer">
+            <a:hlinkClick r:id="rId7"/>
           </p:cNvPr>
           <p:cNvSpPr/>
           <p:nvPr/>
         </p:nvSpPr>
         <p:spPr>
           <a:xfrm>
-            <a:off x="8714349" y="2173681"/>
-            <a:ext cx="1176287" cy="89280"/>
+            <a:off x="3605278" y="2995561"/>
+            <a:ext cx="1056045" cy="113042"/>
           </a:xfrm>
           <a:prstGeom prst="rect">
             <a:avLst/>
@@ -20518,16 +20827,16 @@
       </p:sp>
       <p:sp>
         <p:nvSpPr>
-          <p:cNvPr id="29" name="Invisible source link 6: https://business.optum.com/en/data-analytics/life-">
-            <a:hlinkClick r:id="rId6"/>
+          <p:cNvPr id="31" name="Invisible source link 6: https://veranahealth.com/verana-health-introduces-">
+            <a:hlinkClick r:id="rId8"/>
           </p:cNvPr>
           <p:cNvSpPr/>
           <p:nvPr/>
         </p:nvSpPr>
         <p:spPr>
           <a:xfrm>
-            <a:off x="9961007" y="2173681"/>
-            <a:ext cx="1331087" cy="113042"/>
+            <a:off x="2944326" y="3182035"/>
+            <a:ext cx="848694" cy="89281"/>
           </a:xfrm>
           <a:prstGeom prst="rect">
             <a:avLst/>
@@ -20561,16 +20870,16 @@
       </p:sp>
       <p:sp>
         <p:nvSpPr>
-          <p:cNvPr id="30" name="Invisible source link 6: https://www.concertai.com/precision-explorer">
-            <a:hlinkClick r:id="rId7"/>
+          <p:cNvPr id="32" name="Invisible source link 6: https://veranahealth.com/verana-health-introduces-">
+            <a:hlinkClick r:id="rId8"/>
           </p:cNvPr>
           <p:cNvSpPr/>
           <p:nvPr/>
         </p:nvSpPr>
         <p:spPr>
           <a:xfrm>
-            <a:off x="3605278" y="2995561"/>
-            <a:ext cx="1056045" cy="113042"/>
+            <a:off x="3828110" y="3182035"/>
+            <a:ext cx="703966" cy="113398"/>
           </a:xfrm>
           <a:prstGeom prst="rect">
             <a:avLst/>
@@ -20604,16 +20913,16 @@
       </p:sp>
       <p:sp>
         <p:nvSpPr>
-          <p:cNvPr id="31" name="Invisible source link 6: https://veranahealth.com/verana-health-introduces-">
-            <a:hlinkClick r:id="rId8"/>
+          <p:cNvPr id="36" name="Invisible source link 6: https://mdclone.com/meet-copilot/">
+            <a:hlinkClick r:id="rId11"/>
           </p:cNvPr>
           <p:cNvSpPr/>
           <p:nvPr/>
         </p:nvSpPr>
         <p:spPr>
           <a:xfrm>
-            <a:off x="2944326" y="3182035"/>
-            <a:ext cx="848694" cy="89281"/>
+            <a:off x="3566759" y="3935882"/>
+            <a:ext cx="887568" cy="113398"/>
           </a:xfrm>
           <a:prstGeom prst="rect">
             <a:avLst/>
@@ -20647,16 +20956,16 @@
       </p:sp>
       <p:sp>
         <p:nvSpPr>
-          <p:cNvPr id="32" name="Invisible source link 6: https://veranahealth.com/verana-health-introduces-">
-            <a:hlinkClick r:id="rId8"/>
+          <p:cNvPr id="38" name="Invisible source link 6: https://business.optum.com/en/data-analytics/life-">
+            <a:hlinkClick r:id="rId10"/>
           </p:cNvPr>
           <p:cNvSpPr/>
           <p:nvPr/>
         </p:nvSpPr>
         <p:spPr>
           <a:xfrm>
-            <a:off x="3828110" y="3182035"/>
-            <a:ext cx="703966" cy="113398"/>
+            <a:off x="2065926" y="5418353"/>
+            <a:ext cx="1352688" cy="125641"/>
           </a:xfrm>
           <a:prstGeom prst="rect">
             <a:avLst/>
@@ -20690,16 +20999,16 @@
       </p:sp>
       <p:sp>
         <p:nvSpPr>
-          <p:cNvPr id="33" name="Invisible source link 6: https://business.optum.com/en/data-analytics/life-">
-            <a:hlinkClick r:id="rId9"/>
+          <p:cNvPr id="39" name="Invisible source link 6: https://business.optum.com/en/data-analytics/life-">
+            <a:hlinkClick r:id="rId13"/>
           </p:cNvPr>
           <p:cNvSpPr/>
           <p:nvPr/>
         </p:nvSpPr>
         <p:spPr>
           <a:xfrm>
-            <a:off x="8710742" y="3088805"/>
-            <a:ext cx="960643" cy="89280"/>
+            <a:off x="3734512" y="5418353"/>
+            <a:ext cx="1054242" cy="125641"/>
           </a:xfrm>
           <a:prstGeom prst="rect">
             <a:avLst/>
@@ -20733,16 +21042,16 @@
       </p:sp>
       <p:sp>
         <p:nvSpPr>
-          <p:cNvPr id="34" name="Invisible source link 6: https://business.optum.com/en/data-analytics/life-">
-            <a:hlinkClick r:id="rId10"/>
+          <p:cNvPr id="9508" name="Invisible source link 7: https://business.optum.com/en/data-analytics/life-sciences/real-world-data/enriched-clinical-data.html">
+            <a:hlinkClick r:id="rId5"/>
           </p:cNvPr>
           <p:cNvSpPr/>
           <p:nvPr/>
         </p:nvSpPr>
         <p:spPr>
           <a:xfrm>
-            <a:off x="9746811" y="3088792"/>
-            <a:ext cx="1761282" cy="113042"/>
+            <a:off x="8704795" y="2016291"/>
+            <a:ext cx="1269788" cy="134588"/>
           </a:xfrm>
           <a:prstGeom prst="rect">
             <a:avLst/>
@@ -20776,16 +21085,16 @@
       </p:sp>
       <p:sp>
         <p:nvSpPr>
-          <p:cNvPr id="35" name="Invisible source link 6: https://business.optum.com/en/data-analytics/life-">
-            <a:hlinkClick r:id="rId10"/>
+          <p:cNvPr id="9509" name="Invisible source link 7: https://business.optum.com/en/data-analytics/life-sciences/clinicogenomics.html">
+            <a:hlinkClick r:id="rId6"/>
           </p:cNvPr>
           <p:cNvSpPr/>
           <p:nvPr/>
         </p:nvSpPr>
         <p:spPr>
           <a:xfrm>
-            <a:off x="8709663" y="3198596"/>
-            <a:ext cx="417051" cy="89280"/>
+            <a:off x="9306725" y="2152016"/>
+            <a:ext cx="1463350" cy="134588"/>
           </a:xfrm>
           <a:prstGeom prst="rect">
             <a:avLst/>
@@ -20819,16 +21128,16 @@
       </p:sp>
       <p:sp>
         <p:nvSpPr>
-          <p:cNvPr id="36" name="Invisible source link 6: https://mdclone.com/meet-copilot/">
-            <a:hlinkClick r:id="rId11"/>
+          <p:cNvPr id="9510" name="Invisible source link 7: https://business.optum.com/en/data-analytics/life-sciences/real-world-data/clinical-notes.html">
+            <a:hlinkClick r:id="rId9"/>
           </p:cNvPr>
           <p:cNvSpPr/>
           <p:nvPr/>
         </p:nvSpPr>
         <p:spPr>
           <a:xfrm>
-            <a:off x="3566759" y="3935882"/>
-            <a:ext cx="887568" cy="113398"/>
+            <a:off x="8704795" y="2931415"/>
+            <a:ext cx="1041856" cy="134588"/>
           </a:xfrm>
           <a:prstGeom prst="rect">
             <a:avLst/>
@@ -20862,16 +21171,16 @@
       </p:sp>
       <p:sp>
         <p:nvSpPr>
-          <p:cNvPr id="37" name="Invisible source link 6: https://business.optum.com/en/data-analytics/life-">
-            <a:hlinkClick r:id="rId12"/>
+          <p:cNvPr id="9511" name="Invisible source link 7: https://business.optum.com/en/data-analytics/life-sciences/epidemiology-consulting.html">
+            <a:hlinkClick r:id="rId10"/>
           </p:cNvPr>
           <p:cNvSpPr/>
           <p:nvPr/>
         </p:nvSpPr>
         <p:spPr>
           <a:xfrm>
-            <a:off x="8704620" y="3935882"/>
-            <a:ext cx="1131648" cy="113398"/>
+            <a:off x="8704795" y="3067140"/>
+            <a:ext cx="2372186" cy="134588"/>
           </a:xfrm>
           <a:prstGeom prst="rect">
             <a:avLst/>
@@ -20905,59 +21214,16 @@
       </p:sp>
       <p:sp>
         <p:nvSpPr>
-          <p:cNvPr id="38" name="Invisible source link 6: https://business.optum.com/en/data-analytics/life-">
-            <a:hlinkClick r:id="rId10"/>
+          <p:cNvPr id="9512" name="Invisible source link 7: https://business.optum.com/en/data-analytics/life-sciences/heor/exploratory-analysis.html">
+            <a:hlinkClick r:id="rId12"/>
           </p:cNvPr>
           <p:cNvSpPr/>
           <p:nvPr/>
         </p:nvSpPr>
         <p:spPr>
           <a:xfrm>
-            <a:off x="2065926" y="5418353"/>
-            <a:ext cx="1352688" cy="125641"/>
-          </a:xfrm>
-          <a:prstGeom prst="rect">
-            <a:avLst/>
-          </a:prstGeom>
-          <a:noFill/>
-          <a:ln>
-            <a:noFill/>
-          </a:ln>
-        </p:spPr>
-        <p:style>
-          <a:lnRef idx="1">
-            <a:schemeClr val="accent1"/>
-          </a:lnRef>
-          <a:fillRef idx="3">
-            <a:schemeClr val="accent1"/>
-          </a:fillRef>
-          <a:effectRef idx="2">
-            <a:schemeClr val="accent1"/>
-          </a:effectRef>
-          <a:fontRef idx="minor">
-            <a:schemeClr val="lt1"/>
-          </a:fontRef>
-        </p:style>
-        <p:txBody>
-          <a:bodyPr rtlCol="0" anchor="ctr"/>
-          <a:lstStyle/>
-          <a:p>
-            <a:pPr algn="ctr"/>
-          </a:p>
-        </p:txBody>
-      </p:sp>
-      <p:sp>
-        <p:nvSpPr>
-          <p:cNvPr id="39" name="Invisible source link 6: https://business.optum.com/en/data-analytics/life-">
-            <a:hlinkClick r:id="rId13"/>
-          </p:cNvPr>
-          <p:cNvSpPr/>
-          <p:nvPr/>
-        </p:nvSpPr>
-        <p:spPr>
-          <a:xfrm>
-            <a:off x="3734512" y="5418353"/>
-            <a:ext cx="1054242" cy="125641"/>
+            <a:off x="8704795" y="3778492"/>
+            <a:ext cx="1222996" cy="134588"/>
           </a:xfrm>
           <a:prstGeom prst="rect">
             <a:avLst/>
@@ -21789,12 +22055,20 @@
                         <a:buNone/>
                       </a:pPr>
                       <a:r>
-                        <a:rPr lang="en-US" sz="950" dirty="0">
+                        <a:rPr lang="en-US" sz="950" dirty="0" b="1">
                           <a:solidFill>
                             <a:schemeClr val="tx1"/>
                           </a:solidFill>
                         </a:rPr>
-                        <a:t>Market Clarity: market attractiveness and portfolio research</a:t>
+                        <a:t>Market Clarity</a:t>
+                      </a:r>
+                      <a:r>
+                        <a:rPr lang="en-US" sz="950" dirty="0" b="0">
+                          <a:solidFill>
+                            <a:schemeClr val="tx1"/>
+                          </a:solidFill>
+                        </a:rPr>
+                        <a:t> (linked claims/EHR data, market attractiveness and portfolio analytics)</a:t>
                       </a:r>
                       <a:endParaRPr lang="en-US" sz="950" dirty="0"/>
                     </a:p>
@@ -22048,12 +22322,20 @@
                         <a:buNone/>
                       </a:pPr>
                       <a:r>
-                        <a:rPr lang="en-US" sz="950" dirty="0">
+                        <a:rPr lang="en-US" sz="950" dirty="0" b="1">
                           <a:solidFill>
                             <a:schemeClr val="tx1"/>
                           </a:solidFill>
                         </a:rPr>
-                        <a:t>Market Clarity: patient and prescriber analytics</a:t>
+                        <a:t>Market Clarity</a:t>
+                      </a:r>
+                      <a:r>
+                        <a:rPr lang="en-US" sz="950" dirty="0" b="0">
+                          <a:solidFill>
+                            <a:schemeClr val="tx1"/>
+                          </a:solidFill>
+                        </a:rPr>
+                        <a:t> (patient/prescriber segmentation, treatment patterns, market analytics)</a:t>
                       </a:r>
                       <a:endParaRPr lang="en-US" sz="950" dirty="0"/>
                     </a:p>
@@ -22268,12 +22550,36 @@
                         <a:buNone/>
                       </a:pPr>
                       <a:r>
-                        <a:rPr lang="en-US" sz="950" dirty="0">
+                        <a:rPr lang="en-US" sz="950" dirty="0" b="1">
                           <a:solidFill>
                             <a:schemeClr val="tx1"/>
                           </a:solidFill>
                         </a:rPr>
-                        <a:t>Market Clarity provides market insights; a directly comparable simulated-persona offering was not established in the Optum review</a:t>
+                        <a:t>Market Clarity</a:t>
+                      </a:r>
+                      <a:r>
+                        <a:rPr lang="en-US" sz="950" dirty="0" b="0">
+                          <a:solidFill>
+                            <a:schemeClr val="tx1"/>
+                          </a:solidFill>
+                        </a:rPr>
+                        <a:t> (observed patient/prescriber insights)</a:t>
+                      </a:r>
+                      <a:r>
+                        <a:rPr lang="en-US" sz="950" dirty="0" b="0">
+                          <a:solidFill>
+                            <a:schemeClr val="tx1"/>
+                          </a:solidFill>
+                        </a:rPr>
+                        <a:t>; </a:t>
+                      </a:r>
+                      <a:r>
+                        <a:rPr lang="en-US" sz="950" dirty="0" b="0">
+                          <a:solidFill>
+                            <a:schemeClr val="tx1"/>
+                          </a:solidFill>
+                        </a:rPr>
+                        <a:t>no comparable simulated-persona offering established</a:t>
                       </a:r>
                       <a:endParaRPr lang="en-US" sz="950" dirty="0"/>
                     </a:p>
@@ -22729,16 +23035,16 @@
       </p:sp>
       <p:sp>
         <p:nvSpPr>
-          <p:cNvPr id="30" name="Invisible source link 7: https://business.optum.com/en/data-analytics/life-">
-            <a:hlinkClick r:id="rId6"/>
+          <p:cNvPr id="31" name="Invisible source link 7: https://www.iqvia.com/solutions/commercialization/">
+            <a:hlinkClick r:id="rId3"/>
           </p:cNvPr>
           <p:cNvSpPr/>
           <p:nvPr/>
         </p:nvSpPr>
         <p:spPr>
           <a:xfrm>
-            <a:off x="8714349" y="2194559"/>
-            <a:ext cx="734204" cy="113398"/>
+            <a:off x="3382433" y="3003486"/>
+            <a:ext cx="1005652" cy="113753"/>
           </a:xfrm>
           <a:prstGeom prst="rect">
             <a:avLst/>
@@ -22772,16 +23078,16 @@
       </p:sp>
       <p:sp>
         <p:nvSpPr>
-          <p:cNvPr id="31" name="Invisible source link 7: https://www.iqvia.com/solutions/commercialization/">
-            <a:hlinkClick r:id="rId3"/>
+          <p:cNvPr id="32" name="Invisible source link 7: https://zaidyn.zs.com/products/zaidyn-commercial/c">
+            <a:hlinkClick r:id="rId7"/>
           </p:cNvPr>
           <p:cNvSpPr/>
           <p:nvPr/>
         </p:nvSpPr>
         <p:spPr>
           <a:xfrm>
-            <a:off x="3382433" y="3003486"/>
-            <a:ext cx="1005652" cy="113753"/>
+            <a:off x="3219354" y="3189960"/>
+            <a:ext cx="2410360" cy="89280"/>
           </a:xfrm>
           <a:prstGeom prst="rect">
             <a:avLst/>
@@ -22815,16 +23121,16 @@
       </p:sp>
       <p:sp>
         <p:nvSpPr>
-          <p:cNvPr id="32" name="Invisible source link 7: https://zaidyn.zs.com/products/zaidyn-commercial/c">
-            <a:hlinkClick r:id="rId7"/>
+          <p:cNvPr id="33" name="Invisible source link 7: https://close-upinternational.com/es/crm-farmaceut">
+            <a:hlinkClick r:id="rId8"/>
           </p:cNvPr>
           <p:cNvSpPr/>
           <p:nvPr/>
         </p:nvSpPr>
         <p:spPr>
           <a:xfrm>
-            <a:off x="3219354" y="3189960"/>
-            <a:ext cx="2410360" cy="89280"/>
+            <a:off x="4260833" y="3376447"/>
+            <a:ext cx="516770" cy="113398"/>
           </a:xfrm>
           <a:prstGeom prst="rect">
             <a:avLst/>
@@ -22858,16 +23164,16 @@
       </p:sp>
       <p:sp>
         <p:nvSpPr>
-          <p:cNvPr id="33" name="Invisible source link 7: https://close-upinternational.com/es/crm-farmaceut">
-            <a:hlinkClick r:id="rId8"/>
+          <p:cNvPr id="35" name="Invisible source link 7: https://trinitylifesciences.com/products/insightse">
+            <a:hlinkClick r:id="rId9"/>
           </p:cNvPr>
           <p:cNvSpPr/>
           <p:nvPr/>
         </p:nvSpPr>
         <p:spPr>
           <a:xfrm>
-            <a:off x="4260833" y="3376447"/>
-            <a:ext cx="516770" cy="113398"/>
+            <a:off x="4080469" y="4105084"/>
+            <a:ext cx="1560764" cy="113754"/>
           </a:xfrm>
           <a:prstGeom prst="rect">
             <a:avLst/>
@@ -22901,16 +23207,16 @@
       </p:sp>
       <p:sp>
         <p:nvSpPr>
-          <p:cNvPr id="34" name="Invisible source link 7: https://business.optum.com/en/data-analytics/life-">
-            <a:hlinkClick r:id="rId6"/>
+          <p:cNvPr id="36" name="Invisible source link 7: https://www.ipsos.com/en/healthcare/healthcare-per">
+            <a:hlinkClick r:id="rId10"/>
           </p:cNvPr>
           <p:cNvSpPr/>
           <p:nvPr/>
         </p:nvSpPr>
         <p:spPr>
           <a:xfrm>
-            <a:off x="8714349" y="3257994"/>
-            <a:ext cx="734204" cy="113042"/>
+            <a:off x="3357961" y="4291558"/>
+            <a:ext cx="1317764" cy="89280"/>
           </a:xfrm>
           <a:prstGeom prst="rect">
             <a:avLst/>
@@ -22944,16 +23250,16 @@
       </p:sp>
       <p:sp>
         <p:nvSpPr>
-          <p:cNvPr id="35" name="Invisible source link 7: https://trinitylifesciences.com/products/insightse">
-            <a:hlinkClick r:id="rId9"/>
+          <p:cNvPr id="9513" name="Invisible source link 8: https://business.optum.com/en/data-analytics/life-sciences/real-world-data/market-clarity-data.html">
+            <a:hlinkClick r:id="rId6"/>
           </p:cNvPr>
           <p:cNvSpPr/>
           <p:nvPr/>
         </p:nvSpPr>
         <p:spPr>
           <a:xfrm>
-            <a:off x="4080469" y="4105084"/>
-            <a:ext cx="1560764" cy="113754"/>
+            <a:off x="8704795" y="2172895"/>
+            <a:ext cx="794989" cy="134588"/>
           </a:xfrm>
           <a:prstGeom prst="rect">
             <a:avLst/>
@@ -22987,16 +23293,16 @@
       </p:sp>
       <p:sp>
         <p:nvSpPr>
-          <p:cNvPr id="36" name="Invisible source link 7: https://www.ipsos.com/en/healthcare/healthcare-per">
-            <a:hlinkClick r:id="rId10"/>
+          <p:cNvPr id="9514" name="Invisible source link 8: https://business.optum.com/en/data-analytics/life-sciences/real-world-data/market-clarity-data.html">
+            <a:hlinkClick r:id="rId6"/>
           </p:cNvPr>
           <p:cNvSpPr/>
           <p:nvPr/>
         </p:nvSpPr>
         <p:spPr>
           <a:xfrm>
-            <a:off x="3357961" y="4291558"/>
-            <a:ext cx="1317764" cy="89280"/>
+            <a:off x="8704795" y="3168295"/>
+            <a:ext cx="794989" cy="134588"/>
           </a:xfrm>
           <a:prstGeom prst="rect">
             <a:avLst/>
@@ -23030,7 +23336,7 @@
       </p:sp>
       <p:sp>
         <p:nvSpPr>
-          <p:cNvPr id="37" name="Invisible source link 7: https://business.optum.com/en/data-analytics/life-">
+          <p:cNvPr id="9515" name="Invisible source link 8: https://business.optum.com/en/data-analytics/life-sciences/real-world-data/market-clarity-data.html">
             <a:hlinkClick r:id="rId6"/>
           </p:cNvPr>
           <p:cNvSpPr/>
@@ -23038,8 +23344,8 @@
         </p:nvSpPr>
         <p:spPr>
           <a:xfrm>
-            <a:off x="8714349" y="4062603"/>
-            <a:ext cx="734204" cy="113398"/>
+            <a:off x="8704795" y="4040938"/>
+            <a:ext cx="794989" cy="134588"/>
           </a:xfrm>
           <a:prstGeom prst="rect">
             <a:avLst/>
@@ -23753,12 +24059,44 @@
                         <a:buNone/>
                       </a:pPr>
                       <a:r>
-                        <a:rPr lang="en-US" sz="950" dirty="0">
+                        <a:rPr lang="en-US" sz="950" dirty="0" b="1">
                           <a:solidFill>
                             <a:schemeClr val="tx1"/>
                           </a:solidFill>
                         </a:rPr>
-                        <a:t>Epidemiology research; postapproval safety and comparative-effectiveness studies</a:t>
+                        <a:t>Epidemiology research</a:t>
+                      </a:r>
+                      <a:r>
+                        <a:rPr lang="en-US" sz="950" dirty="0" b="0">
+                          <a:solidFill>
+                            <a:schemeClr val="tx1"/>
+                          </a:solidFill>
+                        </a:rPr>
+                        <a:t> (study design, RWE generation)</a:t>
+                      </a:r>
+                      <a:r>
+                        <a:rPr lang="en-US" sz="950" dirty="0" b="0">
+                          <a:solidFill>
+                            <a:schemeClr val="tx1"/>
+                          </a:solidFill>
+                        </a:rPr>
+                        <a:t>; </a:t>
+                      </a:r>
+                      <a:r>
+                        <a:rPr lang="en-US" sz="950" dirty="0" b="1">
+                          <a:solidFill>
+                            <a:schemeClr val="tx1"/>
+                          </a:solidFill>
+                        </a:rPr>
+                        <a:t>postapproval safety and comparative-effectiveness studies</a:t>
+                      </a:r>
+                      <a:r>
+                        <a:rPr lang="en-US" sz="950" dirty="0" b="0">
+                          <a:solidFill>
+                            <a:schemeClr val="tx1"/>
+                          </a:solidFill>
+                        </a:rPr>
+                        <a:t> (statistical analysis)</a:t>
                       </a:r>
                       <a:endParaRPr lang="en-US" sz="950" dirty="0"/>
                     </a:p>
@@ -23985,12 +24323,20 @@
                         <a:buNone/>
                       </a:pPr>
                       <a:r>
-                        <a:rPr lang="en-US" sz="950" dirty="0">
+                        <a:rPr lang="en-US" sz="950" dirty="0" b="1">
                           <a:solidFill>
                             <a:schemeClr val="tx1"/>
                           </a:solidFill>
                         </a:rPr>
-                        <a:t>Market Clarity medical affairs evidence and MSL insights</a:t>
+                        <a:t>Market Clarity</a:t>
+                      </a:r>
+                      <a:r>
+                        <a:rPr lang="en-US" sz="950" dirty="0" b="0">
+                          <a:solidFill>
+                            <a:schemeClr val="tx1"/>
+                          </a:solidFill>
+                        </a:rPr>
+                        <a:t> (medical affairs evidence, MSL insights, HCP analytics)</a:t>
                       </a:r>
                       <a:endParaRPr lang="en-US" sz="950" dirty="0"/>
                     </a:p>
@@ -24156,12 +24502,36 @@
                         <a:buNone/>
                       </a:pPr>
                       <a:r>
-                        <a:rPr lang="en-US" sz="950" dirty="0">
+                        <a:rPr lang="en-US" sz="950" dirty="0" b="1">
                           <a:solidFill>
                             <a:schemeClr val="tx1"/>
                           </a:solidFill>
                         </a:rPr>
-                        <a:t>Optum's safety and evidence-research services are adjacent; a comparable conversational interface for regulated documents was not established</a:t>
+                        <a:t>Safety and evidence-research services</a:t>
+                      </a:r>
+                      <a:r>
+                        <a:rPr lang="en-US" sz="950" dirty="0" b="0">
+                          <a:solidFill>
+                            <a:schemeClr val="tx1"/>
+                          </a:solidFill>
+                        </a:rPr>
+                        <a:t> (scientific analysis)</a:t>
+                      </a:r>
+                      <a:r>
+                        <a:rPr lang="en-US" sz="950" dirty="0" b="0">
+                          <a:solidFill>
+                            <a:schemeClr val="tx1"/>
+                          </a:solidFill>
+                        </a:rPr>
+                        <a:t>; </a:t>
+                      </a:r>
+                      <a:r>
+                        <a:rPr lang="en-US" sz="950" dirty="0" b="0">
+                          <a:solidFill>
+                            <a:schemeClr val="tx1"/>
+                          </a:solidFill>
+                        </a:rPr>
+                        <a:t>no comparable regulated-document assistant established</a:t>
                       </a:r>
                       <a:endParaRPr lang="en-US" sz="950" dirty="0"/>
                     </a:p>
@@ -24381,16 +24751,16 @@
       </p:sp>
       <p:sp>
         <p:nvSpPr>
-          <p:cNvPr id="27" name="Invisible source link 8: https://business.optum.com/en/data-analytics/life-">
-            <a:hlinkClick r:id="rId4"/>
+          <p:cNvPr id="29" name="Invisible source link 8: https://zaidyn.zs.com/products/zaidyn-medical/conv">
+            <a:hlinkClick r:id="rId5"/>
           </p:cNvPr>
           <p:cNvSpPr/>
           <p:nvPr/>
         </p:nvSpPr>
         <p:spPr>
           <a:xfrm>
-            <a:off x="8714349" y="2141283"/>
-            <a:ext cx="1209040" cy="113398"/>
+            <a:off x="3217564" y="3012833"/>
+            <a:ext cx="2162318" cy="89280"/>
           </a:xfrm>
           <a:prstGeom prst="rect">
             <a:avLst/>
@@ -24424,16 +24794,16 @@
       </p:sp>
       <p:sp>
         <p:nvSpPr>
-          <p:cNvPr id="28" name="Invisible source link 8: https://business.optum.com/en/data-analytics/life-">
-            <a:hlinkClick r:id="rId4"/>
+          <p:cNvPr id="30" name="Invisible source link 8: https://evidenze.com/">
+            <a:hlinkClick r:id="rId6"/>
           </p:cNvPr>
           <p:cNvSpPr/>
           <p:nvPr/>
         </p:nvSpPr>
         <p:spPr>
           <a:xfrm>
-            <a:off x="10003856" y="2141283"/>
-            <a:ext cx="1038049" cy="113398"/>
+            <a:off x="3558835" y="3335032"/>
+            <a:ext cx="1742562" cy="89280"/>
           </a:xfrm>
           <a:prstGeom prst="rect">
             <a:avLst/>
@@ -24467,16 +24837,16 @@
       </p:sp>
       <p:sp>
         <p:nvSpPr>
-          <p:cNvPr id="29" name="Invisible source link 8: https://zaidyn.zs.com/products/zaidyn-medical/conv">
-            <a:hlinkClick r:id="rId5"/>
+          <p:cNvPr id="32" name="Invisible source link 8: https://platform.veevavault.help/en/lr/950642">
+            <a:hlinkClick r:id="rId8"/>
           </p:cNvPr>
           <p:cNvSpPr/>
           <p:nvPr/>
         </p:nvSpPr>
         <p:spPr>
           <a:xfrm>
-            <a:off x="3217564" y="3012833"/>
-            <a:ext cx="2162318" cy="89280"/>
+            <a:off x="3396111" y="4249077"/>
+            <a:ext cx="738167" cy="89280"/>
           </a:xfrm>
           <a:prstGeom prst="rect">
             <a:avLst/>
@@ -24510,16 +24880,16 @@
       </p:sp>
       <p:sp>
         <p:nvSpPr>
-          <p:cNvPr id="30" name="Invisible source link 8: https://evidenze.com/">
-            <a:hlinkClick r:id="rId6"/>
+          <p:cNvPr id="9516" name="Invisible source link 9: https://business.optum.com/en/data-analytics/life-sciences/epidemiology-consulting.html">
+            <a:hlinkClick r:id="rId4"/>
           </p:cNvPr>
           <p:cNvSpPr/>
           <p:nvPr/>
         </p:nvSpPr>
         <p:spPr>
           <a:xfrm>
-            <a:off x="3558835" y="3335032"/>
-            <a:ext cx="1742562" cy="89280"/>
+            <a:off x="8704795" y="1983893"/>
+            <a:ext cx="1323576" cy="134588"/>
           </a:xfrm>
           <a:prstGeom prst="rect">
             <a:avLst/>
@@ -24553,16 +24923,16 @@
       </p:sp>
       <p:sp>
         <p:nvSpPr>
-          <p:cNvPr id="31" name="Invisible source link 8: https://business.optum.com/en/data-analytics/life-">
-            <a:hlinkClick r:id="rId7"/>
+          <p:cNvPr id="9517" name="Invisible source link 9: https://business.optum.com/en/data-analytics/life-sciences/epidemiology-consulting.html">
+            <a:hlinkClick r:id="rId4"/>
           </p:cNvPr>
           <p:cNvSpPr/>
           <p:nvPr/>
         </p:nvSpPr>
         <p:spPr>
           <a:xfrm>
-            <a:off x="8714349" y="3173755"/>
-            <a:ext cx="734204" cy="113398"/>
+            <a:off x="9379800" y="2119618"/>
+            <a:ext cx="1383152" cy="134588"/>
           </a:xfrm>
           <a:prstGeom prst="rect">
             <a:avLst/>
@@ -24596,16 +24966,59 @@
       </p:sp>
       <p:sp>
         <p:nvSpPr>
-          <p:cNvPr id="32" name="Invisible source link 8: https://platform.veevavault.help/en/lr/950642">
-            <a:hlinkClick r:id="rId8"/>
+          <p:cNvPr id="9518" name="Invisible source link 9: https://business.optum.com/en/data-analytics/life-sciences/epidemiology-consulting.html">
+            <a:hlinkClick r:id="rId4"/>
           </p:cNvPr>
           <p:cNvSpPr/>
           <p:nvPr/>
         </p:nvSpPr>
         <p:spPr>
           <a:xfrm>
-            <a:off x="3396111" y="4249077"/>
-            <a:ext cx="738167" cy="89280"/>
+            <a:off x="8704795" y="2255343"/>
+            <a:ext cx="1964199" cy="134588"/>
+          </a:xfrm>
+          <a:prstGeom prst="rect">
+            <a:avLst/>
+          </a:prstGeom>
+          <a:noFill/>
+          <a:ln>
+            <a:noFill/>
+          </a:ln>
+        </p:spPr>
+        <p:style>
+          <a:lnRef idx="1">
+            <a:schemeClr val="accent1"/>
+          </a:lnRef>
+          <a:fillRef idx="3">
+            <a:schemeClr val="accent1"/>
+          </a:fillRef>
+          <a:effectRef idx="2">
+            <a:schemeClr val="accent1"/>
+          </a:effectRef>
+          <a:fontRef idx="minor">
+            <a:schemeClr val="lt1"/>
+          </a:fontRef>
+        </p:style>
+        <p:txBody>
+          <a:bodyPr rtlCol="0" anchor="ctr"/>
+          <a:lstStyle/>
+          <a:p>
+            <a:pPr algn="ctr"/>
+          </a:p>
+        </p:txBody>
+      </p:sp>
+      <p:sp>
+        <p:nvSpPr>
+          <p:cNvPr id="9519" name="Invisible source link 9: https://business.optum.com/en/data-analytics/life-sciences/real-world-data/market-clarity-data.html">
+            <a:hlinkClick r:id="rId7"/>
+          </p:cNvPr>
+          <p:cNvSpPr/>
+          <p:nvPr/>
+        </p:nvSpPr>
+        <p:spPr>
+          <a:xfrm>
+            <a:off x="8704795" y="3152103"/>
+            <a:ext cx="794989" cy="134588"/>
           </a:xfrm>
           <a:prstGeom prst="rect">
             <a:avLst/>

--- a/deck/Optum-LS-Conversational-AI-sourced.pptx
+++ b/deck/Optum-LS-Conversational-AI-sourced.pptx
@@ -17004,6 +17004,10 @@
           </a:solidFill>
           <a:ln/>
         </p:spPr>
+        <p:txBody>
+          <a:bodyPr/>
+          <a:p/>
+        </p:txBody>
       </p:sp>
       <p:sp>
         <p:nvSpPr>
@@ -17062,6 +17066,10 @@
           </a:solidFill>
           <a:ln/>
         </p:spPr>
+        <p:txBody>
+          <a:bodyPr/>
+          <a:p/>
+        </p:txBody>
       </p:sp>
       <p:sp>
         <p:nvSpPr>
@@ -17120,6 +17128,10 @@
           </a:solidFill>
           <a:ln/>
         </p:spPr>
+        <p:txBody>
+          <a:bodyPr/>
+          <a:p/>
+        </p:txBody>
       </p:sp>
       <p:sp>
         <p:nvSpPr>
@@ -17178,6 +17190,10 @@
           </a:solidFill>
           <a:ln/>
         </p:spPr>
+        <p:txBody>
+          <a:bodyPr/>
+          <a:p/>
+        </p:txBody>
       </p:sp>
       <p:sp>
         <p:nvSpPr>
@@ -17236,6 +17252,10 @@
           </a:solidFill>
           <a:ln/>
         </p:spPr>
+        <p:txBody>
+          <a:bodyPr/>
+          <a:p/>
+        </p:txBody>
       </p:sp>
       <p:sp>
         <p:nvSpPr>
@@ -17539,25 +17559,9 @@
                       <a:pPr indent="0" marL="0">
                         <a:buNone/>
                       </a:pPr>
-                      <a:r>
-                        <a:rPr lang="en-US" sz="950" dirty="0">
-                          <a:solidFill>
-                            <a:schemeClr val="tx1"/>
-                          </a:solidFill>
-                        </a:rPr>
-                        <a:t>Merative’s </a:t>
-                      </a:r>
                       <a:pPr indent="0" marL="0">
                         <a:buNone/>
                       </a:pPr>
-                      <a:r>
-                        <a:rPr lang="en-US" sz="950" b="1" dirty="0">
-                          <a:solidFill>
-                            <a:schemeClr val="tx1"/>
-                          </a:solidFill>
-                        </a:rPr>
-                        <a:t>MarketScan Snapshot</a:t>
-                      </a:r>
                       <a:pPr indent="0" marL="0">
                         <a:buNone/>
                       </a:pPr>
@@ -17567,7 +17571,23 @@
                             <a:schemeClr val="tx1"/>
                           </a:solidFill>
                         </a:rPr>
-                        <a:t>: natural-language assessment of dataset suitability;</a:t>
+                        <a:t>Truven </a:t>
+                      </a:r>
+                      <a:r>
+                        <a:rPr lang="en-US" sz="950" b="1" dirty="0">
+                          <a:solidFill>
+                            <a:schemeClr val="tx1"/>
+                          </a:solidFill>
+                        </a:rPr>
+                        <a:t>MarketScan Snapshot</a:t>
+                      </a:r>
+                      <a:r>
+                        <a:rPr lang="en-US" sz="950" dirty="0">
+                          <a:solidFill>
+                            <a:schemeClr val="tx1"/>
+                          </a:solidFill>
+                        </a:rPr>
+                        <a:t>: Natural-language assessment of MarketScan data suitability;</a:t>
                       </a:r>
                       <a:endParaRPr lang="en-US" sz="950" dirty="0"/>
                     </a:p>
@@ -17578,25 +17598,9 @@
                         </a:spcBef>
                         <a:buNone/>
                       </a:pPr>
-                      <a:r>
-                        <a:rPr lang="en-US" sz="950" dirty="0">
-                          <a:solidFill>
-                            <a:schemeClr val="tx1"/>
-                          </a:solidFill>
-                        </a:rPr>
-                        <a:t>HealthVerity’s </a:t>
-                      </a:r>
                       <a:pPr indent="0" marL="0">
                         <a:buNone/>
                       </a:pPr>
-                      <a:r>
-                        <a:rPr lang="en-US" sz="950" b="1" dirty="0">
-                          <a:solidFill>
-                            <a:schemeClr val="tx1"/>
-                          </a:solidFill>
-                        </a:rPr>
-                        <a:t>eXOs</a:t>
-                      </a:r>
                       <a:pPr indent="0" marL="0">
                         <a:buNone/>
                       </a:pPr>
@@ -17606,7 +17610,23 @@
                             <a:schemeClr val="tx1"/>
                           </a:solidFill>
                         </a:rPr>
-                        <a:t>: conversational exploration of connected healthcare data</a:t>
+                        <a:t>Norstella / Panalgo </a:t>
+                      </a:r>
+                      <a:r>
+                        <a:rPr lang="en-US" sz="950" b="1" dirty="0">
+                          <a:solidFill>
+                            <a:schemeClr val="tx1"/>
+                          </a:solidFill>
+                        </a:rPr>
+                        <a:t>Ella AI</a:t>
+                      </a:r>
+                      <a:r>
+                        <a:rPr lang="en-US" sz="950" dirty="0">
+                          <a:solidFill>
+                            <a:schemeClr val="tx1"/>
+                          </a:solidFill>
+                        </a:rPr>
+                        <a:t>: Conversational dataset recommendations (along with cohort construction and documented RWE analysis)</a:t>
                       </a:r>
                       <a:endParaRPr lang="en-US" sz="950" dirty="0"/>
                     </a:p>
@@ -18130,25 +18150,9 @@
                       <a:pPr indent="0" marL="0">
                         <a:buNone/>
                       </a:pPr>
-                      <a:r>
-                        <a:rPr lang="en-US" sz="950" dirty="0">
-                          <a:solidFill>
-                            <a:schemeClr val="tx1"/>
-                          </a:solidFill>
-                        </a:rPr>
-                        <a:t>Norstella’s </a:t>
-                      </a:r>
                       <a:pPr indent="0" marL="0">
                         <a:buNone/>
                       </a:pPr>
-                      <a:r>
-                        <a:rPr lang="en-US" sz="950" b="1" dirty="0">
-                          <a:solidFill>
-                            <a:schemeClr val="tx1"/>
-                          </a:solidFill>
-                        </a:rPr>
-                        <a:t>Ella AI</a:t>
-                      </a:r>
                       <a:pPr indent="0" marL="0">
                         <a:buNone/>
                       </a:pPr>
@@ -18158,7 +18162,23 @@
                             <a:schemeClr val="tx1"/>
                           </a:solidFill>
                         </a:rPr>
-                        <a:t>: conversational RWE analytics;</a:t>
+                        <a:t>HealthVerity </a:t>
+                      </a:r>
+                      <a:r>
+                        <a:rPr lang="en-US" sz="950" b="1" dirty="0">
+                          <a:solidFill>
+                            <a:schemeClr val="tx1"/>
+                          </a:solidFill>
+                        </a:rPr>
+                        <a:t>eXOs</a:t>
+                      </a:r>
+                      <a:r>
+                        <a:rPr lang="en-US" sz="950" dirty="0">
+                          <a:solidFill>
+                            <a:schemeClr val="tx1"/>
+                          </a:solidFill>
+                        </a:rPr>
+                        <a:t>: Conversational data feasibility, cohort design and auditable RWE analysis;</a:t>
                       </a:r>
                       <a:endParaRPr lang="en-US" sz="950" dirty="0"/>
                     </a:p>
@@ -18324,14 +18344,14 @@
       </p:graphicFrame>
       <p:sp>
         <p:nvSpPr>
-          <p:cNvPr id="15" name="beyond the public evidence card"/>
+          <p:cNvPr id="15" name="end-to-end conversational rwe card"/>
           <p:cNvSpPr/>
           <p:nvPr/>
         </p:nvSpPr>
         <p:spPr>
           <a:xfrm>
             <a:off x="548640" y="5033010"/>
-            <a:ext cx="11091672" cy="1020318"/>
+            <a:ext cx="5454396" cy="1020318"/>
           </a:xfrm>
           <a:prstGeom prst="rect">
             <a:avLst/>
@@ -18348,6 +18368,10 @@
             </a:outerShdw>
           </a:effectLst>
         </p:spPr>
+        <p:txBody>
+          <a:bodyPr/>
+          <a:p/>
+        </p:txBody>
       </p:sp>
       <p:sp>
         <p:nvSpPr>
@@ -18357,8 +18381,8 @@
         </p:nvSpPr>
         <p:spPr>
           <a:xfrm>
-            <a:off x="749808" y="5215890"/>
-            <a:ext cx="10689336" cy="256032"/>
+            <a:off x="749808" y="5095113"/>
+            <a:ext cx="5052060" cy="256032"/>
           </a:xfrm>
           <a:prstGeom prst="rect">
             <a:avLst/>
@@ -18379,7 +18403,7 @@
                   <a:schemeClr val="accent2"/>
                 </a:solidFill>
               </a:rPr>
-              <a:t>BEYOND THE PUBLIC EVIDENCE</a:t>
+              <a:t>END-TO-END CONVERSATIONAL RWE</a:t>
             </a:r>
             <a:endParaRPr lang="en-US" sz="1300" dirty="0"/>
           </a:p>
@@ -18393,8 +18417,8 @@
         </p:nvSpPr>
         <p:spPr>
           <a:xfrm>
-            <a:off x="749808" y="5545074"/>
-            <a:ext cx="10689336" cy="380238"/>
+            <a:off x="749808" y="5424297"/>
+            <a:ext cx="5052060" cy="566928"/>
           </a:xfrm>
           <a:prstGeom prst="rect">
             <a:avLst/>
@@ -18415,7 +18439,7 @@
                   <a:schemeClr val="tx1"/>
                 </a:solidFill>
               </a:rPr>
-              <a:t>What information can researchers query directly? What outputs can they generate, inspect and reuse? Where do dataset permissions, cohort definitions or specialist involvement constrain the experience?</a:t>
+              <a:t>HealthVerity eXOs and Norstella Ella position conversational AI as the front door to their platforms, spanning dataset assessment, cohort exploration and broader research questions in a single chat workflow.</a:t>
             </a:r>
             <a:endParaRPr lang="en-US" sz="1050" dirty="0"/>
           </a:p>
@@ -18468,16 +18492,16 @@
       </p:sp>
       <p:sp>
         <p:nvSpPr>
-          <p:cNvPr id="26" name="Invisible source link 5: https://www.merative.com/newsroom/truven-launches-">
-            <a:hlinkClick r:id="rId3"/>
+          <p:cNvPr id="33" name="Invisible source link 5: https://www.komodohealth.com/product/marmot/">
+            <a:hlinkClick r:id="rId8"/>
           </p:cNvPr>
           <p:cNvSpPr/>
           <p:nvPr/>
         </p:nvSpPr>
         <p:spPr>
           <a:xfrm>
-            <a:off x="3531835" y="2122195"/>
-            <a:ext cx="1250810" cy="113398"/>
+            <a:off x="3900118" y="3032277"/>
+            <a:ext cx="426779" cy="84963"/>
           </a:xfrm>
           <a:prstGeom prst="rect">
             <a:avLst/>
@@ -18511,16 +18535,16 @@
       </p:sp>
       <p:sp>
         <p:nvSpPr>
-          <p:cNvPr id="27" name="Invisible source link 5: https://healthverity.com/news/announcing-healthver">
-            <a:hlinkClick r:id="rId4"/>
+          <p:cNvPr id="34" name="Invisible source link 5: https://www.komodohealth.com/press/komodo-health-u">
+            <a:hlinkClick r:id="rId9"/>
           </p:cNvPr>
           <p:cNvSpPr/>
           <p:nvPr/>
         </p:nvSpPr>
         <p:spPr>
           <a:xfrm>
-            <a:off x="2953686" y="2308682"/>
-            <a:ext cx="725569" cy="113398"/>
+            <a:off x="4602828" y="3032277"/>
+            <a:ext cx="346490" cy="108724"/>
           </a:xfrm>
           <a:prstGeom prst="rect">
             <a:avLst/>
@@ -18554,16 +18578,16 @@
       </p:sp>
       <p:sp>
         <p:nvSpPr>
-          <p:cNvPr id="28" name="Invisible source link 5: https://healthverity.com/news/announcing-healthver">
-            <a:hlinkClick r:id="rId4"/>
+          <p:cNvPr id="35" name="Invisible source link 5: https://www.truveta.com/blog/announcement/truveta-">
+            <a:hlinkClick r:id="rId10"/>
           </p:cNvPr>
           <p:cNvSpPr/>
           <p:nvPr/>
         </p:nvSpPr>
         <p:spPr>
           <a:xfrm>
-            <a:off x="3716148" y="2311920"/>
-            <a:ext cx="299336" cy="86042"/>
+            <a:off x="3467040" y="3214446"/>
+            <a:ext cx="1121208" cy="113398"/>
           </a:xfrm>
           <a:prstGeom prst="rect">
             <a:avLst/>
@@ -18597,16 +18621,16 @@
       </p:sp>
       <p:sp>
         <p:nvSpPr>
-          <p:cNvPr id="33" name="Invisible source link 5: https://www.komodohealth.com/product/marmot/">
-            <a:hlinkClick r:id="rId8"/>
+          <p:cNvPr id="36" name="Invisible source link 5: https://briya.com/aire-population-agent/">
+            <a:hlinkClick r:id="rId11"/>
           </p:cNvPr>
           <p:cNvSpPr/>
           <p:nvPr/>
         </p:nvSpPr>
         <p:spPr>
           <a:xfrm>
-            <a:off x="3900118" y="3032277"/>
-            <a:ext cx="426779" cy="84963"/>
+            <a:off x="3339241" y="3400920"/>
+            <a:ext cx="1312367" cy="113398"/>
           </a:xfrm>
           <a:prstGeom prst="rect">
             <a:avLst/>
@@ -18640,16 +18664,16 @@
       </p:sp>
       <p:sp>
         <p:nvSpPr>
-          <p:cNvPr id="34" name="Invisible source link 5: https://www.komodohealth.com/press/komodo-health-u">
-            <a:hlinkClick r:id="rId9"/>
+          <p:cNvPr id="9500" name="Invisible source link 6: https://business.optum.com/en/data-analytics/life-sciences/real-world-data/market-clarity-data.html">
+            <a:hlinkClick r:id="rId5"/>
           </p:cNvPr>
           <p:cNvSpPr/>
           <p:nvPr/>
         </p:nvSpPr>
         <p:spPr>
           <a:xfrm>
-            <a:off x="4602828" y="3032277"/>
-            <a:ext cx="346490" cy="108724"/>
+            <a:off x="8704795" y="2126095"/>
+            <a:ext cx="1088769" cy="134588"/>
           </a:xfrm>
           <a:prstGeom prst="rect">
             <a:avLst/>
@@ -18683,16 +18707,16 @@
       </p:sp>
       <p:sp>
         <p:nvSpPr>
-          <p:cNvPr id="35" name="Invisible source link 5: https://www.truveta.com/blog/announcement/truveta-">
-            <a:hlinkClick r:id="rId10"/>
+          <p:cNvPr id="9501" name="Invisible source link 6: https://business.optum.com/en/data-analytics/life-sciences/real-world-data/enriched-clinical-data.html">
+            <a:hlinkClick r:id="rId7"/>
           </p:cNvPr>
           <p:cNvSpPr/>
           <p:nvPr/>
         </p:nvSpPr>
         <p:spPr>
           <a:xfrm>
-            <a:off x="3467040" y="3214446"/>
-            <a:ext cx="1121208" cy="113398"/>
+            <a:off x="10951197" y="2126095"/>
+            <a:ext cx="513511" cy="134588"/>
           </a:xfrm>
           <a:prstGeom prst="rect">
             <a:avLst/>
@@ -18726,16 +18750,16 @@
       </p:sp>
       <p:sp>
         <p:nvSpPr>
-          <p:cNvPr id="36" name="Invisible source link 5: https://briya.com/aire-population-agent/">
-            <a:hlinkClick r:id="rId11"/>
+          <p:cNvPr id="9502" name="Invisible source link 6: https://business.optum.com/en/data-analytics/life-sciences/real-world-data/enriched-clinical-data.html">
+            <a:hlinkClick r:id="rId7"/>
           </p:cNvPr>
           <p:cNvSpPr/>
           <p:nvPr/>
         </p:nvSpPr>
         <p:spPr>
           <a:xfrm>
-            <a:off x="3339241" y="3400920"/>
-            <a:ext cx="1312367" cy="113398"/>
+            <a:off x="8704795" y="2261820"/>
+            <a:ext cx="721665" cy="134588"/>
           </a:xfrm>
           <a:prstGeom prst="rect">
             <a:avLst/>
@@ -18769,16 +18793,16 @@
       </p:sp>
       <p:sp>
         <p:nvSpPr>
-          <p:cNvPr id="40" name="Invisible source link 5: https://panalgo.com/ella/">
-            <a:hlinkClick r:id="rId15"/>
+          <p:cNvPr id="9503" name="Invisible source link 6: https://business.optum.com/en/data-analytics/life-sciences/heor/exploratory-analysis.html">
+            <a:hlinkClick r:id="rId12"/>
           </p:cNvPr>
           <p:cNvSpPr/>
           <p:nvPr/>
         </p:nvSpPr>
         <p:spPr>
           <a:xfrm>
-            <a:off x="3545157" y="4122001"/>
-            <a:ext cx="348649" cy="89280"/>
+            <a:off x="8704795" y="2989022"/>
+            <a:ext cx="1222996" cy="134588"/>
           </a:xfrm>
           <a:prstGeom prst="rect">
             <a:avLst/>
@@ -18812,16 +18836,16 @@
       </p:sp>
       <p:sp>
         <p:nvSpPr>
-          <p:cNvPr id="41" name="Invisible source link 5: https://www.bcplatforms.com/bc-catalyst">
-            <a:hlinkClick r:id="rId16"/>
+          <p:cNvPr id="9504" name="Invisible source link 6: https://business.optum.com/en/data-analytics/life-sciences/real-world-data/clinical-notes.html">
+            <a:hlinkClick r:id="rId13"/>
           </p:cNvPr>
           <p:cNvSpPr/>
           <p:nvPr/>
         </p:nvSpPr>
         <p:spPr>
           <a:xfrm>
-            <a:off x="3716872" y="4308487"/>
-            <a:ext cx="667975" cy="113398"/>
+            <a:off x="9198724" y="3124734"/>
+            <a:ext cx="1041856" cy="134588"/>
           </a:xfrm>
           <a:prstGeom prst="rect">
             <a:avLst/>
@@ -18855,16 +18879,16 @@
       </p:sp>
       <p:sp>
         <p:nvSpPr>
-          <p:cNvPr id="9500" name="Invisible source link 6: https://business.optum.com/en/data-analytics/life-sciences/real-world-data/market-clarity-data.html">
-            <a:hlinkClick r:id="rId5"/>
+          <p:cNvPr id="9505" name="Invisible source link 6: https://business.optum.com/en/data-analytics/life-sciences/clinical-trial-design.html">
+            <a:hlinkClick r:id="rId14"/>
           </p:cNvPr>
           <p:cNvSpPr/>
           <p:nvPr/>
         </p:nvSpPr>
         <p:spPr>
           <a:xfrm>
-            <a:off x="8704795" y="2126095"/>
-            <a:ext cx="1088769" cy="134588"/>
+            <a:off x="9198724" y="3260459"/>
+            <a:ext cx="634592" cy="134588"/>
           </a:xfrm>
           <a:prstGeom prst="rect">
             <a:avLst/>
@@ -18898,16 +18922,16 @@
       </p:sp>
       <p:sp>
         <p:nvSpPr>
-          <p:cNvPr id="9501" name="Invisible source link 6: https://business.optum.com/en/data-analytics/life-sciences/real-world-data/enriched-clinical-data.html">
-            <a:hlinkClick r:id="rId7"/>
+          <p:cNvPr id="9506" name="Invisible source link 6: https://business.optum.com/en/data-analytics/life-sciences/heor/exploratory-analysis.html">
+            <a:hlinkClick r:id="rId12"/>
           </p:cNvPr>
           <p:cNvSpPr/>
           <p:nvPr/>
         </p:nvSpPr>
         <p:spPr>
           <a:xfrm>
-            <a:off x="10951197" y="2126095"/>
-            <a:ext cx="513511" cy="134588"/>
+            <a:off x="8704795" y="4125901"/>
+            <a:ext cx="1222996" cy="134588"/>
           </a:xfrm>
           <a:prstGeom prst="rect">
             <a:avLst/>
@@ -18941,16 +18965,16 @@
       </p:sp>
       <p:sp>
         <p:nvSpPr>
-          <p:cNvPr id="9502" name="Invisible source link 6: https://business.optum.com/en/data-analytics/life-sciences/real-world-data/enriched-clinical-data.html">
-            <a:hlinkClick r:id="rId7"/>
+          <p:cNvPr id="9507" name="Invisible source link 6: https://business.optum.com/en/data-analytics/life-sciences/epidemiology-consulting.html">
+            <a:hlinkClick r:id="rId17"/>
           </p:cNvPr>
           <p:cNvSpPr/>
           <p:nvPr/>
         </p:nvSpPr>
         <p:spPr>
           <a:xfrm>
-            <a:off x="8704795" y="2261820"/>
-            <a:ext cx="721665" cy="134588"/>
+            <a:off x="9078125" y="4261613"/>
+            <a:ext cx="1823942" cy="134588"/>
           </a:xfrm>
           <a:prstGeom prst="rect">
             <a:avLst/>
@@ -18984,16 +19008,119 @@
       </p:sp>
       <p:sp>
         <p:nvSpPr>
-          <p:cNvPr id="9503" name="Invisible source link 6: https://business.optum.com/en/data-analytics/life-sciences/heor/exploratory-analysis.html">
-            <a:hlinkClick r:id="rId12"/>
+          <p:cNvPr id="9903" name="pre-engagement data evaluation card"/>
+          <p:cNvSpPr/>
+          <p:nvPr/>
+        </p:nvSpPr>
+        <p:spPr>
+          <a:xfrm>
+            <a:off x="6185916" y="5033010"/>
+            <a:ext cx="5454396" cy="1020318"/>
+          </a:xfrm>
+          <a:prstGeom prst="rect">
+            <a:avLst/>
+          </a:prstGeom>
+          <a:solidFill>
+            <a:schemeClr val="bg1"/>
+          </a:solidFill>
+          <a:ln/>
+          <a:effectLst>
+            <a:outerShdw sx="100000" sy="100000" kx="0" ky="0" algn="bl" rotWithShape="0" blurRad="101600" dist="25400" dir="5400000">
+              <a:srgbClr val="000000">
+                <a:alpha val="10000"/>
+              </a:srgbClr>
+            </a:outerShdw>
+          </a:effectLst>
+        </p:spPr>
+        <p:txBody>
+          <a:bodyPr/>
+          <a:p/>
+        </p:txBody>
+      </p:sp>
+      <p:sp>
+        <p:nvSpPr>
+          <p:cNvPr id="9904" name="label"/>
+          <p:cNvSpPr txBox="1"/>
+          <p:nvPr/>
+        </p:nvSpPr>
+        <p:spPr>
+          <a:xfrm>
+            <a:off x="6387084" y="5095113"/>
+            <a:ext cx="5052060" cy="256032"/>
+          </a:xfrm>
+          <a:prstGeom prst="rect">
+            <a:avLst/>
+          </a:prstGeom>
+          <a:noFill/>
+          <a:ln/>
+        </p:spPr>
+        <p:txBody>
+          <a:bodyPr wrap="square" lIns="0" tIns="0" rIns="0" bIns="0" rtlCol="0" anchor="t"/>
+          <a:lstStyle/>
+          <a:p>
+            <a:pPr indent="0" marL="0">
+              <a:buNone/>
+            </a:pPr>
+            <a:r>
+              <a:rPr lang="en-US" sz="1300" b="1" spc="150" kern="0" dirty="0">
+                <a:solidFill>
+                  <a:schemeClr val="accent2"/>
+                </a:solidFill>
+              </a:rPr>
+              <a:t>PRE-ENGAGEMENT DATA EVALUATION</a:t>
+            </a:r>
+            <a:endParaRPr lang="en-US" sz="1300" dirty="0"/>
+          </a:p>
+        </p:txBody>
+      </p:sp>
+      <p:sp>
+        <p:nvSpPr>
+          <p:cNvPr id="9905" name="Text 14"/>
+          <p:cNvSpPr txBox="1"/>
+          <p:nvPr/>
+        </p:nvSpPr>
+        <p:spPr>
+          <a:xfrm>
+            <a:off x="6387084" y="5424297"/>
+            <a:ext cx="5052060" cy="566928"/>
+          </a:xfrm>
+          <a:prstGeom prst="rect">
+            <a:avLst/>
+          </a:prstGeom>
+          <a:noFill/>
+          <a:ln/>
+        </p:spPr>
+        <p:txBody>
+          <a:bodyPr wrap="square" lIns="0" tIns="0" rIns="0" bIns="0" rtlCol="0" anchor="t"/>
+          <a:lstStyle/>
+          <a:p>
+            <a:pPr indent="0" marL="0">
+              <a:buNone/>
+            </a:pPr>
+            <a:r>
+              <a:rPr lang="en-US" sz="1050" b="1" dirty="0">
+                <a:solidFill>
+                  <a:schemeClr val="tx1"/>
+                </a:solidFill>
+              </a:rPr>
+              <a:t>MarketScan Snapshot uses conversational AI as a sales tool as well as an analytics feature, offering qualified prospects free AI access to cohort counts and summary statistics before they commit to a full RWE analysis.</a:t>
+            </a:r>
+            <a:endParaRPr lang="en-US" sz="1050" dirty="0"/>
+          </a:p>
+        </p:txBody>
+      </p:sp>
+      <p:sp>
+        <p:nvSpPr>
+          <p:cNvPr id="9732" name="Invisible source link 6: https://www.merative.com/newsroom/truven-launches-marketscan-snapshot-an-ai-powered-tool-to-evaluate-fit-for-purpose-real-world-data-in-minutes">
+            <a:hlinkClick r:id="rId3"/>
           </p:cNvPr>
           <p:cNvSpPr/>
           <p:nvPr/>
         </p:nvSpPr>
         <p:spPr>
           <a:xfrm>
-            <a:off x="8704795" y="2989022"/>
-            <a:ext cx="1222996" cy="134588"/>
+            <a:off x="3346564" y="2032852"/>
+            <a:ext cx="1290883" cy="134588"/>
           </a:xfrm>
           <a:prstGeom prst="rect">
             <a:avLst/>
@@ -19027,16 +19154,16 @@
       </p:sp>
       <p:sp>
         <p:nvSpPr>
-          <p:cNvPr id="9504" name="Invisible source link 6: https://business.optum.com/en/data-analytics/life-sciences/real-world-data/clinical-notes.html">
-            <a:hlinkClick r:id="rId13"/>
+          <p:cNvPr id="9734" name="Invisible source link 6: https://panalgo.com/ella/">
+            <a:hlinkClick r:id="rId15"/>
           </p:cNvPr>
           <p:cNvSpPr/>
           <p:nvPr/>
         </p:nvSpPr>
         <p:spPr>
           <a:xfrm>
-            <a:off x="9198724" y="3124734"/>
-            <a:ext cx="1041856" cy="134588"/>
+            <a:off x="3994200" y="2219339"/>
+            <a:ext cx="396283" cy="134588"/>
           </a:xfrm>
           <a:prstGeom prst="rect">
             <a:avLst/>
@@ -19070,16 +19197,16 @@
       </p:sp>
       <p:sp>
         <p:nvSpPr>
-          <p:cNvPr id="9505" name="Invisible source link 6: https://business.optum.com/en/data-analytics/life-sciences/clinical-trial-design.html">
-            <a:hlinkClick r:id="rId14"/>
+          <p:cNvPr id="9734" name="Invisible source link 6: https://healthverity.com/news/announcing-healthverity-exos/">
+            <a:hlinkClick r:id="rId4"/>
           </p:cNvPr>
           <p:cNvSpPr/>
           <p:nvPr/>
         </p:nvSpPr>
         <p:spPr>
           <a:xfrm>
-            <a:off x="9198724" y="3260459"/>
-            <a:ext cx="634592" cy="134588"/>
+            <a:off x="3625202" y="4100336"/>
+            <a:ext cx="341203" cy="134588"/>
           </a:xfrm>
           <a:prstGeom prst="rect">
             <a:avLst/>
@@ -19113,59 +19240,16 @@
       </p:sp>
       <p:sp>
         <p:nvSpPr>
-          <p:cNvPr id="9506" name="Invisible source link 6: https://business.optum.com/en/data-analytics/life-sciences/heor/exploratory-analysis.html">
-            <a:hlinkClick r:id="rId12"/>
+          <p:cNvPr id="9736" name="Invisible source link 6: https://www.bcplatforms.com/bc-catalyst">
+            <a:hlinkClick r:id="rId16"/>
           </p:cNvPr>
           <p:cNvSpPr/>
           <p:nvPr/>
         </p:nvSpPr>
         <p:spPr>
           <a:xfrm>
-            <a:off x="8704795" y="4125901"/>
-            <a:ext cx="1222996" cy="134588"/>
-          </a:xfrm>
-          <a:prstGeom prst="rect">
-            <a:avLst/>
-          </a:prstGeom>
-          <a:noFill/>
-          <a:ln>
-            <a:noFill/>
-          </a:ln>
-        </p:spPr>
-        <p:style>
-          <a:lnRef idx="1">
-            <a:schemeClr val="accent1"/>
-          </a:lnRef>
-          <a:fillRef idx="3">
-            <a:schemeClr val="accent1"/>
-          </a:fillRef>
-          <a:effectRef idx="2">
-            <a:schemeClr val="accent1"/>
-          </a:effectRef>
-          <a:fontRef idx="minor">
-            <a:schemeClr val="lt1"/>
-          </a:fontRef>
-        </p:style>
-        <p:txBody>
-          <a:bodyPr rtlCol="0" anchor="ctr"/>
-          <a:lstStyle/>
-          <a:p>
-            <a:pPr algn="ctr"/>
-          </a:p>
-        </p:txBody>
-      </p:sp>
-      <p:sp>
-        <p:nvSpPr>
-          <p:cNvPr id="9507" name="Invisible source link 6: https://business.optum.com/en/data-analytics/life-sciences/epidemiology-consulting.html">
-            <a:hlinkClick r:id="rId17"/>
-          </p:cNvPr>
-          <p:cNvSpPr/>
-          <p:nvPr/>
-        </p:nvSpPr>
-        <p:spPr>
-          <a:xfrm>
-            <a:off x="9078125" y="4261613"/>
-            <a:ext cx="1823942" cy="134588"/>
+            <a:off x="3707637" y="4286823"/>
+            <a:ext cx="674993" cy="134588"/>
           </a:xfrm>
           <a:prstGeom prst="rect">
             <a:avLst/>

--- a/deck/Optum-LS-Conversational-AI-sourced.pptx
+++ b/deck/Optum-LS-Conversational-AI-sourced.pptx
@@ -4004,7 +4004,7 @@
         </p:nvGraphicFramePr>
         <p:xfrm>
           <a:off x="548640" y="1755648"/>
-          <a:ext cx="11091672" cy="1448764"/>
+          <a:ext cx="11091672" cy="1587288"/>
         </p:xfrm>
         <a:graphic>
           <a:graphicData uri="http://schemas.openxmlformats.org/drawingml/2006/table">
@@ -4128,7 +4128,7 @@
                   </a:tcPr>
                 </a:tc>
               </a:tr>
-              <a:tr h="559790">
+              <a:tr h="608076">
                 <a:tc>
                   <a:txBody>
                     <a:bodyPr/>
@@ -4216,7 +4216,7 @@
                             </a:solidFill>
                           </a:uFill>
                         </a:rPr>
-                        <a:t>LIVE Conversational AI + Terrain</a:t>
+                        <a:t>Terrain AI Assistant</a:t>
                       </a:r>
                       <a:r>
                         <a:rPr lang="en-US" sz="950" dirty="0">
@@ -4224,7 +4224,7 @@
                             <a:schemeClr val="tx1"/>
                           </a:solidFill>
                         </a:rPr>
-                        <a:t>: Natural-language protocol feasibility, clinical-code generation and site/investigator intelligence</a:t>
+                        <a:t>: natural-language questions about trial sites, investigator experience and patient populations</a:t>
                       </a:r>
                       <a:endParaRPr lang="en-US" sz="950" dirty="0"/>
                     </a:p>
@@ -4333,7 +4333,7 @@
                   </a:tcPr>
                 </a:tc>
               </a:tr>
-              <a:tr h="559790">
+              <a:tr h="650028">
                 <a:tc>
                   <a:txBody>
                     <a:bodyPr/>
@@ -4553,7 +4553,7 @@
         </p:nvSpPr>
         <p:spPr>
           <a:xfrm>
-            <a:off x="548640" y="3350716"/>
+            <a:off x="548640" y="3489241"/>
             <a:ext cx="11091672" cy="201168"/>
           </a:xfrm>
           <a:prstGeom prst="rect">
@@ -4596,8 +4596,8 @@
           </p:nvPr>
         </p:nvGraphicFramePr>
         <p:xfrm>
-          <a:off x="548640" y="3625036"/>
-          <a:ext cx="11091672" cy="1024686"/>
+          <a:off x="548640" y="3763561"/>
+          <a:ext cx="11091672" cy="1226820"/>
         </p:xfrm>
         <a:graphic>
           <a:graphicData uri="http://schemas.openxmlformats.org/drawingml/2006/table">
@@ -4721,7 +4721,7 @@
                   </a:tcPr>
                 </a:tc>
               </a:tr>
-              <a:tr h="695502">
+              <a:tr h="897636">
                 <a:tc>
                   <a:txBody>
                     <a:bodyPr/>
@@ -4961,14 +4961,14 @@
       </p:graphicFrame>
       <p:sp>
         <p:nvSpPr>
-          <p:cNvPr id="18" name="live protocol testing card"/>
+          <p:cNvPr id="18" name="beyond the public evidence card"/>
           <p:cNvSpPr/>
           <p:nvPr/>
         </p:nvSpPr>
         <p:spPr>
           <a:xfrm>
-            <a:off x="2189988" y="4832604"/>
-            <a:ext cx="7808975" cy="1220724"/>
+            <a:off x="548640" y="5136685"/>
+            <a:ext cx="11091672" cy="971507"/>
           </a:xfrm>
           <a:prstGeom prst="rect">
             <a:avLst/>
@@ -4998,8 +4998,8 @@
         </p:nvSpPr>
         <p:spPr>
           <a:xfrm>
-            <a:off x="2391156" y="5015484"/>
-            <a:ext cx="7406640" cy="256032"/>
+            <a:off x="749808" y="5183526"/>
+            <a:ext cx="10689336" cy="256032"/>
           </a:xfrm>
           <a:prstGeom prst="rect">
             <a:avLst/>
@@ -5020,7 +5020,7 @@
                   <a:schemeClr val="accent2"/>
                 </a:solidFill>
               </a:rPr>
-              <a:t>LIVE PROTOCOL TESTING</a:t>
+              <a:t>BEYOND THE PUBLIC EVIDENCE</a:t>
             </a:r>
             <a:endParaRPr lang="en-US" sz="1300" dirty="0"/>
           </a:p>
@@ -5034,8 +5034,8 @@
         </p:nvSpPr>
         <p:spPr>
           <a:xfrm>
-            <a:off x="2391156" y="5362956"/>
-            <a:ext cx="7406640" cy="507491"/>
+            <a:off x="749808" y="5494422"/>
+            <a:ext cx="10689336" cy="566928"/>
           </a:xfrm>
           <a:prstGeom prst="rect">
             <a:avLst/>
@@ -5047,16 +5047,33 @@
           <a:bodyPr wrap="square" lIns="0" tIns="0" rIns="0" bIns="0" rtlCol="0" anchor="t"/>
           <a:lstStyle/>
           <a:p>
-            <a:pPr indent="0" marL="0" algn="just">
+            <a:pPr indent="0" marL="0">
               <a:buNone/>
             </a:pPr>
             <a:r>
-              <a:rPr lang="en-US" sz="1050" b="1" dirty="0">
+              <a:rPr lang="en-US" sz="1000" b="1" dirty="0">
                 <a:solidFill>
                   <a:schemeClr val="tx1"/>
                 </a:solidFill>
               </a:rPr>
-              <a:t>TriNetX says its LIVE conversational interface turns natural-language eligibility rules into editable clinical codes. In an October 2026 demonstration, adjusting one BMI exclusion criterion shifted a diabetes cohort by 27,000 patients instantly, “with no analyst required.” This makes feasibility a live input to protocol design.</a:t>
+              <a:t>For Clinical Trials, does the interface help identify viable sites, evaluate patients or manage trial documents—and how far does it go?</a:t>
+            </a:r>
+            <a:endParaRPr lang="en-US" sz="1050" dirty="0"/>
+          </a:p>
+          <a:p>
+            <a:pPr indent="0" marL="0">
+              <a:spcBef>
+                <a:spcPts val="600"/>
+              </a:spcBef>
+              <a:buNone/>
+            </a:pPr>
+            <a:r>
+              <a:rPr lang="en-US" sz="1000" b="1" dirty="0">
+                <a:solidFill>
+                  <a:schemeClr val="tx1"/>
+                </a:solidFill>
+              </a:rPr>
+              <a:t>For Market Access, is the customer asking for pricing intelligence, reimbursement information or new economic evidence? Where do the vendor offerings overlap with Optum LS, and where do they solve a different problem?</a:t>
             </a:r>
             <a:endParaRPr lang="en-US" sz="1050" dirty="0"/>
           </a:p>
@@ -5150,8 +5167,8 @@
         </p:nvSpPr>
         <p:spPr>
           <a:xfrm>
-            <a:off x="2944075" y="2229423"/>
-            <a:ext cx="2410845" cy="134588"/>
+            <a:off x="2944075" y="2253540"/>
+            <a:ext cx="1673204" cy="134588"/>
           </a:xfrm>
           <a:prstGeom prst="rect">
             <a:avLst/>
@@ -5193,7 +5210,7 @@
         </p:nvSpPr>
         <p:spPr>
           <a:xfrm>
-            <a:off x="2944075" y="2788858"/>
+            <a:off x="2944075" y="2882457"/>
             <a:ext cx="982622" cy="134588"/>
           </a:xfrm>
           <a:prstGeom prst="rect">
@@ -5236,7 +5253,7 @@
         </p:nvSpPr>
         <p:spPr>
           <a:xfrm>
-            <a:off x="2944075" y="4166579"/>
+            <a:off x="2944075" y="4405974"/>
             <a:ext cx="1490324" cy="134588"/>
           </a:xfrm>
           <a:prstGeom prst="rect">
@@ -5279,7 +5296,7 @@
         </p:nvSpPr>
         <p:spPr>
           <a:xfrm>
-            <a:off x="8704795" y="2161376"/>
+            <a:off x="8704795" y="2185862"/>
             <a:ext cx="634592" cy="134588"/>
           </a:xfrm>
           <a:prstGeom prst="rect">
@@ -5322,7 +5339,7 @@
         </p:nvSpPr>
         <p:spPr>
           <a:xfrm>
-            <a:off x="9198724" y="2297101"/>
+            <a:off x="9198724" y="2321574"/>
             <a:ext cx="1449602" cy="134588"/>
           </a:xfrm>
           <a:prstGeom prst="rect">
@@ -5365,7 +5382,7 @@
         </p:nvSpPr>
         <p:spPr>
           <a:xfrm>
-            <a:off x="8704795" y="2720811"/>
+            <a:off x="8704795" y="2814778"/>
             <a:ext cx="694168" cy="134588"/>
           </a:xfrm>
           <a:prstGeom prst="rect">
@@ -5408,7 +5425,7 @@
         </p:nvSpPr>
         <p:spPr>
           <a:xfrm>
-            <a:off x="8704795" y="4030854"/>
+            <a:off x="8704795" y="4270262"/>
             <a:ext cx="1182595" cy="134588"/>
           </a:xfrm>
           <a:prstGeom prst="rect">
@@ -5451,7 +5468,7 @@
         </p:nvSpPr>
         <p:spPr>
           <a:xfrm>
-            <a:off x="9794519" y="4166579"/>
+            <a:off x="9794519" y="4405974"/>
             <a:ext cx="962019" cy="134588"/>
           </a:xfrm>
           <a:prstGeom prst="rect">
@@ -5494,7 +5511,7 @@
         </p:nvSpPr>
         <p:spPr>
           <a:xfrm>
-            <a:off x="9815753" y="4302291"/>
+            <a:off x="9815753" y="4541699"/>
             <a:ext cx="1509781" cy="134588"/>
           </a:xfrm>
           <a:prstGeom prst="rect">
@@ -5537,7 +5554,7 @@
         </p:nvSpPr>
         <p:spPr>
           <a:xfrm>
-            <a:off x="8704795" y="4438016"/>
+            <a:off x="8704795" y="4677411"/>
             <a:ext cx="875429" cy="134588"/>
           </a:xfrm>
           <a:prstGeom prst="rect">
@@ -12213,7 +12230,7 @@
                   </a:solidFill>
                 </a:uFill>
               </a:rPr>
-              <a:t>TriNetX’s LIVE Conversational AI + Terrain</a:t>
+              <a:t>TriNetX’s Terrain AI Assistant</a:t>
             </a:r>
             <a:endParaRPr lang="en-US" sz="900" dirty="0"/>
           </a:p>
@@ -13457,7 +13474,7 @@
         <p:spPr>
           <a:xfrm>
             <a:off x="5806440" y="4445359"/>
-            <a:ext cx="2147260" cy="127757"/>
+            <a:ext cx="1464743" cy="127757"/>
           </a:xfrm>
           <a:prstGeom prst="rect">
             <a:avLst/>
